--- a/モバイル授業_todoリスト.pptx
+++ b/モバイル授業_todoリスト.pptx
@@ -2,20 +2,22 @@
 <file path=ppt/presentation.xml><?xml version="1.0" encoding="utf-8"?>
 <p:presentation xmlns:a="http://schemas.openxmlformats.org/drawingml/2006/main" xmlns:r="http://schemas.openxmlformats.org/officeDocument/2006/relationships" xmlns:p="http://schemas.openxmlformats.org/presentationml/2006/main" saveSubsetFonts="1">
   <p:sldMasterIdLst>
-    <p:sldMasterId id="2147483648" r:id="rId1"/>
+    <p:sldMasterId id="2147483660" r:id="rId1"/>
   </p:sldMasterIdLst>
   <p:sldIdLst>
     <p:sldId id="256" r:id="rId2"/>
-    <p:sldId id="257" r:id="rId3"/>
+    <p:sldId id="260" r:id="rId3"/>
+    <p:sldId id="261" r:id="rId4"/>
+    <p:sldId id="262" r:id="rId5"/>
   </p:sldIdLst>
   <p:sldSz cx="12192000" cy="6858000"/>
   <p:notesSz cx="6858000" cy="9144000"/>
   <p:defaultTextStyle>
     <a:defPPr>
-      <a:defRPr lang="ja-JP"/>
+      <a:defRPr lang="en-US"/>
     </a:defPPr>
-    <a:lvl1pPr marL="0" algn="l" defTabSz="914400" rtl="0" eaLnBrk="1" latinLnBrk="0" hangingPunct="1">
-      <a:defRPr kumimoji="1" sz="1800" kern="1200">
+    <a:lvl1pPr marL="0" algn="l" defTabSz="457200" rtl="0" eaLnBrk="1" latinLnBrk="0" hangingPunct="1">
+      <a:defRPr sz="1800" kern="1200">
         <a:solidFill>
           <a:schemeClr val="tx1"/>
         </a:solidFill>
@@ -24,8 +26,8 @@
         <a:cs typeface="+mn-cs"/>
       </a:defRPr>
     </a:lvl1pPr>
-    <a:lvl2pPr marL="457200" algn="l" defTabSz="914400" rtl="0" eaLnBrk="1" latinLnBrk="0" hangingPunct="1">
-      <a:defRPr kumimoji="1" sz="1800" kern="1200">
+    <a:lvl2pPr marL="457200" algn="l" defTabSz="457200" rtl="0" eaLnBrk="1" latinLnBrk="0" hangingPunct="1">
+      <a:defRPr sz="1800" kern="1200">
         <a:solidFill>
           <a:schemeClr val="tx1"/>
         </a:solidFill>
@@ -34,8 +36,8 @@
         <a:cs typeface="+mn-cs"/>
       </a:defRPr>
     </a:lvl2pPr>
-    <a:lvl3pPr marL="914400" algn="l" defTabSz="914400" rtl="0" eaLnBrk="1" latinLnBrk="0" hangingPunct="1">
-      <a:defRPr kumimoji="1" sz="1800" kern="1200">
+    <a:lvl3pPr marL="914400" algn="l" defTabSz="457200" rtl="0" eaLnBrk="1" latinLnBrk="0" hangingPunct="1">
+      <a:defRPr sz="1800" kern="1200">
         <a:solidFill>
           <a:schemeClr val="tx1"/>
         </a:solidFill>
@@ -44,8 +46,8 @@
         <a:cs typeface="+mn-cs"/>
       </a:defRPr>
     </a:lvl3pPr>
-    <a:lvl4pPr marL="1371600" algn="l" defTabSz="914400" rtl="0" eaLnBrk="1" latinLnBrk="0" hangingPunct="1">
-      <a:defRPr kumimoji="1" sz="1800" kern="1200">
+    <a:lvl4pPr marL="1371600" algn="l" defTabSz="457200" rtl="0" eaLnBrk="1" latinLnBrk="0" hangingPunct="1">
+      <a:defRPr sz="1800" kern="1200">
         <a:solidFill>
           <a:schemeClr val="tx1"/>
         </a:solidFill>
@@ -54,8 +56,8 @@
         <a:cs typeface="+mn-cs"/>
       </a:defRPr>
     </a:lvl4pPr>
-    <a:lvl5pPr marL="1828800" algn="l" defTabSz="914400" rtl="0" eaLnBrk="1" latinLnBrk="0" hangingPunct="1">
-      <a:defRPr kumimoji="1" sz="1800" kern="1200">
+    <a:lvl5pPr marL="1828800" algn="l" defTabSz="457200" rtl="0" eaLnBrk="1" latinLnBrk="0" hangingPunct="1">
+      <a:defRPr sz="1800" kern="1200">
         <a:solidFill>
           <a:schemeClr val="tx1"/>
         </a:solidFill>
@@ -64,8 +66,8 @@
         <a:cs typeface="+mn-cs"/>
       </a:defRPr>
     </a:lvl5pPr>
-    <a:lvl6pPr marL="2286000" algn="l" defTabSz="914400" rtl="0" eaLnBrk="1" latinLnBrk="0" hangingPunct="1">
-      <a:defRPr kumimoji="1" sz="1800" kern="1200">
+    <a:lvl6pPr marL="2286000" algn="l" defTabSz="457200" rtl="0" eaLnBrk="1" latinLnBrk="0" hangingPunct="1">
+      <a:defRPr sz="1800" kern="1200">
         <a:solidFill>
           <a:schemeClr val="tx1"/>
         </a:solidFill>
@@ -74,8 +76,8 @@
         <a:cs typeface="+mn-cs"/>
       </a:defRPr>
     </a:lvl6pPr>
-    <a:lvl7pPr marL="2743200" algn="l" defTabSz="914400" rtl="0" eaLnBrk="1" latinLnBrk="0" hangingPunct="1">
-      <a:defRPr kumimoji="1" sz="1800" kern="1200">
+    <a:lvl7pPr marL="2743200" algn="l" defTabSz="457200" rtl="0" eaLnBrk="1" latinLnBrk="0" hangingPunct="1">
+      <a:defRPr sz="1800" kern="1200">
         <a:solidFill>
           <a:schemeClr val="tx1"/>
         </a:solidFill>
@@ -84,8 +86,8 @@
         <a:cs typeface="+mn-cs"/>
       </a:defRPr>
     </a:lvl7pPr>
-    <a:lvl8pPr marL="3200400" algn="l" defTabSz="914400" rtl="0" eaLnBrk="1" latinLnBrk="0" hangingPunct="1">
-      <a:defRPr kumimoji="1" sz="1800" kern="1200">
+    <a:lvl8pPr marL="3200400" algn="l" defTabSz="457200" rtl="0" eaLnBrk="1" latinLnBrk="0" hangingPunct="1">
+      <a:defRPr sz="1800" kern="1200">
         <a:solidFill>
           <a:schemeClr val="tx1"/>
         </a:solidFill>
@@ -94,8 +96,8 @@
         <a:cs typeface="+mn-cs"/>
       </a:defRPr>
     </a:lvl8pPr>
-    <a:lvl9pPr marL="3657600" algn="l" defTabSz="914400" rtl="0" eaLnBrk="1" latinLnBrk="0" hangingPunct="1">
-      <a:defRPr kumimoji="1" sz="1800" kern="1200">
+    <a:lvl9pPr marL="3657600" algn="l" defTabSz="457200" rtl="0" eaLnBrk="1" latinLnBrk="0" hangingPunct="1">
+      <a:defRPr sz="1800" kern="1200">
         <a:solidFill>
           <a:schemeClr val="tx1"/>
         </a:solidFill>
@@ -105,12 +107,25 @@
       </a:defRPr>
     </a:lvl9pPr>
   </p:defaultTextStyle>
+  <p:extLst>
+    <p:ext uri="{EFAFB233-063F-42B5-8137-9DF3F51BA10A}">
+      <p15:sldGuideLst xmlns:p15="http://schemas.microsoft.com/office/powerpoint/2012/main"/>
+    </p:ext>
+  </p:extLst>
 </p:presentation>
 </file>
 
 <file path=ppt/slideLayouts/slideLayout1.xml><?xml version="1.0" encoding="utf-8"?>
-<p:sldLayout xmlns:a="http://schemas.openxmlformats.org/drawingml/2006/main" xmlns:r="http://schemas.openxmlformats.org/officeDocument/2006/relationships" xmlns:p="http://schemas.openxmlformats.org/presentationml/2006/main" type="title" preserve="1">
+<p:sldLayout xmlns:a="http://schemas.openxmlformats.org/drawingml/2006/main" xmlns:r="http://schemas.openxmlformats.org/officeDocument/2006/relationships" xmlns:p="http://schemas.openxmlformats.org/presentationml/2006/main" showMasterSp="0" type="title" preserve="1">
   <p:cSld name="タイトル スライド">
+    <p:bg>
+      <p:bgPr>
+        <a:solidFill>
+          <a:schemeClr val="bg2"/>
+        </a:solidFill>
+        <a:effectLst/>
+      </p:bgPr>
+    </p:bg>
     <p:spTree>
       <p:nvGrpSpPr>
         <p:cNvPr id="1" name=""/>
@@ -127,13 +142,7 @@
       </p:grpSpPr>
       <p:sp>
         <p:nvSpPr>
-          <p:cNvPr id="2" name="タイトル 1">
-            <a:extLst>
-              <a:ext uri="{FF2B5EF4-FFF2-40B4-BE49-F238E27FC236}">
-                <a16:creationId xmlns:a16="http://schemas.microsoft.com/office/drawing/2014/main" id="{4FCDCE9F-C631-0889-CBD3-92347F0825D7}"/>
-              </a:ext>
-            </a:extLst>
-          </p:cNvPr>
+          <p:cNvPr id="2" name="Title 1"/>
           <p:cNvSpPr>
             <a:spLocks noGrp="1"/>
           </p:cNvSpPr>
@@ -143,34 +152,35 @@
         </p:nvSpPr>
         <p:spPr>
           <a:xfrm>
-            <a:off x="1524000" y="1122363"/>
-            <a:ext cx="9144000" cy="2387600"/>
+            <a:off x="1915128" y="1788454"/>
+            <a:ext cx="8361229" cy="2098226"/>
           </a:xfrm>
         </p:spPr>
         <p:txBody>
-          <a:bodyPr anchor="b"/>
+          <a:bodyPr anchor="b">
+            <a:noAutofit/>
+          </a:bodyPr>
           <a:lstStyle>
             <a:lvl1pPr algn="ctr">
-              <a:defRPr sz="6000"/>
+              <a:defRPr sz="7200" cap="all" baseline="0">
+                <a:solidFill>
+                  <a:schemeClr val="tx2"/>
+                </a:solidFill>
+              </a:defRPr>
             </a:lvl1pPr>
           </a:lstStyle>
           <a:p>
             <a:r>
-              <a:rPr kumimoji="1" lang="ja-JP" altLang="en-US"/>
+              <a:rPr lang="ja-JP" altLang="en-US"/>
               <a:t>マスター タイトルの書式設定</a:t>
             </a:r>
-          </a:p>
-        </p:txBody>
-      </p:sp>
-      <p:sp>
-        <p:nvSpPr>
-          <p:cNvPr id="3" name="字幕 2">
-            <a:extLst>
-              <a:ext uri="{FF2B5EF4-FFF2-40B4-BE49-F238E27FC236}">
-                <a16:creationId xmlns:a16="http://schemas.microsoft.com/office/drawing/2014/main" id="{510F79F2-CB7B-9B8D-818D-698FE7221711}"/>
-              </a:ext>
-            </a:extLst>
-          </p:cNvPr>
+            <a:endParaRPr lang="en-US" dirty="0"/>
+          </a:p>
+        </p:txBody>
+      </p:sp>
+      <p:sp>
+        <p:nvSpPr>
+          <p:cNvPr id="3" name="Subtitle 2"/>
           <p:cNvSpPr>
             <a:spLocks noGrp="1"/>
           </p:cNvSpPr>
@@ -180,16 +190,27 @@
         </p:nvSpPr>
         <p:spPr>
           <a:xfrm>
-            <a:off x="1524000" y="3602038"/>
-            <a:ext cx="9144000" cy="1655762"/>
+            <a:off x="2679906" y="3956279"/>
+            <a:ext cx="6831673" cy="1086237"/>
           </a:xfrm>
         </p:spPr>
         <p:txBody>
-          <a:bodyPr/>
+          <a:bodyPr>
+            <a:normAutofit/>
+          </a:bodyPr>
           <a:lstStyle>
             <a:lvl1pPr marL="0" indent="0" algn="ctr">
-              <a:buNone/>
-              <a:defRPr sz="2400"/>
+              <a:lnSpc>
+                <a:spcPct val="112000"/>
+              </a:lnSpc>
+              <a:spcBef>
+                <a:spcPts val="0"/>
+              </a:spcBef>
+              <a:spcAft>
+                <a:spcPts val="0"/>
+              </a:spcAft>
+              <a:buNone/>
+              <a:defRPr sz="2300"/>
             </a:lvl1pPr>
             <a:lvl2pPr marL="457200" indent="0" algn="ctr">
               <a:buNone/>
@@ -226,21 +247,16 @@
           </a:lstStyle>
           <a:p>
             <a:r>
-              <a:rPr kumimoji="1" lang="ja-JP" altLang="en-US"/>
+              <a:rPr lang="ja-JP" altLang="en-US"/>
               <a:t>マスター サブタイトルの書式設定</a:t>
             </a:r>
-          </a:p>
-        </p:txBody>
-      </p:sp>
-      <p:sp>
-        <p:nvSpPr>
-          <p:cNvPr id="4" name="日付プレースホルダー 3">
-            <a:extLst>
-              <a:ext uri="{FF2B5EF4-FFF2-40B4-BE49-F238E27FC236}">
-                <a16:creationId xmlns:a16="http://schemas.microsoft.com/office/drawing/2014/main" id="{7A862E09-2865-8FA5-A5AD-F0BEA954FF13}"/>
-              </a:ext>
-            </a:extLst>
-          </p:cNvPr>
+            <a:endParaRPr lang="en-US" dirty="0"/>
+          </a:p>
+        </p:txBody>
+      </p:sp>
+      <p:sp>
+        <p:nvSpPr>
+          <p:cNvPr id="4" name="Date Placeholder 3"/>
           <p:cNvSpPr>
             <a:spLocks noGrp="1"/>
           </p:cNvSpPr>
@@ -248,10 +264,23 @@
             <p:ph type="dt" sz="half" idx="10"/>
           </p:nvPr>
         </p:nvSpPr>
-        <p:spPr/>
+        <p:spPr>
+          <a:xfrm>
+            <a:off x="752858" y="6453386"/>
+            <a:ext cx="1607944" cy="404614"/>
+          </a:xfrm>
+        </p:spPr>
         <p:txBody>
           <a:bodyPr/>
-          <a:lstStyle/>
+          <a:lstStyle>
+            <a:lvl1pPr>
+              <a:defRPr baseline="0">
+                <a:solidFill>
+                  <a:schemeClr val="tx2"/>
+                </a:solidFill>
+              </a:defRPr>
+            </a:lvl1pPr>
+          </a:lstStyle>
           <a:p>
             <a:fld id="{898ACB73-228B-4573-B2A8-EEAE64393BA5}" type="datetimeFigureOut">
               <a:rPr kumimoji="1" lang="ja-JP" altLang="en-US" smtClean="0"/>
@@ -263,13 +292,7 @@
       </p:sp>
       <p:sp>
         <p:nvSpPr>
-          <p:cNvPr id="5" name="フッター プレースホルダー 4">
-            <a:extLst>
-              <a:ext uri="{FF2B5EF4-FFF2-40B4-BE49-F238E27FC236}">
-                <a16:creationId xmlns:a16="http://schemas.microsoft.com/office/drawing/2014/main" id="{0F778F45-E754-8A01-EFDD-9D98C8E4FB81}"/>
-              </a:ext>
-            </a:extLst>
-          </p:cNvPr>
+          <p:cNvPr id="5" name="Footer Placeholder 4"/>
           <p:cNvSpPr>
             <a:spLocks noGrp="1"/>
           </p:cNvSpPr>
@@ -277,10 +300,23 @@
             <p:ph type="ftr" sz="quarter" idx="11"/>
           </p:nvPr>
         </p:nvSpPr>
-        <p:spPr/>
+        <p:spPr>
+          <a:xfrm>
+            <a:off x="2584054" y="6453386"/>
+            <a:ext cx="7023377" cy="404614"/>
+          </a:xfrm>
+        </p:spPr>
         <p:txBody>
           <a:bodyPr/>
-          <a:lstStyle/>
+          <a:lstStyle>
+            <a:lvl1pPr algn="ctr">
+              <a:defRPr baseline="0">
+                <a:solidFill>
+                  <a:schemeClr val="tx2"/>
+                </a:solidFill>
+              </a:defRPr>
+            </a:lvl1pPr>
+          </a:lstStyle>
           <a:p>
             <a:endParaRPr kumimoji="1" lang="ja-JP" altLang="en-US"/>
           </a:p>
@@ -288,13 +324,7 @@
       </p:sp>
       <p:sp>
         <p:nvSpPr>
-          <p:cNvPr id="6" name="スライド番号プレースホルダー 5">
-            <a:extLst>
-              <a:ext uri="{FF2B5EF4-FFF2-40B4-BE49-F238E27FC236}">
-                <a16:creationId xmlns:a16="http://schemas.microsoft.com/office/drawing/2014/main" id="{EA42CE00-D522-0AFB-1CBB-A3EE90506E25}"/>
-              </a:ext>
-            </a:extLst>
-          </p:cNvPr>
+          <p:cNvPr id="6" name="Slide Number Placeholder 5"/>
           <p:cNvSpPr>
             <a:spLocks noGrp="1"/>
           </p:cNvSpPr>
@@ -302,10 +332,23 @@
             <p:ph type="sldNum" sz="quarter" idx="12"/>
           </p:nvPr>
         </p:nvSpPr>
-        <p:spPr/>
+        <p:spPr>
+          <a:xfrm>
+            <a:off x="9830683" y="6453386"/>
+            <a:ext cx="1596292" cy="404614"/>
+          </a:xfrm>
+        </p:spPr>
         <p:txBody>
           <a:bodyPr/>
-          <a:lstStyle/>
+          <a:lstStyle>
+            <a:lvl1pPr>
+              <a:defRPr baseline="0">
+                <a:solidFill>
+                  <a:schemeClr val="tx2"/>
+                </a:solidFill>
+              </a:defRPr>
+            </a:lvl1pPr>
+          </a:lstStyle>
           <a:p>
             <a:fld id="{C0230AD8-E8AE-4279-8B43-53EA3F76DDC3}" type="slidenum">
               <a:rPr kumimoji="1" lang="ja-JP" altLang="en-US" smtClean="0"/>
@@ -315,15 +358,144 @@
           </a:p>
         </p:txBody>
       </p:sp>
+      <p:grpSp>
+        <p:nvGrpSpPr>
+          <p:cNvPr id="7" name="Group 6"/>
+          <p:cNvGrpSpPr/>
+          <p:nvPr/>
+        </p:nvGrpSpPr>
+        <p:grpSpPr>
+          <a:xfrm>
+            <a:off x="752858" y="744469"/>
+            <a:ext cx="10674117" cy="5349671"/>
+            <a:chOff x="752858" y="744469"/>
+            <a:chExt cx="10674117" cy="5349671"/>
+          </a:xfrm>
+        </p:grpSpPr>
+        <p:sp>
+          <p:nvSpPr>
+            <p:cNvPr id="11" name="Freeform 6"/>
+            <p:cNvSpPr/>
+            <p:nvPr/>
+          </p:nvSpPr>
+          <p:spPr bwMode="auto">
+            <a:xfrm>
+              <a:off x="8151962" y="1685652"/>
+              <a:ext cx="3275013" cy="4408488"/>
+            </a:xfrm>
+            <a:custGeom>
+              <a:avLst/>
+              <a:gdLst/>
+              <a:ahLst/>
+              <a:cxnLst/>
+              <a:rect l="l" t="t" r="r" b="b"/>
+              <a:pathLst>
+                <a:path w="10000" h="10000">
+                  <a:moveTo>
+                    <a:pt x="8761" y="0"/>
+                  </a:moveTo>
+                  <a:lnTo>
+                    <a:pt x="10000" y="0"/>
+                  </a:lnTo>
+                  <a:lnTo>
+                    <a:pt x="10000" y="10000"/>
+                  </a:lnTo>
+                  <a:lnTo>
+                    <a:pt x="0" y="10000"/>
+                  </a:lnTo>
+                  <a:lnTo>
+                    <a:pt x="0" y="9126"/>
+                  </a:lnTo>
+                  <a:lnTo>
+                    <a:pt x="8761" y="9127"/>
+                  </a:lnTo>
+                  <a:lnTo>
+                    <a:pt x="8761" y="0"/>
+                  </a:lnTo>
+                  <a:close/>
+                </a:path>
+              </a:pathLst>
+            </a:custGeom>
+            <a:solidFill>
+              <a:schemeClr val="tx2"/>
+            </a:solidFill>
+            <a:ln w="0">
+              <a:noFill/>
+              <a:prstDash val="solid"/>
+              <a:round/>
+              <a:headEnd/>
+              <a:tailEnd/>
+            </a:ln>
+          </p:spPr>
+        </p:sp>
+        <p:sp>
+          <p:nvSpPr>
+            <p:cNvPr id="14" name="Freeform 6"/>
+            <p:cNvSpPr/>
+            <p:nvPr/>
+          </p:nvSpPr>
+          <p:spPr bwMode="auto">
+            <a:xfrm flipH="1" flipV="1">
+              <a:off x="752858" y="744469"/>
+              <a:ext cx="3275668" cy="4408488"/>
+            </a:xfrm>
+            <a:custGeom>
+              <a:avLst/>
+              <a:gdLst/>
+              <a:ahLst/>
+              <a:cxnLst/>
+              <a:rect l="l" t="t" r="r" b="b"/>
+              <a:pathLst>
+                <a:path w="10002" h="10000">
+                  <a:moveTo>
+                    <a:pt x="8763" y="0"/>
+                  </a:moveTo>
+                  <a:lnTo>
+                    <a:pt x="10002" y="0"/>
+                  </a:lnTo>
+                  <a:lnTo>
+                    <a:pt x="10002" y="10000"/>
+                  </a:lnTo>
+                  <a:lnTo>
+                    <a:pt x="2" y="10000"/>
+                  </a:lnTo>
+                  <a:cubicBezTo>
+                    <a:pt x="-2" y="9698"/>
+                    <a:pt x="4" y="9427"/>
+                    <a:pt x="0" y="9125"/>
+                  </a:cubicBezTo>
+                  <a:lnTo>
+                    <a:pt x="8763" y="9128"/>
+                  </a:lnTo>
+                  <a:lnTo>
+                    <a:pt x="8763" y="0"/>
+                  </a:lnTo>
+                  <a:close/>
+                </a:path>
+              </a:pathLst>
+            </a:custGeom>
+            <a:solidFill>
+              <a:schemeClr val="tx2"/>
+            </a:solidFill>
+            <a:ln w="0">
+              <a:noFill/>
+              <a:prstDash val="solid"/>
+              <a:round/>
+              <a:headEnd/>
+              <a:tailEnd/>
+            </a:ln>
+          </p:spPr>
+        </p:sp>
+      </p:grpSp>
     </p:spTree>
     <p:extLst>
       <p:ext uri="{BB962C8B-B14F-4D97-AF65-F5344CB8AC3E}">
-        <p14:creationId xmlns:p14="http://schemas.microsoft.com/office/powerpoint/2010/main" val="3411974463"/>
+        <p14:creationId xmlns:p14="http://schemas.microsoft.com/office/powerpoint/2010/main" val="1737936812"/>
       </p:ext>
     </p:extLst>
   </p:cSld>
   <p:clrMapOvr>
-    <a:masterClrMapping/>
+    <a:overrideClrMapping bg1="lt1" tx1="dk1" bg2="lt2" tx2="dk2" accent1="accent1" accent2="accent2" accent3="accent3" accent4="accent4" accent5="accent5" accent6="accent6" hlink="hlink" folHlink="folHlink"/>
   </p:clrMapOvr>
 </p:sldLayout>
 </file>
@@ -347,13 +519,7 @@
       </p:grpSpPr>
       <p:sp>
         <p:nvSpPr>
-          <p:cNvPr id="2" name="タイトル 1">
-            <a:extLst>
-              <a:ext uri="{FF2B5EF4-FFF2-40B4-BE49-F238E27FC236}">
-                <a16:creationId xmlns:a16="http://schemas.microsoft.com/office/drawing/2014/main" id="{2E180C36-A638-5BA8-1CE7-E9161534180D}"/>
-              </a:ext>
-            </a:extLst>
-          </p:cNvPr>
+          <p:cNvPr id="2" name="Title 1"/>
           <p:cNvSpPr>
             <a:spLocks noGrp="1"/>
           </p:cNvSpPr>
@@ -367,21 +533,16 @@
           <a:lstStyle/>
           <a:p>
             <a:r>
-              <a:rPr kumimoji="1" lang="ja-JP" altLang="en-US"/>
+              <a:rPr lang="ja-JP" altLang="en-US"/>
               <a:t>マスター タイトルの書式設定</a:t>
             </a:r>
-          </a:p>
-        </p:txBody>
-      </p:sp>
-      <p:sp>
-        <p:nvSpPr>
-          <p:cNvPr id="3" name="縦書きテキスト プレースホルダー 2">
-            <a:extLst>
-              <a:ext uri="{FF2B5EF4-FFF2-40B4-BE49-F238E27FC236}">
-                <a16:creationId xmlns:a16="http://schemas.microsoft.com/office/drawing/2014/main" id="{9824B6FB-91EC-D25D-FDA5-C31146D7BCDD}"/>
-              </a:ext>
-            </a:extLst>
-          </p:cNvPr>
+            <a:endParaRPr lang="en-US" dirty="0"/>
+          </a:p>
+        </p:txBody>
+      </p:sp>
+      <p:sp>
+        <p:nvSpPr>
+          <p:cNvPr id="3" name="Vertical Text Placeholder 2"/>
           <p:cNvSpPr>
             <a:spLocks noGrp="1"/>
           </p:cNvSpPr>
@@ -389,88 +550,88 @@
             <p:ph type="body" orient="vert" idx="1"/>
           </p:nvPr>
         </p:nvSpPr>
-        <p:spPr/>
+        <p:spPr>
+          <a:xfrm>
+            <a:off x="1371600" y="2295525"/>
+            <a:ext cx="9601200" cy="3571875"/>
+          </a:xfrm>
+        </p:spPr>
         <p:txBody>
           <a:bodyPr vert="eaVert"/>
           <a:lstStyle/>
           <a:p>
             <a:pPr lvl="0"/>
             <a:r>
-              <a:rPr kumimoji="1" lang="ja-JP" altLang="en-US"/>
+              <a:rPr lang="ja-JP" altLang="en-US"/>
               <a:t>マスター テキストの書式設定</a:t>
             </a:r>
           </a:p>
           <a:p>
             <a:pPr lvl="1"/>
             <a:r>
-              <a:rPr kumimoji="1" lang="ja-JP" altLang="en-US"/>
+              <a:rPr lang="ja-JP" altLang="en-US"/>
               <a:t>第 </a:t>
             </a:r>
             <a:r>
-              <a:rPr kumimoji="1" lang="en-US" altLang="ja-JP"/>
+              <a:rPr lang="en-US" altLang="ja-JP"/>
               <a:t>2 </a:t>
             </a:r>
             <a:r>
-              <a:rPr kumimoji="1" lang="ja-JP" altLang="en-US"/>
+              <a:rPr lang="ja-JP" altLang="en-US"/>
               <a:t>レベル</a:t>
             </a:r>
           </a:p>
           <a:p>
             <a:pPr lvl="2"/>
             <a:r>
-              <a:rPr kumimoji="1" lang="ja-JP" altLang="en-US"/>
+              <a:rPr lang="ja-JP" altLang="en-US"/>
               <a:t>第 </a:t>
             </a:r>
             <a:r>
-              <a:rPr kumimoji="1" lang="en-US" altLang="ja-JP"/>
+              <a:rPr lang="en-US" altLang="ja-JP"/>
               <a:t>3 </a:t>
             </a:r>
             <a:r>
-              <a:rPr kumimoji="1" lang="ja-JP" altLang="en-US"/>
+              <a:rPr lang="ja-JP" altLang="en-US"/>
               <a:t>レベル</a:t>
             </a:r>
           </a:p>
           <a:p>
             <a:pPr lvl="3"/>
             <a:r>
-              <a:rPr kumimoji="1" lang="ja-JP" altLang="en-US"/>
+              <a:rPr lang="ja-JP" altLang="en-US"/>
               <a:t>第 </a:t>
             </a:r>
             <a:r>
-              <a:rPr kumimoji="1" lang="en-US" altLang="ja-JP"/>
+              <a:rPr lang="en-US" altLang="ja-JP"/>
               <a:t>4 </a:t>
             </a:r>
             <a:r>
-              <a:rPr kumimoji="1" lang="ja-JP" altLang="en-US"/>
+              <a:rPr lang="ja-JP" altLang="en-US"/>
               <a:t>レベル</a:t>
             </a:r>
           </a:p>
           <a:p>
             <a:pPr lvl="4"/>
             <a:r>
-              <a:rPr kumimoji="1" lang="ja-JP" altLang="en-US"/>
+              <a:rPr lang="ja-JP" altLang="en-US"/>
               <a:t>第 </a:t>
             </a:r>
             <a:r>
-              <a:rPr kumimoji="1" lang="en-US" altLang="ja-JP"/>
+              <a:rPr lang="en-US" altLang="ja-JP"/>
               <a:t>5 </a:t>
             </a:r>
             <a:r>
-              <a:rPr kumimoji="1" lang="ja-JP" altLang="en-US"/>
+              <a:rPr lang="ja-JP" altLang="en-US"/>
               <a:t>レベル</a:t>
             </a:r>
-          </a:p>
-        </p:txBody>
-      </p:sp>
-      <p:sp>
-        <p:nvSpPr>
-          <p:cNvPr id="4" name="日付プレースホルダー 3">
-            <a:extLst>
-              <a:ext uri="{FF2B5EF4-FFF2-40B4-BE49-F238E27FC236}">
-                <a16:creationId xmlns:a16="http://schemas.microsoft.com/office/drawing/2014/main" id="{5FDD167D-FC79-F9BC-AC96-C2C45F21986A}"/>
-              </a:ext>
-            </a:extLst>
-          </p:cNvPr>
+            <a:endParaRPr lang="en-US" dirty="0"/>
+          </a:p>
+        </p:txBody>
+      </p:sp>
+      <p:sp>
+        <p:nvSpPr>
+          <p:cNvPr id="4" name="Date Placeholder 3"/>
           <p:cNvSpPr>
             <a:spLocks noGrp="1"/>
           </p:cNvSpPr>
@@ -493,13 +654,7 @@
       </p:sp>
       <p:sp>
         <p:nvSpPr>
-          <p:cNvPr id="5" name="フッター プレースホルダー 4">
-            <a:extLst>
-              <a:ext uri="{FF2B5EF4-FFF2-40B4-BE49-F238E27FC236}">
-                <a16:creationId xmlns:a16="http://schemas.microsoft.com/office/drawing/2014/main" id="{FC0955B7-BF98-CB01-4BBD-3577468B16CC}"/>
-              </a:ext>
-            </a:extLst>
-          </p:cNvPr>
+          <p:cNvPr id="5" name="Footer Placeholder 4"/>
           <p:cNvSpPr>
             <a:spLocks noGrp="1"/>
           </p:cNvSpPr>
@@ -518,13 +673,7 @@
       </p:sp>
       <p:sp>
         <p:nvSpPr>
-          <p:cNvPr id="6" name="スライド番号プレースホルダー 5">
-            <a:extLst>
-              <a:ext uri="{FF2B5EF4-FFF2-40B4-BE49-F238E27FC236}">
-                <a16:creationId xmlns:a16="http://schemas.microsoft.com/office/drawing/2014/main" id="{CF7854F5-8D40-2FC6-7591-372E0C69021D}"/>
-              </a:ext>
-            </a:extLst>
-          </p:cNvPr>
+          <p:cNvPr id="6" name="Slide Number Placeholder 5"/>
           <p:cNvSpPr>
             <a:spLocks noGrp="1"/>
           </p:cNvSpPr>
@@ -548,7 +697,7 @@
     </p:spTree>
     <p:extLst>
       <p:ext uri="{BB962C8B-B14F-4D97-AF65-F5344CB8AC3E}">
-        <p14:creationId xmlns:p14="http://schemas.microsoft.com/office/powerpoint/2010/main" val="3481759080"/>
+        <p14:creationId xmlns:p14="http://schemas.microsoft.com/office/powerpoint/2010/main" val="2992532800"/>
       </p:ext>
     </p:extLst>
   </p:cSld>
@@ -577,13 +726,7 @@
       </p:grpSpPr>
       <p:sp>
         <p:nvSpPr>
-          <p:cNvPr id="2" name="縦書きタイトル 1">
-            <a:extLst>
-              <a:ext uri="{FF2B5EF4-FFF2-40B4-BE49-F238E27FC236}">
-                <a16:creationId xmlns:a16="http://schemas.microsoft.com/office/drawing/2014/main" id="{C1195C95-49DD-7D63-20CA-B493E4E344BC}"/>
-              </a:ext>
-            </a:extLst>
-          </p:cNvPr>
+          <p:cNvPr id="2" name="Vertical Title 1"/>
           <p:cNvSpPr>
             <a:spLocks noGrp="1"/>
           </p:cNvSpPr>
@@ -593,8 +736,8 @@
         </p:nvSpPr>
         <p:spPr>
           <a:xfrm>
-            <a:off x="8724900" y="365125"/>
-            <a:ext cx="2628900" cy="5811838"/>
+            <a:off x="9596561" y="624156"/>
+            <a:ext cx="1565766" cy="5243244"/>
           </a:xfrm>
         </p:spPr>
         <p:txBody>
@@ -602,21 +745,16 @@
           <a:lstStyle/>
           <a:p>
             <a:r>
-              <a:rPr kumimoji="1" lang="ja-JP" altLang="en-US"/>
+              <a:rPr lang="ja-JP" altLang="en-US"/>
               <a:t>マスター タイトルの書式設定</a:t>
             </a:r>
-          </a:p>
-        </p:txBody>
-      </p:sp>
-      <p:sp>
-        <p:nvSpPr>
-          <p:cNvPr id="3" name="縦書きテキスト プレースホルダー 2">
-            <a:extLst>
-              <a:ext uri="{FF2B5EF4-FFF2-40B4-BE49-F238E27FC236}">
-                <a16:creationId xmlns:a16="http://schemas.microsoft.com/office/drawing/2014/main" id="{1B00A7CE-D0F0-079C-6E6F-C4578EAB1E99}"/>
-              </a:ext>
-            </a:extLst>
-          </p:cNvPr>
+            <a:endParaRPr lang="en-US" dirty="0"/>
+          </a:p>
+        </p:txBody>
+      </p:sp>
+      <p:sp>
+        <p:nvSpPr>
+          <p:cNvPr id="3" name="Vertical Text Placeholder 2"/>
           <p:cNvSpPr>
             <a:spLocks noGrp="1"/>
           </p:cNvSpPr>
@@ -626,8 +764,8 @@
         </p:nvSpPr>
         <p:spPr>
           <a:xfrm>
-            <a:off x="838200" y="365125"/>
-            <a:ext cx="7734300" cy="5811838"/>
+            <a:off x="1371600" y="624156"/>
+            <a:ext cx="8179641" cy="5243244"/>
           </a:xfrm>
         </p:spPr>
         <p:txBody>
@@ -636,81 +774,76 @@
           <a:p>
             <a:pPr lvl="0"/>
             <a:r>
-              <a:rPr kumimoji="1" lang="ja-JP" altLang="en-US"/>
+              <a:rPr lang="ja-JP" altLang="en-US"/>
               <a:t>マスター テキストの書式設定</a:t>
             </a:r>
           </a:p>
           <a:p>
             <a:pPr lvl="1"/>
             <a:r>
-              <a:rPr kumimoji="1" lang="ja-JP" altLang="en-US"/>
+              <a:rPr lang="ja-JP" altLang="en-US"/>
               <a:t>第 </a:t>
             </a:r>
             <a:r>
-              <a:rPr kumimoji="1" lang="en-US" altLang="ja-JP"/>
+              <a:rPr lang="en-US" altLang="ja-JP"/>
               <a:t>2 </a:t>
             </a:r>
             <a:r>
-              <a:rPr kumimoji="1" lang="ja-JP" altLang="en-US"/>
+              <a:rPr lang="ja-JP" altLang="en-US"/>
               <a:t>レベル</a:t>
             </a:r>
           </a:p>
           <a:p>
             <a:pPr lvl="2"/>
             <a:r>
-              <a:rPr kumimoji="1" lang="ja-JP" altLang="en-US"/>
+              <a:rPr lang="ja-JP" altLang="en-US"/>
               <a:t>第 </a:t>
             </a:r>
             <a:r>
-              <a:rPr kumimoji="1" lang="en-US" altLang="ja-JP"/>
+              <a:rPr lang="en-US" altLang="ja-JP"/>
               <a:t>3 </a:t>
             </a:r>
             <a:r>
-              <a:rPr kumimoji="1" lang="ja-JP" altLang="en-US"/>
+              <a:rPr lang="ja-JP" altLang="en-US"/>
               <a:t>レベル</a:t>
             </a:r>
           </a:p>
           <a:p>
             <a:pPr lvl="3"/>
             <a:r>
-              <a:rPr kumimoji="1" lang="ja-JP" altLang="en-US"/>
+              <a:rPr lang="ja-JP" altLang="en-US"/>
               <a:t>第 </a:t>
             </a:r>
             <a:r>
-              <a:rPr kumimoji="1" lang="en-US" altLang="ja-JP"/>
+              <a:rPr lang="en-US" altLang="ja-JP"/>
               <a:t>4 </a:t>
             </a:r>
             <a:r>
-              <a:rPr kumimoji="1" lang="ja-JP" altLang="en-US"/>
+              <a:rPr lang="ja-JP" altLang="en-US"/>
               <a:t>レベル</a:t>
             </a:r>
           </a:p>
           <a:p>
             <a:pPr lvl="4"/>
             <a:r>
-              <a:rPr kumimoji="1" lang="ja-JP" altLang="en-US"/>
+              <a:rPr lang="ja-JP" altLang="en-US"/>
               <a:t>第 </a:t>
             </a:r>
             <a:r>
-              <a:rPr kumimoji="1" lang="en-US" altLang="ja-JP"/>
+              <a:rPr lang="en-US" altLang="ja-JP"/>
               <a:t>5 </a:t>
             </a:r>
             <a:r>
-              <a:rPr kumimoji="1" lang="ja-JP" altLang="en-US"/>
+              <a:rPr lang="ja-JP" altLang="en-US"/>
               <a:t>レベル</a:t>
             </a:r>
-          </a:p>
-        </p:txBody>
-      </p:sp>
-      <p:sp>
-        <p:nvSpPr>
-          <p:cNvPr id="4" name="日付プレースホルダー 3">
-            <a:extLst>
-              <a:ext uri="{FF2B5EF4-FFF2-40B4-BE49-F238E27FC236}">
-                <a16:creationId xmlns:a16="http://schemas.microsoft.com/office/drawing/2014/main" id="{498827E5-6026-5724-97DD-C110F2AE027E}"/>
-              </a:ext>
-            </a:extLst>
-          </p:cNvPr>
+            <a:endParaRPr lang="en-US" dirty="0"/>
+          </a:p>
+        </p:txBody>
+      </p:sp>
+      <p:sp>
+        <p:nvSpPr>
+          <p:cNvPr id="4" name="Date Placeholder 3"/>
           <p:cNvSpPr>
             <a:spLocks noGrp="1"/>
           </p:cNvSpPr>
@@ -733,13 +866,7 @@
       </p:sp>
       <p:sp>
         <p:nvSpPr>
-          <p:cNvPr id="5" name="フッター プレースホルダー 4">
-            <a:extLst>
-              <a:ext uri="{FF2B5EF4-FFF2-40B4-BE49-F238E27FC236}">
-                <a16:creationId xmlns:a16="http://schemas.microsoft.com/office/drawing/2014/main" id="{5F3631F9-A09B-D69B-150F-7BF9E9E95D20}"/>
-              </a:ext>
-            </a:extLst>
-          </p:cNvPr>
+          <p:cNvPr id="5" name="Footer Placeholder 4"/>
           <p:cNvSpPr>
             <a:spLocks noGrp="1"/>
           </p:cNvSpPr>
@@ -758,13 +885,7 @@
       </p:sp>
       <p:sp>
         <p:nvSpPr>
-          <p:cNvPr id="6" name="スライド番号プレースホルダー 5">
-            <a:extLst>
-              <a:ext uri="{FF2B5EF4-FFF2-40B4-BE49-F238E27FC236}">
-                <a16:creationId xmlns:a16="http://schemas.microsoft.com/office/drawing/2014/main" id="{E9907E63-A0E4-1DB1-6A67-6FD9CFEDF3AB}"/>
-              </a:ext>
-            </a:extLst>
-          </p:cNvPr>
+          <p:cNvPr id="6" name="Slide Number Placeholder 5"/>
           <p:cNvSpPr>
             <a:spLocks noGrp="1"/>
           </p:cNvSpPr>
@@ -788,7 +909,7 @@
     </p:spTree>
     <p:extLst>
       <p:ext uri="{BB962C8B-B14F-4D97-AF65-F5344CB8AC3E}">
-        <p14:creationId xmlns:p14="http://schemas.microsoft.com/office/powerpoint/2010/main" val="1786819714"/>
+        <p14:creationId xmlns:p14="http://schemas.microsoft.com/office/powerpoint/2010/main" val="2452370934"/>
       </p:ext>
     </p:extLst>
   </p:cSld>
@@ -817,13 +938,7 @@
       </p:grpSpPr>
       <p:sp>
         <p:nvSpPr>
-          <p:cNvPr id="2" name="タイトル 1">
-            <a:extLst>
-              <a:ext uri="{FF2B5EF4-FFF2-40B4-BE49-F238E27FC236}">
-                <a16:creationId xmlns:a16="http://schemas.microsoft.com/office/drawing/2014/main" id="{061F4DAC-482B-3D0E-6C0A-95F8C4C7EDBA}"/>
-              </a:ext>
-            </a:extLst>
-          </p:cNvPr>
+          <p:cNvPr id="2" name="Title 1"/>
           <p:cNvSpPr>
             <a:spLocks noGrp="1"/>
           </p:cNvSpPr>
@@ -837,21 +952,16 @@
           <a:lstStyle/>
           <a:p>
             <a:r>
-              <a:rPr kumimoji="1" lang="ja-JP" altLang="en-US"/>
+              <a:rPr lang="ja-JP" altLang="en-US"/>
               <a:t>マスター タイトルの書式設定</a:t>
             </a:r>
-          </a:p>
-        </p:txBody>
-      </p:sp>
-      <p:sp>
-        <p:nvSpPr>
-          <p:cNvPr id="3" name="コンテンツ プレースホルダー 2">
-            <a:extLst>
-              <a:ext uri="{FF2B5EF4-FFF2-40B4-BE49-F238E27FC236}">
-                <a16:creationId xmlns:a16="http://schemas.microsoft.com/office/drawing/2014/main" id="{91AE99BB-972D-18B2-554B-4EA9D0E53313}"/>
-              </a:ext>
-            </a:extLst>
-          </p:cNvPr>
+            <a:endParaRPr lang="en-US" dirty="0"/>
+          </a:p>
+        </p:txBody>
+      </p:sp>
+      <p:sp>
+        <p:nvSpPr>
+          <p:cNvPr id="3" name="Content Placeholder 2"/>
           <p:cNvSpPr>
             <a:spLocks noGrp="1"/>
           </p:cNvSpPr>
@@ -866,81 +976,76 @@
           <a:p>
             <a:pPr lvl="0"/>
             <a:r>
-              <a:rPr kumimoji="1" lang="ja-JP" altLang="en-US"/>
+              <a:rPr lang="ja-JP" altLang="en-US"/>
               <a:t>マスター テキストの書式設定</a:t>
             </a:r>
           </a:p>
           <a:p>
             <a:pPr lvl="1"/>
             <a:r>
-              <a:rPr kumimoji="1" lang="ja-JP" altLang="en-US"/>
+              <a:rPr lang="ja-JP" altLang="en-US"/>
               <a:t>第 </a:t>
             </a:r>
             <a:r>
-              <a:rPr kumimoji="1" lang="en-US" altLang="ja-JP"/>
+              <a:rPr lang="en-US" altLang="ja-JP"/>
               <a:t>2 </a:t>
             </a:r>
             <a:r>
-              <a:rPr kumimoji="1" lang="ja-JP" altLang="en-US"/>
+              <a:rPr lang="ja-JP" altLang="en-US"/>
               <a:t>レベル</a:t>
             </a:r>
           </a:p>
           <a:p>
             <a:pPr lvl="2"/>
             <a:r>
-              <a:rPr kumimoji="1" lang="ja-JP" altLang="en-US"/>
+              <a:rPr lang="ja-JP" altLang="en-US"/>
               <a:t>第 </a:t>
             </a:r>
             <a:r>
-              <a:rPr kumimoji="1" lang="en-US" altLang="ja-JP"/>
+              <a:rPr lang="en-US" altLang="ja-JP"/>
               <a:t>3 </a:t>
             </a:r>
             <a:r>
-              <a:rPr kumimoji="1" lang="ja-JP" altLang="en-US"/>
+              <a:rPr lang="ja-JP" altLang="en-US"/>
               <a:t>レベル</a:t>
             </a:r>
           </a:p>
           <a:p>
             <a:pPr lvl="3"/>
             <a:r>
-              <a:rPr kumimoji="1" lang="ja-JP" altLang="en-US"/>
+              <a:rPr lang="ja-JP" altLang="en-US"/>
               <a:t>第 </a:t>
             </a:r>
             <a:r>
-              <a:rPr kumimoji="1" lang="en-US" altLang="ja-JP"/>
+              <a:rPr lang="en-US" altLang="ja-JP"/>
               <a:t>4 </a:t>
             </a:r>
             <a:r>
-              <a:rPr kumimoji="1" lang="ja-JP" altLang="en-US"/>
+              <a:rPr lang="ja-JP" altLang="en-US"/>
               <a:t>レベル</a:t>
             </a:r>
           </a:p>
           <a:p>
             <a:pPr lvl="4"/>
             <a:r>
-              <a:rPr kumimoji="1" lang="ja-JP" altLang="en-US"/>
+              <a:rPr lang="ja-JP" altLang="en-US"/>
               <a:t>第 </a:t>
             </a:r>
             <a:r>
-              <a:rPr kumimoji="1" lang="en-US" altLang="ja-JP"/>
+              <a:rPr lang="en-US" altLang="ja-JP"/>
               <a:t>5 </a:t>
             </a:r>
             <a:r>
-              <a:rPr kumimoji="1" lang="ja-JP" altLang="en-US"/>
+              <a:rPr lang="ja-JP" altLang="en-US"/>
               <a:t>レベル</a:t>
             </a:r>
-          </a:p>
-        </p:txBody>
-      </p:sp>
-      <p:sp>
-        <p:nvSpPr>
-          <p:cNvPr id="4" name="日付プレースホルダー 3">
-            <a:extLst>
-              <a:ext uri="{FF2B5EF4-FFF2-40B4-BE49-F238E27FC236}">
-                <a16:creationId xmlns:a16="http://schemas.microsoft.com/office/drawing/2014/main" id="{07F159CF-E6EC-31D9-C50E-946CFAD099BA}"/>
-              </a:ext>
-            </a:extLst>
-          </p:cNvPr>
+            <a:endParaRPr lang="en-US" dirty="0"/>
+          </a:p>
+        </p:txBody>
+      </p:sp>
+      <p:sp>
+        <p:nvSpPr>
+          <p:cNvPr id="4" name="Date Placeholder 3"/>
           <p:cNvSpPr>
             <a:spLocks noGrp="1"/>
           </p:cNvSpPr>
@@ -963,13 +1068,7 @@
       </p:sp>
       <p:sp>
         <p:nvSpPr>
-          <p:cNvPr id="5" name="フッター プレースホルダー 4">
-            <a:extLst>
-              <a:ext uri="{FF2B5EF4-FFF2-40B4-BE49-F238E27FC236}">
-                <a16:creationId xmlns:a16="http://schemas.microsoft.com/office/drawing/2014/main" id="{A080ED29-8195-6CE7-6FAE-562643E6717C}"/>
-              </a:ext>
-            </a:extLst>
-          </p:cNvPr>
+          <p:cNvPr id="5" name="Footer Placeholder 4"/>
           <p:cNvSpPr>
             <a:spLocks noGrp="1"/>
           </p:cNvSpPr>
@@ -988,13 +1087,7 @@
       </p:sp>
       <p:sp>
         <p:nvSpPr>
-          <p:cNvPr id="6" name="スライド番号プレースホルダー 5">
-            <a:extLst>
-              <a:ext uri="{FF2B5EF4-FFF2-40B4-BE49-F238E27FC236}">
-                <a16:creationId xmlns:a16="http://schemas.microsoft.com/office/drawing/2014/main" id="{A0F3F72D-99C1-52C9-CD2B-4D64B294F868}"/>
-              </a:ext>
-            </a:extLst>
-          </p:cNvPr>
+          <p:cNvPr id="6" name="Slide Number Placeholder 5"/>
           <p:cNvSpPr>
             <a:spLocks noGrp="1"/>
           </p:cNvSpPr>
@@ -1018,7 +1111,7 @@
     </p:spTree>
     <p:extLst>
       <p:ext uri="{BB962C8B-B14F-4D97-AF65-F5344CB8AC3E}">
-        <p14:creationId xmlns:p14="http://schemas.microsoft.com/office/powerpoint/2010/main" val="3649471062"/>
+        <p14:creationId xmlns:p14="http://schemas.microsoft.com/office/powerpoint/2010/main" val="4265001419"/>
       </p:ext>
     </p:extLst>
   </p:cSld>
@@ -1029,8 +1122,13 @@
 </file>
 
 <file path=ppt/slideLayouts/slideLayout3.xml><?xml version="1.0" encoding="utf-8"?>
-<p:sldLayout xmlns:a="http://schemas.openxmlformats.org/drawingml/2006/main" xmlns:r="http://schemas.openxmlformats.org/officeDocument/2006/relationships" xmlns:p="http://schemas.openxmlformats.org/presentationml/2006/main" type="secHead" preserve="1">
+<p:sldLayout xmlns:a="http://schemas.openxmlformats.org/drawingml/2006/main" xmlns:r="http://schemas.openxmlformats.org/officeDocument/2006/relationships" xmlns:p="http://schemas.openxmlformats.org/presentationml/2006/main" showMasterSp="0" type="secHead" preserve="1">
   <p:cSld name="セクション見出し">
+    <p:bg>
+      <p:bgRef idx="1001">
+        <a:schemeClr val="bg2"/>
+      </p:bgRef>
+    </p:bg>
     <p:spTree>
       <p:nvGrpSpPr>
         <p:cNvPr id="1" name=""/>
@@ -1047,13 +1145,7 @@
       </p:grpSpPr>
       <p:sp>
         <p:nvSpPr>
-          <p:cNvPr id="2" name="タイトル 1">
-            <a:extLst>
-              <a:ext uri="{FF2B5EF4-FFF2-40B4-BE49-F238E27FC236}">
-                <a16:creationId xmlns:a16="http://schemas.microsoft.com/office/drawing/2014/main" id="{66B2EB90-5A28-AA7A-9410-FA5D24C48D77}"/>
-              </a:ext>
-            </a:extLst>
-          </p:cNvPr>
+          <p:cNvPr id="2" name="Title 1"/>
           <p:cNvSpPr>
             <a:spLocks noGrp="1"/>
           </p:cNvSpPr>
@@ -1063,170 +1155,185 @@
         </p:nvSpPr>
         <p:spPr>
           <a:xfrm>
-            <a:off x="831850" y="1709738"/>
-            <a:ext cx="10515600" cy="2852737"/>
+            <a:off x="765025" y="1301360"/>
+            <a:ext cx="9612971" cy="2852737"/>
           </a:xfrm>
         </p:spPr>
         <p:txBody>
-          <a:bodyPr anchor="b"/>
+          <a:bodyPr anchor="b">
+            <a:normAutofit/>
+          </a:bodyPr>
+          <a:lstStyle>
+            <a:lvl1pPr algn="r">
+              <a:defRPr sz="7200" cap="all" baseline="0">
+                <a:solidFill>
+                  <a:schemeClr val="tx2"/>
+                </a:solidFill>
+              </a:defRPr>
+            </a:lvl1pPr>
+          </a:lstStyle>
+          <a:p>
+            <a:r>
+              <a:rPr lang="ja-JP" altLang="en-US"/>
+              <a:t>マスター タイトルの書式設定</a:t>
+            </a:r>
+            <a:endParaRPr lang="en-US" dirty="0"/>
+          </a:p>
+        </p:txBody>
+      </p:sp>
+      <p:sp>
+        <p:nvSpPr>
+          <p:cNvPr id="3" name="Text Placeholder 2"/>
+          <p:cNvSpPr>
+            <a:spLocks noGrp="1"/>
+          </p:cNvSpPr>
+          <p:nvPr>
+            <p:ph type="body" idx="1"/>
+          </p:nvPr>
+        </p:nvSpPr>
+        <p:spPr>
+          <a:xfrm>
+            <a:off x="765025" y="4216328"/>
+            <a:ext cx="9612971" cy="1143324"/>
+          </a:xfrm>
+        </p:spPr>
+        <p:txBody>
+          <a:bodyPr/>
+          <a:lstStyle>
+            <a:lvl1pPr marL="0" indent="0" algn="r">
+              <a:lnSpc>
+                <a:spcPct val="112000"/>
+              </a:lnSpc>
+              <a:spcBef>
+                <a:spcPts val="0"/>
+              </a:spcBef>
+              <a:spcAft>
+                <a:spcPts val="0"/>
+              </a:spcAft>
+              <a:buNone/>
+              <a:defRPr sz="2400">
+                <a:solidFill>
+                  <a:schemeClr val="tx2"/>
+                </a:solidFill>
+              </a:defRPr>
+            </a:lvl1pPr>
+            <a:lvl2pPr marL="457200" indent="0">
+              <a:buNone/>
+              <a:defRPr sz="2000">
+                <a:solidFill>
+                  <a:schemeClr val="tx1">
+                    <a:tint val="75000"/>
+                  </a:schemeClr>
+                </a:solidFill>
+              </a:defRPr>
+            </a:lvl2pPr>
+            <a:lvl3pPr marL="914400" indent="0">
+              <a:buNone/>
+              <a:defRPr sz="1800">
+                <a:solidFill>
+                  <a:schemeClr val="tx1">
+                    <a:tint val="75000"/>
+                  </a:schemeClr>
+                </a:solidFill>
+              </a:defRPr>
+            </a:lvl3pPr>
+            <a:lvl4pPr marL="1371600" indent="0">
+              <a:buNone/>
+              <a:defRPr sz="1600">
+                <a:solidFill>
+                  <a:schemeClr val="tx1">
+                    <a:tint val="75000"/>
+                  </a:schemeClr>
+                </a:solidFill>
+              </a:defRPr>
+            </a:lvl4pPr>
+            <a:lvl5pPr marL="1828800" indent="0">
+              <a:buNone/>
+              <a:defRPr sz="1600">
+                <a:solidFill>
+                  <a:schemeClr val="tx1">
+                    <a:tint val="75000"/>
+                  </a:schemeClr>
+                </a:solidFill>
+              </a:defRPr>
+            </a:lvl5pPr>
+            <a:lvl6pPr marL="2286000" indent="0">
+              <a:buNone/>
+              <a:defRPr sz="1600">
+                <a:solidFill>
+                  <a:schemeClr val="tx1">
+                    <a:tint val="75000"/>
+                  </a:schemeClr>
+                </a:solidFill>
+              </a:defRPr>
+            </a:lvl6pPr>
+            <a:lvl7pPr marL="2743200" indent="0">
+              <a:buNone/>
+              <a:defRPr sz="1600">
+                <a:solidFill>
+                  <a:schemeClr val="tx1">
+                    <a:tint val="75000"/>
+                  </a:schemeClr>
+                </a:solidFill>
+              </a:defRPr>
+            </a:lvl7pPr>
+            <a:lvl8pPr marL="3200400" indent="0">
+              <a:buNone/>
+              <a:defRPr sz="1600">
+                <a:solidFill>
+                  <a:schemeClr val="tx1">
+                    <a:tint val="75000"/>
+                  </a:schemeClr>
+                </a:solidFill>
+              </a:defRPr>
+            </a:lvl8pPr>
+            <a:lvl9pPr marL="3657600" indent="0">
+              <a:buNone/>
+              <a:defRPr sz="1600">
+                <a:solidFill>
+                  <a:schemeClr val="tx1">
+                    <a:tint val="75000"/>
+                  </a:schemeClr>
+                </a:solidFill>
+              </a:defRPr>
+            </a:lvl9pPr>
+          </a:lstStyle>
+          <a:p>
+            <a:pPr lvl="0"/>
+            <a:r>
+              <a:rPr lang="ja-JP" altLang="en-US"/>
+              <a:t>マスター テキストの書式設定</a:t>
+            </a:r>
+          </a:p>
+        </p:txBody>
+      </p:sp>
+      <p:sp>
+        <p:nvSpPr>
+          <p:cNvPr id="4" name="Date Placeholder 3"/>
+          <p:cNvSpPr>
+            <a:spLocks noGrp="1"/>
+          </p:cNvSpPr>
+          <p:nvPr>
+            <p:ph type="dt" sz="half" idx="10"/>
+          </p:nvPr>
+        </p:nvSpPr>
+        <p:spPr>
+          <a:xfrm>
+            <a:off x="738908" y="6453386"/>
+            <a:ext cx="1622409" cy="404614"/>
+          </a:xfrm>
+        </p:spPr>
+        <p:txBody>
+          <a:bodyPr/>
           <a:lstStyle>
             <a:lvl1pPr>
-              <a:defRPr sz="6000"/>
+              <a:defRPr>
+                <a:solidFill>
+                  <a:schemeClr val="tx2"/>
+                </a:solidFill>
+              </a:defRPr>
             </a:lvl1pPr>
           </a:lstStyle>
-          <a:p>
-            <a:r>
-              <a:rPr kumimoji="1" lang="ja-JP" altLang="en-US"/>
-              <a:t>マスター タイトルの書式設定</a:t>
-            </a:r>
-          </a:p>
-        </p:txBody>
-      </p:sp>
-      <p:sp>
-        <p:nvSpPr>
-          <p:cNvPr id="3" name="テキスト プレースホルダー 2">
-            <a:extLst>
-              <a:ext uri="{FF2B5EF4-FFF2-40B4-BE49-F238E27FC236}">
-                <a16:creationId xmlns:a16="http://schemas.microsoft.com/office/drawing/2014/main" id="{B5E3BB9E-9BDD-F0AE-B954-A66793EB5FAF}"/>
-              </a:ext>
-            </a:extLst>
-          </p:cNvPr>
-          <p:cNvSpPr>
-            <a:spLocks noGrp="1"/>
-          </p:cNvSpPr>
-          <p:nvPr>
-            <p:ph type="body" idx="1"/>
-          </p:nvPr>
-        </p:nvSpPr>
-        <p:spPr>
-          <a:xfrm>
-            <a:off x="831850" y="4589463"/>
-            <a:ext cx="10515600" cy="1500187"/>
-          </a:xfrm>
-        </p:spPr>
-        <p:txBody>
-          <a:bodyPr/>
-          <a:lstStyle>
-            <a:lvl1pPr marL="0" indent="0">
-              <a:buNone/>
-              <a:defRPr sz="2400">
-                <a:solidFill>
-                  <a:schemeClr val="tx1">
-                    <a:tint val="82000"/>
-                  </a:schemeClr>
-                </a:solidFill>
-              </a:defRPr>
-            </a:lvl1pPr>
-            <a:lvl2pPr marL="457200" indent="0">
-              <a:buNone/>
-              <a:defRPr sz="2000">
-                <a:solidFill>
-                  <a:schemeClr val="tx1">
-                    <a:tint val="82000"/>
-                  </a:schemeClr>
-                </a:solidFill>
-              </a:defRPr>
-            </a:lvl2pPr>
-            <a:lvl3pPr marL="914400" indent="0">
-              <a:buNone/>
-              <a:defRPr sz="1800">
-                <a:solidFill>
-                  <a:schemeClr val="tx1">
-                    <a:tint val="82000"/>
-                  </a:schemeClr>
-                </a:solidFill>
-              </a:defRPr>
-            </a:lvl3pPr>
-            <a:lvl4pPr marL="1371600" indent="0">
-              <a:buNone/>
-              <a:defRPr sz="1600">
-                <a:solidFill>
-                  <a:schemeClr val="tx1">
-                    <a:tint val="82000"/>
-                  </a:schemeClr>
-                </a:solidFill>
-              </a:defRPr>
-            </a:lvl4pPr>
-            <a:lvl5pPr marL="1828800" indent="0">
-              <a:buNone/>
-              <a:defRPr sz="1600">
-                <a:solidFill>
-                  <a:schemeClr val="tx1">
-                    <a:tint val="82000"/>
-                  </a:schemeClr>
-                </a:solidFill>
-              </a:defRPr>
-            </a:lvl5pPr>
-            <a:lvl6pPr marL="2286000" indent="0">
-              <a:buNone/>
-              <a:defRPr sz="1600">
-                <a:solidFill>
-                  <a:schemeClr val="tx1">
-                    <a:tint val="82000"/>
-                  </a:schemeClr>
-                </a:solidFill>
-              </a:defRPr>
-            </a:lvl6pPr>
-            <a:lvl7pPr marL="2743200" indent="0">
-              <a:buNone/>
-              <a:defRPr sz="1600">
-                <a:solidFill>
-                  <a:schemeClr val="tx1">
-                    <a:tint val="82000"/>
-                  </a:schemeClr>
-                </a:solidFill>
-              </a:defRPr>
-            </a:lvl7pPr>
-            <a:lvl8pPr marL="3200400" indent="0">
-              <a:buNone/>
-              <a:defRPr sz="1600">
-                <a:solidFill>
-                  <a:schemeClr val="tx1">
-                    <a:tint val="82000"/>
-                  </a:schemeClr>
-                </a:solidFill>
-              </a:defRPr>
-            </a:lvl8pPr>
-            <a:lvl9pPr marL="3657600" indent="0">
-              <a:buNone/>
-              <a:defRPr sz="1600">
-                <a:solidFill>
-                  <a:schemeClr val="tx1">
-                    <a:tint val="82000"/>
-                  </a:schemeClr>
-                </a:solidFill>
-              </a:defRPr>
-            </a:lvl9pPr>
-          </a:lstStyle>
-          <a:p>
-            <a:pPr lvl="0"/>
-            <a:r>
-              <a:rPr kumimoji="1" lang="ja-JP" altLang="en-US"/>
-              <a:t>マスター テキストの書式設定</a:t>
-            </a:r>
-          </a:p>
-        </p:txBody>
-      </p:sp>
-      <p:sp>
-        <p:nvSpPr>
-          <p:cNvPr id="4" name="日付プレースホルダー 3">
-            <a:extLst>
-              <a:ext uri="{FF2B5EF4-FFF2-40B4-BE49-F238E27FC236}">
-                <a16:creationId xmlns:a16="http://schemas.microsoft.com/office/drawing/2014/main" id="{A0FA825F-205D-5D0F-B1E6-5F95ABD0CB74}"/>
-              </a:ext>
-            </a:extLst>
-          </p:cNvPr>
-          <p:cNvSpPr>
-            <a:spLocks noGrp="1"/>
-          </p:cNvSpPr>
-          <p:nvPr>
-            <p:ph type="dt" sz="half" idx="10"/>
-          </p:nvPr>
-        </p:nvSpPr>
-        <p:spPr/>
-        <p:txBody>
-          <a:bodyPr/>
-          <a:lstStyle/>
           <a:p>
             <a:fld id="{898ACB73-228B-4573-B2A8-EEAE64393BA5}" type="datetimeFigureOut">
               <a:rPr kumimoji="1" lang="ja-JP" altLang="en-US" smtClean="0"/>
@@ -1238,13 +1345,7 @@
       </p:sp>
       <p:sp>
         <p:nvSpPr>
-          <p:cNvPr id="5" name="フッター プレースホルダー 4">
-            <a:extLst>
-              <a:ext uri="{FF2B5EF4-FFF2-40B4-BE49-F238E27FC236}">
-                <a16:creationId xmlns:a16="http://schemas.microsoft.com/office/drawing/2014/main" id="{588CC3C6-C37C-2408-6FD8-9B7541D09D8C}"/>
-              </a:ext>
-            </a:extLst>
-          </p:cNvPr>
+          <p:cNvPr id="5" name="Footer Placeholder 4"/>
           <p:cNvSpPr>
             <a:spLocks noGrp="1"/>
           </p:cNvSpPr>
@@ -1252,10 +1353,23 @@
             <p:ph type="ftr" sz="quarter" idx="11"/>
           </p:nvPr>
         </p:nvSpPr>
-        <p:spPr/>
+        <p:spPr>
+          <a:xfrm>
+            <a:off x="2584312" y="6453386"/>
+            <a:ext cx="7023377" cy="404614"/>
+          </a:xfrm>
+        </p:spPr>
         <p:txBody>
           <a:bodyPr/>
-          <a:lstStyle/>
+          <a:lstStyle>
+            <a:lvl1pPr algn="ctr">
+              <a:defRPr>
+                <a:solidFill>
+                  <a:schemeClr val="tx2"/>
+                </a:solidFill>
+              </a:defRPr>
+            </a:lvl1pPr>
+          </a:lstStyle>
           <a:p>
             <a:endParaRPr kumimoji="1" lang="ja-JP" altLang="en-US"/>
           </a:p>
@@ -1263,13 +1377,7 @@
       </p:sp>
       <p:sp>
         <p:nvSpPr>
-          <p:cNvPr id="6" name="スライド番号プレースホルダー 5">
-            <a:extLst>
-              <a:ext uri="{FF2B5EF4-FFF2-40B4-BE49-F238E27FC236}">
-                <a16:creationId xmlns:a16="http://schemas.microsoft.com/office/drawing/2014/main" id="{025AEDFC-EFB7-23B5-A7BC-5AA55A947FAD}"/>
-              </a:ext>
-            </a:extLst>
-          </p:cNvPr>
+          <p:cNvPr id="6" name="Slide Number Placeholder 5"/>
           <p:cNvSpPr>
             <a:spLocks noGrp="1"/>
           </p:cNvSpPr>
@@ -1277,10 +1385,23 @@
             <p:ph type="sldNum" sz="quarter" idx="12"/>
           </p:nvPr>
         </p:nvSpPr>
-        <p:spPr/>
+        <p:spPr>
+          <a:xfrm>
+            <a:off x="9830683" y="6453386"/>
+            <a:ext cx="1596292" cy="404614"/>
+          </a:xfrm>
+        </p:spPr>
         <p:txBody>
           <a:bodyPr/>
-          <a:lstStyle/>
+          <a:lstStyle>
+            <a:lvl1pPr>
+              <a:defRPr>
+                <a:solidFill>
+                  <a:schemeClr val="tx2"/>
+                </a:solidFill>
+              </a:defRPr>
+            </a:lvl1pPr>
+          </a:lstStyle>
           <a:p>
             <a:fld id="{C0230AD8-E8AE-4279-8B43-53EA3F76DDC3}" type="slidenum">
               <a:rPr kumimoji="1" lang="ja-JP" altLang="en-US" smtClean="0"/>
@@ -1290,15 +1411,71 @@
           </a:p>
         </p:txBody>
       </p:sp>
+      <p:sp>
+        <p:nvSpPr>
+          <p:cNvPr id="7" name="Freeform 6" title="Crop Mark"/>
+          <p:cNvSpPr/>
+          <p:nvPr/>
+        </p:nvSpPr>
+        <p:spPr bwMode="auto">
+          <a:xfrm>
+            <a:off x="8151962" y="1685652"/>
+            <a:ext cx="3275013" cy="4408488"/>
+          </a:xfrm>
+          <a:custGeom>
+            <a:avLst/>
+            <a:gdLst/>
+            <a:ahLst/>
+            <a:cxnLst/>
+            <a:rect l="0" t="0" r="r" b="b"/>
+            <a:pathLst>
+              <a:path w="4125" h="5554">
+                <a:moveTo>
+                  <a:pt x="3614" y="0"/>
+                </a:moveTo>
+                <a:lnTo>
+                  <a:pt x="4125" y="0"/>
+                </a:lnTo>
+                <a:lnTo>
+                  <a:pt x="4125" y="5554"/>
+                </a:lnTo>
+                <a:lnTo>
+                  <a:pt x="0" y="5554"/>
+                </a:lnTo>
+                <a:lnTo>
+                  <a:pt x="0" y="5074"/>
+                </a:lnTo>
+                <a:lnTo>
+                  <a:pt x="3614" y="5074"/>
+                </a:lnTo>
+                <a:lnTo>
+                  <a:pt x="3614" y="0"/>
+                </a:lnTo>
+                <a:close/>
+              </a:path>
+            </a:pathLst>
+          </a:custGeom>
+          <a:solidFill>
+            <a:schemeClr val="tx2"/>
+          </a:solidFill>
+          <a:ln w="0">
+            <a:noFill/>
+            <a:prstDash val="solid"/>
+            <a:round/>
+            <a:headEnd/>
+            <a:tailEnd/>
+          </a:ln>
+        </p:spPr>
+      </p:sp>
     </p:spTree>
     <p:extLst>
       <p:ext uri="{BB962C8B-B14F-4D97-AF65-F5344CB8AC3E}">
-        <p14:creationId xmlns:p14="http://schemas.microsoft.com/office/powerpoint/2010/main" val="1141034391"/>
+        <p14:creationId xmlns:p14="http://schemas.microsoft.com/office/powerpoint/2010/main" val="3205399625"/>
       </p:ext>
     </p:extLst>
   </p:cSld>
   <p:clrMapOvr>
-    <a:masterClrMapping/>
+    <a:overrideClrMapping bg1="dk1" tx1="lt1" bg2="dk2" tx2="lt2" accent1="accent1" accent2="accent2" accent3="accent3" accent4="accent4" accent5="accent5" accent6="accent6" hlink="hlink" folHlink="folHlink"/>
   </p:clrMapOvr>
 </p:sldLayout>
 </file>
@@ -1322,13 +1499,7 @@
       </p:grpSpPr>
       <p:sp>
         <p:nvSpPr>
-          <p:cNvPr id="2" name="タイトル 1">
-            <a:extLst>
-              <a:ext uri="{FF2B5EF4-FFF2-40B4-BE49-F238E27FC236}">
-                <a16:creationId xmlns:a16="http://schemas.microsoft.com/office/drawing/2014/main" id="{52D8D158-BB01-A87C-338F-F50D72299ED0}"/>
-              </a:ext>
-            </a:extLst>
-          </p:cNvPr>
+          <p:cNvPr id="2" name="Title 1"/>
           <p:cNvSpPr>
             <a:spLocks noGrp="1"/>
           </p:cNvSpPr>
@@ -1339,24 +1510,27 @@
         <p:spPr/>
         <p:txBody>
           <a:bodyPr/>
-          <a:lstStyle/>
-          <a:p>
-            <a:r>
-              <a:rPr kumimoji="1" lang="ja-JP" altLang="en-US"/>
+          <a:lstStyle>
+            <a:lvl1pPr>
+              <a:defRPr>
+                <a:solidFill>
+                  <a:schemeClr val="tx2"/>
+                </a:solidFill>
+              </a:defRPr>
+            </a:lvl1pPr>
+          </a:lstStyle>
+          <a:p>
+            <a:r>
+              <a:rPr lang="ja-JP" altLang="en-US"/>
               <a:t>マスター タイトルの書式設定</a:t>
             </a:r>
-          </a:p>
-        </p:txBody>
-      </p:sp>
-      <p:sp>
-        <p:nvSpPr>
-          <p:cNvPr id="3" name="コンテンツ プレースホルダー 2">
-            <a:extLst>
-              <a:ext uri="{FF2B5EF4-FFF2-40B4-BE49-F238E27FC236}">
-                <a16:creationId xmlns:a16="http://schemas.microsoft.com/office/drawing/2014/main" id="{196D3894-7B03-A426-BE70-65FB49810850}"/>
-              </a:ext>
-            </a:extLst>
-          </p:cNvPr>
+            <a:endParaRPr lang="en-US" dirty="0"/>
+          </a:p>
+        </p:txBody>
+      </p:sp>
+      <p:sp>
+        <p:nvSpPr>
+          <p:cNvPr id="3" name="Content Placeholder 2"/>
           <p:cNvSpPr>
             <a:spLocks noGrp="1"/>
           </p:cNvSpPr>
@@ -1366,91 +1540,122 @@
         </p:nvSpPr>
         <p:spPr>
           <a:xfrm>
-            <a:off x="838200" y="1825625"/>
-            <a:ext cx="5181600" cy="4351338"/>
+            <a:off x="1371600" y="2285999"/>
+            <a:ext cx="4447786" cy="3581401"/>
           </a:xfrm>
         </p:spPr>
         <p:txBody>
           <a:bodyPr/>
-          <a:lstStyle/>
+          <a:lstStyle>
+            <a:lvl1pPr>
+              <a:defRPr baseline="0">
+                <a:solidFill>
+                  <a:schemeClr val="tx2"/>
+                </a:solidFill>
+              </a:defRPr>
+            </a:lvl1pPr>
+            <a:lvl2pPr>
+              <a:defRPr baseline="0">
+                <a:solidFill>
+                  <a:schemeClr val="tx2"/>
+                </a:solidFill>
+              </a:defRPr>
+            </a:lvl2pPr>
+            <a:lvl3pPr>
+              <a:defRPr baseline="0">
+                <a:solidFill>
+                  <a:schemeClr val="tx2"/>
+                </a:solidFill>
+              </a:defRPr>
+            </a:lvl3pPr>
+            <a:lvl4pPr>
+              <a:defRPr baseline="0">
+                <a:solidFill>
+                  <a:schemeClr val="tx2"/>
+                </a:solidFill>
+              </a:defRPr>
+            </a:lvl4pPr>
+            <a:lvl5pPr>
+              <a:defRPr baseline="0">
+                <a:solidFill>
+                  <a:schemeClr val="tx2"/>
+                </a:solidFill>
+              </a:defRPr>
+            </a:lvl5pPr>
+          </a:lstStyle>
           <a:p>
             <a:pPr lvl="0"/>
             <a:r>
-              <a:rPr kumimoji="1" lang="ja-JP" altLang="en-US"/>
+              <a:rPr lang="ja-JP" altLang="en-US"/>
               <a:t>マスター テキストの書式設定</a:t>
             </a:r>
           </a:p>
           <a:p>
             <a:pPr lvl="1"/>
             <a:r>
-              <a:rPr kumimoji="1" lang="ja-JP" altLang="en-US"/>
+              <a:rPr lang="ja-JP" altLang="en-US"/>
               <a:t>第 </a:t>
             </a:r>
             <a:r>
-              <a:rPr kumimoji="1" lang="en-US" altLang="ja-JP"/>
+              <a:rPr lang="en-US" altLang="ja-JP"/>
               <a:t>2 </a:t>
             </a:r>
             <a:r>
-              <a:rPr kumimoji="1" lang="ja-JP" altLang="en-US"/>
+              <a:rPr lang="ja-JP" altLang="en-US"/>
               <a:t>レベル</a:t>
             </a:r>
           </a:p>
           <a:p>
             <a:pPr lvl="2"/>
             <a:r>
-              <a:rPr kumimoji="1" lang="ja-JP" altLang="en-US"/>
+              <a:rPr lang="ja-JP" altLang="en-US"/>
               <a:t>第 </a:t>
             </a:r>
             <a:r>
-              <a:rPr kumimoji="1" lang="en-US" altLang="ja-JP"/>
+              <a:rPr lang="en-US" altLang="ja-JP"/>
               <a:t>3 </a:t>
             </a:r>
             <a:r>
-              <a:rPr kumimoji="1" lang="ja-JP" altLang="en-US"/>
+              <a:rPr lang="ja-JP" altLang="en-US"/>
               <a:t>レベル</a:t>
             </a:r>
           </a:p>
           <a:p>
             <a:pPr lvl="3"/>
             <a:r>
-              <a:rPr kumimoji="1" lang="ja-JP" altLang="en-US"/>
+              <a:rPr lang="ja-JP" altLang="en-US"/>
               <a:t>第 </a:t>
             </a:r>
             <a:r>
-              <a:rPr kumimoji="1" lang="en-US" altLang="ja-JP"/>
+              <a:rPr lang="en-US" altLang="ja-JP"/>
               <a:t>4 </a:t>
             </a:r>
             <a:r>
-              <a:rPr kumimoji="1" lang="ja-JP" altLang="en-US"/>
+              <a:rPr lang="ja-JP" altLang="en-US"/>
               <a:t>レベル</a:t>
             </a:r>
           </a:p>
           <a:p>
             <a:pPr lvl="4"/>
             <a:r>
-              <a:rPr kumimoji="1" lang="ja-JP" altLang="en-US"/>
+              <a:rPr lang="ja-JP" altLang="en-US"/>
               <a:t>第 </a:t>
             </a:r>
             <a:r>
-              <a:rPr kumimoji="1" lang="en-US" altLang="ja-JP"/>
+              <a:rPr lang="en-US" altLang="ja-JP"/>
               <a:t>5 </a:t>
             </a:r>
             <a:r>
-              <a:rPr kumimoji="1" lang="ja-JP" altLang="en-US"/>
+              <a:rPr lang="ja-JP" altLang="en-US"/>
               <a:t>レベル</a:t>
             </a:r>
-          </a:p>
-        </p:txBody>
-      </p:sp>
-      <p:sp>
-        <p:nvSpPr>
-          <p:cNvPr id="4" name="コンテンツ プレースホルダー 3">
-            <a:extLst>
-              <a:ext uri="{FF2B5EF4-FFF2-40B4-BE49-F238E27FC236}">
-                <a16:creationId xmlns:a16="http://schemas.microsoft.com/office/drawing/2014/main" id="{7B0E3976-9A0E-8667-637F-0C4C59858F0E}"/>
-              </a:ext>
-            </a:extLst>
-          </p:cNvPr>
+            <a:endParaRPr lang="en-US" dirty="0"/>
+          </a:p>
+        </p:txBody>
+      </p:sp>
+      <p:sp>
+        <p:nvSpPr>
+          <p:cNvPr id="4" name="Content Placeholder 3"/>
           <p:cNvSpPr>
             <a:spLocks noGrp="1"/>
           </p:cNvSpPr>
@@ -1460,91 +1665,122 @@
         </p:nvSpPr>
         <p:spPr>
           <a:xfrm>
-            <a:off x="6172200" y="1825625"/>
-            <a:ext cx="5181600" cy="4351338"/>
+            <a:off x="6525403" y="2285999"/>
+            <a:ext cx="4447786" cy="3581401"/>
           </a:xfrm>
         </p:spPr>
         <p:txBody>
           <a:bodyPr/>
-          <a:lstStyle/>
+          <a:lstStyle>
+            <a:lvl1pPr>
+              <a:defRPr>
+                <a:solidFill>
+                  <a:schemeClr val="tx2"/>
+                </a:solidFill>
+              </a:defRPr>
+            </a:lvl1pPr>
+            <a:lvl2pPr>
+              <a:defRPr>
+                <a:solidFill>
+                  <a:schemeClr val="tx2"/>
+                </a:solidFill>
+              </a:defRPr>
+            </a:lvl2pPr>
+            <a:lvl3pPr>
+              <a:defRPr>
+                <a:solidFill>
+                  <a:schemeClr val="tx2"/>
+                </a:solidFill>
+              </a:defRPr>
+            </a:lvl3pPr>
+            <a:lvl4pPr>
+              <a:defRPr>
+                <a:solidFill>
+                  <a:schemeClr val="tx2"/>
+                </a:solidFill>
+              </a:defRPr>
+            </a:lvl4pPr>
+            <a:lvl5pPr>
+              <a:defRPr>
+                <a:solidFill>
+                  <a:schemeClr val="tx2"/>
+                </a:solidFill>
+              </a:defRPr>
+            </a:lvl5pPr>
+          </a:lstStyle>
           <a:p>
             <a:pPr lvl="0"/>
             <a:r>
-              <a:rPr kumimoji="1" lang="ja-JP" altLang="en-US"/>
+              <a:rPr lang="ja-JP" altLang="en-US"/>
               <a:t>マスター テキストの書式設定</a:t>
             </a:r>
           </a:p>
           <a:p>
             <a:pPr lvl="1"/>
             <a:r>
-              <a:rPr kumimoji="1" lang="ja-JP" altLang="en-US"/>
+              <a:rPr lang="ja-JP" altLang="en-US"/>
               <a:t>第 </a:t>
             </a:r>
             <a:r>
-              <a:rPr kumimoji="1" lang="en-US" altLang="ja-JP"/>
+              <a:rPr lang="en-US" altLang="ja-JP"/>
               <a:t>2 </a:t>
             </a:r>
             <a:r>
-              <a:rPr kumimoji="1" lang="ja-JP" altLang="en-US"/>
+              <a:rPr lang="ja-JP" altLang="en-US"/>
               <a:t>レベル</a:t>
             </a:r>
           </a:p>
           <a:p>
             <a:pPr lvl="2"/>
             <a:r>
-              <a:rPr kumimoji="1" lang="ja-JP" altLang="en-US"/>
+              <a:rPr lang="ja-JP" altLang="en-US"/>
               <a:t>第 </a:t>
             </a:r>
             <a:r>
-              <a:rPr kumimoji="1" lang="en-US" altLang="ja-JP"/>
+              <a:rPr lang="en-US" altLang="ja-JP"/>
               <a:t>3 </a:t>
             </a:r>
             <a:r>
-              <a:rPr kumimoji="1" lang="ja-JP" altLang="en-US"/>
+              <a:rPr lang="ja-JP" altLang="en-US"/>
               <a:t>レベル</a:t>
             </a:r>
           </a:p>
           <a:p>
             <a:pPr lvl="3"/>
             <a:r>
-              <a:rPr kumimoji="1" lang="ja-JP" altLang="en-US"/>
+              <a:rPr lang="ja-JP" altLang="en-US"/>
               <a:t>第 </a:t>
             </a:r>
             <a:r>
-              <a:rPr kumimoji="1" lang="en-US" altLang="ja-JP"/>
+              <a:rPr lang="en-US" altLang="ja-JP"/>
               <a:t>4 </a:t>
             </a:r>
             <a:r>
-              <a:rPr kumimoji="1" lang="ja-JP" altLang="en-US"/>
+              <a:rPr lang="ja-JP" altLang="en-US"/>
               <a:t>レベル</a:t>
             </a:r>
           </a:p>
           <a:p>
             <a:pPr lvl="4"/>
             <a:r>
-              <a:rPr kumimoji="1" lang="ja-JP" altLang="en-US"/>
+              <a:rPr lang="ja-JP" altLang="en-US"/>
               <a:t>第 </a:t>
             </a:r>
             <a:r>
-              <a:rPr kumimoji="1" lang="en-US" altLang="ja-JP"/>
+              <a:rPr lang="en-US" altLang="ja-JP"/>
               <a:t>5 </a:t>
             </a:r>
             <a:r>
-              <a:rPr kumimoji="1" lang="ja-JP" altLang="en-US"/>
+              <a:rPr lang="ja-JP" altLang="en-US"/>
               <a:t>レベル</a:t>
             </a:r>
-          </a:p>
-        </p:txBody>
-      </p:sp>
-      <p:sp>
-        <p:nvSpPr>
-          <p:cNvPr id="5" name="日付プレースホルダー 4">
-            <a:extLst>
-              <a:ext uri="{FF2B5EF4-FFF2-40B4-BE49-F238E27FC236}">
-                <a16:creationId xmlns:a16="http://schemas.microsoft.com/office/drawing/2014/main" id="{AE6F5E6C-BA99-2E1A-7854-528BAF169F81}"/>
-              </a:ext>
-            </a:extLst>
-          </p:cNvPr>
+            <a:endParaRPr lang="en-US" dirty="0"/>
+          </a:p>
+        </p:txBody>
+      </p:sp>
+      <p:sp>
+        <p:nvSpPr>
+          <p:cNvPr id="5" name="Date Placeholder 4"/>
           <p:cNvSpPr>
             <a:spLocks noGrp="1"/>
           </p:cNvSpPr>
@@ -1567,13 +1803,7 @@
       </p:sp>
       <p:sp>
         <p:nvSpPr>
-          <p:cNvPr id="6" name="フッター プレースホルダー 5">
-            <a:extLst>
-              <a:ext uri="{FF2B5EF4-FFF2-40B4-BE49-F238E27FC236}">
-                <a16:creationId xmlns:a16="http://schemas.microsoft.com/office/drawing/2014/main" id="{040E3DBB-1A83-2F81-2D58-B480ED76018D}"/>
-              </a:ext>
-            </a:extLst>
-          </p:cNvPr>
+          <p:cNvPr id="6" name="Footer Placeholder 5"/>
           <p:cNvSpPr>
             <a:spLocks noGrp="1"/>
           </p:cNvSpPr>
@@ -1592,13 +1822,7 @@
       </p:sp>
       <p:sp>
         <p:nvSpPr>
-          <p:cNvPr id="7" name="スライド番号プレースホルダー 6">
-            <a:extLst>
-              <a:ext uri="{FF2B5EF4-FFF2-40B4-BE49-F238E27FC236}">
-                <a16:creationId xmlns:a16="http://schemas.microsoft.com/office/drawing/2014/main" id="{27409F19-0CDA-CEC0-8188-6933CD90332E}"/>
-              </a:ext>
-            </a:extLst>
-          </p:cNvPr>
+          <p:cNvPr id="7" name="Slide Number Placeholder 6"/>
           <p:cNvSpPr>
             <a:spLocks noGrp="1"/>
           </p:cNvSpPr>
@@ -1622,7 +1846,7 @@
     </p:spTree>
     <p:extLst>
       <p:ext uri="{BB962C8B-B14F-4D97-AF65-F5344CB8AC3E}">
-        <p14:creationId xmlns:p14="http://schemas.microsoft.com/office/powerpoint/2010/main" val="2972564427"/>
+        <p14:creationId xmlns:p14="http://schemas.microsoft.com/office/powerpoint/2010/main" val="1912151319"/>
       </p:ext>
     </p:extLst>
   </p:cSld>
@@ -1651,13 +1875,7 @@
       </p:grpSpPr>
       <p:sp>
         <p:nvSpPr>
-          <p:cNvPr id="2" name="タイトル 1">
-            <a:extLst>
-              <a:ext uri="{FF2B5EF4-FFF2-40B4-BE49-F238E27FC236}">
-                <a16:creationId xmlns:a16="http://schemas.microsoft.com/office/drawing/2014/main" id="{B87C590B-A37E-C9FB-8578-2E80B78C3A20}"/>
-              </a:ext>
-            </a:extLst>
-          </p:cNvPr>
+          <p:cNvPr id="2" name="Title 1"/>
           <p:cNvSpPr>
             <a:spLocks noGrp="1"/>
           </p:cNvSpPr>
@@ -1667,30 +1885,33 @@
         </p:nvSpPr>
         <p:spPr>
           <a:xfrm>
-            <a:off x="839788" y="365125"/>
-            <a:ext cx="10515600" cy="1325563"/>
+            <a:off x="1371600" y="685800"/>
+            <a:ext cx="9601200" cy="1485900"/>
           </a:xfrm>
         </p:spPr>
         <p:txBody>
           <a:bodyPr/>
-          <a:lstStyle/>
-          <a:p>
-            <a:r>
-              <a:rPr kumimoji="1" lang="ja-JP" altLang="en-US"/>
+          <a:lstStyle>
+            <a:lvl1pPr>
+              <a:defRPr>
+                <a:solidFill>
+                  <a:schemeClr val="tx2"/>
+                </a:solidFill>
+              </a:defRPr>
+            </a:lvl1pPr>
+          </a:lstStyle>
+          <a:p>
+            <a:r>
+              <a:rPr lang="ja-JP" altLang="en-US"/>
               <a:t>マスター タイトルの書式設定</a:t>
             </a:r>
-          </a:p>
-        </p:txBody>
-      </p:sp>
-      <p:sp>
-        <p:nvSpPr>
-          <p:cNvPr id="3" name="テキスト プレースホルダー 2">
-            <a:extLst>
-              <a:ext uri="{FF2B5EF4-FFF2-40B4-BE49-F238E27FC236}">
-                <a16:creationId xmlns:a16="http://schemas.microsoft.com/office/drawing/2014/main" id="{D12335B3-8454-DA73-42DB-5DAF5D273746}"/>
-              </a:ext>
-            </a:extLst>
-          </p:cNvPr>
+            <a:endParaRPr lang="en-US" dirty="0"/>
+          </a:p>
+        </p:txBody>
+      </p:sp>
+      <p:sp>
+        <p:nvSpPr>
+          <p:cNvPr id="3" name="Text Placeholder 2"/>
           <p:cNvSpPr>
             <a:spLocks noGrp="1"/>
           </p:cNvSpPr>
@@ -1700,16 +1921,31 @@
         </p:nvSpPr>
         <p:spPr>
           <a:xfrm>
-            <a:off x="839788" y="1681163"/>
-            <a:ext cx="5157787" cy="823912"/>
+            <a:off x="1371600" y="2340864"/>
+            <a:ext cx="4443984" cy="823912"/>
           </a:xfrm>
         </p:spPr>
         <p:txBody>
-          <a:bodyPr anchor="b"/>
+          <a:bodyPr anchor="b">
+            <a:noAutofit/>
+          </a:bodyPr>
           <a:lstStyle>
             <a:lvl1pPr marL="0" indent="0">
-              <a:buNone/>
-              <a:defRPr sz="2400" b="1"/>
+              <a:lnSpc>
+                <a:spcPct val="84000"/>
+              </a:lnSpc>
+              <a:spcBef>
+                <a:spcPts val="0"/>
+              </a:spcBef>
+              <a:spcAft>
+                <a:spcPts val="0"/>
+              </a:spcAft>
+              <a:buNone/>
+              <a:defRPr sz="3000" b="0" baseline="0">
+                <a:solidFill>
+                  <a:schemeClr val="tx2"/>
+                </a:solidFill>
+              </a:defRPr>
             </a:lvl1pPr>
             <a:lvl2pPr marL="457200" indent="0">
               <a:buNone/>
@@ -1747,7 +1983,7 @@
           <a:p>
             <a:pPr lvl="0"/>
             <a:r>
-              <a:rPr kumimoji="1" lang="ja-JP" altLang="en-US"/>
+              <a:rPr lang="ja-JP" altLang="en-US"/>
               <a:t>マスター テキストの書式設定</a:t>
             </a:r>
           </a:p>
@@ -1755,13 +1991,7 @@
       </p:sp>
       <p:sp>
         <p:nvSpPr>
-          <p:cNvPr id="4" name="コンテンツ プレースホルダー 3">
-            <a:extLst>
-              <a:ext uri="{FF2B5EF4-FFF2-40B4-BE49-F238E27FC236}">
-                <a16:creationId xmlns:a16="http://schemas.microsoft.com/office/drawing/2014/main" id="{D9331C97-3156-5685-767D-217B521D417B}"/>
-              </a:ext>
-            </a:extLst>
-          </p:cNvPr>
+          <p:cNvPr id="4" name="Content Placeholder 3"/>
           <p:cNvSpPr>
             <a:spLocks noGrp="1"/>
           </p:cNvSpPr>
@@ -1771,91 +2001,122 @@
         </p:nvSpPr>
         <p:spPr>
           <a:xfrm>
-            <a:off x="839788" y="2505075"/>
-            <a:ext cx="5157787" cy="3684588"/>
+            <a:off x="1371600" y="3305207"/>
+            <a:ext cx="4443984" cy="2562193"/>
           </a:xfrm>
         </p:spPr>
         <p:txBody>
           <a:bodyPr/>
-          <a:lstStyle/>
+          <a:lstStyle>
+            <a:lvl1pPr>
+              <a:defRPr baseline="0">
+                <a:solidFill>
+                  <a:schemeClr val="tx2"/>
+                </a:solidFill>
+              </a:defRPr>
+            </a:lvl1pPr>
+            <a:lvl2pPr>
+              <a:defRPr baseline="0">
+                <a:solidFill>
+                  <a:schemeClr val="tx2"/>
+                </a:solidFill>
+              </a:defRPr>
+            </a:lvl2pPr>
+            <a:lvl3pPr>
+              <a:defRPr baseline="0">
+                <a:solidFill>
+                  <a:schemeClr val="tx2"/>
+                </a:solidFill>
+              </a:defRPr>
+            </a:lvl3pPr>
+            <a:lvl4pPr>
+              <a:defRPr baseline="0">
+                <a:solidFill>
+                  <a:schemeClr val="tx2"/>
+                </a:solidFill>
+              </a:defRPr>
+            </a:lvl4pPr>
+            <a:lvl5pPr>
+              <a:defRPr baseline="0">
+                <a:solidFill>
+                  <a:schemeClr val="tx2"/>
+                </a:solidFill>
+              </a:defRPr>
+            </a:lvl5pPr>
+          </a:lstStyle>
           <a:p>
             <a:pPr lvl="0"/>
             <a:r>
-              <a:rPr kumimoji="1" lang="ja-JP" altLang="en-US"/>
+              <a:rPr lang="ja-JP" altLang="en-US"/>
               <a:t>マスター テキストの書式設定</a:t>
             </a:r>
           </a:p>
           <a:p>
             <a:pPr lvl="1"/>
             <a:r>
-              <a:rPr kumimoji="1" lang="ja-JP" altLang="en-US"/>
+              <a:rPr lang="ja-JP" altLang="en-US"/>
               <a:t>第 </a:t>
             </a:r>
             <a:r>
-              <a:rPr kumimoji="1" lang="en-US" altLang="ja-JP"/>
+              <a:rPr lang="en-US" altLang="ja-JP"/>
               <a:t>2 </a:t>
             </a:r>
             <a:r>
-              <a:rPr kumimoji="1" lang="ja-JP" altLang="en-US"/>
+              <a:rPr lang="ja-JP" altLang="en-US"/>
               <a:t>レベル</a:t>
             </a:r>
           </a:p>
           <a:p>
             <a:pPr lvl="2"/>
             <a:r>
-              <a:rPr kumimoji="1" lang="ja-JP" altLang="en-US"/>
+              <a:rPr lang="ja-JP" altLang="en-US"/>
               <a:t>第 </a:t>
             </a:r>
             <a:r>
-              <a:rPr kumimoji="1" lang="en-US" altLang="ja-JP"/>
+              <a:rPr lang="en-US" altLang="ja-JP"/>
               <a:t>3 </a:t>
             </a:r>
             <a:r>
-              <a:rPr kumimoji="1" lang="ja-JP" altLang="en-US"/>
+              <a:rPr lang="ja-JP" altLang="en-US"/>
               <a:t>レベル</a:t>
             </a:r>
           </a:p>
           <a:p>
             <a:pPr lvl="3"/>
             <a:r>
-              <a:rPr kumimoji="1" lang="ja-JP" altLang="en-US"/>
+              <a:rPr lang="ja-JP" altLang="en-US"/>
               <a:t>第 </a:t>
             </a:r>
             <a:r>
-              <a:rPr kumimoji="1" lang="en-US" altLang="ja-JP"/>
+              <a:rPr lang="en-US" altLang="ja-JP"/>
               <a:t>4 </a:t>
             </a:r>
             <a:r>
-              <a:rPr kumimoji="1" lang="ja-JP" altLang="en-US"/>
+              <a:rPr lang="ja-JP" altLang="en-US"/>
               <a:t>レベル</a:t>
             </a:r>
           </a:p>
           <a:p>
             <a:pPr lvl="4"/>
             <a:r>
-              <a:rPr kumimoji="1" lang="ja-JP" altLang="en-US"/>
+              <a:rPr lang="ja-JP" altLang="en-US"/>
               <a:t>第 </a:t>
             </a:r>
             <a:r>
-              <a:rPr kumimoji="1" lang="en-US" altLang="ja-JP"/>
+              <a:rPr lang="en-US" altLang="ja-JP"/>
               <a:t>5 </a:t>
             </a:r>
             <a:r>
-              <a:rPr kumimoji="1" lang="ja-JP" altLang="en-US"/>
+              <a:rPr lang="ja-JP" altLang="en-US"/>
               <a:t>レベル</a:t>
             </a:r>
-          </a:p>
-        </p:txBody>
-      </p:sp>
-      <p:sp>
-        <p:nvSpPr>
-          <p:cNvPr id="5" name="テキスト プレースホルダー 4">
-            <a:extLst>
-              <a:ext uri="{FF2B5EF4-FFF2-40B4-BE49-F238E27FC236}">
-                <a16:creationId xmlns:a16="http://schemas.microsoft.com/office/drawing/2014/main" id="{A621F0D7-65AC-41B4-B1EB-4C0137C85D23}"/>
-              </a:ext>
-            </a:extLst>
-          </p:cNvPr>
+            <a:endParaRPr lang="en-US" dirty="0"/>
+          </a:p>
+        </p:txBody>
+      </p:sp>
+      <p:sp>
+        <p:nvSpPr>
+          <p:cNvPr id="5" name="Text Placeholder 4"/>
           <p:cNvSpPr>
             <a:spLocks noGrp="1"/>
           </p:cNvSpPr>
@@ -1865,16 +2126,31 @@
         </p:nvSpPr>
         <p:spPr>
           <a:xfrm>
-            <a:off x="6172200" y="1681163"/>
-            <a:ext cx="5183188" cy="823912"/>
+            <a:off x="6525014" y="2340864"/>
+            <a:ext cx="4443984" cy="823912"/>
           </a:xfrm>
         </p:spPr>
         <p:txBody>
-          <a:bodyPr anchor="b"/>
+          <a:bodyPr anchor="b">
+            <a:noAutofit/>
+          </a:bodyPr>
           <a:lstStyle>
             <a:lvl1pPr marL="0" indent="0">
-              <a:buNone/>
-              <a:defRPr sz="2400" b="1"/>
+              <a:lnSpc>
+                <a:spcPct val="84000"/>
+              </a:lnSpc>
+              <a:spcBef>
+                <a:spcPts val="0"/>
+              </a:spcBef>
+              <a:spcAft>
+                <a:spcPts val="0"/>
+              </a:spcAft>
+              <a:buNone/>
+              <a:defRPr sz="3000" b="0" baseline="0">
+                <a:solidFill>
+                  <a:schemeClr val="tx2"/>
+                </a:solidFill>
+              </a:defRPr>
             </a:lvl1pPr>
             <a:lvl2pPr marL="457200" indent="0">
               <a:buNone/>
@@ -1912,7 +2188,7 @@
           <a:p>
             <a:pPr lvl="0"/>
             <a:r>
-              <a:rPr kumimoji="1" lang="ja-JP" altLang="en-US"/>
+              <a:rPr lang="ja-JP" altLang="en-US"/>
               <a:t>マスター テキストの書式設定</a:t>
             </a:r>
           </a:p>
@@ -1920,13 +2196,7 @@
       </p:sp>
       <p:sp>
         <p:nvSpPr>
-          <p:cNvPr id="6" name="コンテンツ プレースホルダー 5">
-            <a:extLst>
-              <a:ext uri="{FF2B5EF4-FFF2-40B4-BE49-F238E27FC236}">
-                <a16:creationId xmlns:a16="http://schemas.microsoft.com/office/drawing/2014/main" id="{AD6E72AA-DB1C-022B-4247-9A929054D9EA}"/>
-              </a:ext>
-            </a:extLst>
-          </p:cNvPr>
+          <p:cNvPr id="6" name="Content Placeholder 5"/>
           <p:cNvSpPr>
             <a:spLocks noGrp="1"/>
           </p:cNvSpPr>
@@ -1936,91 +2206,122 @@
         </p:nvSpPr>
         <p:spPr>
           <a:xfrm>
-            <a:off x="6172200" y="2505075"/>
-            <a:ext cx="5183188" cy="3684588"/>
+            <a:off x="6525014" y="3305207"/>
+            <a:ext cx="4443984" cy="2562193"/>
           </a:xfrm>
         </p:spPr>
         <p:txBody>
           <a:bodyPr/>
-          <a:lstStyle/>
+          <a:lstStyle>
+            <a:lvl1pPr>
+              <a:defRPr baseline="0">
+                <a:solidFill>
+                  <a:schemeClr val="tx2"/>
+                </a:solidFill>
+              </a:defRPr>
+            </a:lvl1pPr>
+            <a:lvl2pPr>
+              <a:defRPr baseline="0">
+                <a:solidFill>
+                  <a:schemeClr val="tx2"/>
+                </a:solidFill>
+              </a:defRPr>
+            </a:lvl2pPr>
+            <a:lvl3pPr>
+              <a:defRPr baseline="0">
+                <a:solidFill>
+                  <a:schemeClr val="tx2"/>
+                </a:solidFill>
+              </a:defRPr>
+            </a:lvl3pPr>
+            <a:lvl4pPr>
+              <a:defRPr baseline="0">
+                <a:solidFill>
+                  <a:schemeClr val="tx2"/>
+                </a:solidFill>
+              </a:defRPr>
+            </a:lvl4pPr>
+            <a:lvl5pPr>
+              <a:defRPr baseline="0">
+                <a:solidFill>
+                  <a:schemeClr val="tx2"/>
+                </a:solidFill>
+              </a:defRPr>
+            </a:lvl5pPr>
+          </a:lstStyle>
           <a:p>
             <a:pPr lvl="0"/>
             <a:r>
-              <a:rPr kumimoji="1" lang="ja-JP" altLang="en-US"/>
+              <a:rPr lang="ja-JP" altLang="en-US"/>
               <a:t>マスター テキストの書式設定</a:t>
             </a:r>
           </a:p>
           <a:p>
             <a:pPr lvl="1"/>
             <a:r>
-              <a:rPr kumimoji="1" lang="ja-JP" altLang="en-US"/>
+              <a:rPr lang="ja-JP" altLang="en-US"/>
               <a:t>第 </a:t>
             </a:r>
             <a:r>
-              <a:rPr kumimoji="1" lang="en-US" altLang="ja-JP"/>
+              <a:rPr lang="en-US" altLang="ja-JP"/>
               <a:t>2 </a:t>
             </a:r>
             <a:r>
-              <a:rPr kumimoji="1" lang="ja-JP" altLang="en-US"/>
+              <a:rPr lang="ja-JP" altLang="en-US"/>
               <a:t>レベル</a:t>
             </a:r>
           </a:p>
           <a:p>
             <a:pPr lvl="2"/>
             <a:r>
-              <a:rPr kumimoji="1" lang="ja-JP" altLang="en-US"/>
+              <a:rPr lang="ja-JP" altLang="en-US"/>
               <a:t>第 </a:t>
             </a:r>
             <a:r>
-              <a:rPr kumimoji="1" lang="en-US" altLang="ja-JP"/>
+              <a:rPr lang="en-US" altLang="ja-JP"/>
               <a:t>3 </a:t>
             </a:r>
             <a:r>
-              <a:rPr kumimoji="1" lang="ja-JP" altLang="en-US"/>
+              <a:rPr lang="ja-JP" altLang="en-US"/>
               <a:t>レベル</a:t>
             </a:r>
           </a:p>
           <a:p>
             <a:pPr lvl="3"/>
             <a:r>
-              <a:rPr kumimoji="1" lang="ja-JP" altLang="en-US"/>
+              <a:rPr lang="ja-JP" altLang="en-US"/>
               <a:t>第 </a:t>
             </a:r>
             <a:r>
-              <a:rPr kumimoji="1" lang="en-US" altLang="ja-JP"/>
+              <a:rPr lang="en-US" altLang="ja-JP"/>
               <a:t>4 </a:t>
             </a:r>
             <a:r>
-              <a:rPr kumimoji="1" lang="ja-JP" altLang="en-US"/>
+              <a:rPr lang="ja-JP" altLang="en-US"/>
               <a:t>レベル</a:t>
             </a:r>
           </a:p>
           <a:p>
             <a:pPr lvl="4"/>
             <a:r>
-              <a:rPr kumimoji="1" lang="ja-JP" altLang="en-US"/>
+              <a:rPr lang="ja-JP" altLang="en-US"/>
               <a:t>第 </a:t>
             </a:r>
             <a:r>
-              <a:rPr kumimoji="1" lang="en-US" altLang="ja-JP"/>
+              <a:rPr lang="en-US" altLang="ja-JP"/>
               <a:t>5 </a:t>
             </a:r>
             <a:r>
-              <a:rPr kumimoji="1" lang="ja-JP" altLang="en-US"/>
+              <a:rPr lang="ja-JP" altLang="en-US"/>
               <a:t>レベル</a:t>
             </a:r>
-          </a:p>
-        </p:txBody>
-      </p:sp>
-      <p:sp>
-        <p:nvSpPr>
-          <p:cNvPr id="7" name="日付プレースホルダー 6">
-            <a:extLst>
-              <a:ext uri="{FF2B5EF4-FFF2-40B4-BE49-F238E27FC236}">
-                <a16:creationId xmlns:a16="http://schemas.microsoft.com/office/drawing/2014/main" id="{F8751178-EDC1-7A8C-C68A-149CBF1AF10D}"/>
-              </a:ext>
-            </a:extLst>
-          </p:cNvPr>
+            <a:endParaRPr lang="en-US" dirty="0"/>
+          </a:p>
+        </p:txBody>
+      </p:sp>
+      <p:sp>
+        <p:nvSpPr>
+          <p:cNvPr id="7" name="Date Placeholder 6"/>
           <p:cNvSpPr>
             <a:spLocks noGrp="1"/>
           </p:cNvSpPr>
@@ -2043,13 +2344,7 @@
       </p:sp>
       <p:sp>
         <p:nvSpPr>
-          <p:cNvPr id="8" name="フッター プレースホルダー 7">
-            <a:extLst>
-              <a:ext uri="{FF2B5EF4-FFF2-40B4-BE49-F238E27FC236}">
-                <a16:creationId xmlns:a16="http://schemas.microsoft.com/office/drawing/2014/main" id="{135974F3-6B04-F099-0CE0-115528E3B026}"/>
-              </a:ext>
-            </a:extLst>
-          </p:cNvPr>
+          <p:cNvPr id="8" name="Footer Placeholder 7"/>
           <p:cNvSpPr>
             <a:spLocks noGrp="1"/>
           </p:cNvSpPr>
@@ -2068,13 +2363,7 @@
       </p:sp>
       <p:sp>
         <p:nvSpPr>
-          <p:cNvPr id="9" name="スライド番号プレースホルダー 8">
-            <a:extLst>
-              <a:ext uri="{FF2B5EF4-FFF2-40B4-BE49-F238E27FC236}">
-                <a16:creationId xmlns:a16="http://schemas.microsoft.com/office/drawing/2014/main" id="{13BD6FBC-42A4-D326-7545-E60432494818}"/>
-              </a:ext>
-            </a:extLst>
-          </p:cNvPr>
+          <p:cNvPr id="9" name="Slide Number Placeholder 8"/>
           <p:cNvSpPr>
             <a:spLocks noGrp="1"/>
           </p:cNvSpPr>
@@ -2098,7 +2387,7 @@
     </p:spTree>
     <p:extLst>
       <p:ext uri="{BB962C8B-B14F-4D97-AF65-F5344CB8AC3E}">
-        <p14:creationId xmlns:p14="http://schemas.microsoft.com/office/powerpoint/2010/main" val="1869951724"/>
+        <p14:creationId xmlns:p14="http://schemas.microsoft.com/office/powerpoint/2010/main" val="1439602917"/>
       </p:ext>
     </p:extLst>
   </p:cSld>
@@ -2127,13 +2416,7 @@
       </p:grpSpPr>
       <p:sp>
         <p:nvSpPr>
-          <p:cNvPr id="2" name="タイトル 1">
-            <a:extLst>
-              <a:ext uri="{FF2B5EF4-FFF2-40B4-BE49-F238E27FC236}">
-                <a16:creationId xmlns:a16="http://schemas.microsoft.com/office/drawing/2014/main" id="{CAF221C2-6D89-EF8C-6676-5452F4B51CC1}"/>
-              </a:ext>
-            </a:extLst>
-          </p:cNvPr>
+          <p:cNvPr id="2" name="Title 1"/>
           <p:cNvSpPr>
             <a:spLocks noGrp="1"/>
           </p:cNvSpPr>
@@ -2147,21 +2430,16 @@
           <a:lstStyle/>
           <a:p>
             <a:r>
-              <a:rPr kumimoji="1" lang="ja-JP" altLang="en-US"/>
+              <a:rPr lang="ja-JP" altLang="en-US"/>
               <a:t>マスター タイトルの書式設定</a:t>
             </a:r>
-          </a:p>
-        </p:txBody>
-      </p:sp>
-      <p:sp>
-        <p:nvSpPr>
-          <p:cNvPr id="3" name="日付プレースホルダー 2">
-            <a:extLst>
-              <a:ext uri="{FF2B5EF4-FFF2-40B4-BE49-F238E27FC236}">
-                <a16:creationId xmlns:a16="http://schemas.microsoft.com/office/drawing/2014/main" id="{FA9368CA-DF67-E972-8864-95A809C4C13B}"/>
-              </a:ext>
-            </a:extLst>
-          </p:cNvPr>
+            <a:endParaRPr lang="en-US" dirty="0"/>
+          </a:p>
+        </p:txBody>
+      </p:sp>
+      <p:sp>
+        <p:nvSpPr>
+          <p:cNvPr id="3" name="Date Placeholder 2"/>
           <p:cNvSpPr>
             <a:spLocks noGrp="1"/>
           </p:cNvSpPr>
@@ -2184,13 +2462,7 @@
       </p:sp>
       <p:sp>
         <p:nvSpPr>
-          <p:cNvPr id="4" name="フッター プレースホルダー 3">
-            <a:extLst>
-              <a:ext uri="{FF2B5EF4-FFF2-40B4-BE49-F238E27FC236}">
-                <a16:creationId xmlns:a16="http://schemas.microsoft.com/office/drawing/2014/main" id="{91F281FE-435E-3BB0-DB52-1727A5E3D3F8}"/>
-              </a:ext>
-            </a:extLst>
-          </p:cNvPr>
+          <p:cNvPr id="4" name="Footer Placeholder 3"/>
           <p:cNvSpPr>
             <a:spLocks noGrp="1"/>
           </p:cNvSpPr>
@@ -2209,13 +2481,7 @@
       </p:sp>
       <p:sp>
         <p:nvSpPr>
-          <p:cNvPr id="5" name="スライド番号プレースホルダー 4">
-            <a:extLst>
-              <a:ext uri="{FF2B5EF4-FFF2-40B4-BE49-F238E27FC236}">
-                <a16:creationId xmlns:a16="http://schemas.microsoft.com/office/drawing/2014/main" id="{E6B45FD7-ED92-167C-7172-43133E3E92ED}"/>
-              </a:ext>
-            </a:extLst>
-          </p:cNvPr>
+          <p:cNvPr id="5" name="Slide Number Placeholder 4"/>
           <p:cNvSpPr>
             <a:spLocks noGrp="1"/>
           </p:cNvSpPr>
@@ -2239,7 +2505,7 @@
     </p:spTree>
     <p:extLst>
       <p:ext uri="{BB962C8B-B14F-4D97-AF65-F5344CB8AC3E}">
-        <p14:creationId xmlns:p14="http://schemas.microsoft.com/office/powerpoint/2010/main" val="125719944"/>
+        <p14:creationId xmlns:p14="http://schemas.microsoft.com/office/powerpoint/2010/main" val="2319099476"/>
       </p:ext>
     </p:extLst>
   </p:cSld>
@@ -2268,13 +2534,7 @@
       </p:grpSpPr>
       <p:sp>
         <p:nvSpPr>
-          <p:cNvPr id="2" name="日付プレースホルダー 1">
-            <a:extLst>
-              <a:ext uri="{FF2B5EF4-FFF2-40B4-BE49-F238E27FC236}">
-                <a16:creationId xmlns:a16="http://schemas.microsoft.com/office/drawing/2014/main" id="{3526784A-1D0C-9D09-3A83-4CEF31B320F9}"/>
-              </a:ext>
-            </a:extLst>
-          </p:cNvPr>
+          <p:cNvPr id="2" name="Date Placeholder 1"/>
           <p:cNvSpPr>
             <a:spLocks noGrp="1"/>
           </p:cNvSpPr>
@@ -2297,13 +2557,7 @@
       </p:sp>
       <p:sp>
         <p:nvSpPr>
-          <p:cNvPr id="3" name="フッター プレースホルダー 2">
-            <a:extLst>
-              <a:ext uri="{FF2B5EF4-FFF2-40B4-BE49-F238E27FC236}">
-                <a16:creationId xmlns:a16="http://schemas.microsoft.com/office/drawing/2014/main" id="{C31327FE-425C-EBEC-09FC-D5B3B4FFDA25}"/>
-              </a:ext>
-            </a:extLst>
-          </p:cNvPr>
+          <p:cNvPr id="3" name="Footer Placeholder 2"/>
           <p:cNvSpPr>
             <a:spLocks noGrp="1"/>
           </p:cNvSpPr>
@@ -2322,13 +2576,7 @@
       </p:sp>
       <p:sp>
         <p:nvSpPr>
-          <p:cNvPr id="4" name="スライド番号プレースホルダー 3">
-            <a:extLst>
-              <a:ext uri="{FF2B5EF4-FFF2-40B4-BE49-F238E27FC236}">
-                <a16:creationId xmlns:a16="http://schemas.microsoft.com/office/drawing/2014/main" id="{7679FAD4-31B0-207B-1C99-2D1E4D6F219A}"/>
-              </a:ext>
-            </a:extLst>
-          </p:cNvPr>
+          <p:cNvPr id="4" name="Slide Number Placeholder 3"/>
           <p:cNvSpPr>
             <a:spLocks noGrp="1"/>
           </p:cNvSpPr>
@@ -2352,7 +2600,7 @@
     </p:spTree>
     <p:extLst>
       <p:ext uri="{BB962C8B-B14F-4D97-AF65-F5344CB8AC3E}">
-        <p14:creationId xmlns:p14="http://schemas.microsoft.com/office/powerpoint/2010/main" val="3650101301"/>
+        <p14:creationId xmlns:p14="http://schemas.microsoft.com/office/powerpoint/2010/main" val="3153045813"/>
       </p:ext>
     </p:extLst>
   </p:cSld>
@@ -2363,7 +2611,7 @@
 </file>
 
 <file path=ppt/slideLayouts/slideLayout8.xml><?xml version="1.0" encoding="utf-8"?>
-<p:sldLayout xmlns:a="http://schemas.openxmlformats.org/drawingml/2006/main" xmlns:r="http://schemas.openxmlformats.org/officeDocument/2006/relationships" xmlns:p="http://schemas.openxmlformats.org/presentationml/2006/main" type="objTx" preserve="1">
+<p:sldLayout xmlns:a="http://schemas.openxmlformats.org/drawingml/2006/main" xmlns:r="http://schemas.openxmlformats.org/officeDocument/2006/relationships" xmlns:p="http://schemas.openxmlformats.org/presentationml/2006/main" showMasterSp="0" type="objTx" preserve="1">
   <p:cSld name="タイトル付きのコンテンツ">
     <p:spTree>
       <p:nvGrpSpPr>
@@ -2381,13 +2629,45 @@
       </p:grpSpPr>
       <p:sp>
         <p:nvSpPr>
-          <p:cNvPr id="2" name="タイトル 1">
-            <a:extLst>
-              <a:ext uri="{FF2B5EF4-FFF2-40B4-BE49-F238E27FC236}">
-                <a16:creationId xmlns:a16="http://schemas.microsoft.com/office/drawing/2014/main" id="{15D2B958-331D-35DC-54AE-F410ADF628F5}"/>
-              </a:ext>
-            </a:extLst>
-          </p:cNvPr>
+          <p:cNvPr id="8" name="Rectangle 7" title="Background Shape"/>
+          <p:cNvSpPr/>
+          <p:nvPr/>
+        </p:nvSpPr>
+        <p:spPr>
+          <a:xfrm>
+            <a:off x="0" y="376"/>
+            <a:ext cx="5303520" cy="6857624"/>
+          </a:xfrm>
+          <a:prstGeom prst="rect">
+            <a:avLst/>
+          </a:prstGeom>
+          <a:solidFill>
+            <a:schemeClr val="accent1"/>
+          </a:solidFill>
+          <a:ln>
+            <a:noFill/>
+          </a:ln>
+        </p:spPr>
+        <p:style>
+          <a:lnRef idx="2">
+            <a:schemeClr val="accent1">
+              <a:shade val="50000"/>
+            </a:schemeClr>
+          </a:lnRef>
+          <a:fillRef idx="1">
+            <a:schemeClr val="accent1"/>
+          </a:fillRef>
+          <a:effectRef idx="0">
+            <a:schemeClr val="accent1"/>
+          </a:effectRef>
+          <a:fontRef idx="minor">
+            <a:schemeClr val="lt1"/>
+          </a:fontRef>
+        </p:style>
+      </p:sp>
+      <p:sp>
+        <p:nvSpPr>
+          <p:cNvPr id="2" name="Title 1"/>
           <p:cNvSpPr>
             <a:spLocks noGrp="1"/>
           </p:cNvSpPr>
@@ -2397,34 +2677,38 @@
         </p:nvSpPr>
         <p:spPr>
           <a:xfrm>
-            <a:off x="839788" y="457200"/>
-            <a:ext cx="3932237" cy="1600200"/>
+            <a:off x="723900" y="685800"/>
+            <a:ext cx="3855720" cy="2157884"/>
           </a:xfrm>
         </p:spPr>
         <p:txBody>
-          <a:bodyPr anchor="b"/>
+          <a:bodyPr anchor="t">
+            <a:noAutofit/>
+          </a:bodyPr>
           <a:lstStyle>
             <a:lvl1pPr>
-              <a:defRPr sz="3200"/>
+              <a:lnSpc>
+                <a:spcPct val="84000"/>
+              </a:lnSpc>
+              <a:defRPr sz="4800" baseline="0">
+                <a:solidFill>
+                  <a:schemeClr val="tx2"/>
+                </a:solidFill>
+              </a:defRPr>
             </a:lvl1pPr>
           </a:lstStyle>
           <a:p>
             <a:r>
-              <a:rPr kumimoji="1" lang="ja-JP" altLang="en-US"/>
+              <a:rPr lang="ja-JP" altLang="en-US"/>
               <a:t>マスター タイトルの書式設定</a:t>
             </a:r>
-          </a:p>
-        </p:txBody>
-      </p:sp>
-      <p:sp>
-        <p:nvSpPr>
-          <p:cNvPr id="3" name="コンテンツ プレースホルダー 2">
-            <a:extLst>
-              <a:ext uri="{FF2B5EF4-FFF2-40B4-BE49-F238E27FC236}">
-                <a16:creationId xmlns:a16="http://schemas.microsoft.com/office/drawing/2014/main" id="{920C3A5F-009A-C787-FC40-FB60F670A458}"/>
-              </a:ext>
-            </a:extLst>
-          </p:cNvPr>
+            <a:endParaRPr lang="en-US" dirty="0"/>
+          </a:p>
+        </p:txBody>
+      </p:sp>
+      <p:sp>
+        <p:nvSpPr>
+          <p:cNvPr id="3" name="Content Placeholder 2"/>
           <p:cNvSpPr>
             <a:spLocks noGrp="1"/>
           </p:cNvSpPr>
@@ -2434,119 +2718,114 @@
         </p:nvSpPr>
         <p:spPr>
           <a:xfrm>
-            <a:off x="5183188" y="987425"/>
-            <a:ext cx="6172200" cy="4873625"/>
+            <a:off x="6256020" y="685801"/>
+            <a:ext cx="5212080" cy="5175250"/>
           </a:xfrm>
         </p:spPr>
         <p:txBody>
           <a:bodyPr/>
           <a:lstStyle>
             <a:lvl1pPr>
-              <a:defRPr sz="3200"/>
+              <a:defRPr sz="2000"/>
             </a:lvl1pPr>
             <a:lvl2pPr>
-              <a:defRPr sz="2800"/>
+              <a:defRPr sz="2000"/>
             </a:lvl2pPr>
             <a:lvl3pPr>
-              <a:defRPr sz="2400"/>
+              <a:defRPr sz="1800"/>
             </a:lvl3pPr>
             <a:lvl4pPr>
-              <a:defRPr sz="2000"/>
+              <a:defRPr sz="1800"/>
             </a:lvl4pPr>
             <a:lvl5pPr>
-              <a:defRPr sz="2000"/>
+              <a:defRPr sz="1600"/>
             </a:lvl5pPr>
             <a:lvl6pPr>
-              <a:defRPr sz="2000"/>
+              <a:defRPr sz="1600"/>
             </a:lvl6pPr>
             <a:lvl7pPr>
-              <a:defRPr sz="2000"/>
+              <a:defRPr sz="1600"/>
             </a:lvl7pPr>
             <a:lvl8pPr>
-              <a:defRPr sz="2000"/>
+              <a:defRPr sz="1600"/>
             </a:lvl8pPr>
             <a:lvl9pPr>
-              <a:defRPr sz="2000"/>
+              <a:defRPr sz="1600"/>
             </a:lvl9pPr>
           </a:lstStyle>
           <a:p>
             <a:pPr lvl="0"/>
             <a:r>
-              <a:rPr kumimoji="1" lang="ja-JP" altLang="en-US"/>
+              <a:rPr lang="ja-JP" altLang="en-US"/>
               <a:t>マスター テキストの書式設定</a:t>
             </a:r>
           </a:p>
           <a:p>
             <a:pPr lvl="1"/>
             <a:r>
-              <a:rPr kumimoji="1" lang="ja-JP" altLang="en-US"/>
+              <a:rPr lang="ja-JP" altLang="en-US"/>
               <a:t>第 </a:t>
             </a:r>
             <a:r>
-              <a:rPr kumimoji="1" lang="en-US" altLang="ja-JP"/>
+              <a:rPr lang="en-US" altLang="ja-JP"/>
               <a:t>2 </a:t>
             </a:r>
             <a:r>
-              <a:rPr kumimoji="1" lang="ja-JP" altLang="en-US"/>
+              <a:rPr lang="ja-JP" altLang="en-US"/>
               <a:t>レベル</a:t>
             </a:r>
           </a:p>
           <a:p>
             <a:pPr lvl="2"/>
             <a:r>
-              <a:rPr kumimoji="1" lang="ja-JP" altLang="en-US"/>
+              <a:rPr lang="ja-JP" altLang="en-US"/>
               <a:t>第 </a:t>
             </a:r>
             <a:r>
-              <a:rPr kumimoji="1" lang="en-US" altLang="ja-JP"/>
+              <a:rPr lang="en-US" altLang="ja-JP"/>
               <a:t>3 </a:t>
             </a:r>
             <a:r>
-              <a:rPr kumimoji="1" lang="ja-JP" altLang="en-US"/>
+              <a:rPr lang="ja-JP" altLang="en-US"/>
               <a:t>レベル</a:t>
             </a:r>
           </a:p>
           <a:p>
             <a:pPr lvl="3"/>
             <a:r>
-              <a:rPr kumimoji="1" lang="ja-JP" altLang="en-US"/>
+              <a:rPr lang="ja-JP" altLang="en-US"/>
               <a:t>第 </a:t>
             </a:r>
             <a:r>
-              <a:rPr kumimoji="1" lang="en-US" altLang="ja-JP"/>
+              <a:rPr lang="en-US" altLang="ja-JP"/>
               <a:t>4 </a:t>
             </a:r>
             <a:r>
-              <a:rPr kumimoji="1" lang="ja-JP" altLang="en-US"/>
+              <a:rPr lang="ja-JP" altLang="en-US"/>
               <a:t>レベル</a:t>
             </a:r>
           </a:p>
           <a:p>
             <a:pPr lvl="4"/>
             <a:r>
-              <a:rPr kumimoji="1" lang="ja-JP" altLang="en-US"/>
+              <a:rPr lang="ja-JP" altLang="en-US"/>
               <a:t>第 </a:t>
             </a:r>
             <a:r>
-              <a:rPr kumimoji="1" lang="en-US" altLang="ja-JP"/>
+              <a:rPr lang="en-US" altLang="ja-JP"/>
               <a:t>5 </a:t>
             </a:r>
             <a:r>
-              <a:rPr kumimoji="1" lang="ja-JP" altLang="en-US"/>
+              <a:rPr lang="ja-JP" altLang="en-US"/>
               <a:t>レベル</a:t>
             </a:r>
-          </a:p>
-        </p:txBody>
-      </p:sp>
-      <p:sp>
-        <p:nvSpPr>
-          <p:cNvPr id="4" name="テキスト プレースホルダー 3">
-            <a:extLst>
-              <a:ext uri="{FF2B5EF4-FFF2-40B4-BE49-F238E27FC236}">
-                <a16:creationId xmlns:a16="http://schemas.microsoft.com/office/drawing/2014/main" id="{E7D323BC-0979-9E3F-59CC-5BD6CBC948F3}"/>
-              </a:ext>
-            </a:extLst>
-          </p:cNvPr>
+            <a:endParaRPr lang="en-US" dirty="0"/>
+          </a:p>
+        </p:txBody>
+      </p:sp>
+      <p:sp>
+        <p:nvSpPr>
+          <p:cNvPr id="4" name="Text Placeholder 3"/>
           <p:cNvSpPr>
             <a:spLocks noGrp="1"/>
           </p:cNvSpPr>
@@ -2556,14 +2835,23 @@
         </p:nvSpPr>
         <p:spPr>
           <a:xfrm>
-            <a:off x="839788" y="2057400"/>
-            <a:ext cx="3932237" cy="3811588"/>
+            <a:off x="723900" y="2856344"/>
+            <a:ext cx="3855720" cy="3011056"/>
           </a:xfrm>
         </p:spPr>
         <p:txBody>
           <a:bodyPr/>
           <a:lstStyle>
             <a:lvl1pPr marL="0" indent="0">
+              <a:lnSpc>
+                <a:spcPct val="113000"/>
+              </a:lnSpc>
+              <a:spcBef>
+                <a:spcPts val="0"/>
+              </a:spcBef>
+              <a:spcAft>
+                <a:spcPts val="1500"/>
+              </a:spcAft>
               <a:buNone/>
               <a:defRPr sz="1600"/>
             </a:lvl1pPr>
@@ -2603,7 +2891,7 @@
           <a:p>
             <a:pPr lvl="0"/>
             <a:r>
-              <a:rPr kumimoji="1" lang="ja-JP" altLang="en-US"/>
+              <a:rPr lang="ja-JP" altLang="en-US"/>
               <a:t>マスター テキストの書式設定</a:t>
             </a:r>
           </a:p>
@@ -2611,13 +2899,7 @@
       </p:sp>
       <p:sp>
         <p:nvSpPr>
-          <p:cNvPr id="5" name="日付プレースホルダー 4">
-            <a:extLst>
-              <a:ext uri="{FF2B5EF4-FFF2-40B4-BE49-F238E27FC236}">
-                <a16:creationId xmlns:a16="http://schemas.microsoft.com/office/drawing/2014/main" id="{CD66F2FD-4ECF-9205-9BB3-A30F21A4F440}"/>
-              </a:ext>
-            </a:extLst>
-          </p:cNvPr>
+          <p:cNvPr id="5" name="Date Placeholder 4"/>
           <p:cNvSpPr>
             <a:spLocks noGrp="1"/>
           </p:cNvSpPr>
@@ -2625,10 +2907,23 @@
             <p:ph type="dt" sz="half" idx="10"/>
           </p:nvPr>
         </p:nvSpPr>
-        <p:spPr/>
+        <p:spPr>
+          <a:xfrm>
+            <a:off x="723900" y="6453386"/>
+            <a:ext cx="1204572" cy="404614"/>
+          </a:xfrm>
+        </p:spPr>
         <p:txBody>
           <a:bodyPr/>
-          <a:lstStyle/>
+          <a:lstStyle>
+            <a:lvl1pPr>
+              <a:defRPr>
+                <a:solidFill>
+                  <a:schemeClr val="tx2"/>
+                </a:solidFill>
+              </a:defRPr>
+            </a:lvl1pPr>
+          </a:lstStyle>
           <a:p>
             <a:fld id="{898ACB73-228B-4573-B2A8-EEAE64393BA5}" type="datetimeFigureOut">
               <a:rPr kumimoji="1" lang="ja-JP" altLang="en-US" smtClean="0"/>
@@ -2640,13 +2935,7 @@
       </p:sp>
       <p:sp>
         <p:nvSpPr>
-          <p:cNvPr id="6" name="フッター プレースホルダー 5">
-            <a:extLst>
-              <a:ext uri="{FF2B5EF4-FFF2-40B4-BE49-F238E27FC236}">
-                <a16:creationId xmlns:a16="http://schemas.microsoft.com/office/drawing/2014/main" id="{33ED627E-4E4E-A2A4-60EB-E353BC5690DE}"/>
-              </a:ext>
-            </a:extLst>
-          </p:cNvPr>
+          <p:cNvPr id="6" name="Footer Placeholder 5"/>
           <p:cNvSpPr>
             <a:spLocks noGrp="1"/>
           </p:cNvSpPr>
@@ -2654,10 +2943,23 @@
             <p:ph type="ftr" sz="quarter" idx="11"/>
           </p:nvPr>
         </p:nvSpPr>
-        <p:spPr/>
+        <p:spPr>
+          <a:xfrm>
+            <a:off x="2205945" y="6453386"/>
+            <a:ext cx="2373675" cy="404614"/>
+          </a:xfrm>
+        </p:spPr>
         <p:txBody>
           <a:bodyPr/>
-          <a:lstStyle/>
+          <a:lstStyle>
+            <a:lvl1pPr>
+              <a:defRPr>
+                <a:solidFill>
+                  <a:schemeClr val="tx2"/>
+                </a:solidFill>
+              </a:defRPr>
+            </a:lvl1pPr>
+          </a:lstStyle>
           <a:p>
             <a:endParaRPr kumimoji="1" lang="ja-JP" altLang="en-US"/>
           </a:p>
@@ -2665,13 +2967,7 @@
       </p:sp>
       <p:sp>
         <p:nvSpPr>
-          <p:cNvPr id="7" name="スライド番号プレースホルダー 6">
-            <a:extLst>
-              <a:ext uri="{FF2B5EF4-FFF2-40B4-BE49-F238E27FC236}">
-                <a16:creationId xmlns:a16="http://schemas.microsoft.com/office/drawing/2014/main" id="{38AEE01F-1082-F397-053C-DE998C12C220}"/>
-              </a:ext>
-            </a:extLst>
-          </p:cNvPr>
+          <p:cNvPr id="7" name="Slide Number Placeholder 6"/>
           <p:cNvSpPr>
             <a:spLocks noGrp="1"/>
           </p:cNvSpPr>
@@ -2679,10 +2975,23 @@
             <p:ph type="sldNum" sz="quarter" idx="12"/>
           </p:nvPr>
         </p:nvSpPr>
-        <p:spPr/>
+        <p:spPr>
+          <a:xfrm>
+            <a:off x="9883140" y="6453386"/>
+            <a:ext cx="1596292" cy="404614"/>
+          </a:xfrm>
+        </p:spPr>
         <p:txBody>
           <a:bodyPr/>
-          <a:lstStyle/>
+          <a:lstStyle>
+            <a:lvl1pPr>
+              <a:defRPr>
+                <a:solidFill>
+                  <a:schemeClr val="tx2"/>
+                </a:solidFill>
+              </a:defRPr>
+            </a:lvl1pPr>
+          </a:lstStyle>
           <a:p>
             <a:fld id="{C0230AD8-E8AE-4279-8B43-53EA3F76DDC3}" type="slidenum">
               <a:rPr kumimoji="1" lang="ja-JP" altLang="en-US" smtClean="0"/>
@@ -2692,10 +3001,48 @@
           </a:p>
         </p:txBody>
       </p:sp>
+      <p:sp>
+        <p:nvSpPr>
+          <p:cNvPr id="9" name="Rectangle 8" title="Divider Bar"/>
+          <p:cNvSpPr/>
+          <p:nvPr/>
+        </p:nvSpPr>
+        <p:spPr>
+          <a:xfrm>
+            <a:off x="5303520" y="376"/>
+            <a:ext cx="228600" cy="6858000"/>
+          </a:xfrm>
+          <a:prstGeom prst="rect">
+            <a:avLst/>
+          </a:prstGeom>
+          <a:solidFill>
+            <a:schemeClr val="tx2"/>
+          </a:solidFill>
+          <a:ln>
+            <a:noFill/>
+          </a:ln>
+        </p:spPr>
+        <p:style>
+          <a:lnRef idx="2">
+            <a:schemeClr val="accent1">
+              <a:shade val="50000"/>
+            </a:schemeClr>
+          </a:lnRef>
+          <a:fillRef idx="1">
+            <a:schemeClr val="accent1"/>
+          </a:fillRef>
+          <a:effectRef idx="0">
+            <a:schemeClr val="accent1"/>
+          </a:effectRef>
+          <a:fontRef idx="minor">
+            <a:schemeClr val="lt1"/>
+          </a:fontRef>
+        </p:style>
+      </p:sp>
     </p:spTree>
     <p:extLst>
       <p:ext uri="{BB962C8B-B14F-4D97-AF65-F5344CB8AC3E}">
-        <p14:creationId xmlns:p14="http://schemas.microsoft.com/office/powerpoint/2010/main" val="3627632802"/>
+        <p14:creationId xmlns:p14="http://schemas.microsoft.com/office/powerpoint/2010/main" val="744610743"/>
       </p:ext>
     </p:extLst>
   </p:cSld>
@@ -2706,7 +3053,7 @@
 </file>
 
 <file path=ppt/slideLayouts/slideLayout9.xml><?xml version="1.0" encoding="utf-8"?>
-<p:sldLayout xmlns:a="http://schemas.openxmlformats.org/drawingml/2006/main" xmlns:r="http://schemas.openxmlformats.org/officeDocument/2006/relationships" xmlns:p="http://schemas.openxmlformats.org/presentationml/2006/main" type="picTx" preserve="1">
+<p:sldLayout xmlns:a="http://schemas.openxmlformats.org/drawingml/2006/main" xmlns:r="http://schemas.openxmlformats.org/officeDocument/2006/relationships" xmlns:p="http://schemas.openxmlformats.org/presentationml/2006/main" showMasterSp="0" type="picTx" preserve="1">
   <p:cSld name="タイトル付きの図">
     <p:spTree>
       <p:nvGrpSpPr>
@@ -2724,13 +3071,45 @@
       </p:grpSpPr>
       <p:sp>
         <p:nvSpPr>
-          <p:cNvPr id="2" name="タイトル 1">
-            <a:extLst>
-              <a:ext uri="{FF2B5EF4-FFF2-40B4-BE49-F238E27FC236}">
-                <a16:creationId xmlns:a16="http://schemas.microsoft.com/office/drawing/2014/main" id="{36126696-C455-FA35-B720-18F42E055544}"/>
-              </a:ext>
-            </a:extLst>
-          </p:cNvPr>
+          <p:cNvPr id="8" name="Rectangle 7" title="Background Shape"/>
+          <p:cNvSpPr/>
+          <p:nvPr/>
+        </p:nvSpPr>
+        <p:spPr>
+          <a:xfrm>
+            <a:off x="0" y="376"/>
+            <a:ext cx="5303520" cy="6857624"/>
+          </a:xfrm>
+          <a:prstGeom prst="rect">
+            <a:avLst/>
+          </a:prstGeom>
+          <a:solidFill>
+            <a:schemeClr val="accent1"/>
+          </a:solidFill>
+          <a:ln>
+            <a:noFill/>
+          </a:ln>
+        </p:spPr>
+        <p:style>
+          <a:lnRef idx="2">
+            <a:schemeClr val="accent1">
+              <a:shade val="50000"/>
+            </a:schemeClr>
+          </a:lnRef>
+          <a:fillRef idx="1">
+            <a:schemeClr val="accent1"/>
+          </a:fillRef>
+          <a:effectRef idx="0">
+            <a:schemeClr val="accent1"/>
+          </a:effectRef>
+          <a:fontRef idx="minor">
+            <a:schemeClr val="lt1"/>
+          </a:fontRef>
+        </p:style>
+      </p:sp>
+      <p:sp>
+        <p:nvSpPr>
+          <p:cNvPr id="2" name="Title 1"/>
           <p:cNvSpPr>
             <a:spLocks noGrp="1"/>
           </p:cNvSpPr>
@@ -2740,36 +3119,36 @@
         </p:nvSpPr>
         <p:spPr>
           <a:xfrm>
-            <a:off x="839788" y="457200"/>
-            <a:ext cx="3932237" cy="1600200"/>
+            <a:off x="723900" y="685800"/>
+            <a:ext cx="3855720" cy="2157884"/>
           </a:xfrm>
         </p:spPr>
         <p:txBody>
-          <a:bodyPr anchor="b"/>
+          <a:bodyPr anchor="t">
+            <a:normAutofit/>
+          </a:bodyPr>
           <a:lstStyle>
             <a:lvl1pPr>
-              <a:defRPr sz="3200"/>
+              <a:lnSpc>
+                <a:spcPct val="84000"/>
+              </a:lnSpc>
+              <a:defRPr sz="4800" baseline="0"/>
             </a:lvl1pPr>
           </a:lstStyle>
           <a:p>
             <a:r>
-              <a:rPr kumimoji="1" lang="ja-JP" altLang="en-US"/>
+              <a:rPr lang="ja-JP" altLang="en-US"/>
               <a:t>マスター タイトルの書式設定</a:t>
             </a:r>
-          </a:p>
-        </p:txBody>
-      </p:sp>
-      <p:sp>
-        <p:nvSpPr>
-          <p:cNvPr id="3" name="図プレースホルダー 2">
-            <a:extLst>
-              <a:ext uri="{FF2B5EF4-FFF2-40B4-BE49-F238E27FC236}">
-                <a16:creationId xmlns:a16="http://schemas.microsoft.com/office/drawing/2014/main" id="{B6A5D06D-96F5-573A-622B-6060A3834EC4}"/>
-              </a:ext>
-            </a:extLst>
-          </p:cNvPr>
-          <p:cNvSpPr>
-            <a:spLocks noGrp="1"/>
+            <a:endParaRPr lang="en-US" dirty="0"/>
+          </a:p>
+        </p:txBody>
+      </p:sp>
+      <p:sp>
+        <p:nvSpPr>
+          <p:cNvPr id="3" name="Picture Placeholder 2"/>
+          <p:cNvSpPr>
+            <a:spLocks noGrp="1" noChangeAspect="1"/>
           </p:cNvSpPr>
           <p:nvPr>
             <p:ph type="pic" idx="1"/>
@@ -2777,81 +3156,90 @@
         </p:nvSpPr>
         <p:spPr>
           <a:xfrm>
-            <a:off x="5183188" y="987425"/>
-            <a:ext cx="6172200" cy="4873625"/>
+            <a:off x="5532120" y="0"/>
+            <a:ext cx="6659880" cy="6857999"/>
+          </a:xfrm>
+        </p:spPr>
+        <p:txBody>
+          <a:bodyPr anchor="t">
+            <a:normAutofit/>
+          </a:bodyPr>
+          <a:lstStyle>
+            <a:lvl1pPr marL="0" indent="0">
+              <a:buNone/>
+              <a:defRPr sz="2000"/>
+            </a:lvl1pPr>
+            <a:lvl2pPr marL="457200" indent="0">
+              <a:buNone/>
+              <a:defRPr sz="2000"/>
+            </a:lvl2pPr>
+            <a:lvl3pPr marL="914400" indent="0">
+              <a:buNone/>
+              <a:defRPr sz="2000"/>
+            </a:lvl3pPr>
+            <a:lvl4pPr marL="1371600" indent="0">
+              <a:buNone/>
+              <a:defRPr sz="2000"/>
+            </a:lvl4pPr>
+            <a:lvl5pPr marL="1828800" indent="0">
+              <a:buNone/>
+              <a:defRPr sz="2000"/>
+            </a:lvl5pPr>
+            <a:lvl6pPr marL="2286000" indent="0">
+              <a:buNone/>
+              <a:defRPr sz="2000"/>
+            </a:lvl6pPr>
+            <a:lvl7pPr marL="2743200" indent="0">
+              <a:buNone/>
+              <a:defRPr sz="2000"/>
+            </a:lvl7pPr>
+            <a:lvl8pPr marL="3200400" indent="0">
+              <a:buNone/>
+              <a:defRPr sz="2000"/>
+            </a:lvl8pPr>
+            <a:lvl9pPr marL="3657600" indent="0">
+              <a:buNone/>
+              <a:defRPr sz="2000"/>
+            </a:lvl9pPr>
+          </a:lstStyle>
+          <a:p>
+            <a:r>
+              <a:rPr lang="ja-JP" altLang="en-US"/>
+              <a:t>アイコンをクリックして図を追加</a:t>
+            </a:r>
+            <a:endParaRPr lang="en-US" dirty="0"/>
+          </a:p>
+        </p:txBody>
+      </p:sp>
+      <p:sp>
+        <p:nvSpPr>
+          <p:cNvPr id="4" name="Text Placeholder 3"/>
+          <p:cNvSpPr>
+            <a:spLocks noGrp="1"/>
+          </p:cNvSpPr>
+          <p:nvPr>
+            <p:ph type="body" sz="half" idx="2"/>
+          </p:nvPr>
+        </p:nvSpPr>
+        <p:spPr>
+          <a:xfrm>
+            <a:off x="723900" y="2855968"/>
+            <a:ext cx="3855720" cy="3011432"/>
           </a:xfrm>
         </p:spPr>
         <p:txBody>
           <a:bodyPr/>
           <a:lstStyle>
             <a:lvl1pPr marL="0" indent="0">
-              <a:buNone/>
-              <a:defRPr sz="3200"/>
-            </a:lvl1pPr>
-            <a:lvl2pPr marL="457200" indent="0">
-              <a:buNone/>
-              <a:defRPr sz="2800"/>
-            </a:lvl2pPr>
-            <a:lvl3pPr marL="914400" indent="0">
-              <a:buNone/>
-              <a:defRPr sz="2400"/>
-            </a:lvl3pPr>
-            <a:lvl4pPr marL="1371600" indent="0">
-              <a:buNone/>
-              <a:defRPr sz="2000"/>
-            </a:lvl4pPr>
-            <a:lvl5pPr marL="1828800" indent="0">
-              <a:buNone/>
-              <a:defRPr sz="2000"/>
-            </a:lvl5pPr>
-            <a:lvl6pPr marL="2286000" indent="0">
-              <a:buNone/>
-              <a:defRPr sz="2000"/>
-            </a:lvl6pPr>
-            <a:lvl7pPr marL="2743200" indent="0">
-              <a:buNone/>
-              <a:defRPr sz="2000"/>
-            </a:lvl7pPr>
-            <a:lvl8pPr marL="3200400" indent="0">
-              <a:buNone/>
-              <a:defRPr sz="2000"/>
-            </a:lvl8pPr>
-            <a:lvl9pPr marL="3657600" indent="0">
-              <a:buNone/>
-              <a:defRPr sz="2000"/>
-            </a:lvl9pPr>
-          </a:lstStyle>
-          <a:p>
-            <a:endParaRPr kumimoji="1" lang="ja-JP" altLang="en-US"/>
-          </a:p>
-        </p:txBody>
-      </p:sp>
-      <p:sp>
-        <p:nvSpPr>
-          <p:cNvPr id="4" name="テキスト プレースホルダー 3">
-            <a:extLst>
-              <a:ext uri="{FF2B5EF4-FFF2-40B4-BE49-F238E27FC236}">
-                <a16:creationId xmlns:a16="http://schemas.microsoft.com/office/drawing/2014/main" id="{5C5EDA2A-3EB8-DBAB-530C-ED8F33529802}"/>
-              </a:ext>
-            </a:extLst>
-          </p:cNvPr>
-          <p:cNvSpPr>
-            <a:spLocks noGrp="1"/>
-          </p:cNvSpPr>
-          <p:nvPr>
-            <p:ph type="body" sz="half" idx="2"/>
-          </p:nvPr>
-        </p:nvSpPr>
-        <p:spPr>
-          <a:xfrm>
-            <a:off x="839788" y="2057400"/>
-            <a:ext cx="3932237" cy="3811588"/>
-          </a:xfrm>
-        </p:spPr>
-        <p:txBody>
-          <a:bodyPr/>
-          <a:lstStyle>
-            <a:lvl1pPr marL="0" indent="0">
+              <a:lnSpc>
+                <a:spcPct val="113000"/>
+              </a:lnSpc>
+              <a:spcBef>
+                <a:spcPts val="0"/>
+              </a:spcBef>
+              <a:spcAft>
+                <a:spcPts val="1500"/>
+              </a:spcAft>
               <a:buNone/>
               <a:defRPr sz="1600"/>
             </a:lvl1pPr>
@@ -2891,7 +3279,7 @@
           <a:p>
             <a:pPr lvl="0"/>
             <a:r>
-              <a:rPr kumimoji="1" lang="ja-JP" altLang="en-US"/>
+              <a:rPr lang="ja-JP" altLang="en-US"/>
               <a:t>マスター テキストの書式設定</a:t>
             </a:r>
           </a:p>
@@ -2899,13 +3287,7 @@
       </p:sp>
       <p:sp>
         <p:nvSpPr>
-          <p:cNvPr id="5" name="日付プレースホルダー 4">
-            <a:extLst>
-              <a:ext uri="{FF2B5EF4-FFF2-40B4-BE49-F238E27FC236}">
-                <a16:creationId xmlns:a16="http://schemas.microsoft.com/office/drawing/2014/main" id="{C4943A85-BA65-AF7B-1F6B-FBC586FA4B1C}"/>
-              </a:ext>
-            </a:extLst>
-          </p:cNvPr>
+          <p:cNvPr id="5" name="Date Placeholder 4"/>
           <p:cNvSpPr>
             <a:spLocks noGrp="1"/>
           </p:cNvSpPr>
@@ -2913,10 +3295,23 @@
             <p:ph type="dt" sz="half" idx="10"/>
           </p:nvPr>
         </p:nvSpPr>
-        <p:spPr/>
+        <p:spPr>
+          <a:xfrm>
+            <a:off x="723900" y="6453386"/>
+            <a:ext cx="1204572" cy="404614"/>
+          </a:xfrm>
+        </p:spPr>
         <p:txBody>
           <a:bodyPr/>
-          <a:lstStyle/>
+          <a:lstStyle>
+            <a:lvl1pPr>
+              <a:defRPr>
+                <a:solidFill>
+                  <a:schemeClr val="tx2"/>
+                </a:solidFill>
+              </a:defRPr>
+            </a:lvl1pPr>
+          </a:lstStyle>
           <a:p>
             <a:fld id="{898ACB73-228B-4573-B2A8-EEAE64393BA5}" type="datetimeFigureOut">
               <a:rPr kumimoji="1" lang="ja-JP" altLang="en-US" smtClean="0"/>
@@ -2928,13 +3323,7 @@
       </p:sp>
       <p:sp>
         <p:nvSpPr>
-          <p:cNvPr id="6" name="フッター プレースホルダー 5">
-            <a:extLst>
-              <a:ext uri="{FF2B5EF4-FFF2-40B4-BE49-F238E27FC236}">
-                <a16:creationId xmlns:a16="http://schemas.microsoft.com/office/drawing/2014/main" id="{EC1D2F62-1583-6A43-79A6-4ABBE0474242}"/>
-              </a:ext>
-            </a:extLst>
-          </p:cNvPr>
+          <p:cNvPr id="6" name="Footer Placeholder 5"/>
           <p:cNvSpPr>
             <a:spLocks noGrp="1"/>
           </p:cNvSpPr>
@@ -2942,10 +3331,23 @@
             <p:ph type="ftr" sz="quarter" idx="11"/>
           </p:nvPr>
         </p:nvSpPr>
-        <p:spPr/>
+        <p:spPr>
+          <a:xfrm>
+            <a:off x="2205945" y="6453386"/>
+            <a:ext cx="2373675" cy="404614"/>
+          </a:xfrm>
+        </p:spPr>
         <p:txBody>
           <a:bodyPr/>
-          <a:lstStyle/>
+          <a:lstStyle>
+            <a:lvl1pPr>
+              <a:defRPr>
+                <a:solidFill>
+                  <a:schemeClr val="tx2"/>
+                </a:solidFill>
+              </a:defRPr>
+            </a:lvl1pPr>
+          </a:lstStyle>
           <a:p>
             <a:endParaRPr kumimoji="1" lang="ja-JP" altLang="en-US"/>
           </a:p>
@@ -2953,13 +3355,7 @@
       </p:sp>
       <p:sp>
         <p:nvSpPr>
-          <p:cNvPr id="7" name="スライド番号プレースホルダー 6">
-            <a:extLst>
-              <a:ext uri="{FF2B5EF4-FFF2-40B4-BE49-F238E27FC236}">
-                <a16:creationId xmlns:a16="http://schemas.microsoft.com/office/drawing/2014/main" id="{A119AC08-E75A-6B5D-BF32-6C76F9E77908}"/>
-              </a:ext>
-            </a:extLst>
-          </p:cNvPr>
+          <p:cNvPr id="7" name="Slide Number Placeholder 6"/>
           <p:cNvSpPr>
             <a:spLocks noGrp="1"/>
           </p:cNvSpPr>
@@ -2967,10 +3363,23 @@
             <p:ph type="sldNum" sz="quarter" idx="12"/>
           </p:nvPr>
         </p:nvSpPr>
-        <p:spPr/>
+        <p:spPr>
+          <a:xfrm>
+            <a:off x="9883140" y="6453386"/>
+            <a:ext cx="1596292" cy="404614"/>
+          </a:xfrm>
+        </p:spPr>
         <p:txBody>
           <a:bodyPr/>
-          <a:lstStyle/>
+          <a:lstStyle>
+            <a:lvl1pPr>
+              <a:defRPr>
+                <a:solidFill>
+                  <a:schemeClr val="tx2"/>
+                </a:solidFill>
+              </a:defRPr>
+            </a:lvl1pPr>
+          </a:lstStyle>
           <a:p>
             <a:fld id="{C0230AD8-E8AE-4279-8B43-53EA3F76DDC3}" type="slidenum">
               <a:rPr kumimoji="1" lang="ja-JP" altLang="en-US" smtClean="0"/>
@@ -2980,10 +3389,48 @@
           </a:p>
         </p:txBody>
       </p:sp>
+      <p:sp>
+        <p:nvSpPr>
+          <p:cNvPr id="9" name="Rectangle 8" title="Divider Bar"/>
+          <p:cNvSpPr/>
+          <p:nvPr/>
+        </p:nvSpPr>
+        <p:spPr>
+          <a:xfrm>
+            <a:off x="5303520" y="376"/>
+            <a:ext cx="228600" cy="6858000"/>
+          </a:xfrm>
+          <a:prstGeom prst="rect">
+            <a:avLst/>
+          </a:prstGeom>
+          <a:solidFill>
+            <a:schemeClr val="tx2"/>
+          </a:solidFill>
+          <a:ln>
+            <a:noFill/>
+          </a:ln>
+        </p:spPr>
+        <p:style>
+          <a:lnRef idx="2">
+            <a:schemeClr val="accent1">
+              <a:shade val="50000"/>
+            </a:schemeClr>
+          </a:lnRef>
+          <a:fillRef idx="1">
+            <a:schemeClr val="accent1"/>
+          </a:fillRef>
+          <a:effectRef idx="0">
+            <a:schemeClr val="accent1"/>
+          </a:effectRef>
+          <a:fontRef idx="minor">
+            <a:schemeClr val="lt1"/>
+          </a:fontRef>
+        </p:style>
+      </p:sp>
     </p:spTree>
     <p:extLst>
       <p:ext uri="{BB962C8B-B14F-4D97-AF65-F5344CB8AC3E}">
-        <p14:creationId xmlns:p14="http://schemas.microsoft.com/office/powerpoint/2010/main" val="2037344464"/>
+        <p14:creationId xmlns:p14="http://schemas.microsoft.com/office/powerpoint/2010/main" val="2019852951"/>
       </p:ext>
     </p:extLst>
   </p:cSld>
@@ -2997,9 +3444,12 @@
 <p:sldMaster xmlns:a="http://schemas.openxmlformats.org/drawingml/2006/main" xmlns:r="http://schemas.openxmlformats.org/officeDocument/2006/relationships" xmlns:p="http://schemas.openxmlformats.org/presentationml/2006/main">
   <p:cSld>
     <p:bg>
-      <p:bgRef idx="1001">
-        <a:schemeClr val="bg1"/>
-      </p:bgRef>
+      <p:bgPr>
+        <a:solidFill>
+          <a:schemeClr val="bg2"/>
+        </a:solidFill>
+        <a:effectLst/>
+      </p:bgPr>
     </p:bg>
     <p:spTree>
       <p:nvGrpSpPr>
@@ -3017,13 +3467,7 @@
       </p:grpSpPr>
       <p:sp>
         <p:nvSpPr>
-          <p:cNvPr id="2" name="タイトル プレースホルダー 1">
-            <a:extLst>
-              <a:ext uri="{FF2B5EF4-FFF2-40B4-BE49-F238E27FC236}">
-                <a16:creationId xmlns:a16="http://schemas.microsoft.com/office/drawing/2014/main" id="{B1A2B83E-4EBF-200D-AFA0-E3FF04611CA5}"/>
-              </a:ext>
-            </a:extLst>
-          </p:cNvPr>
+          <p:cNvPr id="2" name="Title Placeholder 1"/>
           <p:cNvSpPr>
             <a:spLocks noGrp="1"/>
           </p:cNvSpPr>
@@ -3033,35 +3477,30 @@
         </p:nvSpPr>
         <p:spPr>
           <a:xfrm>
-            <a:off x="838200" y="365125"/>
-            <a:ext cx="10515600" cy="1325563"/>
+            <a:off x="1371600" y="685800"/>
+            <a:ext cx="9601200" cy="1485900"/>
           </a:xfrm>
           <a:prstGeom prst="rect">
             <a:avLst/>
           </a:prstGeom>
         </p:spPr>
         <p:txBody>
-          <a:bodyPr vert="horz" lIns="91440" tIns="45720" rIns="91440" bIns="45720" rtlCol="0" anchor="ctr">
+          <a:bodyPr vert="horz" lIns="91440" tIns="45720" rIns="91440" bIns="45720" rtlCol="0" anchor="t">
             <a:normAutofit/>
           </a:bodyPr>
           <a:lstStyle/>
           <a:p>
             <a:r>
-              <a:rPr kumimoji="1" lang="ja-JP" altLang="en-US"/>
+              <a:rPr lang="ja-JP" altLang="en-US"/>
               <a:t>マスター タイトルの書式設定</a:t>
             </a:r>
-          </a:p>
-        </p:txBody>
-      </p:sp>
-      <p:sp>
-        <p:nvSpPr>
-          <p:cNvPr id="3" name="テキスト プレースホルダー 2">
-            <a:extLst>
-              <a:ext uri="{FF2B5EF4-FFF2-40B4-BE49-F238E27FC236}">
-                <a16:creationId xmlns:a16="http://schemas.microsoft.com/office/drawing/2014/main" id="{47A2DB76-5356-058F-F829-F6318BD94A8E}"/>
-              </a:ext>
-            </a:extLst>
-          </p:cNvPr>
+            <a:endParaRPr lang="en-US" dirty="0"/>
+          </a:p>
+        </p:txBody>
+      </p:sp>
+      <p:sp>
+        <p:nvSpPr>
+          <p:cNvPr id="3" name="Text Placeholder 2"/>
           <p:cNvSpPr>
             <a:spLocks noGrp="1"/>
           </p:cNvSpPr>
@@ -3071,8 +3510,8 @@
         </p:nvSpPr>
         <p:spPr>
           <a:xfrm>
-            <a:off x="838200" y="1825625"/>
-            <a:ext cx="10515600" cy="4351338"/>
+            <a:off x="1371600" y="2286000"/>
+            <a:ext cx="9601200" cy="3581400"/>
           </a:xfrm>
           <a:prstGeom prst="rect">
             <a:avLst/>
@@ -3086,81 +3525,76 @@
           <a:p>
             <a:pPr lvl="0"/>
             <a:r>
-              <a:rPr kumimoji="1" lang="ja-JP" altLang="en-US"/>
+              <a:rPr lang="ja-JP" altLang="en-US"/>
               <a:t>マスター テキストの書式設定</a:t>
             </a:r>
           </a:p>
           <a:p>
             <a:pPr lvl="1"/>
             <a:r>
-              <a:rPr kumimoji="1" lang="ja-JP" altLang="en-US"/>
+              <a:rPr lang="ja-JP" altLang="en-US"/>
               <a:t>第 </a:t>
             </a:r>
             <a:r>
-              <a:rPr kumimoji="1" lang="en-US" altLang="ja-JP"/>
+              <a:rPr lang="en-US" altLang="ja-JP"/>
               <a:t>2 </a:t>
             </a:r>
             <a:r>
-              <a:rPr kumimoji="1" lang="ja-JP" altLang="en-US"/>
+              <a:rPr lang="ja-JP" altLang="en-US"/>
               <a:t>レベル</a:t>
             </a:r>
           </a:p>
           <a:p>
             <a:pPr lvl="2"/>
             <a:r>
-              <a:rPr kumimoji="1" lang="ja-JP" altLang="en-US"/>
+              <a:rPr lang="ja-JP" altLang="en-US"/>
               <a:t>第 </a:t>
             </a:r>
             <a:r>
-              <a:rPr kumimoji="1" lang="en-US" altLang="ja-JP"/>
+              <a:rPr lang="en-US" altLang="ja-JP"/>
               <a:t>3 </a:t>
             </a:r>
             <a:r>
-              <a:rPr kumimoji="1" lang="ja-JP" altLang="en-US"/>
+              <a:rPr lang="ja-JP" altLang="en-US"/>
               <a:t>レベル</a:t>
             </a:r>
           </a:p>
           <a:p>
             <a:pPr lvl="3"/>
             <a:r>
-              <a:rPr kumimoji="1" lang="ja-JP" altLang="en-US"/>
+              <a:rPr lang="ja-JP" altLang="en-US"/>
               <a:t>第 </a:t>
             </a:r>
             <a:r>
-              <a:rPr kumimoji="1" lang="en-US" altLang="ja-JP"/>
+              <a:rPr lang="en-US" altLang="ja-JP"/>
               <a:t>4 </a:t>
             </a:r>
             <a:r>
-              <a:rPr kumimoji="1" lang="ja-JP" altLang="en-US"/>
+              <a:rPr lang="ja-JP" altLang="en-US"/>
               <a:t>レベル</a:t>
             </a:r>
           </a:p>
           <a:p>
             <a:pPr lvl="4"/>
             <a:r>
-              <a:rPr kumimoji="1" lang="ja-JP" altLang="en-US"/>
+              <a:rPr lang="ja-JP" altLang="en-US"/>
               <a:t>第 </a:t>
             </a:r>
             <a:r>
-              <a:rPr kumimoji="1" lang="en-US" altLang="ja-JP"/>
+              <a:rPr lang="en-US" altLang="ja-JP"/>
               <a:t>5 </a:t>
             </a:r>
             <a:r>
-              <a:rPr kumimoji="1" lang="ja-JP" altLang="en-US"/>
+              <a:rPr lang="ja-JP" altLang="en-US"/>
               <a:t>レベル</a:t>
             </a:r>
-          </a:p>
-        </p:txBody>
-      </p:sp>
-      <p:sp>
-        <p:nvSpPr>
-          <p:cNvPr id="4" name="日付プレースホルダー 3">
-            <a:extLst>
-              <a:ext uri="{FF2B5EF4-FFF2-40B4-BE49-F238E27FC236}">
-                <a16:creationId xmlns:a16="http://schemas.microsoft.com/office/drawing/2014/main" id="{963F60C3-518A-522C-96E5-571D9F9FDD3C}"/>
-              </a:ext>
-            </a:extLst>
-          </p:cNvPr>
+            <a:endParaRPr lang="en-US" dirty="0"/>
+          </a:p>
+        </p:txBody>
+      </p:sp>
+      <p:sp>
+        <p:nvSpPr>
+          <p:cNvPr id="4" name="Date Placeholder 3"/>
           <p:cNvSpPr>
             <a:spLocks noGrp="1"/>
           </p:cNvSpPr>
@@ -3170,8 +3604,8 @@
         </p:nvSpPr>
         <p:spPr>
           <a:xfrm>
-            <a:off x="838200" y="6356350"/>
-            <a:ext cx="2743200" cy="365125"/>
+            <a:off x="1390650" y="6453386"/>
+            <a:ext cx="1204572" cy="404614"/>
           </a:xfrm>
           <a:prstGeom prst="rect">
             <a:avLst/>
@@ -3181,11 +3615,9 @@
           <a:bodyPr vert="horz" lIns="91440" tIns="45720" rIns="91440" bIns="45720" rtlCol="0" anchor="ctr"/>
           <a:lstStyle>
             <a:lvl1pPr algn="l">
-              <a:defRPr sz="1200">
-                <a:solidFill>
-                  <a:schemeClr val="tx1">
-                    <a:tint val="82000"/>
-                  </a:schemeClr>
+              <a:defRPr sz="1200" baseline="0">
+                <a:solidFill>
+                  <a:schemeClr val="tx2"/>
                 </a:solidFill>
               </a:defRPr>
             </a:lvl1pPr>
@@ -3201,13 +3633,7 @@
       </p:sp>
       <p:sp>
         <p:nvSpPr>
-          <p:cNvPr id="5" name="フッター プレースホルダー 4">
-            <a:extLst>
-              <a:ext uri="{FF2B5EF4-FFF2-40B4-BE49-F238E27FC236}">
-                <a16:creationId xmlns:a16="http://schemas.microsoft.com/office/drawing/2014/main" id="{2D7703C4-4CCD-0034-D0FB-5EE3180A8C59}"/>
-              </a:ext>
-            </a:extLst>
-          </p:cNvPr>
+          <p:cNvPr id="5" name="Footer Placeholder 4"/>
           <p:cNvSpPr>
             <a:spLocks noGrp="1"/>
           </p:cNvSpPr>
@@ -3217,8 +3643,8 @@
         </p:nvSpPr>
         <p:spPr>
           <a:xfrm>
-            <a:off x="4038600" y="6356350"/>
-            <a:ext cx="4114800" cy="365125"/>
+            <a:off x="2893564" y="6453386"/>
+            <a:ext cx="6280830" cy="404614"/>
           </a:xfrm>
           <a:prstGeom prst="rect">
             <a:avLst/>
@@ -3227,12 +3653,10 @@
         <p:txBody>
           <a:bodyPr vert="horz" lIns="91440" tIns="45720" rIns="91440" bIns="45720" rtlCol="0" anchor="ctr"/>
           <a:lstStyle>
-            <a:lvl1pPr algn="ctr">
-              <a:defRPr sz="1200">
-                <a:solidFill>
-                  <a:schemeClr val="tx1">
-                    <a:tint val="82000"/>
-                  </a:schemeClr>
+            <a:lvl1pPr algn="l">
+              <a:defRPr sz="1200" baseline="0">
+                <a:solidFill>
+                  <a:schemeClr val="tx2"/>
                 </a:solidFill>
               </a:defRPr>
             </a:lvl1pPr>
@@ -3244,13 +3668,7 @@
       </p:sp>
       <p:sp>
         <p:nvSpPr>
-          <p:cNvPr id="6" name="スライド番号プレースホルダー 5">
-            <a:extLst>
-              <a:ext uri="{FF2B5EF4-FFF2-40B4-BE49-F238E27FC236}">
-                <a16:creationId xmlns:a16="http://schemas.microsoft.com/office/drawing/2014/main" id="{5A3FA6C8-0474-504B-1626-4294D0086CFB}"/>
-              </a:ext>
-            </a:extLst>
-          </p:cNvPr>
+          <p:cNvPr id="6" name="Slide Number Placeholder 5"/>
           <p:cNvSpPr>
             <a:spLocks noGrp="1"/>
           </p:cNvSpPr>
@@ -3260,8 +3678,8 @@
         </p:nvSpPr>
         <p:spPr>
           <a:xfrm>
-            <a:off x="8610600" y="6356350"/>
-            <a:ext cx="2743200" cy="365125"/>
+            <a:off x="9472736" y="6453386"/>
+            <a:ext cx="1596292" cy="404614"/>
           </a:xfrm>
           <a:prstGeom prst="rect">
             <a:avLst/>
@@ -3271,11 +3689,9 @@
           <a:bodyPr vert="horz" lIns="91440" tIns="45720" rIns="91440" bIns="45720" rtlCol="0" anchor="ctr"/>
           <a:lstStyle>
             <a:lvl1pPr algn="r">
-              <a:defRPr sz="1200">
-                <a:solidFill>
-                  <a:schemeClr val="tx1">
-                    <a:tint val="82000"/>
-                  </a:schemeClr>
+              <a:defRPr sz="1200" baseline="0">
+                <a:solidFill>
+                  <a:schemeClr val="tx2"/>
                 </a:solidFill>
               </a:defRPr>
             </a:lvl1pPr>
@@ -3289,40 +3705,78 @@
           </a:p>
         </p:txBody>
       </p:sp>
+      <p:sp>
+        <p:nvSpPr>
+          <p:cNvPr id="9" name="Rectangle 8" title="Side bar"/>
+          <p:cNvSpPr/>
+          <p:nvPr/>
+        </p:nvSpPr>
+        <p:spPr>
+          <a:xfrm>
+            <a:off x="478095" y="376"/>
+            <a:ext cx="228600" cy="6858000"/>
+          </a:xfrm>
+          <a:prstGeom prst="rect">
+            <a:avLst/>
+          </a:prstGeom>
+          <a:solidFill>
+            <a:schemeClr val="tx2"/>
+          </a:solidFill>
+          <a:ln>
+            <a:noFill/>
+          </a:ln>
+        </p:spPr>
+        <p:style>
+          <a:lnRef idx="2">
+            <a:schemeClr val="accent1">
+              <a:shade val="50000"/>
+            </a:schemeClr>
+          </a:lnRef>
+          <a:fillRef idx="1">
+            <a:schemeClr val="accent1"/>
+          </a:fillRef>
+          <a:effectRef idx="0">
+            <a:schemeClr val="accent1"/>
+          </a:effectRef>
+          <a:fontRef idx="minor">
+            <a:schemeClr val="lt1"/>
+          </a:fontRef>
+        </p:style>
+      </p:sp>
     </p:spTree>
     <p:extLst>
       <p:ext uri="{BB962C8B-B14F-4D97-AF65-F5344CB8AC3E}">
-        <p14:creationId xmlns:p14="http://schemas.microsoft.com/office/powerpoint/2010/main" val="733605267"/>
+        <p14:creationId xmlns:p14="http://schemas.microsoft.com/office/powerpoint/2010/main" val="3787793613"/>
       </p:ext>
     </p:extLst>
   </p:cSld>
   <p:clrMap bg1="lt1" tx1="dk1" bg2="lt2" tx2="dk2" accent1="accent1" accent2="accent2" accent3="accent3" accent4="accent4" accent5="accent5" accent6="accent6" hlink="hlink" folHlink="folHlink"/>
   <p:sldLayoutIdLst>
-    <p:sldLayoutId id="2147483649" r:id="rId1"/>
-    <p:sldLayoutId id="2147483650" r:id="rId2"/>
-    <p:sldLayoutId id="2147483651" r:id="rId3"/>
-    <p:sldLayoutId id="2147483652" r:id="rId4"/>
-    <p:sldLayoutId id="2147483653" r:id="rId5"/>
-    <p:sldLayoutId id="2147483654" r:id="rId6"/>
-    <p:sldLayoutId id="2147483655" r:id="rId7"/>
-    <p:sldLayoutId id="2147483656" r:id="rId8"/>
-    <p:sldLayoutId id="2147483657" r:id="rId9"/>
-    <p:sldLayoutId id="2147483658" r:id="rId10"/>
-    <p:sldLayoutId id="2147483659" r:id="rId11"/>
+    <p:sldLayoutId id="2147483661" r:id="rId1"/>
+    <p:sldLayoutId id="2147483662" r:id="rId2"/>
+    <p:sldLayoutId id="2147483663" r:id="rId3"/>
+    <p:sldLayoutId id="2147483664" r:id="rId4"/>
+    <p:sldLayoutId id="2147483665" r:id="rId5"/>
+    <p:sldLayoutId id="2147483666" r:id="rId6"/>
+    <p:sldLayoutId id="2147483667" r:id="rId7"/>
+    <p:sldLayoutId id="2147483668" r:id="rId8"/>
+    <p:sldLayoutId id="2147483669" r:id="rId9"/>
+    <p:sldLayoutId id="2147483670" r:id="rId10"/>
+    <p:sldLayoutId id="2147483671" r:id="rId11"/>
   </p:sldLayoutIdLst>
   <p:txStyles>
     <p:titleStyle>
       <a:lvl1pPr algn="l" defTabSz="914400" rtl="0" eaLnBrk="1" latinLnBrk="0" hangingPunct="1">
         <a:lnSpc>
-          <a:spcPct val="90000"/>
+          <a:spcPct val="89000"/>
         </a:lnSpc>
         <a:spcBef>
           <a:spcPct val="0"/>
         </a:spcBef>
         <a:buNone/>
-        <a:defRPr kumimoji="1" sz="4400" kern="1200">
+        <a:defRPr kumimoji="1" sz="4400" kern="1200" baseline="0">
           <a:solidFill>
-            <a:schemeClr val="tx1"/>
+            <a:schemeClr val="tx2"/>
           </a:solidFill>
           <a:latin typeface="+mj-lt"/>
           <a:ea typeface="+mj-ea"/>
@@ -3331,162 +3785,189 @@
       </a:lvl1pPr>
     </p:titleStyle>
     <p:bodyStyle>
-      <a:lvl1pPr marL="228600" indent="-228600" algn="l" defTabSz="914400" rtl="0" eaLnBrk="1" latinLnBrk="0" hangingPunct="1">
+      <a:lvl1pPr marL="384048" indent="-384048" algn="l" defTabSz="914400" rtl="0" eaLnBrk="1" latinLnBrk="0" hangingPunct="1">
         <a:lnSpc>
-          <a:spcPct val="90000"/>
+          <a:spcPct val="94000"/>
         </a:lnSpc>
         <a:spcBef>
           <a:spcPts val="1000"/>
         </a:spcBef>
-        <a:buFont typeface="Arial" panose="020B0604020202020204" pitchFamily="34" charset="0"/>
-        <a:buChar char="•"/>
-        <a:defRPr kumimoji="1" sz="2800" kern="1200">
+        <a:spcAft>
+          <a:spcPts val="200"/>
+        </a:spcAft>
+        <a:buFont typeface="Franklin Gothic Book" panose="020B0503020102020204" pitchFamily="34" charset="0"/>
+        <a:buChar char="■"/>
+        <a:defRPr kumimoji="1" sz="2000" kern="1200" baseline="0">
           <a:solidFill>
-            <a:schemeClr val="tx1"/>
+            <a:schemeClr val="tx2"/>
           </a:solidFill>
           <a:latin typeface="+mn-lt"/>
           <a:ea typeface="+mn-ea"/>
           <a:cs typeface="+mn-cs"/>
         </a:defRPr>
       </a:lvl1pPr>
-      <a:lvl2pPr marL="685800" indent="-228600" algn="l" defTabSz="914400" rtl="0" eaLnBrk="1" latinLnBrk="0" hangingPunct="1">
+      <a:lvl2pPr marL="914400" indent="-384048" algn="l" defTabSz="914400" rtl="0" eaLnBrk="1" latinLnBrk="0" hangingPunct="1">
         <a:lnSpc>
-          <a:spcPct val="90000"/>
+          <a:spcPct val="94000"/>
         </a:lnSpc>
         <a:spcBef>
           <a:spcPts val="500"/>
         </a:spcBef>
-        <a:buFont typeface="Arial" panose="020B0604020202020204" pitchFamily="34" charset="0"/>
-        <a:buChar char="•"/>
-        <a:defRPr kumimoji="1" sz="2400" kern="1200">
+        <a:spcAft>
+          <a:spcPts val="200"/>
+        </a:spcAft>
+        <a:buFont typeface="Franklin Gothic Book" panose="020B0503020102020204" pitchFamily="34" charset="0"/>
+        <a:buChar char="–"/>
+        <a:defRPr kumimoji="1" sz="2000" i="1" kern="1200" baseline="0">
           <a:solidFill>
-            <a:schemeClr val="tx1"/>
+            <a:schemeClr val="tx2"/>
           </a:solidFill>
           <a:latin typeface="+mn-lt"/>
           <a:ea typeface="+mn-ea"/>
           <a:cs typeface="+mn-cs"/>
         </a:defRPr>
       </a:lvl2pPr>
-      <a:lvl3pPr marL="1143000" indent="-228600" algn="l" defTabSz="914400" rtl="0" eaLnBrk="1" latinLnBrk="0" hangingPunct="1">
+      <a:lvl3pPr marL="1371600" indent="-384048" algn="l" defTabSz="914400" rtl="0" eaLnBrk="1" latinLnBrk="0" hangingPunct="1">
         <a:lnSpc>
-          <a:spcPct val="90000"/>
+          <a:spcPct val="94000"/>
         </a:lnSpc>
         <a:spcBef>
           <a:spcPts val="500"/>
         </a:spcBef>
-        <a:buFont typeface="Arial" panose="020B0604020202020204" pitchFamily="34" charset="0"/>
-        <a:buChar char="•"/>
-        <a:defRPr kumimoji="1" sz="2000" kern="1200">
+        <a:spcAft>
+          <a:spcPts val="200"/>
+        </a:spcAft>
+        <a:buFont typeface="Franklin Gothic Book" panose="020B0503020102020204" pitchFamily="34" charset="0"/>
+        <a:buChar char="■"/>
+        <a:defRPr kumimoji="1" sz="1800" kern="1200" baseline="0">
           <a:solidFill>
-            <a:schemeClr val="tx1"/>
+            <a:schemeClr val="tx2"/>
           </a:solidFill>
           <a:latin typeface="+mn-lt"/>
           <a:ea typeface="+mn-ea"/>
           <a:cs typeface="+mn-cs"/>
         </a:defRPr>
       </a:lvl3pPr>
-      <a:lvl4pPr marL="1600200" indent="-228600" algn="l" defTabSz="914400" rtl="0" eaLnBrk="1" latinLnBrk="0" hangingPunct="1">
+      <a:lvl4pPr marL="1828800" indent="-384048" algn="l" defTabSz="914400" rtl="0" eaLnBrk="1" latinLnBrk="0" hangingPunct="1">
         <a:lnSpc>
-          <a:spcPct val="90000"/>
+          <a:spcPct val="94000"/>
         </a:lnSpc>
         <a:spcBef>
           <a:spcPts val="500"/>
         </a:spcBef>
-        <a:buFont typeface="Arial" panose="020B0604020202020204" pitchFamily="34" charset="0"/>
-        <a:buChar char="•"/>
-        <a:defRPr kumimoji="1" sz="1800" kern="1200">
+        <a:spcAft>
+          <a:spcPts val="200"/>
+        </a:spcAft>
+        <a:buFont typeface="Franklin Gothic Book" panose="020B0503020102020204" pitchFamily="34" charset="0"/>
+        <a:buChar char="–"/>
+        <a:defRPr kumimoji="1" sz="1800" i="1" kern="1200" baseline="0">
           <a:solidFill>
-            <a:schemeClr val="tx1"/>
+            <a:schemeClr val="tx2"/>
           </a:solidFill>
           <a:latin typeface="+mn-lt"/>
           <a:ea typeface="+mn-ea"/>
           <a:cs typeface="+mn-cs"/>
         </a:defRPr>
       </a:lvl4pPr>
-      <a:lvl5pPr marL="2057400" indent="-228600" algn="l" defTabSz="914400" rtl="0" eaLnBrk="1" latinLnBrk="0" hangingPunct="1">
+      <a:lvl5pPr marL="2286000" indent="-384048" algn="l" defTabSz="914400" rtl="0" eaLnBrk="1" latinLnBrk="0" hangingPunct="1">
         <a:lnSpc>
-          <a:spcPct val="90000"/>
+          <a:spcPct val="94000"/>
         </a:lnSpc>
         <a:spcBef>
           <a:spcPts val="500"/>
         </a:spcBef>
-        <a:buFont typeface="Arial" panose="020B0604020202020204" pitchFamily="34" charset="0"/>
-        <a:buChar char="•"/>
-        <a:defRPr kumimoji="1" sz="1800" kern="1200">
+        <a:spcAft>
+          <a:spcPts val="200"/>
+        </a:spcAft>
+        <a:buFont typeface="Franklin Gothic Book" panose="020B0503020102020204" pitchFamily="34" charset="0"/>
+        <a:buChar char="■"/>
+        <a:defRPr kumimoji="1" sz="1600" kern="1200" baseline="0">
           <a:solidFill>
-            <a:schemeClr val="tx1"/>
+            <a:schemeClr val="tx2"/>
           </a:solidFill>
           <a:latin typeface="+mn-lt"/>
           <a:ea typeface="+mn-ea"/>
           <a:cs typeface="+mn-cs"/>
         </a:defRPr>
       </a:lvl5pPr>
-      <a:lvl6pPr marL="2514600" indent="-228600" algn="l" defTabSz="914400" rtl="0" eaLnBrk="1" latinLnBrk="0" hangingPunct="1">
+      <a:lvl6pPr marL="2743200" indent="-384048" algn="l" defTabSz="914400" rtl="0" eaLnBrk="1" latinLnBrk="0" hangingPunct="1">
         <a:lnSpc>
-          <a:spcPct val="90000"/>
+          <a:spcPct val="94000"/>
         </a:lnSpc>
         <a:spcBef>
           <a:spcPts val="500"/>
         </a:spcBef>
-        <a:buFont typeface="Arial" panose="020B0604020202020204" pitchFamily="34" charset="0"/>
-        <a:buChar char="•"/>
-        <a:defRPr kumimoji="1" sz="1800" kern="1200">
+        <a:spcAft>
+          <a:spcPts val="200"/>
+        </a:spcAft>
+        <a:buFont typeface="Franklin Gothic Book" panose="020B0503020102020204" pitchFamily="34" charset="0"/>
+        <a:buChar char="–"/>
+        <a:defRPr kumimoji="1" sz="1600" i="1" kern="1200" baseline="0">
           <a:solidFill>
-            <a:schemeClr val="tx1"/>
+            <a:schemeClr val="tx2"/>
           </a:solidFill>
           <a:latin typeface="+mn-lt"/>
           <a:ea typeface="+mn-ea"/>
           <a:cs typeface="+mn-cs"/>
         </a:defRPr>
       </a:lvl6pPr>
-      <a:lvl7pPr marL="2971800" indent="-228600" algn="l" defTabSz="914400" rtl="0" eaLnBrk="1" latinLnBrk="0" hangingPunct="1">
+      <a:lvl7pPr marL="3200400" indent="-384048" algn="l" defTabSz="914400" rtl="0" eaLnBrk="1" latinLnBrk="0" hangingPunct="1">
         <a:lnSpc>
-          <a:spcPct val="90000"/>
+          <a:spcPct val="94000"/>
         </a:lnSpc>
         <a:spcBef>
           <a:spcPts val="500"/>
         </a:spcBef>
-        <a:buFont typeface="Arial" panose="020B0604020202020204" pitchFamily="34" charset="0"/>
-        <a:buChar char="•"/>
-        <a:defRPr kumimoji="1" sz="1800" kern="1200">
+        <a:spcAft>
+          <a:spcPts val="200"/>
+        </a:spcAft>
+        <a:buFont typeface="Franklin Gothic Book" panose="020B0503020102020204" pitchFamily="34" charset="0"/>
+        <a:buChar char="■"/>
+        <a:defRPr kumimoji="1" sz="1400" kern="1200" baseline="0">
           <a:solidFill>
-            <a:schemeClr val="tx1"/>
+            <a:schemeClr val="tx2"/>
           </a:solidFill>
           <a:latin typeface="+mn-lt"/>
           <a:ea typeface="+mn-ea"/>
           <a:cs typeface="+mn-cs"/>
         </a:defRPr>
       </a:lvl7pPr>
-      <a:lvl8pPr marL="3429000" indent="-228600" algn="l" defTabSz="914400" rtl="0" eaLnBrk="1" latinLnBrk="0" hangingPunct="1">
+      <a:lvl8pPr marL="3657600" indent="-384048" algn="l" defTabSz="914400" rtl="0" eaLnBrk="1" latinLnBrk="0" hangingPunct="1">
         <a:lnSpc>
-          <a:spcPct val="90000"/>
+          <a:spcPct val="94000"/>
         </a:lnSpc>
         <a:spcBef>
           <a:spcPts val="500"/>
         </a:spcBef>
-        <a:buFont typeface="Arial" panose="020B0604020202020204" pitchFamily="34" charset="0"/>
-        <a:buChar char="•"/>
-        <a:defRPr kumimoji="1" sz="1800" kern="1200">
+        <a:spcAft>
+          <a:spcPts val="200"/>
+        </a:spcAft>
+        <a:buFont typeface="Franklin Gothic Book" panose="020B0503020102020204" pitchFamily="34" charset="0"/>
+        <a:buChar char="–"/>
+        <a:defRPr kumimoji="1" sz="1400" i="1" kern="1200" baseline="0">
           <a:solidFill>
-            <a:schemeClr val="tx1"/>
+            <a:schemeClr val="tx2"/>
           </a:solidFill>
           <a:latin typeface="+mn-lt"/>
           <a:ea typeface="+mn-ea"/>
           <a:cs typeface="+mn-cs"/>
         </a:defRPr>
       </a:lvl8pPr>
-      <a:lvl9pPr marL="3886200" indent="-228600" algn="l" defTabSz="914400" rtl="0" eaLnBrk="1" latinLnBrk="0" hangingPunct="1">
+      <a:lvl9pPr marL="4114800" indent="-384048" algn="l" defTabSz="914400" rtl="0" eaLnBrk="1" latinLnBrk="0" hangingPunct="1">
         <a:lnSpc>
-          <a:spcPct val="90000"/>
+          <a:spcPct val="94000"/>
         </a:lnSpc>
         <a:spcBef>
           <a:spcPts val="500"/>
         </a:spcBef>
-        <a:buFont typeface="Arial" panose="020B0604020202020204" pitchFamily="34" charset="0"/>
-        <a:buChar char="•"/>
-        <a:defRPr kumimoji="1" sz="1800" kern="1200">
+        <a:spcAft>
+          <a:spcPts val="200"/>
+        </a:spcAft>
+        <a:buFont typeface="Franklin Gothic Book" panose="020B0503020102020204" pitchFamily="34" charset="0"/>
+        <a:buChar char="■"/>
+        <a:defRPr kumimoji="1" sz="1400" kern="1200" baseline="0">
           <a:solidFill>
-            <a:schemeClr val="tx1"/>
+            <a:schemeClr val="tx2"/>
           </a:solidFill>
           <a:latin typeface="+mn-lt"/>
           <a:ea typeface="+mn-ea"/>
@@ -3496,7 +3977,7 @@
     </p:bodyStyle>
     <p:otherStyle>
       <a:defPPr>
-        <a:defRPr lang="ja-JP"/>
+        <a:defRPr lang="en-US"/>
       </a:defPPr>
       <a:lvl1pPr marL="0" algn="l" defTabSz="914400" rtl="0" eaLnBrk="1" latinLnBrk="0" hangingPunct="1">
         <a:defRPr kumimoji="1" sz="1800" kern="1200">
@@ -3590,6 +4071,52 @@
       </a:lvl9pPr>
     </p:otherStyle>
   </p:txStyles>
+  <p:extLst>
+    <p:ext uri="{27BBF7A9-308A-43DC-89C8-2F10F3537804}">
+      <p15:sldGuideLst xmlns:p15="http://schemas.microsoft.com/office/powerpoint/2012/main">
+        <p15:guide id="3" orient="horz" pos="1368">
+          <p15:clr>
+            <a:srgbClr val="F26B43"/>
+          </p15:clr>
+        </p15:guide>
+        <p15:guide id="4" orient="horz" pos="1440">
+          <p15:clr>
+            <a:srgbClr val="F26B43"/>
+          </p15:clr>
+        </p15:guide>
+        <p15:guide id="6" orient="horz" pos="3696">
+          <p15:clr>
+            <a:srgbClr val="F26B43"/>
+          </p15:clr>
+        </p15:guide>
+        <p15:guide id="7" orient="horz" pos="432">
+          <p15:clr>
+            <a:srgbClr val="F26B43"/>
+          </p15:clr>
+        </p15:guide>
+        <p15:guide id="8" orient="horz" pos="1512">
+          <p15:clr>
+            <a:srgbClr val="F26B43"/>
+          </p15:clr>
+        </p15:guide>
+        <p15:guide id="9" pos="6912">
+          <p15:clr>
+            <a:srgbClr val="F26B43"/>
+          </p15:clr>
+        </p15:guide>
+        <p15:guide id="10" pos="936">
+          <p15:clr>
+            <a:srgbClr val="F26B43"/>
+          </p15:clr>
+        </p15:guide>
+        <p15:guide id="11" pos="864">
+          <p15:clr>
+            <a:srgbClr val="F26B43"/>
+          </p15:clr>
+        </p15:guide>
+      </p15:sldGuideLst>
+    </p:ext>
+  </p:extLst>
 </p:sldMaster>
 </file>
 
@@ -3663,7 +4190,10 @@
           <a:bodyPr/>
           <a:lstStyle/>
           <a:p>
-            <a:endParaRPr kumimoji="1" lang="ja-JP" altLang="en-US"/>
+            <a:r>
+              <a:rPr kumimoji="1" lang="ja-JP" altLang="en-US" dirty="0"/>
+              <a:t>宇田川竜聖</a:t>
+            </a:r>
           </a:p>
         </p:txBody>
       </p:sp>
@@ -3699,132 +4229,489 @@
       </p:grpSpPr>
       <p:sp>
         <p:nvSpPr>
-          <p:cNvPr id="2" name="テキスト ボックス 1">
+          <p:cNvPr id="2" name="タイトル 1">
             <a:extLst>
               <a:ext uri="{FF2B5EF4-FFF2-40B4-BE49-F238E27FC236}">
-                <a16:creationId xmlns:a16="http://schemas.microsoft.com/office/drawing/2014/main" id="{179DBB0A-5B34-C398-913F-3A79B45173B9}"/>
+                <a16:creationId xmlns:a16="http://schemas.microsoft.com/office/drawing/2014/main" id="{12918395-B7EF-9787-1C1B-77253858D2BB}"/>
               </a:ext>
             </a:extLst>
           </p:cNvPr>
-          <p:cNvSpPr txBox="1"/>
+          <p:cNvSpPr txBox="1">
+            <a:spLocks/>
+          </p:cNvSpPr>
           <p:nvPr/>
         </p:nvSpPr>
         <p:spPr>
           <a:xfrm>
-            <a:off x="304799" y="766915"/>
-            <a:ext cx="5565059" cy="707886"/>
+            <a:off x="4037371" y="449826"/>
+            <a:ext cx="4117258" cy="759542"/>
           </a:xfrm>
           <a:prstGeom prst="rect">
             <a:avLst/>
           </a:prstGeom>
-          <a:noFill/>
         </p:spPr>
         <p:txBody>
-          <a:bodyPr wrap="square" rtlCol="0">
-            <a:spAutoFit/>
+          <a:bodyPr>
+            <a:normAutofit/>
           </a:bodyPr>
-          <a:lstStyle/>
-          <a:p>
-            <a:r>
-              <a:rPr lang="ja-JP" altLang="en-US" sz="4000" dirty="0"/>
-              <a:t>・</a:t>
-            </a:r>
-            <a:r>
-              <a:rPr lang="en-US" altLang="ja-JP" sz="4000" dirty="0" err="1"/>
-              <a:t>todo</a:t>
-            </a:r>
-            <a:r>
-              <a:rPr lang="ja-JP" altLang="en-US" sz="4000" dirty="0"/>
-              <a:t>リストを作る</a:t>
-            </a:r>
-            <a:endParaRPr kumimoji="1" lang="ja-JP" altLang="en-US" sz="4000" dirty="0"/>
-          </a:p>
-        </p:txBody>
-      </p:sp>
-      <p:sp>
-        <p:nvSpPr>
-          <p:cNvPr id="3" name="テキスト ボックス 2">
+          <a:lstStyle>
+            <a:lvl1pPr algn="l" defTabSz="914400" rtl="0" eaLnBrk="1" latinLnBrk="0" hangingPunct="1">
+              <a:lnSpc>
+                <a:spcPct val="89000"/>
+              </a:lnSpc>
+              <a:spcBef>
+                <a:spcPct val="0"/>
+              </a:spcBef>
+              <a:buNone/>
+              <a:defRPr kumimoji="1" sz="4400" kern="1200" baseline="0">
+                <a:solidFill>
+                  <a:schemeClr val="tx2"/>
+                </a:solidFill>
+                <a:latin typeface="+mj-lt"/>
+                <a:ea typeface="+mj-ea"/>
+                <a:cs typeface="+mj-cs"/>
+              </a:defRPr>
+            </a:lvl1pPr>
+          </a:lstStyle>
+          <a:p>
+            <a:r>
+              <a:rPr lang="ja-JP" altLang="en-US"/>
+              <a:t>最優先する機能</a:t>
+            </a:r>
+            <a:endParaRPr lang="ja-JP" altLang="en-US" dirty="0"/>
+          </a:p>
+        </p:txBody>
+      </p:sp>
+      <p:sp>
+        <p:nvSpPr>
+          <p:cNvPr id="3" name="楕円 2">
             <a:extLst>
               <a:ext uri="{FF2B5EF4-FFF2-40B4-BE49-F238E27FC236}">
-                <a16:creationId xmlns:a16="http://schemas.microsoft.com/office/drawing/2014/main" id="{A482EDAA-50E1-8FD6-A256-9784104D3DF4}"/>
+                <a16:creationId xmlns:a16="http://schemas.microsoft.com/office/drawing/2014/main" id="{CD50E7C0-42A0-36AE-E07B-CA7128156EED}"/>
               </a:ext>
             </a:extLst>
           </p:cNvPr>
-          <p:cNvSpPr txBox="1"/>
+          <p:cNvSpPr/>
           <p:nvPr/>
         </p:nvSpPr>
         <p:spPr>
           <a:xfrm>
-            <a:off x="304799" y="1774721"/>
-            <a:ext cx="11336595" cy="1323439"/>
+            <a:off x="1893242" y="2099188"/>
+            <a:ext cx="3600000" cy="3600000"/>
+          </a:xfrm>
+          <a:prstGeom prst="ellipse">
+            <a:avLst/>
+          </a:prstGeom>
+        </p:spPr>
+        <p:style>
+          <a:lnRef idx="1">
+            <a:schemeClr val="accent2"/>
+          </a:lnRef>
+          <a:fillRef idx="2">
+            <a:schemeClr val="accent2"/>
+          </a:fillRef>
+          <a:effectRef idx="1">
+            <a:schemeClr val="accent2"/>
+          </a:effectRef>
+          <a:fontRef idx="minor">
+            <a:schemeClr val="dk1"/>
+          </a:fontRef>
+        </p:style>
+        <p:txBody>
+          <a:bodyPr rtlCol="0" anchor="ctr"/>
+          <a:lstStyle/>
+          <a:p>
+            <a:pPr algn="ctr">
+              <a:lnSpc>
+                <a:spcPct val="150000"/>
+              </a:lnSpc>
+            </a:pPr>
+            <a:r>
+              <a:rPr kumimoji="1" lang="en-US" altLang="ja-JP" sz="2800" dirty="0"/>
+              <a:t>TODO</a:t>
+            </a:r>
+            <a:r>
+              <a:rPr kumimoji="1" lang="ja-JP" altLang="en-US" sz="2800" dirty="0"/>
+              <a:t>リストの</a:t>
+            </a:r>
+            <a:endParaRPr kumimoji="1" lang="en-US" altLang="ja-JP" sz="2800" dirty="0"/>
+          </a:p>
+          <a:p>
+            <a:pPr algn="ctr">
+              <a:lnSpc>
+                <a:spcPct val="150000"/>
+              </a:lnSpc>
+            </a:pPr>
+            <a:r>
+              <a:rPr kumimoji="1" lang="ja-JP" altLang="en-US" sz="2800" dirty="0"/>
+              <a:t>追加・削除</a:t>
+            </a:r>
+          </a:p>
+        </p:txBody>
+      </p:sp>
+      <p:sp>
+        <p:nvSpPr>
+          <p:cNvPr id="4" name="楕円 3">
+            <a:extLst>
+              <a:ext uri="{FF2B5EF4-FFF2-40B4-BE49-F238E27FC236}">
+                <a16:creationId xmlns:a16="http://schemas.microsoft.com/office/drawing/2014/main" id="{5E5DFFAA-5BC0-78F5-1EDC-3C574AD8ED0B}"/>
+              </a:ext>
+            </a:extLst>
+          </p:cNvPr>
+          <p:cNvSpPr/>
+          <p:nvPr/>
+        </p:nvSpPr>
+        <p:spPr>
+          <a:xfrm>
+            <a:off x="7004090" y="2099188"/>
+            <a:ext cx="3600000" cy="3600000"/>
+          </a:xfrm>
+          <a:prstGeom prst="ellipse">
+            <a:avLst/>
+          </a:prstGeom>
+        </p:spPr>
+        <p:style>
+          <a:lnRef idx="1">
+            <a:schemeClr val="accent2"/>
+          </a:lnRef>
+          <a:fillRef idx="2">
+            <a:schemeClr val="accent2"/>
+          </a:fillRef>
+          <a:effectRef idx="1">
+            <a:schemeClr val="accent2"/>
+          </a:effectRef>
+          <a:fontRef idx="minor">
+            <a:schemeClr val="dk1"/>
+          </a:fontRef>
+        </p:style>
+        <p:txBody>
+          <a:bodyPr rtlCol="0" anchor="ctr"/>
+          <a:lstStyle/>
+          <a:p>
+            <a:pPr algn="ctr">
+              <a:lnSpc>
+                <a:spcPct val="150000"/>
+              </a:lnSpc>
+            </a:pPr>
+            <a:r>
+              <a:rPr kumimoji="1" lang="en-US" altLang="ja-JP" sz="2800" dirty="0"/>
+              <a:t>TODO</a:t>
+            </a:r>
+            <a:r>
+              <a:rPr kumimoji="1" lang="ja-JP" altLang="en-US" sz="2800" dirty="0"/>
+              <a:t>リストの</a:t>
+            </a:r>
+            <a:endParaRPr kumimoji="1" lang="en-US" altLang="ja-JP" sz="2800" dirty="0"/>
+          </a:p>
+          <a:p>
+            <a:pPr algn="ctr">
+              <a:lnSpc>
+                <a:spcPct val="150000"/>
+              </a:lnSpc>
+            </a:pPr>
+            <a:r>
+              <a:rPr kumimoji="1" lang="ja-JP" altLang="en-US" sz="2800" dirty="0"/>
+              <a:t>保存</a:t>
+            </a:r>
+          </a:p>
+        </p:txBody>
+      </p:sp>
+    </p:spTree>
+    <p:extLst>
+      <p:ext uri="{BB962C8B-B14F-4D97-AF65-F5344CB8AC3E}">
+        <p14:creationId xmlns:p14="http://schemas.microsoft.com/office/powerpoint/2010/main" val="3016099760"/>
+      </p:ext>
+    </p:extLst>
+  </p:cSld>
+  <p:clrMapOvr>
+    <a:masterClrMapping/>
+  </p:clrMapOvr>
+</p:sld>
+</file>
+
+<file path=ppt/slides/slide3.xml><?xml version="1.0" encoding="utf-8"?>
+<p:sld xmlns:a="http://schemas.openxmlformats.org/drawingml/2006/main" xmlns:r="http://schemas.openxmlformats.org/officeDocument/2006/relationships" xmlns:p="http://schemas.openxmlformats.org/presentationml/2006/main">
+  <p:cSld>
+    <p:spTree>
+      <p:nvGrpSpPr>
+        <p:cNvPr id="1" name="">
+          <a:extLst>
+            <a:ext uri="{FF2B5EF4-FFF2-40B4-BE49-F238E27FC236}">
+              <a16:creationId xmlns:a16="http://schemas.microsoft.com/office/drawing/2014/main" id="{AC01C5AB-A551-3D72-90EE-73F806C0663A}"/>
+            </a:ext>
+          </a:extLst>
+        </p:cNvPr>
+        <p:cNvGrpSpPr/>
+        <p:nvPr/>
+      </p:nvGrpSpPr>
+      <p:grpSpPr>
+        <a:xfrm>
+          <a:off x="0" y="0"/>
+          <a:ext cx="0" cy="0"/>
+          <a:chOff x="0" y="0"/>
+          <a:chExt cx="0" cy="0"/>
+        </a:xfrm>
+      </p:grpSpPr>
+      <p:sp>
+        <p:nvSpPr>
+          <p:cNvPr id="2" name="タイトル 1">
+            <a:extLst>
+              <a:ext uri="{FF2B5EF4-FFF2-40B4-BE49-F238E27FC236}">
+                <a16:creationId xmlns:a16="http://schemas.microsoft.com/office/drawing/2014/main" id="{82D5749F-944D-A0AC-7F03-342EA101893E}"/>
+              </a:ext>
+            </a:extLst>
+          </p:cNvPr>
+          <p:cNvSpPr txBox="1">
+            <a:spLocks/>
+          </p:cNvSpPr>
+          <p:nvPr/>
+        </p:nvSpPr>
+        <p:spPr>
+          <a:xfrm>
+            <a:off x="4037371" y="449826"/>
+            <a:ext cx="4117258" cy="759542"/>
           </a:xfrm>
           <a:prstGeom prst="rect">
             <a:avLst/>
           </a:prstGeom>
-          <a:noFill/>
         </p:spPr>
         <p:txBody>
-          <a:bodyPr wrap="square" rtlCol="0">
-            <a:spAutoFit/>
+          <a:bodyPr>
+            <a:normAutofit fontScale="85000" lnSpcReduction="10000"/>
           </a:bodyPr>
-          <a:lstStyle/>
-          <a:p>
-            <a:r>
-              <a:rPr lang="ja-JP" altLang="en-US" sz="4000" dirty="0"/>
-              <a:t>・最低限</a:t>
-            </a:r>
-            <a:r>
-              <a:rPr lang="en-US" altLang="ja-JP" sz="4000" dirty="0" err="1"/>
-              <a:t>todo</a:t>
-            </a:r>
-            <a:r>
-              <a:rPr lang="ja-JP" altLang="en-US" sz="4000" dirty="0"/>
-              <a:t>リストの追加と削除ができるようにする</a:t>
-            </a:r>
-            <a:endParaRPr kumimoji="1" lang="ja-JP" altLang="en-US" sz="4000" dirty="0"/>
-          </a:p>
-        </p:txBody>
-      </p:sp>
-      <p:sp>
-        <p:nvSpPr>
-          <p:cNvPr id="4" name="テキスト ボックス 3">
+          <a:lstStyle>
+            <a:lvl1pPr algn="l" defTabSz="914400" rtl="0" eaLnBrk="1" latinLnBrk="0" hangingPunct="1">
+              <a:lnSpc>
+                <a:spcPct val="89000"/>
+              </a:lnSpc>
+              <a:spcBef>
+                <a:spcPct val="0"/>
+              </a:spcBef>
+              <a:buNone/>
+              <a:defRPr kumimoji="1" sz="4400" kern="1200" baseline="0">
+                <a:solidFill>
+                  <a:schemeClr val="tx2"/>
+                </a:solidFill>
+                <a:latin typeface="+mj-lt"/>
+                <a:ea typeface="+mj-ea"/>
+                <a:cs typeface="+mj-cs"/>
+              </a:defRPr>
+            </a:lvl1pPr>
+          </a:lstStyle>
+          <a:p>
+            <a:r>
+              <a:rPr lang="ja-JP" altLang="en-US" dirty="0"/>
+              <a:t>余裕があれば実装</a:t>
+            </a:r>
+          </a:p>
+        </p:txBody>
+      </p:sp>
+      <p:sp>
+        <p:nvSpPr>
+          <p:cNvPr id="3" name="楕円 2">
             <a:extLst>
               <a:ext uri="{FF2B5EF4-FFF2-40B4-BE49-F238E27FC236}">
-                <a16:creationId xmlns:a16="http://schemas.microsoft.com/office/drawing/2014/main" id="{57DC6A1A-FB01-F814-7F3A-3E1A98D0177F}"/>
+                <a16:creationId xmlns:a16="http://schemas.microsoft.com/office/drawing/2014/main" id="{D221B393-2508-5E7B-9BC6-8FCEFE10769D}"/>
               </a:ext>
             </a:extLst>
           </p:cNvPr>
-          <p:cNvSpPr txBox="1"/>
+          <p:cNvSpPr/>
           <p:nvPr/>
         </p:nvSpPr>
         <p:spPr>
           <a:xfrm>
-            <a:off x="201560" y="3398080"/>
-            <a:ext cx="11336595" cy="1323439"/>
-          </a:xfrm>
-          <a:prstGeom prst="rect">
+            <a:off x="1709371" y="1209368"/>
+            <a:ext cx="2880000" cy="2880000"/>
+          </a:xfrm>
+          <a:prstGeom prst="ellipse">
             <a:avLst/>
           </a:prstGeom>
-          <a:noFill/>
         </p:spPr>
-        <p:txBody>
-          <a:bodyPr wrap="square" rtlCol="0">
-            <a:spAutoFit/>
-          </a:bodyPr>
+        <p:style>
+          <a:lnRef idx="1">
+            <a:schemeClr val="accent2"/>
+          </a:lnRef>
+          <a:fillRef idx="2">
+            <a:schemeClr val="accent2"/>
+          </a:fillRef>
+          <a:effectRef idx="1">
+            <a:schemeClr val="accent2"/>
+          </a:effectRef>
+          <a:fontRef idx="minor">
+            <a:schemeClr val="dk1"/>
+          </a:fontRef>
+        </p:style>
+        <p:txBody>
+          <a:bodyPr rtlCol="0" anchor="ctr"/>
           <a:lstStyle/>
           <a:p>
-            <a:r>
-              <a:rPr lang="ja-JP" altLang="en-US" sz="4000" dirty="0"/>
-              <a:t>・余裕があれば日時の設定やカテゴリ毎にまとめる機能など追加する</a:t>
-            </a:r>
-            <a:endParaRPr kumimoji="1" lang="ja-JP" altLang="en-US" sz="4000" dirty="0"/>
+            <a:pPr algn="ctr">
+              <a:lnSpc>
+                <a:spcPct val="150000"/>
+              </a:lnSpc>
+            </a:pPr>
+            <a:r>
+              <a:rPr kumimoji="1" lang="ja-JP" altLang="en-US" sz="2800" dirty="0"/>
+              <a:t>日時設定</a:t>
+            </a:r>
+            <a:endParaRPr kumimoji="1" lang="en-US" altLang="ja-JP" sz="2800" dirty="0"/>
+          </a:p>
+        </p:txBody>
+      </p:sp>
+      <p:sp>
+        <p:nvSpPr>
+          <p:cNvPr id="6" name="楕円 5">
+            <a:extLst>
+              <a:ext uri="{FF2B5EF4-FFF2-40B4-BE49-F238E27FC236}">
+                <a16:creationId xmlns:a16="http://schemas.microsoft.com/office/drawing/2014/main" id="{69A54F0B-805E-A746-9B64-412143FE56E7}"/>
+              </a:ext>
+            </a:extLst>
+          </p:cNvPr>
+          <p:cNvSpPr/>
+          <p:nvPr/>
+        </p:nvSpPr>
+        <p:spPr>
+          <a:xfrm>
+            <a:off x="4656000" y="3764640"/>
+            <a:ext cx="2880000" cy="2880000"/>
+          </a:xfrm>
+          <a:prstGeom prst="ellipse">
+            <a:avLst/>
+          </a:prstGeom>
+        </p:spPr>
+        <p:style>
+          <a:lnRef idx="1">
+            <a:schemeClr val="accent2"/>
+          </a:lnRef>
+          <a:fillRef idx="2">
+            <a:schemeClr val="accent2"/>
+          </a:fillRef>
+          <a:effectRef idx="1">
+            <a:schemeClr val="accent2"/>
+          </a:effectRef>
+          <a:fontRef idx="minor">
+            <a:schemeClr val="dk1"/>
+          </a:fontRef>
+        </p:style>
+        <p:txBody>
+          <a:bodyPr rtlCol="0" anchor="ctr"/>
+          <a:lstStyle/>
+          <a:p>
+            <a:pPr algn="ctr">
+              <a:lnSpc>
+                <a:spcPct val="150000"/>
+              </a:lnSpc>
+            </a:pPr>
+            <a:r>
+              <a:rPr kumimoji="1" lang="en-US" altLang="ja-JP" sz="2800" dirty="0"/>
+              <a:t>UI</a:t>
+            </a:r>
+            <a:r>
+              <a:rPr kumimoji="1" lang="ja-JP" altLang="en-US" sz="2800" dirty="0"/>
+              <a:t>の工夫</a:t>
+            </a:r>
+            <a:endParaRPr kumimoji="1" lang="en-US" altLang="ja-JP" sz="2800" dirty="0"/>
+          </a:p>
+        </p:txBody>
+      </p:sp>
+      <p:sp>
+        <p:nvSpPr>
+          <p:cNvPr id="7" name="楕円 6">
+            <a:extLst>
+              <a:ext uri="{FF2B5EF4-FFF2-40B4-BE49-F238E27FC236}">
+                <a16:creationId xmlns:a16="http://schemas.microsoft.com/office/drawing/2014/main" id="{43603B06-72ED-30E9-D9B1-0650F73D763D}"/>
+              </a:ext>
+            </a:extLst>
+          </p:cNvPr>
+          <p:cNvSpPr/>
+          <p:nvPr/>
+        </p:nvSpPr>
+        <p:spPr>
+          <a:xfrm>
+            <a:off x="7602629" y="1209368"/>
+            <a:ext cx="2880000" cy="2880000"/>
+          </a:xfrm>
+          <a:prstGeom prst="ellipse">
+            <a:avLst/>
+          </a:prstGeom>
+        </p:spPr>
+        <p:style>
+          <a:lnRef idx="1">
+            <a:schemeClr val="accent2"/>
+          </a:lnRef>
+          <a:fillRef idx="2">
+            <a:schemeClr val="accent2"/>
+          </a:fillRef>
+          <a:effectRef idx="1">
+            <a:schemeClr val="accent2"/>
+          </a:effectRef>
+          <a:fontRef idx="minor">
+            <a:schemeClr val="dk1"/>
+          </a:fontRef>
+        </p:style>
+        <p:txBody>
+          <a:bodyPr rtlCol="0" anchor="ctr"/>
+          <a:lstStyle/>
+          <a:p>
+            <a:pPr algn="ctr">
+              <a:lnSpc>
+                <a:spcPct val="150000"/>
+              </a:lnSpc>
+            </a:pPr>
+            <a:r>
+              <a:rPr kumimoji="1" lang="ja-JP" altLang="en-US" sz="2800" dirty="0"/>
+              <a:t>カテゴリの</a:t>
+            </a:r>
+            <a:endParaRPr kumimoji="1" lang="en-US" altLang="ja-JP" sz="2800" dirty="0"/>
+          </a:p>
+          <a:p>
+            <a:pPr algn="ctr">
+              <a:lnSpc>
+                <a:spcPct val="150000"/>
+              </a:lnSpc>
+            </a:pPr>
+            <a:r>
+              <a:rPr kumimoji="1" lang="ja-JP" altLang="en-US" sz="2800" dirty="0"/>
+              <a:t>設定・区分</a:t>
+            </a:r>
+            <a:endParaRPr kumimoji="1" lang="en-US" altLang="ja-JP" sz="2800" dirty="0"/>
           </a:p>
         </p:txBody>
       </p:sp>
     </p:spTree>
     <p:extLst>
       <p:ext uri="{BB962C8B-B14F-4D97-AF65-F5344CB8AC3E}">
-        <p14:creationId xmlns:p14="http://schemas.microsoft.com/office/powerpoint/2010/main" val="3840918743"/>
+        <p14:creationId xmlns:p14="http://schemas.microsoft.com/office/powerpoint/2010/main" val="2350854536"/>
+      </p:ext>
+    </p:extLst>
+  </p:cSld>
+  <p:clrMapOvr>
+    <a:masterClrMapping/>
+  </p:clrMapOvr>
+</p:sld>
+</file>
+
+<file path=ppt/slides/slide4.xml><?xml version="1.0" encoding="utf-8"?>
+<p:sld xmlns:a="http://schemas.openxmlformats.org/drawingml/2006/main" xmlns:r="http://schemas.openxmlformats.org/officeDocument/2006/relationships" xmlns:p="http://schemas.openxmlformats.org/presentationml/2006/main">
+  <p:cSld>
+    <p:spTree>
+      <p:nvGrpSpPr>
+        <p:cNvPr id="1" name=""/>
+        <p:cNvGrpSpPr/>
+        <p:nvPr/>
+      </p:nvGrpSpPr>
+      <p:grpSpPr>
+        <a:xfrm>
+          <a:off x="0" y="0"/>
+          <a:ext cx="0" cy="0"/>
+          <a:chOff x="0" y="0"/>
+          <a:chExt cx="0" cy="0"/>
+        </a:xfrm>
+      </p:grpSpPr>
+    </p:spTree>
+    <p:extLst>
+      <p:ext uri="{BB962C8B-B14F-4D97-AF65-F5344CB8AC3E}">
+        <p14:creationId xmlns:p14="http://schemas.microsoft.com/office/powerpoint/2010/main" val="3574809456"/>
       </p:ext>
     </p:extLst>
   </p:cSld>
@@ -3835,9 +4722,9 @@
 </file>
 
 <file path=ppt/theme/theme1.xml><?xml version="1.0" encoding="utf-8"?>
-<a:theme xmlns:a="http://schemas.openxmlformats.org/drawingml/2006/main" name="Office テーマ">
+<a:theme xmlns:a="http://schemas.openxmlformats.org/drawingml/2006/main" name="トリミング">
   <a:themeElements>
-    <a:clrScheme name="Office">
+    <a:clrScheme name="トリミング">
       <a:dk1>
         <a:sysClr val="windowText" lastClr="000000"/>
       </a:dk1>
@@ -3845,100 +4732,48 @@
         <a:sysClr val="window" lastClr="FFFFFF"/>
       </a:lt1>
       <a:dk2>
-        <a:srgbClr val="0E2841"/>
+        <a:srgbClr val="191B0E"/>
       </a:dk2>
       <a:lt2>
-        <a:srgbClr val="E8E8E8"/>
+        <a:srgbClr val="EFEDE3"/>
       </a:lt2>
       <a:accent1>
-        <a:srgbClr val="156082"/>
+        <a:srgbClr val="8C8D86"/>
       </a:accent1>
       <a:accent2>
-        <a:srgbClr val="E97132"/>
+        <a:srgbClr val="E6C069"/>
       </a:accent2>
       <a:accent3>
-        <a:srgbClr val="196B24"/>
+        <a:srgbClr val="897B61"/>
       </a:accent3>
       <a:accent4>
-        <a:srgbClr val="0F9ED5"/>
+        <a:srgbClr val="8DAB8E"/>
       </a:accent4>
       <a:accent5>
-        <a:srgbClr val="A02B93"/>
+        <a:srgbClr val="77A2BB"/>
       </a:accent5>
       <a:accent6>
-        <a:srgbClr val="4EA72E"/>
+        <a:srgbClr val="E28394"/>
       </a:accent6>
       <a:hlink>
-        <a:srgbClr val="467886"/>
+        <a:srgbClr val="77A2BB"/>
       </a:hlink>
       <a:folHlink>
-        <a:srgbClr val="96607D"/>
+        <a:srgbClr val="957A99"/>
       </a:folHlink>
     </a:clrScheme>
-    <a:fontScheme name="Office">
+    <a:fontScheme name="トリミング">
       <a:majorFont>
-        <a:latin typeface="游ゴシック Light" panose="02110004020202020204"/>
+        <a:latin typeface="Franklin Gothic Book" panose="020B0503020102020204"/>
         <a:ea typeface=""/>
         <a:cs typeface=""/>
-        <a:font script="Jpan" typeface="游ゴシック Light"/>
-        <a:font script="Hang" typeface="맑은 고딕"/>
-        <a:font script="Hans" typeface="等线 Light"/>
-        <a:font script="Hant" typeface="新細明體"/>
-        <a:font script="Arab" typeface="Times New Roman"/>
-        <a:font script="Hebr" typeface="Times New Roman"/>
-        <a:font script="Thai" typeface="Angsana New"/>
-        <a:font script="Ethi" typeface="Nyala"/>
-        <a:font script="Beng" typeface="Vrinda"/>
-        <a:font script="Gujr" typeface="Shruti"/>
-        <a:font script="Khmr" typeface="MoolBoran"/>
-        <a:font script="Knda" typeface="Tunga"/>
-        <a:font script="Guru" typeface="Raavi"/>
-        <a:font script="Cans" typeface="Euphemia"/>
-        <a:font script="Cher" typeface="Plantagenet Cherokee"/>
-        <a:font script="Yiii" typeface="Microsoft Yi Baiti"/>
-        <a:font script="Tibt" typeface="Microsoft Himalaya"/>
-        <a:font script="Thaa" typeface="MV Boli"/>
-        <a:font script="Deva" typeface="Mangal"/>
-        <a:font script="Telu" typeface="Gautami"/>
-        <a:font script="Taml" typeface="Latha"/>
-        <a:font script="Syrc" typeface="Estrangelo Edessa"/>
-        <a:font script="Orya" typeface="Kalinga"/>
-        <a:font script="Mlym" typeface="Kartika"/>
-        <a:font script="Laoo" typeface="DokChampa"/>
-        <a:font script="Sinh" typeface="Iskoola Pota"/>
-        <a:font script="Mong" typeface="Mongolian Baiti"/>
-        <a:font script="Viet" typeface="Times New Roman"/>
-        <a:font script="Uigh" typeface="Microsoft Uighur"/>
-        <a:font script="Geor" typeface="Sylfaen"/>
-        <a:font script="Armn" typeface="Arial"/>
-        <a:font script="Bugi" typeface="Leelawadee UI"/>
-        <a:font script="Bopo" typeface="Microsoft JhengHei"/>
-        <a:font script="Java" typeface="Javanese Text"/>
-        <a:font script="Lisu" typeface="Segoe UI"/>
-        <a:font script="Mymr" typeface="Myanmar Text"/>
-        <a:font script="Nkoo" typeface="Ebrima"/>
-        <a:font script="Olck" typeface="Nirmala UI"/>
-        <a:font script="Osma" typeface="Ebrima"/>
-        <a:font script="Phag" typeface="Phagspa"/>
-        <a:font script="Syrn" typeface="Estrangelo Edessa"/>
-        <a:font script="Syrj" typeface="Estrangelo Edessa"/>
-        <a:font script="Syre" typeface="Estrangelo Edessa"/>
-        <a:font script="Sora" typeface="Nirmala UI"/>
-        <a:font script="Tale" typeface="Microsoft Tai Le"/>
-        <a:font script="Talu" typeface="Microsoft New Tai Lue"/>
-        <a:font script="Tfng" typeface="Ebrima"/>
-      </a:majorFont>
-      <a:minorFont>
-        <a:latin typeface="游ゴシック" panose="02110004020202020204"/>
-        <a:ea typeface=""/>
-        <a:cs typeface=""/>
-        <a:font script="Jpan" typeface="游ゴシック"/>
-        <a:font script="Hang" typeface="맑은 고딕"/>
-        <a:font script="Hans" typeface="等线"/>
-        <a:font script="Hant" typeface="新細明體"/>
-        <a:font script="Arab" typeface="Arial"/>
-        <a:font script="Hebr" typeface="Arial"/>
-        <a:font script="Thai" typeface="Cordia New"/>
+        <a:font script="Jpan" typeface="メイリオ"/>
+        <a:font script="Hang" typeface="돋움"/>
+        <a:font script="Hans" typeface="华文楷体"/>
+        <a:font script="Hant" typeface="微軟正黑體"/>
+        <a:font script="Arab" typeface="Tahoma"/>
+        <a:font script="Hebr" typeface="Aharoni"/>
+        <a:font script="Thai" typeface="LilyUPC"/>
         <a:font script="Ethi" typeface="Nyala"/>
         <a:font script="Beng" typeface="Vrinda"/>
         <a:font script="Gujr" typeface="Shruti"/>
@@ -3959,29 +4794,47 @@
         <a:font script="Laoo" typeface="DokChampa"/>
         <a:font script="Sinh" typeface="Iskoola Pota"/>
         <a:font script="Mong" typeface="Mongolian Baiti"/>
-        <a:font script="Viet" typeface="Arial"/>
+        <a:font script="Viet" typeface="Tahoma"/>
         <a:font script="Uigh" typeface="Microsoft Uighur"/>
         <a:font script="Geor" typeface="Sylfaen"/>
-        <a:font script="Armn" typeface="Arial"/>
-        <a:font script="Bugi" typeface="Leelawadee UI"/>
-        <a:font script="Bopo" typeface="Microsoft JhengHei"/>
-        <a:font script="Java" typeface="Javanese Text"/>
-        <a:font script="Lisu" typeface="Segoe UI"/>
-        <a:font script="Mymr" typeface="Myanmar Text"/>
-        <a:font script="Nkoo" typeface="Ebrima"/>
-        <a:font script="Olck" typeface="Nirmala UI"/>
-        <a:font script="Osma" typeface="Ebrima"/>
-        <a:font script="Phag" typeface="Phagspa"/>
-        <a:font script="Syrn" typeface="Estrangelo Edessa"/>
-        <a:font script="Syrj" typeface="Estrangelo Edessa"/>
-        <a:font script="Syre" typeface="Estrangelo Edessa"/>
-        <a:font script="Sora" typeface="Nirmala UI"/>
-        <a:font script="Tale" typeface="Microsoft Tai Le"/>
-        <a:font script="Talu" typeface="Microsoft New Tai Lue"/>
-        <a:font script="Tfng" typeface="Ebrima"/>
+      </a:majorFont>
+      <a:minorFont>
+        <a:latin typeface="Franklin Gothic Book" panose="020B0503020102020204"/>
+        <a:ea typeface=""/>
+        <a:cs typeface=""/>
+        <a:font script="Jpan" typeface="メイリオ"/>
+        <a:font script="Hang" typeface="돋움"/>
+        <a:font script="Hans" typeface="华文楷体"/>
+        <a:font script="Hant" typeface="微軟正黑體"/>
+        <a:font script="Arab" typeface="Tahoma"/>
+        <a:font script="Hebr" typeface="Aharoni"/>
+        <a:font script="Thai" typeface="LilyUPC"/>
+        <a:font script="Ethi" typeface="Nyala"/>
+        <a:font script="Beng" typeface="Vrinda"/>
+        <a:font script="Gujr" typeface="Shruti"/>
+        <a:font script="Khmr" typeface="DaunPenh"/>
+        <a:font script="Knda" typeface="Tunga"/>
+        <a:font script="Guru" typeface="Raavi"/>
+        <a:font script="Cans" typeface="Euphemia"/>
+        <a:font script="Cher" typeface="Plantagenet Cherokee"/>
+        <a:font script="Yiii" typeface="Microsoft Yi Baiti"/>
+        <a:font script="Tibt" typeface="Microsoft Himalaya"/>
+        <a:font script="Thaa" typeface="MV Boli"/>
+        <a:font script="Deva" typeface="Mangal"/>
+        <a:font script="Telu" typeface="Gautami"/>
+        <a:font script="Taml" typeface="Latha"/>
+        <a:font script="Syrc" typeface="Estrangelo Edessa"/>
+        <a:font script="Orya" typeface="Kalinga"/>
+        <a:font script="Mlym" typeface="Kartika"/>
+        <a:font script="Laoo" typeface="DokChampa"/>
+        <a:font script="Sinh" typeface="Iskoola Pota"/>
+        <a:font script="Mong" typeface="Mongolian Baiti"/>
+        <a:font script="Viet" typeface="Tahoma"/>
+        <a:font script="Uigh" typeface="Microsoft Uighur"/>
+        <a:font script="Geor" typeface="Sylfaen"/>
       </a:minorFont>
     </a:fontScheme>
-    <a:fmtScheme name="Office">
+    <a:fmtScheme name="トリミング">
       <a:fillStyleLst>
         <a:solidFill>
           <a:schemeClr val="phClr"/>
@@ -3990,23 +4843,23 @@
           <a:gsLst>
             <a:gs pos="0">
               <a:schemeClr val="phClr">
+                <a:tint val="67000"/>
+                <a:satMod val="105000"/>
                 <a:lumMod val="110000"/>
-                <a:satMod val="105000"/>
-                <a:tint val="67000"/>
               </a:schemeClr>
             </a:gs>
             <a:gs pos="50000">
               <a:schemeClr val="phClr">
+                <a:tint val="73000"/>
+                <a:satMod val="103000"/>
                 <a:lumMod val="105000"/>
-                <a:satMod val="103000"/>
-                <a:tint val="73000"/>
               </a:schemeClr>
             </a:gs>
             <a:gs pos="100000">
               <a:schemeClr val="phClr">
+                <a:tint val="81000"/>
+                <a:satMod val="109000"/>
                 <a:lumMod val="105000"/>
-                <a:satMod val="109000"/>
-                <a:tint val="81000"/>
               </a:schemeClr>
             </a:gs>
           </a:gsLst>
@@ -4016,23 +4869,23 @@
           <a:gsLst>
             <a:gs pos="0">
               <a:schemeClr val="phClr">
+                <a:tint val="94000"/>
                 <a:satMod val="103000"/>
                 <a:lumMod val="102000"/>
-                <a:tint val="94000"/>
               </a:schemeClr>
             </a:gs>
             <a:gs pos="50000">
               <a:schemeClr val="phClr">
+                <a:shade val="100000"/>
                 <a:satMod val="110000"/>
                 <a:lumMod val="100000"/>
-                <a:shade val="100000"/>
               </a:schemeClr>
             </a:gs>
             <a:gs pos="100000">
               <a:schemeClr val="phClr">
+                <a:shade val="78000"/>
+                <a:satMod val="120000"/>
                 <a:lumMod val="99000"/>
-                <a:satMod val="120000"/>
-                <a:shade val="78000"/>
               </a:schemeClr>
             </a:gs>
           </a:gsLst>
@@ -4040,26 +4893,23 @@
         </a:gradFill>
       </a:fillStyleLst>
       <a:lnStyleLst>
-        <a:ln w="12700" cap="flat" cmpd="sng" algn="ctr">
+        <a:ln w="6350" cap="flat" cmpd="sng" algn="in">
           <a:solidFill>
             <a:schemeClr val="phClr"/>
           </a:solidFill>
           <a:prstDash val="solid"/>
-          <a:miter lim="800000"/>
         </a:ln>
-        <a:ln w="19050" cap="flat" cmpd="sng" algn="ctr">
+        <a:ln w="34925" cap="flat" cmpd="sng" algn="in">
           <a:solidFill>
             <a:schemeClr val="phClr"/>
           </a:solidFill>
           <a:prstDash val="solid"/>
-          <a:miter lim="800000"/>
         </a:ln>
-        <a:ln w="25400" cap="flat" cmpd="sng" algn="ctr">
+        <a:ln w="19050" cap="flat" cmpd="sng" algn="in">
           <a:solidFill>
             <a:schemeClr val="phClr"/>
           </a:solidFill>
           <a:prstDash val="solid"/>
-          <a:miter lim="800000"/>
         </a:ln>
       </a:lnStyleLst>
       <a:effectStyleLst>
@@ -4073,7 +4923,7 @@
           <a:effectLst>
             <a:outerShdw blurRad="57150" dist="19050" dir="5400000" algn="ctr" rotWithShape="0">
               <a:srgbClr val="000000">
-                <a:alpha val="63000"/>
+                <a:alpha val="35000"/>
               </a:srgbClr>
             </a:outerShdw>
           </a:effectLst>
@@ -4094,16 +4944,16 @@
             <a:gs pos="0">
               <a:schemeClr val="phClr">
                 <a:tint val="93000"/>
+                <a:shade val="98000"/>
                 <a:satMod val="150000"/>
-                <a:shade val="98000"/>
                 <a:lumMod val="102000"/>
               </a:schemeClr>
             </a:gs>
             <a:gs pos="50000">
               <a:schemeClr val="phClr">
                 <a:tint val="98000"/>
+                <a:shade val="90000"/>
                 <a:satMod val="130000"/>
-                <a:shade val="90000"/>
                 <a:lumMod val="103000"/>
               </a:schemeClr>
             </a:gs>
@@ -4119,31 +4969,11 @@
       </a:bgFillStyleLst>
     </a:fmtScheme>
   </a:themeElements>
-  <a:objectDefaults>
-    <a:lnDef>
-      <a:spPr/>
-      <a:bodyPr/>
-      <a:lstStyle/>
-      <a:style>
-        <a:lnRef idx="2">
-          <a:schemeClr val="accent1"/>
-        </a:lnRef>
-        <a:fillRef idx="0">
-          <a:schemeClr val="accent1"/>
-        </a:fillRef>
-        <a:effectRef idx="1">
-          <a:schemeClr val="accent1"/>
-        </a:effectRef>
-        <a:fontRef idx="minor">
-          <a:schemeClr val="tx1"/>
-        </a:fontRef>
-      </a:style>
-    </a:lnDef>
-  </a:objectDefaults>
+  <a:objectDefaults/>
   <a:extraClrSchemeLst/>
   <a:extLst>
     <a:ext uri="{05A4C25C-085E-4340-85A3-A5531E510DB2}">
-      <thm15:themeFamily xmlns:thm15="http://schemas.microsoft.com/office/thememl/2012/main" name="Office Theme" id="{2E142A2C-CD16-42D6-873A-C26D2A0506FA}" vid="{1BDDFF52-6CD6-40A5-AB3C-68EB2F1E4D0A}"/>
+      <thm15:themeFamily xmlns:thm15="http://schemas.microsoft.com/office/thememl/2012/main" name="Crop" id="{EC9488ED-E761-4D60-9AC4-764D1FE2C171}" vid="{CE19780C-D67D-4C13-9DE9-A52BC3BA51B4}"/>
     </a:ext>
   </a:extLst>
 </a:theme>

--- a/モバイル授業_todoリスト.pptx
+++ b/モバイル授業_todoリスト.pptx
@@ -427,6 +427,13 @@
               <a:tailEnd/>
             </a:ln>
           </p:spPr>
+          <p:txBody>
+            <a:bodyPr/>
+            <a:lstStyle/>
+            <a:p>
+              <a:endParaRPr lang="ja-JP" altLang="en-US"/>
+            </a:p>
+          </p:txBody>
         </p:sp>
         <p:sp>
           <p:nvSpPr>
@@ -485,6 +492,13 @@
               <a:tailEnd/>
             </a:ln>
           </p:spPr>
+          <p:txBody>
+            <a:bodyPr/>
+            <a:lstStyle/>
+            <a:p>
+              <a:endParaRPr lang="ja-JP" altLang="en-US"/>
+            </a:p>
+          </p:txBody>
         </p:sp>
       </p:grpSp>
     </p:spTree>
@@ -3742,6 +3756,13 @@
             <a:schemeClr val="lt1"/>
           </a:fontRef>
         </p:style>
+        <p:txBody>
+          <a:bodyPr/>
+          <a:lstStyle/>
+          <a:p>
+            <a:endParaRPr lang="ja-JP" altLang="en-US"/>
+          </a:p>
+        </p:txBody>
       </p:sp>
     </p:spTree>
     <p:extLst>
@@ -4520,7 +4541,7 @@
         </p:nvSpPr>
         <p:spPr>
           <a:xfrm>
-            <a:off x="1709371" y="1209368"/>
+            <a:off x="814742" y="1209368"/>
             <a:ext cx="2880000" cy="2880000"/>
           </a:xfrm>
           <a:prstGeom prst="ellipse">
@@ -4572,7 +4593,7 @@
         </p:nvSpPr>
         <p:spPr>
           <a:xfrm>
-            <a:off x="4656000" y="3764640"/>
+            <a:off x="3694742" y="3764640"/>
             <a:ext cx="2880000" cy="2880000"/>
           </a:xfrm>
           <a:prstGeom prst="ellipse">
@@ -4628,7 +4649,7 @@
         </p:nvSpPr>
         <p:spPr>
           <a:xfrm>
-            <a:off x="7602629" y="1209368"/>
+            <a:off x="6578429" y="1209368"/>
             <a:ext cx="2880000" cy="2880000"/>
           </a:xfrm>
           <a:prstGeom prst="ellipse">
@@ -4673,6 +4694,58 @@
             <a:r>
               <a:rPr kumimoji="1" lang="ja-JP" altLang="en-US" sz="2800" dirty="0"/>
               <a:t>設定・区分</a:t>
+            </a:r>
+            <a:endParaRPr kumimoji="1" lang="en-US" altLang="ja-JP" sz="2800" dirty="0"/>
+          </a:p>
+        </p:txBody>
+      </p:sp>
+      <p:sp>
+        <p:nvSpPr>
+          <p:cNvPr id="4" name="楕円 3">
+            <a:extLst>
+              <a:ext uri="{FF2B5EF4-FFF2-40B4-BE49-F238E27FC236}">
+                <a16:creationId xmlns:a16="http://schemas.microsoft.com/office/drawing/2014/main" id="{BF7EC4BC-6101-AA91-DA49-D560BF15C8FF}"/>
+              </a:ext>
+            </a:extLst>
+          </p:cNvPr>
+          <p:cNvSpPr/>
+          <p:nvPr/>
+        </p:nvSpPr>
+        <p:spPr>
+          <a:xfrm>
+            <a:off x="9115800" y="3764640"/>
+            <a:ext cx="2880000" cy="2880000"/>
+          </a:xfrm>
+          <a:prstGeom prst="ellipse">
+            <a:avLst/>
+          </a:prstGeom>
+        </p:spPr>
+        <p:style>
+          <a:lnRef idx="1">
+            <a:schemeClr val="accent2"/>
+          </a:lnRef>
+          <a:fillRef idx="2">
+            <a:schemeClr val="accent2"/>
+          </a:fillRef>
+          <a:effectRef idx="1">
+            <a:schemeClr val="accent2"/>
+          </a:effectRef>
+          <a:fontRef idx="minor">
+            <a:schemeClr val="dk1"/>
+          </a:fontRef>
+        </p:style>
+        <p:txBody>
+          <a:bodyPr rtlCol="0" anchor="ctr"/>
+          <a:lstStyle/>
+          <a:p>
+            <a:pPr algn="ctr">
+              <a:lnSpc>
+                <a:spcPct val="150000"/>
+              </a:lnSpc>
+            </a:pPr>
+            <a:r>
+              <a:rPr kumimoji="1" lang="ja-JP" altLang="en-US" sz="2800" dirty="0"/>
+              <a:t>ソート機能</a:t>
             </a:r>
             <a:endParaRPr kumimoji="1" lang="en-US" altLang="ja-JP" sz="2800" dirty="0"/>
           </a:p>

--- a/モバイル授業_todoリスト.pptx
+++ b/モバイル授業_todoリスト.pptx
@@ -284,7 +284,7 @@
           <a:p>
             <a:fld id="{898ACB73-228B-4573-B2A8-EEAE64393BA5}" type="datetimeFigureOut">
               <a:rPr kumimoji="1" lang="ja-JP" altLang="en-US" smtClean="0"/>
-              <a:t>2026/5/13</a:t>
+              <a:t>2026/6/10</a:t>
             </a:fld>
             <a:endParaRPr kumimoji="1" lang="ja-JP" altLang="en-US"/>
           </a:p>
@@ -660,7 +660,7 @@
           <a:p>
             <a:fld id="{898ACB73-228B-4573-B2A8-EEAE64393BA5}" type="datetimeFigureOut">
               <a:rPr kumimoji="1" lang="ja-JP" altLang="en-US" smtClean="0"/>
-              <a:t>2026/5/13</a:t>
+              <a:t>2026/6/10</a:t>
             </a:fld>
             <a:endParaRPr kumimoji="1" lang="ja-JP" altLang="en-US"/>
           </a:p>
@@ -872,7 +872,7 @@
           <a:p>
             <a:fld id="{898ACB73-228B-4573-B2A8-EEAE64393BA5}" type="datetimeFigureOut">
               <a:rPr kumimoji="1" lang="ja-JP" altLang="en-US" smtClean="0"/>
-              <a:t>2026/5/13</a:t>
+              <a:t>2026/6/10</a:t>
             </a:fld>
             <a:endParaRPr kumimoji="1" lang="ja-JP" altLang="en-US"/>
           </a:p>
@@ -1074,7 +1074,7 @@
           <a:p>
             <a:fld id="{898ACB73-228B-4573-B2A8-EEAE64393BA5}" type="datetimeFigureOut">
               <a:rPr kumimoji="1" lang="ja-JP" altLang="en-US" smtClean="0"/>
-              <a:t>2026/5/13</a:t>
+              <a:t>2026/6/10</a:t>
             </a:fld>
             <a:endParaRPr kumimoji="1" lang="ja-JP" altLang="en-US"/>
           </a:p>
@@ -1351,7 +1351,7 @@
           <a:p>
             <a:fld id="{898ACB73-228B-4573-B2A8-EEAE64393BA5}" type="datetimeFigureOut">
               <a:rPr kumimoji="1" lang="ja-JP" altLang="en-US" smtClean="0"/>
-              <a:t>2026/5/13</a:t>
+              <a:t>2026/6/10</a:t>
             </a:fld>
             <a:endParaRPr kumimoji="1" lang="ja-JP" altLang="en-US"/>
           </a:p>
@@ -1809,7 +1809,7 @@
           <a:p>
             <a:fld id="{898ACB73-228B-4573-B2A8-EEAE64393BA5}" type="datetimeFigureOut">
               <a:rPr kumimoji="1" lang="ja-JP" altLang="en-US" smtClean="0"/>
-              <a:t>2026/5/13</a:t>
+              <a:t>2026/6/10</a:t>
             </a:fld>
             <a:endParaRPr kumimoji="1" lang="ja-JP" altLang="en-US"/>
           </a:p>
@@ -2350,7 +2350,7 @@
           <a:p>
             <a:fld id="{898ACB73-228B-4573-B2A8-EEAE64393BA5}" type="datetimeFigureOut">
               <a:rPr kumimoji="1" lang="ja-JP" altLang="en-US" smtClean="0"/>
-              <a:t>2026/5/13</a:t>
+              <a:t>2026/6/10</a:t>
             </a:fld>
             <a:endParaRPr kumimoji="1" lang="ja-JP" altLang="en-US"/>
           </a:p>
@@ -2468,7 +2468,7 @@
           <a:p>
             <a:fld id="{898ACB73-228B-4573-B2A8-EEAE64393BA5}" type="datetimeFigureOut">
               <a:rPr kumimoji="1" lang="ja-JP" altLang="en-US" smtClean="0"/>
-              <a:t>2026/5/13</a:t>
+              <a:t>2026/6/10</a:t>
             </a:fld>
             <a:endParaRPr kumimoji="1" lang="ja-JP" altLang="en-US"/>
           </a:p>
@@ -2563,7 +2563,7 @@
           <a:p>
             <a:fld id="{898ACB73-228B-4573-B2A8-EEAE64393BA5}" type="datetimeFigureOut">
               <a:rPr kumimoji="1" lang="ja-JP" altLang="en-US" smtClean="0"/>
-              <a:t>2026/5/13</a:t>
+              <a:t>2026/6/10</a:t>
             </a:fld>
             <a:endParaRPr kumimoji="1" lang="ja-JP" altLang="en-US"/>
           </a:p>
@@ -2941,7 +2941,7 @@
           <a:p>
             <a:fld id="{898ACB73-228B-4573-B2A8-EEAE64393BA5}" type="datetimeFigureOut">
               <a:rPr kumimoji="1" lang="ja-JP" altLang="en-US" smtClean="0"/>
-              <a:t>2026/5/13</a:t>
+              <a:t>2026/6/10</a:t>
             </a:fld>
             <a:endParaRPr kumimoji="1" lang="ja-JP" altLang="en-US"/>
           </a:p>
@@ -3329,7 +3329,7 @@
           <a:p>
             <a:fld id="{898ACB73-228B-4573-B2A8-EEAE64393BA5}" type="datetimeFigureOut">
               <a:rPr kumimoji="1" lang="ja-JP" altLang="en-US" smtClean="0"/>
-              <a:t>2026/5/13</a:t>
+              <a:t>2026/6/10</a:t>
             </a:fld>
             <a:endParaRPr kumimoji="1" lang="ja-JP" altLang="en-US"/>
           </a:p>
@@ -3639,7 +3639,7 @@
           <a:p>
             <a:fld id="{898ACB73-228B-4573-B2A8-EEAE64393BA5}" type="datetimeFigureOut">
               <a:rPr kumimoji="1" lang="ja-JP" altLang="en-US" smtClean="0"/>
-              <a:t>2026/5/13</a:t>
+              <a:t>2026/6/10</a:t>
             </a:fld>
             <a:endParaRPr kumimoji="1" lang="ja-JP" altLang="en-US"/>
           </a:p>
@@ -4624,14 +4624,10 @@
               </a:lnSpc>
             </a:pPr>
             <a:r>
-              <a:rPr kumimoji="1" lang="en-US" altLang="ja-JP" sz="2800" dirty="0"/>
-              <a:t>UI</a:t>
-            </a:r>
-            <a:r>
-              <a:rPr kumimoji="1" lang="ja-JP" altLang="en-US" sz="2800" dirty="0"/>
-              <a:t>の工夫</a:t>
-            </a:r>
-            <a:endParaRPr kumimoji="1" lang="en-US" altLang="ja-JP" sz="2800" dirty="0"/>
+              <a:rPr kumimoji="1" lang="ja-JP" altLang="en-US" sz="2400" dirty="0"/>
+              <a:t>ログイン機能</a:t>
+            </a:r>
+            <a:endParaRPr kumimoji="1" lang="en-US" altLang="ja-JP" sz="2400" dirty="0"/>
           </a:p>
         </p:txBody>
       </p:sp>

--- a/モバイル授業_todoリスト.pptx
+++ b/モバイル授業_todoリスト.pptx
@@ -6,9 +6,10 @@
   </p:sldMasterIdLst>
   <p:sldIdLst>
     <p:sldId id="256" r:id="rId2"/>
-    <p:sldId id="260" r:id="rId3"/>
-    <p:sldId id="261" r:id="rId4"/>
-    <p:sldId id="262" r:id="rId5"/>
+    <p:sldId id="263" r:id="rId3"/>
+    <p:sldId id="260" r:id="rId4"/>
+    <p:sldId id="261" r:id="rId5"/>
+    <p:sldId id="264" r:id="rId6"/>
   </p:sldIdLst>
   <p:sldSz cx="12192000" cy="6858000"/>
   <p:notesSz cx="6858000" cy="9144000"/>
@@ -284,7 +285,7 @@
           <a:p>
             <a:fld id="{898ACB73-228B-4573-B2A8-EEAE64393BA5}" type="datetimeFigureOut">
               <a:rPr kumimoji="1" lang="ja-JP" altLang="en-US" smtClean="0"/>
-              <a:t>2026/6/10</a:t>
+              <a:t>2026/6/12</a:t>
             </a:fld>
             <a:endParaRPr kumimoji="1" lang="ja-JP" altLang="en-US"/>
           </a:p>
@@ -660,7 +661,7 @@
           <a:p>
             <a:fld id="{898ACB73-228B-4573-B2A8-EEAE64393BA5}" type="datetimeFigureOut">
               <a:rPr kumimoji="1" lang="ja-JP" altLang="en-US" smtClean="0"/>
-              <a:t>2026/6/10</a:t>
+              <a:t>2026/6/12</a:t>
             </a:fld>
             <a:endParaRPr kumimoji="1" lang="ja-JP" altLang="en-US"/>
           </a:p>
@@ -872,7 +873,7 @@
           <a:p>
             <a:fld id="{898ACB73-228B-4573-B2A8-EEAE64393BA5}" type="datetimeFigureOut">
               <a:rPr kumimoji="1" lang="ja-JP" altLang="en-US" smtClean="0"/>
-              <a:t>2026/6/10</a:t>
+              <a:t>2026/6/12</a:t>
             </a:fld>
             <a:endParaRPr kumimoji="1" lang="ja-JP" altLang="en-US"/>
           </a:p>
@@ -1074,7 +1075,7 @@
           <a:p>
             <a:fld id="{898ACB73-228B-4573-B2A8-EEAE64393BA5}" type="datetimeFigureOut">
               <a:rPr kumimoji="1" lang="ja-JP" altLang="en-US" smtClean="0"/>
-              <a:t>2026/6/10</a:t>
+              <a:t>2026/6/12</a:t>
             </a:fld>
             <a:endParaRPr kumimoji="1" lang="ja-JP" altLang="en-US"/>
           </a:p>
@@ -1351,7 +1352,7 @@
           <a:p>
             <a:fld id="{898ACB73-228B-4573-B2A8-EEAE64393BA5}" type="datetimeFigureOut">
               <a:rPr kumimoji="1" lang="ja-JP" altLang="en-US" smtClean="0"/>
-              <a:t>2026/6/10</a:t>
+              <a:t>2026/6/12</a:t>
             </a:fld>
             <a:endParaRPr kumimoji="1" lang="ja-JP" altLang="en-US"/>
           </a:p>
@@ -1809,7 +1810,7 @@
           <a:p>
             <a:fld id="{898ACB73-228B-4573-B2A8-EEAE64393BA5}" type="datetimeFigureOut">
               <a:rPr kumimoji="1" lang="ja-JP" altLang="en-US" smtClean="0"/>
-              <a:t>2026/6/10</a:t>
+              <a:t>2026/6/12</a:t>
             </a:fld>
             <a:endParaRPr kumimoji="1" lang="ja-JP" altLang="en-US"/>
           </a:p>
@@ -2350,7 +2351,7 @@
           <a:p>
             <a:fld id="{898ACB73-228B-4573-B2A8-EEAE64393BA5}" type="datetimeFigureOut">
               <a:rPr kumimoji="1" lang="ja-JP" altLang="en-US" smtClean="0"/>
-              <a:t>2026/6/10</a:t>
+              <a:t>2026/6/12</a:t>
             </a:fld>
             <a:endParaRPr kumimoji="1" lang="ja-JP" altLang="en-US"/>
           </a:p>
@@ -2468,7 +2469,7 @@
           <a:p>
             <a:fld id="{898ACB73-228B-4573-B2A8-EEAE64393BA5}" type="datetimeFigureOut">
               <a:rPr kumimoji="1" lang="ja-JP" altLang="en-US" smtClean="0"/>
-              <a:t>2026/6/10</a:t>
+              <a:t>2026/6/12</a:t>
             </a:fld>
             <a:endParaRPr kumimoji="1" lang="ja-JP" altLang="en-US"/>
           </a:p>
@@ -2563,7 +2564,7 @@
           <a:p>
             <a:fld id="{898ACB73-228B-4573-B2A8-EEAE64393BA5}" type="datetimeFigureOut">
               <a:rPr kumimoji="1" lang="ja-JP" altLang="en-US" smtClean="0"/>
-              <a:t>2026/6/10</a:t>
+              <a:t>2026/6/12</a:t>
             </a:fld>
             <a:endParaRPr kumimoji="1" lang="ja-JP" altLang="en-US"/>
           </a:p>
@@ -2941,7 +2942,7 @@
           <a:p>
             <a:fld id="{898ACB73-228B-4573-B2A8-EEAE64393BA5}" type="datetimeFigureOut">
               <a:rPr kumimoji="1" lang="ja-JP" altLang="en-US" smtClean="0"/>
-              <a:t>2026/6/10</a:t>
+              <a:t>2026/6/12</a:t>
             </a:fld>
             <a:endParaRPr kumimoji="1" lang="ja-JP" altLang="en-US"/>
           </a:p>
@@ -3329,7 +3330,7 @@
           <a:p>
             <a:fld id="{898ACB73-228B-4573-B2A8-EEAE64393BA5}" type="datetimeFigureOut">
               <a:rPr kumimoji="1" lang="ja-JP" altLang="en-US" smtClean="0"/>
-              <a:t>2026/6/10</a:t>
+              <a:t>2026/6/12</a:t>
             </a:fld>
             <a:endParaRPr kumimoji="1" lang="ja-JP" altLang="en-US"/>
           </a:p>
@@ -3639,7 +3640,7 @@
           <a:p>
             <a:fld id="{898ACB73-228B-4573-B2A8-EEAE64393BA5}" type="datetimeFigureOut">
               <a:rPr kumimoji="1" lang="ja-JP" altLang="en-US" smtClean="0"/>
-              <a:t>2026/6/10</a:t>
+              <a:t>2026/6/12</a:t>
             </a:fld>
             <a:endParaRPr kumimoji="1" lang="ja-JP" altLang="en-US"/>
           </a:p>
@@ -4180,11 +4181,11 @@
           <a:lstStyle/>
           <a:p>
             <a:r>
-              <a:rPr kumimoji="1" lang="en-US" altLang="ja-JP" dirty="0" err="1"/>
+              <a:rPr kumimoji="1" lang="en-US" altLang="ja-JP" sz="8000" b="1" dirty="0" err="1"/>
               <a:t>todo</a:t>
             </a:r>
             <a:r>
-              <a:rPr kumimoji="1" lang="ja-JP" altLang="en-US" dirty="0"/>
+              <a:rPr kumimoji="1" lang="ja-JP" altLang="en-US" b="1" dirty="0"/>
               <a:t>リスト</a:t>
             </a:r>
           </a:p>
@@ -4212,7 +4213,7 @@
           <a:lstStyle/>
           <a:p>
             <a:r>
-              <a:rPr kumimoji="1" lang="ja-JP" altLang="en-US" dirty="0"/>
+              <a:rPr kumimoji="1" lang="ja-JP" altLang="en-US" b="1" dirty="0"/>
               <a:t>宇田川竜聖</a:t>
             </a:r>
           </a:p>
@@ -4236,6 +4237,171 @@
   <p:cSld>
     <p:spTree>
       <p:nvGrpSpPr>
+        <p:cNvPr id="1" name="">
+          <a:extLst>
+            <a:ext uri="{FF2B5EF4-FFF2-40B4-BE49-F238E27FC236}">
+              <a16:creationId xmlns:a16="http://schemas.microsoft.com/office/drawing/2014/main" id="{44BF297D-E9BE-6642-5412-B960E9D0D174}"/>
+            </a:ext>
+          </a:extLst>
+        </p:cNvPr>
+        <p:cNvGrpSpPr/>
+        <p:nvPr/>
+      </p:nvGrpSpPr>
+      <p:grpSpPr>
+        <a:xfrm>
+          <a:off x="0" y="0"/>
+          <a:ext cx="0" cy="0"/>
+          <a:chOff x="0" y="0"/>
+          <a:chExt cx="0" cy="0"/>
+        </a:xfrm>
+      </p:grpSpPr>
+      <p:sp>
+        <p:nvSpPr>
+          <p:cNvPr id="2" name="タイトル 1">
+            <a:extLst>
+              <a:ext uri="{FF2B5EF4-FFF2-40B4-BE49-F238E27FC236}">
+                <a16:creationId xmlns:a16="http://schemas.microsoft.com/office/drawing/2014/main" id="{90B5F012-68D5-5D0A-9532-0E5EEA5C14D0}"/>
+              </a:ext>
+            </a:extLst>
+          </p:cNvPr>
+          <p:cNvSpPr txBox="1">
+            <a:spLocks/>
+          </p:cNvSpPr>
+          <p:nvPr/>
+        </p:nvSpPr>
+        <p:spPr>
+          <a:xfrm>
+            <a:off x="5448607" y="528485"/>
+            <a:ext cx="1294785" cy="759542"/>
+          </a:xfrm>
+          <a:prstGeom prst="rect">
+            <a:avLst/>
+          </a:prstGeom>
+        </p:spPr>
+        <p:txBody>
+          <a:bodyPr>
+            <a:normAutofit/>
+          </a:bodyPr>
+          <a:lstStyle>
+            <a:lvl1pPr algn="l" defTabSz="914400" rtl="0" eaLnBrk="1" latinLnBrk="0" hangingPunct="1">
+              <a:lnSpc>
+                <a:spcPct val="89000"/>
+              </a:lnSpc>
+              <a:spcBef>
+                <a:spcPct val="0"/>
+              </a:spcBef>
+              <a:buNone/>
+              <a:defRPr kumimoji="1" sz="4400" kern="1200" baseline="0">
+                <a:solidFill>
+                  <a:schemeClr val="tx2"/>
+                </a:solidFill>
+                <a:latin typeface="+mj-lt"/>
+                <a:ea typeface="+mj-ea"/>
+                <a:cs typeface="+mj-cs"/>
+              </a:defRPr>
+            </a:lvl1pPr>
+          </a:lstStyle>
+          <a:p>
+            <a:endParaRPr lang="ja-JP" altLang="en-US" dirty="0"/>
+          </a:p>
+        </p:txBody>
+      </p:sp>
+      <p:sp>
+        <p:nvSpPr>
+          <p:cNvPr id="8" name="テキスト ボックス 7">
+            <a:extLst>
+              <a:ext uri="{FF2B5EF4-FFF2-40B4-BE49-F238E27FC236}">
+                <a16:creationId xmlns:a16="http://schemas.microsoft.com/office/drawing/2014/main" id="{193FE242-F0FA-C9E2-97BA-18FE1820C3EE}"/>
+              </a:ext>
+            </a:extLst>
+          </p:cNvPr>
+          <p:cNvSpPr txBox="1"/>
+          <p:nvPr/>
+        </p:nvSpPr>
+        <p:spPr>
+          <a:xfrm>
+            <a:off x="1248443" y="1795584"/>
+            <a:ext cx="5109925" cy="769441"/>
+          </a:xfrm>
+          <a:prstGeom prst="rect">
+            <a:avLst/>
+          </a:prstGeom>
+          <a:noFill/>
+        </p:spPr>
+        <p:txBody>
+          <a:bodyPr wrap="none" rtlCol="0">
+            <a:spAutoFit/>
+          </a:bodyPr>
+          <a:lstStyle/>
+          <a:p>
+            <a:r>
+              <a:rPr kumimoji="1" lang="ja-JP" altLang="en-US" sz="4000" b="1" dirty="0"/>
+              <a:t>・</a:t>
+            </a:r>
+            <a:r>
+              <a:rPr kumimoji="1" lang="en-US" altLang="ja-JP" sz="4400" b="1" dirty="0"/>
+              <a:t>TODO</a:t>
+            </a:r>
+            <a:r>
+              <a:rPr kumimoji="1" lang="ja-JP" altLang="en-US" sz="4000" b="1" dirty="0"/>
+              <a:t>リストを作る</a:t>
+            </a:r>
+          </a:p>
+        </p:txBody>
+      </p:sp>
+      <p:sp>
+        <p:nvSpPr>
+          <p:cNvPr id="9" name="テキスト ボックス 8">
+            <a:extLst>
+              <a:ext uri="{FF2B5EF4-FFF2-40B4-BE49-F238E27FC236}">
+                <a16:creationId xmlns:a16="http://schemas.microsoft.com/office/drawing/2014/main" id="{E7F68445-83C4-8083-15E9-A3828FCAB235}"/>
+              </a:ext>
+            </a:extLst>
+          </p:cNvPr>
+          <p:cNvSpPr txBox="1"/>
+          <p:nvPr/>
+        </p:nvSpPr>
+        <p:spPr>
+          <a:xfrm>
+            <a:off x="1238611" y="4292975"/>
+            <a:ext cx="7520007" cy="769441"/>
+          </a:xfrm>
+          <a:prstGeom prst="rect">
+            <a:avLst/>
+          </a:prstGeom>
+          <a:noFill/>
+        </p:spPr>
+        <p:txBody>
+          <a:bodyPr wrap="none" rtlCol="0">
+            <a:spAutoFit/>
+          </a:bodyPr>
+          <a:lstStyle/>
+          <a:p>
+            <a:r>
+              <a:rPr kumimoji="1" lang="ja-JP" altLang="en-US" sz="4400" b="1" dirty="0"/>
+              <a:t>・「シンプルさ」を意識した</a:t>
+            </a:r>
+          </a:p>
+        </p:txBody>
+      </p:sp>
+    </p:spTree>
+    <p:extLst>
+      <p:ext uri="{BB962C8B-B14F-4D97-AF65-F5344CB8AC3E}">
+        <p14:creationId xmlns:p14="http://schemas.microsoft.com/office/powerpoint/2010/main" val="1552576892"/>
+      </p:ext>
+    </p:extLst>
+  </p:cSld>
+  <p:clrMapOvr>
+    <a:masterClrMapping/>
+  </p:clrMapOvr>
+</p:sld>
+</file>
+
+<file path=ppt/slides/slide3.xml><?xml version="1.0" encoding="utf-8"?>
+<p:sld xmlns:a="http://schemas.openxmlformats.org/drawingml/2006/main" xmlns:r="http://schemas.openxmlformats.org/officeDocument/2006/relationships" xmlns:p="http://schemas.openxmlformats.org/presentationml/2006/main">
+  <p:cSld>
+    <p:spTree>
+      <p:nvGrpSpPr>
         <p:cNvPr id="1" name=""/>
         <p:cNvGrpSpPr/>
         <p:nvPr/>
@@ -4296,10 +4462,9 @@
           </a:lstStyle>
           <a:p>
             <a:r>
-              <a:rPr lang="ja-JP" altLang="en-US"/>
+              <a:rPr lang="ja-JP" altLang="en-US" b="1" dirty="0"/>
               <a:t>最優先する機能</a:t>
             </a:r>
-            <a:endParaRPr lang="ja-JP" altLang="en-US" dirty="0"/>
           </a:p>
         </p:txBody>
       </p:sp>
@@ -4348,14 +4513,14 @@
               </a:lnSpc>
             </a:pPr>
             <a:r>
-              <a:rPr kumimoji="1" lang="en-US" altLang="ja-JP" sz="2800" dirty="0"/>
+              <a:rPr kumimoji="1" lang="en-US" altLang="ja-JP" sz="2800" b="1" dirty="0"/>
               <a:t>TODO</a:t>
             </a:r>
             <a:r>
-              <a:rPr kumimoji="1" lang="ja-JP" altLang="en-US" sz="2800" dirty="0"/>
+              <a:rPr kumimoji="1" lang="ja-JP" altLang="en-US" sz="2800" b="1" dirty="0"/>
               <a:t>リストの</a:t>
             </a:r>
-            <a:endParaRPr kumimoji="1" lang="en-US" altLang="ja-JP" sz="2800" dirty="0"/>
+            <a:endParaRPr kumimoji="1" lang="en-US" altLang="ja-JP" sz="2800" b="1" dirty="0"/>
           </a:p>
           <a:p>
             <a:pPr algn="ctr">
@@ -4364,7 +4529,7 @@
               </a:lnSpc>
             </a:pPr>
             <a:r>
-              <a:rPr kumimoji="1" lang="ja-JP" altLang="en-US" sz="2800" dirty="0"/>
+              <a:rPr kumimoji="1" lang="ja-JP" altLang="en-US" sz="2800" b="1" dirty="0"/>
               <a:t>追加・削除</a:t>
             </a:r>
           </a:p>
@@ -4415,14 +4580,14 @@
               </a:lnSpc>
             </a:pPr>
             <a:r>
-              <a:rPr kumimoji="1" lang="en-US" altLang="ja-JP" sz="2800" dirty="0"/>
+              <a:rPr kumimoji="1" lang="en-US" altLang="ja-JP" sz="2800" b="1" dirty="0"/>
               <a:t>TODO</a:t>
             </a:r>
             <a:r>
-              <a:rPr kumimoji="1" lang="ja-JP" altLang="en-US" sz="2800" dirty="0"/>
+              <a:rPr kumimoji="1" lang="ja-JP" altLang="en-US" sz="2800" b="1" dirty="0"/>
               <a:t>リストの</a:t>
             </a:r>
-            <a:endParaRPr kumimoji="1" lang="en-US" altLang="ja-JP" sz="2800" dirty="0"/>
+            <a:endParaRPr kumimoji="1" lang="en-US" altLang="ja-JP" sz="2800" b="1" dirty="0"/>
           </a:p>
           <a:p>
             <a:pPr algn="ctr">
@@ -4431,7 +4596,7 @@
               </a:lnSpc>
             </a:pPr>
             <a:r>
-              <a:rPr kumimoji="1" lang="ja-JP" altLang="en-US" sz="2800" dirty="0"/>
+              <a:rPr kumimoji="1" lang="ja-JP" altLang="en-US" sz="2800" b="1" dirty="0"/>
               <a:t>保存</a:t>
             </a:r>
           </a:p>
@@ -4450,7 +4615,7 @@
 </p:sld>
 </file>
 
-<file path=ppt/slides/slide3.xml><?xml version="1.0" encoding="utf-8"?>
+<file path=ppt/slides/slide4.xml><?xml version="1.0" encoding="utf-8"?>
 <p:sld xmlns:a="http://schemas.openxmlformats.org/drawingml/2006/main" xmlns:r="http://schemas.openxmlformats.org/officeDocument/2006/relationships" xmlns:p="http://schemas.openxmlformats.org/presentationml/2006/main">
   <p:cSld>
     <p:spTree>
@@ -4521,7 +4686,7 @@
           </a:lstStyle>
           <a:p>
             <a:r>
-              <a:rPr lang="ja-JP" altLang="en-US" dirty="0"/>
+              <a:rPr lang="ja-JP" altLang="en-US" b="1" dirty="0"/>
               <a:t>余裕があれば実装</a:t>
             </a:r>
           </a:p>
@@ -4572,10 +4737,10 @@
               </a:lnSpc>
             </a:pPr>
             <a:r>
-              <a:rPr kumimoji="1" lang="ja-JP" altLang="en-US" sz="2800" dirty="0"/>
+              <a:rPr kumimoji="1" lang="ja-JP" altLang="en-US" sz="2800" b="1" dirty="0"/>
               <a:t>日時設定</a:t>
             </a:r>
-            <a:endParaRPr kumimoji="1" lang="en-US" altLang="ja-JP" sz="2800" dirty="0"/>
+            <a:endParaRPr kumimoji="1" lang="en-US" altLang="ja-JP" sz="2800" b="1" dirty="0"/>
           </a:p>
         </p:txBody>
       </p:sp>
@@ -4624,10 +4789,10 @@
               </a:lnSpc>
             </a:pPr>
             <a:r>
-              <a:rPr kumimoji="1" lang="ja-JP" altLang="en-US" sz="2400" dirty="0"/>
-              <a:t>ログイン機能</a:t>
-            </a:r>
-            <a:endParaRPr kumimoji="1" lang="en-US" altLang="ja-JP" sz="2400" dirty="0"/>
+              <a:rPr kumimoji="1" lang="ja-JP" altLang="en-US" sz="2000" b="1" dirty="0"/>
+              <a:t>アカウント機能</a:t>
+            </a:r>
+            <a:endParaRPr kumimoji="1" lang="en-US" altLang="ja-JP" sz="2000" b="1" dirty="0"/>
           </a:p>
         </p:txBody>
       </p:sp>
@@ -4676,10 +4841,10 @@
               </a:lnSpc>
             </a:pPr>
             <a:r>
-              <a:rPr kumimoji="1" lang="ja-JP" altLang="en-US" sz="2800" dirty="0"/>
+              <a:rPr kumimoji="1" lang="ja-JP" altLang="en-US" sz="2800" b="1" dirty="0"/>
               <a:t>カテゴリの</a:t>
             </a:r>
-            <a:endParaRPr kumimoji="1" lang="en-US" altLang="ja-JP" sz="2800" dirty="0"/>
+            <a:endParaRPr kumimoji="1" lang="en-US" altLang="ja-JP" sz="2800" b="1" dirty="0"/>
           </a:p>
           <a:p>
             <a:pPr algn="ctr">
@@ -4688,10 +4853,10 @@
               </a:lnSpc>
             </a:pPr>
             <a:r>
-              <a:rPr kumimoji="1" lang="ja-JP" altLang="en-US" sz="2800" dirty="0"/>
+              <a:rPr kumimoji="1" lang="ja-JP" altLang="en-US" sz="2800" b="1" dirty="0"/>
               <a:t>設定・区分</a:t>
             </a:r>
-            <a:endParaRPr kumimoji="1" lang="en-US" altLang="ja-JP" sz="2800" dirty="0"/>
+            <a:endParaRPr kumimoji="1" lang="en-US" altLang="ja-JP" sz="2800" b="1" dirty="0"/>
           </a:p>
         </p:txBody>
       </p:sp>
@@ -4740,10 +4905,10 @@
               </a:lnSpc>
             </a:pPr>
             <a:r>
-              <a:rPr kumimoji="1" lang="ja-JP" altLang="en-US" sz="2800" dirty="0"/>
+              <a:rPr kumimoji="1" lang="ja-JP" altLang="en-US" sz="2800" b="1" dirty="0"/>
               <a:t>ソート機能</a:t>
             </a:r>
-            <a:endParaRPr kumimoji="1" lang="en-US" altLang="ja-JP" sz="2800" dirty="0"/>
+            <a:endParaRPr kumimoji="1" lang="en-US" altLang="ja-JP" sz="2800" b="1" dirty="0"/>
           </a:p>
         </p:txBody>
       </p:sp>
@@ -4760,12 +4925,18 @@
 </p:sld>
 </file>
 
-<file path=ppt/slides/slide4.xml><?xml version="1.0" encoding="utf-8"?>
+<file path=ppt/slides/slide5.xml><?xml version="1.0" encoding="utf-8"?>
 <p:sld xmlns:a="http://schemas.openxmlformats.org/drawingml/2006/main" xmlns:r="http://schemas.openxmlformats.org/officeDocument/2006/relationships" xmlns:p="http://schemas.openxmlformats.org/presentationml/2006/main">
   <p:cSld>
     <p:spTree>
       <p:nvGrpSpPr>
-        <p:cNvPr id="1" name=""/>
+        <p:cNvPr id="1" name="">
+          <a:extLst>
+            <a:ext uri="{FF2B5EF4-FFF2-40B4-BE49-F238E27FC236}">
+              <a16:creationId xmlns:a16="http://schemas.microsoft.com/office/drawing/2014/main" id="{2087F40B-0DCA-8276-6D62-2C3AADFC2A1D}"/>
+            </a:ext>
+          </a:extLst>
+        </p:cNvPr>
         <p:cNvGrpSpPr/>
         <p:nvPr/>
       </p:nvGrpSpPr>
@@ -4777,10 +4948,209 @@
           <a:chExt cx="0" cy="0"/>
         </a:xfrm>
       </p:grpSpPr>
+      <p:sp>
+        <p:nvSpPr>
+          <p:cNvPr id="2" name="タイトル 1">
+            <a:extLst>
+              <a:ext uri="{FF2B5EF4-FFF2-40B4-BE49-F238E27FC236}">
+                <a16:creationId xmlns:a16="http://schemas.microsoft.com/office/drawing/2014/main" id="{0E86ADDE-E18E-17C3-DB9A-72D2337013A4}"/>
+              </a:ext>
+            </a:extLst>
+          </p:cNvPr>
+          <p:cNvSpPr txBox="1">
+            <a:spLocks/>
+          </p:cNvSpPr>
+          <p:nvPr/>
+        </p:nvSpPr>
+        <p:spPr>
+          <a:xfrm>
+            <a:off x="4874956" y="498987"/>
+            <a:ext cx="2442087" cy="759542"/>
+          </a:xfrm>
+          <a:prstGeom prst="rect">
+            <a:avLst/>
+          </a:prstGeom>
+        </p:spPr>
+        <p:txBody>
+          <a:bodyPr>
+            <a:normAutofit/>
+          </a:bodyPr>
+          <a:lstStyle>
+            <a:lvl1pPr algn="l" defTabSz="914400" rtl="0" eaLnBrk="1" latinLnBrk="0" hangingPunct="1">
+              <a:lnSpc>
+                <a:spcPct val="89000"/>
+              </a:lnSpc>
+              <a:spcBef>
+                <a:spcPct val="0"/>
+              </a:spcBef>
+              <a:buNone/>
+              <a:defRPr kumimoji="1" sz="4400" kern="1200" baseline="0">
+                <a:solidFill>
+                  <a:schemeClr val="tx2"/>
+                </a:solidFill>
+                <a:latin typeface="+mj-lt"/>
+                <a:ea typeface="+mj-ea"/>
+                <a:cs typeface="+mj-cs"/>
+              </a:defRPr>
+            </a:lvl1pPr>
+          </a:lstStyle>
+          <a:p>
+            <a:r>
+              <a:rPr lang="ja-JP" altLang="en-US" b="1" dirty="0"/>
+              <a:t>機能説明</a:t>
+            </a:r>
+          </a:p>
+        </p:txBody>
+      </p:sp>
+      <p:sp>
+        <p:nvSpPr>
+          <p:cNvPr id="5" name="テキスト ボックス 4">
+            <a:extLst>
+              <a:ext uri="{FF2B5EF4-FFF2-40B4-BE49-F238E27FC236}">
+                <a16:creationId xmlns:a16="http://schemas.microsoft.com/office/drawing/2014/main" id="{96281983-FAB1-AE10-A205-12A7FE163574}"/>
+              </a:ext>
+            </a:extLst>
+          </p:cNvPr>
+          <p:cNvSpPr txBox="1"/>
+          <p:nvPr/>
+        </p:nvSpPr>
+        <p:spPr>
+          <a:xfrm>
+            <a:off x="932426" y="1735394"/>
+            <a:ext cx="11151322" cy="523220"/>
+          </a:xfrm>
+          <a:prstGeom prst="rect">
+            <a:avLst/>
+          </a:prstGeom>
+          <a:noFill/>
+        </p:spPr>
+        <p:txBody>
+          <a:bodyPr wrap="none" rtlCol="0">
+            <a:spAutoFit/>
+          </a:bodyPr>
+          <a:lstStyle/>
+          <a:p>
+            <a:r>
+              <a:rPr kumimoji="1" lang="ja-JP" altLang="en-US" sz="2800" b="1" dirty="0"/>
+              <a:t>・内容、日時</a:t>
+            </a:r>
+            <a:r>
+              <a:rPr kumimoji="1" lang="en-US" altLang="ja-JP" sz="2800" b="1" dirty="0"/>
+              <a:t>(</a:t>
+            </a:r>
+            <a:r>
+              <a:rPr kumimoji="1" lang="ja-JP" altLang="en-US" sz="2800" b="1" dirty="0"/>
+              <a:t>任意</a:t>
+            </a:r>
+            <a:r>
+              <a:rPr kumimoji="1" lang="en-US" altLang="ja-JP" sz="2800" b="1" dirty="0"/>
+              <a:t>)</a:t>
+            </a:r>
+            <a:r>
+              <a:rPr kumimoji="1" lang="ja-JP" altLang="en-US" sz="2800" b="1" dirty="0"/>
+              <a:t>、カテゴリ</a:t>
+            </a:r>
+            <a:r>
+              <a:rPr kumimoji="1" lang="en-US" altLang="ja-JP" sz="2800" b="1" dirty="0"/>
+              <a:t>(</a:t>
+            </a:r>
+            <a:r>
+              <a:rPr kumimoji="1" lang="ja-JP" altLang="en-US" sz="2800" b="1" dirty="0"/>
+              <a:t>任意</a:t>
+            </a:r>
+            <a:r>
+              <a:rPr kumimoji="1" lang="en-US" altLang="ja-JP" sz="2800" b="1" dirty="0"/>
+              <a:t>)</a:t>
+            </a:r>
+            <a:r>
+              <a:rPr kumimoji="1" lang="ja-JP" altLang="en-US" sz="2800" b="1" dirty="0"/>
+              <a:t>を指定して、</a:t>
+            </a:r>
+            <a:r>
+              <a:rPr kumimoji="1" lang="en-US" altLang="ja-JP" sz="2800" b="1" dirty="0"/>
+              <a:t>TODO</a:t>
+            </a:r>
+            <a:r>
+              <a:rPr kumimoji="1" lang="ja-JP" altLang="en-US" sz="2800" b="1" dirty="0"/>
+              <a:t>リストに追加</a:t>
+            </a:r>
+          </a:p>
+        </p:txBody>
+      </p:sp>
+      <p:sp>
+        <p:nvSpPr>
+          <p:cNvPr id="6" name="テキスト ボックス 5">
+            <a:extLst>
+              <a:ext uri="{FF2B5EF4-FFF2-40B4-BE49-F238E27FC236}">
+                <a16:creationId xmlns:a16="http://schemas.microsoft.com/office/drawing/2014/main" id="{AB3F3D26-2DC1-AA83-2D71-BC3A451BAC8F}"/>
+              </a:ext>
+            </a:extLst>
+          </p:cNvPr>
+          <p:cNvSpPr txBox="1"/>
+          <p:nvPr/>
+        </p:nvSpPr>
+        <p:spPr>
+          <a:xfrm>
+            <a:off x="932426" y="3167390"/>
+            <a:ext cx="8443337" cy="523220"/>
+          </a:xfrm>
+          <a:prstGeom prst="rect">
+            <a:avLst/>
+          </a:prstGeom>
+          <a:noFill/>
+        </p:spPr>
+        <p:txBody>
+          <a:bodyPr wrap="none" rtlCol="0">
+            <a:spAutoFit/>
+          </a:bodyPr>
+          <a:lstStyle/>
+          <a:p>
+            <a:r>
+              <a:rPr kumimoji="1" lang="ja-JP" altLang="en-US" sz="2800" b="1" dirty="0"/>
+              <a:t>・新しい順、古い順、日時順、名前順にソート可能</a:t>
+            </a:r>
+          </a:p>
+        </p:txBody>
+      </p:sp>
+      <p:sp>
+        <p:nvSpPr>
+          <p:cNvPr id="7" name="テキスト ボックス 6">
+            <a:extLst>
+              <a:ext uri="{FF2B5EF4-FFF2-40B4-BE49-F238E27FC236}">
+                <a16:creationId xmlns:a16="http://schemas.microsoft.com/office/drawing/2014/main" id="{C0F64986-CC73-3548-A1EF-352749189D7B}"/>
+              </a:ext>
+            </a:extLst>
+          </p:cNvPr>
+          <p:cNvSpPr txBox="1"/>
+          <p:nvPr/>
+        </p:nvSpPr>
+        <p:spPr>
+          <a:xfrm>
+            <a:off x="932426" y="4599386"/>
+            <a:ext cx="5570756" cy="523220"/>
+          </a:xfrm>
+          <a:prstGeom prst="rect">
+            <a:avLst/>
+          </a:prstGeom>
+          <a:noFill/>
+        </p:spPr>
+        <p:txBody>
+          <a:bodyPr wrap="none" rtlCol="0">
+            <a:spAutoFit/>
+          </a:bodyPr>
+          <a:lstStyle/>
+          <a:p>
+            <a:r>
+              <a:rPr kumimoji="1" lang="ja-JP" altLang="en-US" sz="2800" b="1" dirty="0"/>
+              <a:t>・カテゴリ毎に絞り込みができる</a:t>
+            </a:r>
+          </a:p>
+        </p:txBody>
+      </p:sp>
     </p:spTree>
     <p:extLst>
       <p:ext uri="{BB962C8B-B14F-4D97-AF65-F5344CB8AC3E}">
-        <p14:creationId xmlns:p14="http://schemas.microsoft.com/office/powerpoint/2010/main" val="3574809456"/>
+        <p14:creationId xmlns:p14="http://schemas.microsoft.com/office/powerpoint/2010/main" val="3382973414"/>
       </p:ext>
     </p:extLst>
   </p:cSld>

--- a/モバイル授業_todoリスト.pptx
+++ b/モバイル授業_todoリスト.pptx
@@ -10,6 +10,9 @@
     <p:sldId id="260" r:id="rId4"/>
     <p:sldId id="261" r:id="rId5"/>
     <p:sldId id="264" r:id="rId6"/>
+    <p:sldId id="266" r:id="rId7"/>
+    <p:sldId id="267" r:id="rId8"/>
+    <p:sldId id="265" r:id="rId9"/>
   </p:sldIdLst>
   <p:sldSz cx="12192000" cy="6858000"/>
   <p:notesSz cx="6858000" cy="9144000"/>
@@ -285,7 +288,7 @@
           <a:p>
             <a:fld id="{898ACB73-228B-4573-B2A8-EEAE64393BA5}" type="datetimeFigureOut">
               <a:rPr kumimoji="1" lang="ja-JP" altLang="en-US" smtClean="0"/>
-              <a:t>2026/6/12</a:t>
+              <a:t>2026/6/17</a:t>
             </a:fld>
             <a:endParaRPr kumimoji="1" lang="ja-JP" altLang="en-US"/>
           </a:p>
@@ -661,7 +664,7 @@
           <a:p>
             <a:fld id="{898ACB73-228B-4573-B2A8-EEAE64393BA5}" type="datetimeFigureOut">
               <a:rPr kumimoji="1" lang="ja-JP" altLang="en-US" smtClean="0"/>
-              <a:t>2026/6/12</a:t>
+              <a:t>2026/6/17</a:t>
             </a:fld>
             <a:endParaRPr kumimoji="1" lang="ja-JP" altLang="en-US"/>
           </a:p>
@@ -873,7 +876,7 @@
           <a:p>
             <a:fld id="{898ACB73-228B-4573-B2A8-EEAE64393BA5}" type="datetimeFigureOut">
               <a:rPr kumimoji="1" lang="ja-JP" altLang="en-US" smtClean="0"/>
-              <a:t>2026/6/12</a:t>
+              <a:t>2026/6/17</a:t>
             </a:fld>
             <a:endParaRPr kumimoji="1" lang="ja-JP" altLang="en-US"/>
           </a:p>
@@ -1075,7 +1078,7 @@
           <a:p>
             <a:fld id="{898ACB73-228B-4573-B2A8-EEAE64393BA5}" type="datetimeFigureOut">
               <a:rPr kumimoji="1" lang="ja-JP" altLang="en-US" smtClean="0"/>
-              <a:t>2026/6/12</a:t>
+              <a:t>2026/6/17</a:t>
             </a:fld>
             <a:endParaRPr kumimoji="1" lang="ja-JP" altLang="en-US"/>
           </a:p>
@@ -1352,7 +1355,7 @@
           <a:p>
             <a:fld id="{898ACB73-228B-4573-B2A8-EEAE64393BA5}" type="datetimeFigureOut">
               <a:rPr kumimoji="1" lang="ja-JP" altLang="en-US" smtClean="0"/>
-              <a:t>2026/6/12</a:t>
+              <a:t>2026/6/17</a:t>
             </a:fld>
             <a:endParaRPr kumimoji="1" lang="ja-JP" altLang="en-US"/>
           </a:p>
@@ -1810,7 +1813,7 @@
           <a:p>
             <a:fld id="{898ACB73-228B-4573-B2A8-EEAE64393BA5}" type="datetimeFigureOut">
               <a:rPr kumimoji="1" lang="ja-JP" altLang="en-US" smtClean="0"/>
-              <a:t>2026/6/12</a:t>
+              <a:t>2026/6/17</a:t>
             </a:fld>
             <a:endParaRPr kumimoji="1" lang="ja-JP" altLang="en-US"/>
           </a:p>
@@ -2351,7 +2354,7 @@
           <a:p>
             <a:fld id="{898ACB73-228B-4573-B2A8-EEAE64393BA5}" type="datetimeFigureOut">
               <a:rPr kumimoji="1" lang="ja-JP" altLang="en-US" smtClean="0"/>
-              <a:t>2026/6/12</a:t>
+              <a:t>2026/6/17</a:t>
             </a:fld>
             <a:endParaRPr kumimoji="1" lang="ja-JP" altLang="en-US"/>
           </a:p>
@@ -2469,7 +2472,7 @@
           <a:p>
             <a:fld id="{898ACB73-228B-4573-B2A8-EEAE64393BA5}" type="datetimeFigureOut">
               <a:rPr kumimoji="1" lang="ja-JP" altLang="en-US" smtClean="0"/>
-              <a:t>2026/6/12</a:t>
+              <a:t>2026/6/17</a:t>
             </a:fld>
             <a:endParaRPr kumimoji="1" lang="ja-JP" altLang="en-US"/>
           </a:p>
@@ -2564,7 +2567,7 @@
           <a:p>
             <a:fld id="{898ACB73-228B-4573-B2A8-EEAE64393BA5}" type="datetimeFigureOut">
               <a:rPr kumimoji="1" lang="ja-JP" altLang="en-US" smtClean="0"/>
-              <a:t>2026/6/12</a:t>
+              <a:t>2026/6/17</a:t>
             </a:fld>
             <a:endParaRPr kumimoji="1" lang="ja-JP" altLang="en-US"/>
           </a:p>
@@ -2942,7 +2945,7 @@
           <a:p>
             <a:fld id="{898ACB73-228B-4573-B2A8-EEAE64393BA5}" type="datetimeFigureOut">
               <a:rPr kumimoji="1" lang="ja-JP" altLang="en-US" smtClean="0"/>
-              <a:t>2026/6/12</a:t>
+              <a:t>2026/6/17</a:t>
             </a:fld>
             <a:endParaRPr kumimoji="1" lang="ja-JP" altLang="en-US"/>
           </a:p>
@@ -3330,7 +3333,7 @@
           <a:p>
             <a:fld id="{898ACB73-228B-4573-B2A8-EEAE64393BA5}" type="datetimeFigureOut">
               <a:rPr kumimoji="1" lang="ja-JP" altLang="en-US" smtClean="0"/>
-              <a:t>2026/6/12</a:t>
+              <a:t>2026/6/17</a:t>
             </a:fld>
             <a:endParaRPr kumimoji="1" lang="ja-JP" altLang="en-US"/>
           </a:p>
@@ -3640,7 +3643,7 @@
           <a:p>
             <a:fld id="{898ACB73-228B-4573-B2A8-EEAE64393BA5}" type="datetimeFigureOut">
               <a:rPr kumimoji="1" lang="ja-JP" altLang="en-US" smtClean="0"/>
-              <a:t>2026/6/12</a:t>
+              <a:t>2026/6/17</a:t>
             </a:fld>
             <a:endParaRPr kumimoji="1" lang="ja-JP" altLang="en-US"/>
           </a:p>
@@ -4321,7 +4324,7 @@
         <p:spPr>
           <a:xfrm>
             <a:off x="1248443" y="1795584"/>
-            <a:ext cx="5109925" cy="769441"/>
+            <a:ext cx="6648808" cy="769441"/>
           </a:xfrm>
           <a:prstGeom prst="rect">
             <a:avLst/>
@@ -4344,7 +4347,7 @@
             </a:r>
             <a:r>
               <a:rPr kumimoji="1" lang="ja-JP" altLang="en-US" sz="4000" b="1" dirty="0"/>
-              <a:t>リストを作る</a:t>
+              <a:t>リストを作りました</a:t>
             </a:r>
           </a:p>
         </p:txBody>
@@ -4364,7 +4367,7 @@
         <p:spPr>
           <a:xfrm>
             <a:off x="1238611" y="4292975"/>
-            <a:ext cx="7520007" cy="769441"/>
+            <a:ext cx="8648521" cy="769441"/>
           </a:xfrm>
           <a:prstGeom prst="rect">
             <a:avLst/>
@@ -4379,7 +4382,7 @@
           <a:p>
             <a:r>
               <a:rPr kumimoji="1" lang="ja-JP" altLang="en-US" sz="4400" b="1" dirty="0"/>
-              <a:t>・「シンプルさ」を意識した</a:t>
+              <a:t>・「シンプルさ」を意識しました</a:t>
             </a:r>
           </a:p>
         </p:txBody>
@@ -4654,8 +4657,8 @@
         </p:nvSpPr>
         <p:spPr>
           <a:xfrm>
-            <a:off x="4037371" y="449826"/>
-            <a:ext cx="4117258" cy="759542"/>
+            <a:off x="4827314" y="410497"/>
+            <a:ext cx="2537371" cy="759542"/>
           </a:xfrm>
           <a:prstGeom prst="rect">
             <a:avLst/>
@@ -4663,7 +4666,7 @@
         </p:spPr>
         <p:txBody>
           <a:bodyPr>
-            <a:normAutofit fontScale="85000" lnSpcReduction="10000"/>
+            <a:normAutofit/>
           </a:bodyPr>
           <a:lstStyle>
             <a:lvl1pPr algn="l" defTabSz="914400" rtl="0" eaLnBrk="1" latinLnBrk="0" hangingPunct="1">
@@ -4687,7 +4690,7 @@
           <a:p>
             <a:r>
               <a:rPr lang="ja-JP" altLang="en-US" b="1" dirty="0"/>
-              <a:t>余裕があれば実装</a:t>
+              <a:t>随時実装</a:t>
             </a:r>
           </a:p>
         </p:txBody>
@@ -5064,7 +5067,7 @@
             </a:r>
             <a:r>
               <a:rPr kumimoji="1" lang="ja-JP" altLang="en-US" sz="2800" b="1" dirty="0"/>
-              <a:t>を指定して、</a:t>
+              <a:t>を設定して、</a:t>
             </a:r>
             <a:r>
               <a:rPr kumimoji="1" lang="en-US" altLang="ja-JP" sz="2800" b="1" dirty="0"/>
@@ -5092,7 +5095,7 @@
         <p:spPr>
           <a:xfrm>
             <a:off x="932426" y="3167390"/>
-            <a:ext cx="8443337" cy="523220"/>
+            <a:ext cx="9879628" cy="523220"/>
           </a:xfrm>
           <a:prstGeom prst="rect">
             <a:avLst/>
@@ -5107,7 +5110,7 @@
           <a:p>
             <a:r>
               <a:rPr kumimoji="1" lang="ja-JP" altLang="en-US" sz="2800" b="1" dirty="0"/>
-              <a:t>・新しい順、古い順、日時順、名前順にソート可能</a:t>
+              <a:t>・リストは新しい順、古い順、日時順、名前順にソート可能</a:t>
             </a:r>
           </a:p>
         </p:txBody>
@@ -5142,7 +5145,7 @@
           <a:p>
             <a:r>
               <a:rPr kumimoji="1" lang="ja-JP" altLang="en-US" sz="2800" b="1" dirty="0"/>
-              <a:t>・カテゴリ毎に絞り込みができる</a:t>
+              <a:t>・カテゴリ毎に絞り込みもできる</a:t>
             </a:r>
           </a:p>
         </p:txBody>
@@ -5151,6 +5154,331 @@
     <p:extLst>
       <p:ext uri="{BB962C8B-B14F-4D97-AF65-F5344CB8AC3E}">
         <p14:creationId xmlns:p14="http://schemas.microsoft.com/office/powerpoint/2010/main" val="3382973414"/>
+      </p:ext>
+    </p:extLst>
+  </p:cSld>
+  <p:clrMapOvr>
+    <a:masterClrMapping/>
+  </p:clrMapOvr>
+</p:sld>
+</file>
+
+<file path=ppt/slides/slide6.xml><?xml version="1.0" encoding="utf-8"?>
+<p:sld xmlns:a="http://schemas.openxmlformats.org/drawingml/2006/main" xmlns:r="http://schemas.openxmlformats.org/officeDocument/2006/relationships" xmlns:p="http://schemas.openxmlformats.org/presentationml/2006/main">
+  <p:cSld>
+    <p:spTree>
+      <p:nvGrpSpPr>
+        <p:cNvPr id="1" name=""/>
+        <p:cNvGrpSpPr/>
+        <p:nvPr/>
+      </p:nvGrpSpPr>
+      <p:grpSpPr>
+        <a:xfrm>
+          <a:off x="0" y="0"/>
+          <a:ext cx="0" cy="0"/>
+          <a:chOff x="0" y="0"/>
+          <a:chExt cx="0" cy="0"/>
+        </a:xfrm>
+      </p:grpSpPr>
+      <p:sp>
+        <p:nvSpPr>
+          <p:cNvPr id="2" name="テキスト ボックス 1">
+            <a:extLst>
+              <a:ext uri="{FF2B5EF4-FFF2-40B4-BE49-F238E27FC236}">
+                <a16:creationId xmlns:a16="http://schemas.microsoft.com/office/drawing/2014/main" id="{63FAD635-FD64-A676-843B-FB092A60FF3D}"/>
+              </a:ext>
+            </a:extLst>
+          </p:cNvPr>
+          <p:cNvSpPr txBox="1"/>
+          <p:nvPr/>
+        </p:nvSpPr>
+        <p:spPr>
+          <a:xfrm>
+            <a:off x="3951823" y="2767280"/>
+            <a:ext cx="4288353" cy="1323439"/>
+          </a:xfrm>
+          <a:prstGeom prst="rect">
+            <a:avLst/>
+          </a:prstGeom>
+          <a:noFill/>
+        </p:spPr>
+        <p:txBody>
+          <a:bodyPr wrap="none" rtlCol="0">
+            <a:spAutoFit/>
+          </a:bodyPr>
+          <a:lstStyle/>
+          <a:p>
+            <a:r>
+              <a:rPr kumimoji="1" lang="ja-JP" altLang="en-US" sz="8000" b="1" dirty="0"/>
+              <a:t>実機説明</a:t>
+            </a:r>
+          </a:p>
+        </p:txBody>
+      </p:sp>
+    </p:spTree>
+    <p:extLst>
+      <p:ext uri="{BB962C8B-B14F-4D97-AF65-F5344CB8AC3E}">
+        <p14:creationId xmlns:p14="http://schemas.microsoft.com/office/powerpoint/2010/main" val="1609274902"/>
+      </p:ext>
+    </p:extLst>
+  </p:cSld>
+  <p:clrMapOvr>
+    <a:masterClrMapping/>
+  </p:clrMapOvr>
+</p:sld>
+</file>
+
+<file path=ppt/slides/slide7.xml><?xml version="1.0" encoding="utf-8"?>
+<p:sld xmlns:a="http://schemas.openxmlformats.org/drawingml/2006/main" xmlns:r="http://schemas.openxmlformats.org/officeDocument/2006/relationships" xmlns:p="http://schemas.openxmlformats.org/presentationml/2006/main">
+  <p:cSld>
+    <p:spTree>
+      <p:nvGrpSpPr>
+        <p:cNvPr id="1" name="">
+          <a:extLst>
+            <a:ext uri="{FF2B5EF4-FFF2-40B4-BE49-F238E27FC236}">
+              <a16:creationId xmlns:a16="http://schemas.microsoft.com/office/drawing/2014/main" id="{47F491B6-7374-3301-CACE-0ED8431A4B2C}"/>
+            </a:ext>
+          </a:extLst>
+        </p:cNvPr>
+        <p:cNvGrpSpPr/>
+        <p:nvPr/>
+      </p:nvGrpSpPr>
+      <p:grpSpPr>
+        <a:xfrm>
+          <a:off x="0" y="0"/>
+          <a:ext cx="0" cy="0"/>
+          <a:chOff x="0" y="0"/>
+          <a:chExt cx="0" cy="0"/>
+        </a:xfrm>
+      </p:grpSpPr>
+      <p:sp>
+        <p:nvSpPr>
+          <p:cNvPr id="2" name="タイトル 1">
+            <a:extLst>
+              <a:ext uri="{FF2B5EF4-FFF2-40B4-BE49-F238E27FC236}">
+                <a16:creationId xmlns:a16="http://schemas.microsoft.com/office/drawing/2014/main" id="{F3D9376E-2F96-D894-865E-EA38984CD13F}"/>
+              </a:ext>
+            </a:extLst>
+          </p:cNvPr>
+          <p:cNvSpPr txBox="1">
+            <a:spLocks/>
+          </p:cNvSpPr>
+          <p:nvPr/>
+        </p:nvSpPr>
+        <p:spPr>
+          <a:xfrm>
+            <a:off x="5146265" y="446847"/>
+            <a:ext cx="1899470" cy="759542"/>
+          </a:xfrm>
+          <a:prstGeom prst="rect">
+            <a:avLst/>
+          </a:prstGeom>
+        </p:spPr>
+        <p:txBody>
+          <a:bodyPr>
+            <a:normAutofit/>
+          </a:bodyPr>
+          <a:lstStyle>
+            <a:lvl1pPr algn="l" defTabSz="914400" rtl="0" eaLnBrk="1" latinLnBrk="0" hangingPunct="1">
+              <a:lnSpc>
+                <a:spcPct val="89000"/>
+              </a:lnSpc>
+              <a:spcBef>
+                <a:spcPct val="0"/>
+              </a:spcBef>
+              <a:buNone/>
+              <a:defRPr kumimoji="1" sz="4400" kern="1200" baseline="0">
+                <a:solidFill>
+                  <a:schemeClr val="tx2"/>
+                </a:solidFill>
+                <a:latin typeface="+mj-lt"/>
+                <a:ea typeface="+mj-ea"/>
+                <a:cs typeface="+mj-cs"/>
+              </a:defRPr>
+            </a:lvl1pPr>
+          </a:lstStyle>
+          <a:p>
+            <a:r>
+              <a:rPr lang="ja-JP" altLang="en-US" b="1" dirty="0"/>
+              <a:t>まとめ</a:t>
+            </a:r>
+          </a:p>
+        </p:txBody>
+      </p:sp>
+      <p:sp>
+        <p:nvSpPr>
+          <p:cNvPr id="5" name="テキスト ボックス 4">
+            <a:extLst>
+              <a:ext uri="{FF2B5EF4-FFF2-40B4-BE49-F238E27FC236}">
+                <a16:creationId xmlns:a16="http://schemas.microsoft.com/office/drawing/2014/main" id="{63A9E1F0-6E06-67C9-35F5-9FFC90BFADE5}"/>
+              </a:ext>
+            </a:extLst>
+          </p:cNvPr>
+          <p:cNvSpPr txBox="1"/>
+          <p:nvPr/>
+        </p:nvSpPr>
+        <p:spPr>
+          <a:xfrm>
+            <a:off x="932426" y="1735394"/>
+            <a:ext cx="543739" cy="523220"/>
+          </a:xfrm>
+          <a:prstGeom prst="rect">
+            <a:avLst/>
+          </a:prstGeom>
+          <a:noFill/>
+        </p:spPr>
+        <p:txBody>
+          <a:bodyPr wrap="none" rtlCol="0">
+            <a:spAutoFit/>
+          </a:bodyPr>
+          <a:lstStyle/>
+          <a:p>
+            <a:r>
+              <a:rPr kumimoji="1" lang="ja-JP" altLang="en-US" sz="2800" b="1" dirty="0"/>
+              <a:t>・</a:t>
+            </a:r>
+          </a:p>
+        </p:txBody>
+      </p:sp>
+      <p:sp>
+        <p:nvSpPr>
+          <p:cNvPr id="6" name="テキスト ボックス 5">
+            <a:extLst>
+              <a:ext uri="{FF2B5EF4-FFF2-40B4-BE49-F238E27FC236}">
+                <a16:creationId xmlns:a16="http://schemas.microsoft.com/office/drawing/2014/main" id="{B05085C8-E2B1-5A7E-4E55-B16F6F152925}"/>
+              </a:ext>
+            </a:extLst>
+          </p:cNvPr>
+          <p:cNvSpPr txBox="1"/>
+          <p:nvPr/>
+        </p:nvSpPr>
+        <p:spPr>
+          <a:xfrm>
+            <a:off x="932426" y="3167390"/>
+            <a:ext cx="543739" cy="523220"/>
+          </a:xfrm>
+          <a:prstGeom prst="rect">
+            <a:avLst/>
+          </a:prstGeom>
+          <a:noFill/>
+        </p:spPr>
+        <p:txBody>
+          <a:bodyPr wrap="none" rtlCol="0">
+            <a:spAutoFit/>
+          </a:bodyPr>
+          <a:lstStyle/>
+          <a:p>
+            <a:r>
+              <a:rPr kumimoji="1" lang="ja-JP" altLang="en-US" sz="2800" b="1" dirty="0"/>
+              <a:t>・</a:t>
+            </a:r>
+          </a:p>
+        </p:txBody>
+      </p:sp>
+      <p:sp>
+        <p:nvSpPr>
+          <p:cNvPr id="7" name="テキスト ボックス 6">
+            <a:extLst>
+              <a:ext uri="{FF2B5EF4-FFF2-40B4-BE49-F238E27FC236}">
+                <a16:creationId xmlns:a16="http://schemas.microsoft.com/office/drawing/2014/main" id="{1F53E04E-94F0-2C6A-F991-6ED879AE15ED}"/>
+              </a:ext>
+            </a:extLst>
+          </p:cNvPr>
+          <p:cNvSpPr txBox="1"/>
+          <p:nvPr/>
+        </p:nvSpPr>
+        <p:spPr>
+          <a:xfrm>
+            <a:off x="932426" y="4599386"/>
+            <a:ext cx="543739" cy="523220"/>
+          </a:xfrm>
+          <a:prstGeom prst="rect">
+            <a:avLst/>
+          </a:prstGeom>
+          <a:noFill/>
+        </p:spPr>
+        <p:txBody>
+          <a:bodyPr wrap="none" rtlCol="0">
+            <a:spAutoFit/>
+          </a:bodyPr>
+          <a:lstStyle/>
+          <a:p>
+            <a:r>
+              <a:rPr kumimoji="1" lang="ja-JP" altLang="en-US" sz="2800" b="1" dirty="0"/>
+              <a:t>・</a:t>
+            </a:r>
+          </a:p>
+        </p:txBody>
+      </p:sp>
+    </p:spTree>
+    <p:extLst>
+      <p:ext uri="{BB962C8B-B14F-4D97-AF65-F5344CB8AC3E}">
+        <p14:creationId xmlns:p14="http://schemas.microsoft.com/office/powerpoint/2010/main" val="710571263"/>
+      </p:ext>
+    </p:extLst>
+  </p:cSld>
+  <p:clrMapOvr>
+    <a:masterClrMapping/>
+  </p:clrMapOvr>
+</p:sld>
+</file>
+
+<file path=ppt/slides/slide8.xml><?xml version="1.0" encoding="utf-8"?>
+<p:sld xmlns:a="http://schemas.openxmlformats.org/drawingml/2006/main" xmlns:r="http://schemas.openxmlformats.org/officeDocument/2006/relationships" xmlns:p="http://schemas.openxmlformats.org/presentationml/2006/main">
+  <p:cSld>
+    <p:spTree>
+      <p:nvGrpSpPr>
+        <p:cNvPr id="1" name=""/>
+        <p:cNvGrpSpPr/>
+        <p:nvPr/>
+      </p:nvGrpSpPr>
+      <p:grpSpPr>
+        <a:xfrm>
+          <a:off x="0" y="0"/>
+          <a:ext cx="0" cy="0"/>
+          <a:chOff x="0" y="0"/>
+          <a:chExt cx="0" cy="0"/>
+        </a:xfrm>
+      </p:grpSpPr>
+      <p:sp>
+        <p:nvSpPr>
+          <p:cNvPr id="2" name="テキスト ボックス 1">
+            <a:extLst>
+              <a:ext uri="{FF2B5EF4-FFF2-40B4-BE49-F238E27FC236}">
+                <a16:creationId xmlns:a16="http://schemas.microsoft.com/office/drawing/2014/main" id="{155C96AD-CEFA-9B09-521A-E6DC813362A9}"/>
+              </a:ext>
+            </a:extLst>
+          </p:cNvPr>
+          <p:cNvSpPr txBox="1"/>
+          <p:nvPr/>
+        </p:nvSpPr>
+        <p:spPr>
+          <a:xfrm>
+            <a:off x="947830" y="2921168"/>
+            <a:ext cx="10956846" cy="1015663"/>
+          </a:xfrm>
+          <a:prstGeom prst="rect">
+            <a:avLst/>
+          </a:prstGeom>
+          <a:noFill/>
+        </p:spPr>
+        <p:txBody>
+          <a:bodyPr wrap="none" rtlCol="0">
+            <a:spAutoFit/>
+          </a:bodyPr>
+          <a:lstStyle/>
+          <a:p>
+            <a:r>
+              <a:rPr kumimoji="1" lang="ja-JP" altLang="en-US" sz="6000" b="1" dirty="0"/>
+              <a:t>ご清聴ありがとうございました</a:t>
+            </a:r>
+          </a:p>
+        </p:txBody>
+      </p:sp>
+    </p:spTree>
+    <p:extLst>
+      <p:ext uri="{BB962C8B-B14F-4D97-AF65-F5344CB8AC3E}">
+        <p14:creationId xmlns:p14="http://schemas.microsoft.com/office/powerpoint/2010/main" val="478292780"/>
       </p:ext>
     </p:extLst>
   </p:cSld>

--- a/モバイル授業_todoリスト.pptx
+++ b/モバイル授業_todoリスト.pptx
@@ -9,10 +9,11 @@
     <p:sldId id="263" r:id="rId3"/>
     <p:sldId id="260" r:id="rId4"/>
     <p:sldId id="261" r:id="rId5"/>
-    <p:sldId id="264" r:id="rId6"/>
-    <p:sldId id="266" r:id="rId7"/>
-    <p:sldId id="267" r:id="rId8"/>
-    <p:sldId id="265" r:id="rId9"/>
+    <p:sldId id="268" r:id="rId6"/>
+    <p:sldId id="264" r:id="rId7"/>
+    <p:sldId id="266" r:id="rId8"/>
+    <p:sldId id="267" r:id="rId9"/>
+    <p:sldId id="265" r:id="rId10"/>
   </p:sldIdLst>
   <p:sldSz cx="12192000" cy="6858000"/>
   <p:notesSz cx="6858000" cy="9144000"/>
@@ -288,7 +289,7 @@
           <a:p>
             <a:fld id="{898ACB73-228B-4573-B2A8-EEAE64393BA5}" type="datetimeFigureOut">
               <a:rPr kumimoji="1" lang="ja-JP" altLang="en-US" smtClean="0"/>
-              <a:t>2026/6/17</a:t>
+              <a:t>2026/6/24</a:t>
             </a:fld>
             <a:endParaRPr kumimoji="1" lang="ja-JP" altLang="en-US"/>
           </a:p>
@@ -664,7 +665,7 @@
           <a:p>
             <a:fld id="{898ACB73-228B-4573-B2A8-EEAE64393BA5}" type="datetimeFigureOut">
               <a:rPr kumimoji="1" lang="ja-JP" altLang="en-US" smtClean="0"/>
-              <a:t>2026/6/17</a:t>
+              <a:t>2026/6/24</a:t>
             </a:fld>
             <a:endParaRPr kumimoji="1" lang="ja-JP" altLang="en-US"/>
           </a:p>
@@ -876,7 +877,7 @@
           <a:p>
             <a:fld id="{898ACB73-228B-4573-B2A8-EEAE64393BA5}" type="datetimeFigureOut">
               <a:rPr kumimoji="1" lang="ja-JP" altLang="en-US" smtClean="0"/>
-              <a:t>2026/6/17</a:t>
+              <a:t>2026/6/24</a:t>
             </a:fld>
             <a:endParaRPr kumimoji="1" lang="ja-JP" altLang="en-US"/>
           </a:p>
@@ -1078,7 +1079,7 @@
           <a:p>
             <a:fld id="{898ACB73-228B-4573-B2A8-EEAE64393BA5}" type="datetimeFigureOut">
               <a:rPr kumimoji="1" lang="ja-JP" altLang="en-US" smtClean="0"/>
-              <a:t>2026/6/17</a:t>
+              <a:t>2026/6/24</a:t>
             </a:fld>
             <a:endParaRPr kumimoji="1" lang="ja-JP" altLang="en-US"/>
           </a:p>
@@ -1355,7 +1356,7 @@
           <a:p>
             <a:fld id="{898ACB73-228B-4573-B2A8-EEAE64393BA5}" type="datetimeFigureOut">
               <a:rPr kumimoji="1" lang="ja-JP" altLang="en-US" smtClean="0"/>
-              <a:t>2026/6/17</a:t>
+              <a:t>2026/6/24</a:t>
             </a:fld>
             <a:endParaRPr kumimoji="1" lang="ja-JP" altLang="en-US"/>
           </a:p>
@@ -1813,7 +1814,7 @@
           <a:p>
             <a:fld id="{898ACB73-228B-4573-B2A8-EEAE64393BA5}" type="datetimeFigureOut">
               <a:rPr kumimoji="1" lang="ja-JP" altLang="en-US" smtClean="0"/>
-              <a:t>2026/6/17</a:t>
+              <a:t>2026/6/24</a:t>
             </a:fld>
             <a:endParaRPr kumimoji="1" lang="ja-JP" altLang="en-US"/>
           </a:p>
@@ -2354,7 +2355,7 @@
           <a:p>
             <a:fld id="{898ACB73-228B-4573-B2A8-EEAE64393BA5}" type="datetimeFigureOut">
               <a:rPr kumimoji="1" lang="ja-JP" altLang="en-US" smtClean="0"/>
-              <a:t>2026/6/17</a:t>
+              <a:t>2026/6/24</a:t>
             </a:fld>
             <a:endParaRPr kumimoji="1" lang="ja-JP" altLang="en-US"/>
           </a:p>
@@ -2472,7 +2473,7 @@
           <a:p>
             <a:fld id="{898ACB73-228B-4573-B2A8-EEAE64393BA5}" type="datetimeFigureOut">
               <a:rPr kumimoji="1" lang="ja-JP" altLang="en-US" smtClean="0"/>
-              <a:t>2026/6/17</a:t>
+              <a:t>2026/6/24</a:t>
             </a:fld>
             <a:endParaRPr kumimoji="1" lang="ja-JP" altLang="en-US"/>
           </a:p>
@@ -2567,7 +2568,7 @@
           <a:p>
             <a:fld id="{898ACB73-228B-4573-B2A8-EEAE64393BA5}" type="datetimeFigureOut">
               <a:rPr kumimoji="1" lang="ja-JP" altLang="en-US" smtClean="0"/>
-              <a:t>2026/6/17</a:t>
+              <a:t>2026/6/24</a:t>
             </a:fld>
             <a:endParaRPr kumimoji="1" lang="ja-JP" altLang="en-US"/>
           </a:p>
@@ -2945,7 +2946,7 @@
           <a:p>
             <a:fld id="{898ACB73-228B-4573-B2A8-EEAE64393BA5}" type="datetimeFigureOut">
               <a:rPr kumimoji="1" lang="ja-JP" altLang="en-US" smtClean="0"/>
-              <a:t>2026/6/17</a:t>
+              <a:t>2026/6/24</a:t>
             </a:fld>
             <a:endParaRPr kumimoji="1" lang="ja-JP" altLang="en-US"/>
           </a:p>
@@ -3333,7 +3334,7 @@
           <a:p>
             <a:fld id="{898ACB73-228B-4573-B2A8-EEAE64393BA5}" type="datetimeFigureOut">
               <a:rPr kumimoji="1" lang="ja-JP" altLang="en-US" smtClean="0"/>
-              <a:t>2026/6/17</a:t>
+              <a:t>2026/6/24</a:t>
             </a:fld>
             <a:endParaRPr kumimoji="1" lang="ja-JP" altLang="en-US"/>
           </a:p>
@@ -3643,7 +3644,7 @@
           <a:p>
             <a:fld id="{898ACB73-228B-4573-B2A8-EEAE64393BA5}" type="datetimeFigureOut">
               <a:rPr kumimoji="1" lang="ja-JP" altLang="en-US" smtClean="0"/>
-              <a:t>2026/6/17</a:t>
+              <a:t>2026/6/24</a:t>
             </a:fld>
             <a:endParaRPr kumimoji="1" lang="ja-JP" altLang="en-US"/>
           </a:p>
@@ -4323,8 +4324,8 @@
         </p:nvSpPr>
         <p:spPr>
           <a:xfrm>
-            <a:off x="1248443" y="1795584"/>
-            <a:ext cx="6648808" cy="769441"/>
+            <a:off x="1238611" y="1011991"/>
+            <a:ext cx="10289996" cy="769441"/>
           </a:xfrm>
           <a:prstGeom prst="rect">
             <a:avLst/>
@@ -4342,13 +4343,10 @@
               <a:t>・</a:t>
             </a:r>
             <a:r>
-              <a:rPr kumimoji="1" lang="en-US" altLang="ja-JP" sz="4400" b="1" dirty="0"/>
-              <a:t>TODO</a:t>
-            </a:r>
-            <a:r>
-              <a:rPr kumimoji="1" lang="ja-JP" altLang="en-US" sz="4000" b="1" dirty="0"/>
-              <a:t>リストを作りました</a:t>
-            </a:r>
+              <a:rPr kumimoji="1" lang="ja-JP" altLang="en-US" sz="4400" b="1" dirty="0"/>
+              <a:t>学校でも私生活でも予定の管理が苦手</a:t>
+            </a:r>
+            <a:endParaRPr kumimoji="1" lang="ja-JP" altLang="en-US" sz="4000" b="1" dirty="0"/>
           </a:p>
         </p:txBody>
       </p:sp>
@@ -4366,7 +4364,7 @@
         </p:nvSpPr>
         <p:spPr>
           <a:xfrm>
-            <a:off x="1238611" y="4292975"/>
+            <a:off x="1238611" y="5076567"/>
             <a:ext cx="8648521" cy="769441"/>
           </a:xfrm>
           <a:prstGeom prst="rect">
@@ -4384,6 +4382,46 @@
               <a:rPr kumimoji="1" lang="ja-JP" altLang="en-US" sz="4400" b="1" dirty="0"/>
               <a:t>・「シンプルさ」を意識しました</a:t>
             </a:r>
+          </a:p>
+        </p:txBody>
+      </p:sp>
+      <p:sp>
+        <p:nvSpPr>
+          <p:cNvPr id="4" name="テキスト ボックス 3">
+            <a:extLst>
+              <a:ext uri="{FF2B5EF4-FFF2-40B4-BE49-F238E27FC236}">
+                <a16:creationId xmlns:a16="http://schemas.microsoft.com/office/drawing/2014/main" id="{C7817B32-378F-2AE9-038E-2F501F80C8C6}"/>
+              </a:ext>
+            </a:extLst>
+          </p:cNvPr>
+          <p:cNvSpPr txBox="1"/>
+          <p:nvPr/>
+        </p:nvSpPr>
+        <p:spPr>
+          <a:xfrm>
+            <a:off x="1238611" y="3044279"/>
+            <a:ext cx="10289996" cy="769441"/>
+          </a:xfrm>
+          <a:prstGeom prst="rect">
+            <a:avLst/>
+          </a:prstGeom>
+          <a:noFill/>
+        </p:spPr>
+        <p:txBody>
+          <a:bodyPr wrap="none" rtlCol="0">
+            <a:spAutoFit/>
+          </a:bodyPr>
+          <a:lstStyle/>
+          <a:p>
+            <a:r>
+              <a:rPr kumimoji="1" lang="ja-JP" altLang="en-US" sz="4000" b="1" dirty="0"/>
+              <a:t>・</a:t>
+            </a:r>
+            <a:r>
+              <a:rPr kumimoji="1" lang="ja-JP" altLang="en-US" sz="4400" b="1" dirty="0"/>
+              <a:t>使いやすい予定管理アプリが作りたい</a:t>
+            </a:r>
+            <a:endParaRPr kumimoji="1" lang="ja-JP" altLang="en-US" sz="4000" b="1" dirty="0"/>
           </a:p>
         </p:txBody>
       </p:sp>
@@ -4936,6 +4974,147 @@
         <p:cNvPr id="1" name="">
           <a:extLst>
             <a:ext uri="{FF2B5EF4-FFF2-40B4-BE49-F238E27FC236}">
+              <a16:creationId xmlns:a16="http://schemas.microsoft.com/office/drawing/2014/main" id="{44F219D8-B9CD-06AE-8F82-464D8E8D5887}"/>
+            </a:ext>
+          </a:extLst>
+        </p:cNvPr>
+        <p:cNvGrpSpPr/>
+        <p:nvPr/>
+      </p:nvGrpSpPr>
+      <p:grpSpPr>
+        <a:xfrm>
+          <a:off x="0" y="0"/>
+          <a:ext cx="0" cy="0"/>
+          <a:chOff x="0" y="0"/>
+          <a:chExt cx="0" cy="0"/>
+        </a:xfrm>
+      </p:grpSpPr>
+      <p:sp>
+        <p:nvSpPr>
+          <p:cNvPr id="2" name="タイトル 1">
+            <a:extLst>
+              <a:ext uri="{FF2B5EF4-FFF2-40B4-BE49-F238E27FC236}">
+                <a16:creationId xmlns:a16="http://schemas.microsoft.com/office/drawing/2014/main" id="{A8859D81-6A05-7CAA-305B-3706D2BC0EFE}"/>
+              </a:ext>
+            </a:extLst>
+          </p:cNvPr>
+          <p:cNvSpPr txBox="1">
+            <a:spLocks/>
+          </p:cNvSpPr>
+          <p:nvPr/>
+        </p:nvSpPr>
+        <p:spPr>
+          <a:xfrm>
+            <a:off x="3183808" y="508819"/>
+            <a:ext cx="5824384" cy="759542"/>
+          </a:xfrm>
+          <a:prstGeom prst="rect">
+            <a:avLst/>
+          </a:prstGeom>
+        </p:spPr>
+        <p:txBody>
+          <a:bodyPr>
+            <a:normAutofit/>
+          </a:bodyPr>
+          <a:lstStyle>
+            <a:lvl1pPr algn="l" defTabSz="914400" rtl="0" eaLnBrk="1" latinLnBrk="0" hangingPunct="1">
+              <a:lnSpc>
+                <a:spcPct val="89000"/>
+              </a:lnSpc>
+              <a:spcBef>
+                <a:spcPct val="0"/>
+              </a:spcBef>
+              <a:buNone/>
+              <a:defRPr kumimoji="1" sz="4400" kern="1200" baseline="0">
+                <a:solidFill>
+                  <a:schemeClr val="tx2"/>
+                </a:solidFill>
+                <a:latin typeface="+mj-lt"/>
+                <a:ea typeface="+mj-ea"/>
+                <a:cs typeface="+mj-cs"/>
+              </a:defRPr>
+            </a:lvl1pPr>
+          </a:lstStyle>
+          <a:p>
+            <a:r>
+              <a:rPr lang="ja-JP" altLang="en-US" b="1" dirty="0"/>
+              <a:t>実装できなかった機能</a:t>
+            </a:r>
+          </a:p>
+        </p:txBody>
+      </p:sp>
+      <p:sp>
+        <p:nvSpPr>
+          <p:cNvPr id="3" name="楕円 2">
+            <a:extLst>
+              <a:ext uri="{FF2B5EF4-FFF2-40B4-BE49-F238E27FC236}">
+                <a16:creationId xmlns:a16="http://schemas.microsoft.com/office/drawing/2014/main" id="{46941E49-BE74-E401-B17A-683F87754CDC}"/>
+              </a:ext>
+            </a:extLst>
+          </p:cNvPr>
+          <p:cNvSpPr/>
+          <p:nvPr/>
+        </p:nvSpPr>
+        <p:spPr>
+          <a:xfrm>
+            <a:off x="4296000" y="1835477"/>
+            <a:ext cx="3600000" cy="3600000"/>
+          </a:xfrm>
+          <a:prstGeom prst="ellipse">
+            <a:avLst/>
+          </a:prstGeom>
+        </p:spPr>
+        <p:style>
+          <a:lnRef idx="1">
+            <a:schemeClr val="accent2"/>
+          </a:lnRef>
+          <a:fillRef idx="2">
+            <a:schemeClr val="accent2"/>
+          </a:fillRef>
+          <a:effectRef idx="1">
+            <a:schemeClr val="accent2"/>
+          </a:effectRef>
+          <a:fontRef idx="minor">
+            <a:schemeClr val="dk1"/>
+          </a:fontRef>
+        </p:style>
+        <p:txBody>
+          <a:bodyPr rtlCol="0" anchor="ctr"/>
+          <a:lstStyle/>
+          <a:p>
+            <a:pPr algn="ctr">
+              <a:lnSpc>
+                <a:spcPct val="150000"/>
+              </a:lnSpc>
+            </a:pPr>
+            <a:r>
+              <a:rPr kumimoji="1" lang="ja-JP" altLang="en-US" sz="2800" b="1" dirty="0"/>
+              <a:t>通知設定</a:t>
+            </a:r>
+          </a:p>
+        </p:txBody>
+      </p:sp>
+    </p:spTree>
+    <p:extLst>
+      <p:ext uri="{BB962C8B-B14F-4D97-AF65-F5344CB8AC3E}">
+        <p14:creationId xmlns:p14="http://schemas.microsoft.com/office/powerpoint/2010/main" val="3535540919"/>
+      </p:ext>
+    </p:extLst>
+  </p:cSld>
+  <p:clrMapOvr>
+    <a:masterClrMapping/>
+  </p:clrMapOvr>
+</p:sld>
+</file>
+
+<file path=ppt/slides/slide6.xml><?xml version="1.0" encoding="utf-8"?>
+<p:sld xmlns:a="http://schemas.openxmlformats.org/drawingml/2006/main" xmlns:r="http://schemas.openxmlformats.org/officeDocument/2006/relationships" xmlns:p="http://schemas.openxmlformats.org/presentationml/2006/main">
+  <p:cSld>
+    <p:spTree>
+      <p:nvGrpSpPr>
+        <p:cNvPr id="1" name="">
+          <a:extLst>
+            <a:ext uri="{FF2B5EF4-FFF2-40B4-BE49-F238E27FC236}">
               <a16:creationId xmlns:a16="http://schemas.microsoft.com/office/drawing/2014/main" id="{2087F40B-0DCA-8276-6D62-2C3AADFC2A1D}"/>
             </a:ext>
           </a:extLst>
@@ -4967,8 +5146,8 @@
         </p:nvSpPr>
         <p:spPr>
           <a:xfrm>
-            <a:off x="4874956" y="498987"/>
-            <a:ext cx="2442087" cy="759542"/>
+            <a:off x="4437485" y="521464"/>
+            <a:ext cx="4131393" cy="759542"/>
           </a:xfrm>
           <a:prstGeom prst="rect">
             <a:avLst/>
@@ -5000,7 +5179,7 @@
           <a:p>
             <a:r>
               <a:rPr lang="ja-JP" altLang="en-US" b="1" dirty="0"/>
-              <a:t>機能説明</a:t>
+              <a:t>アプリの使い方</a:t>
             </a:r>
           </a:p>
         </p:txBody>
@@ -5019,7 +5198,7 @@
         </p:nvSpPr>
         <p:spPr>
           <a:xfrm>
-            <a:off x="932426" y="1735394"/>
+            <a:off x="927520" y="2079523"/>
             <a:ext cx="11151322" cy="523220"/>
           </a:xfrm>
           <a:prstGeom prst="rect">
@@ -5094,7 +5273,7 @@
         </p:nvSpPr>
         <p:spPr>
           <a:xfrm>
-            <a:off x="932426" y="3167390"/>
+            <a:off x="932425" y="3767158"/>
             <a:ext cx="9879628" cy="523220"/>
           </a:xfrm>
           <a:prstGeom prst="rect">
@@ -5129,7 +5308,7 @@
         </p:nvSpPr>
         <p:spPr>
           <a:xfrm>
-            <a:off x="932426" y="4599386"/>
+            <a:off x="932425" y="5454793"/>
             <a:ext cx="5570756" cy="523220"/>
           </a:xfrm>
           <a:prstGeom prst="rect">
@@ -5163,7 +5342,7 @@
 </p:sld>
 </file>
 
-<file path=ppt/slides/slide6.xml><?xml version="1.0" encoding="utf-8"?>
+<file path=ppt/slides/slide7.xml><?xml version="1.0" encoding="utf-8"?>
 <p:sld xmlns:a="http://schemas.openxmlformats.org/drawingml/2006/main" xmlns:r="http://schemas.openxmlformats.org/officeDocument/2006/relationships" xmlns:p="http://schemas.openxmlformats.org/presentationml/2006/main">
   <p:cSld>
     <p:spTree>
@@ -5228,7 +5407,7 @@
 </p:sld>
 </file>
 
-<file path=ppt/slides/slide7.xml><?xml version="1.0" encoding="utf-8"?>
+<file path=ppt/slides/slide8.xml><?xml version="1.0" encoding="utf-8"?>
 <p:sld xmlns:a="http://schemas.openxmlformats.org/drawingml/2006/main" xmlns:r="http://schemas.openxmlformats.org/officeDocument/2006/relationships" xmlns:p="http://schemas.openxmlformats.org/presentationml/2006/main">
   <p:cSld>
     <p:spTree>
@@ -5319,8 +5498,8 @@
         </p:nvSpPr>
         <p:spPr>
           <a:xfrm>
-            <a:off x="932426" y="1735394"/>
-            <a:ext cx="543739" cy="523220"/>
+            <a:off x="932426" y="2204218"/>
+            <a:ext cx="9558593" cy="584775"/>
           </a:xfrm>
           <a:prstGeom prst="rect">
             <a:avLst/>
@@ -5328,14 +5507,14 @@
           <a:noFill/>
         </p:spPr>
         <p:txBody>
-          <a:bodyPr wrap="none" rtlCol="0">
+          <a:bodyPr wrap="square" rtlCol="0">
             <a:spAutoFit/>
           </a:bodyPr>
           <a:lstStyle/>
           <a:p>
             <a:r>
-              <a:rPr kumimoji="1" lang="ja-JP" altLang="en-US" sz="2800" b="1" dirty="0"/>
-              <a:t>・</a:t>
+              <a:rPr kumimoji="1" lang="ja-JP" altLang="en-US" sz="3200" b="1" dirty="0"/>
+              <a:t>・自分が求めるアプリに仕上がったので満足</a:t>
             </a:r>
           </a:p>
         </p:txBody>
@@ -5354,8 +5533,8 @@
         </p:nvSpPr>
         <p:spPr>
           <a:xfrm>
-            <a:off x="932426" y="3167390"/>
-            <a:ext cx="543739" cy="523220"/>
+            <a:off x="923413" y="4317764"/>
+            <a:ext cx="10345174" cy="646331"/>
           </a:xfrm>
           <a:prstGeom prst="rect">
             <a:avLst/>
@@ -5363,50 +5542,16 @@
           <a:noFill/>
         </p:spPr>
         <p:txBody>
-          <a:bodyPr wrap="none" rtlCol="0">
+          <a:bodyPr wrap="square" rtlCol="0">
             <a:spAutoFit/>
           </a:bodyPr>
           <a:lstStyle/>
           <a:p>
             <a:r>
-              <a:rPr kumimoji="1" lang="ja-JP" altLang="en-US" sz="2800" b="1" dirty="0"/>
-              <a:t>・</a:t>
-            </a:r>
-          </a:p>
-        </p:txBody>
-      </p:sp>
-      <p:sp>
-        <p:nvSpPr>
-          <p:cNvPr id="7" name="テキスト ボックス 6">
-            <a:extLst>
-              <a:ext uri="{FF2B5EF4-FFF2-40B4-BE49-F238E27FC236}">
-                <a16:creationId xmlns:a16="http://schemas.microsoft.com/office/drawing/2014/main" id="{1F53E04E-94F0-2C6A-F991-6ED879AE15ED}"/>
-              </a:ext>
-            </a:extLst>
-          </p:cNvPr>
-          <p:cNvSpPr txBox="1"/>
-          <p:nvPr/>
-        </p:nvSpPr>
-        <p:spPr>
-          <a:xfrm>
-            <a:off x="932426" y="4599386"/>
-            <a:ext cx="543739" cy="523220"/>
-          </a:xfrm>
-          <a:prstGeom prst="rect">
-            <a:avLst/>
-          </a:prstGeom>
-          <a:noFill/>
-        </p:spPr>
-        <p:txBody>
-          <a:bodyPr wrap="none" rtlCol="0">
-            <a:spAutoFit/>
-          </a:bodyPr>
-          <a:lstStyle/>
-          <a:p>
-            <a:r>
-              <a:rPr kumimoji="1" lang="ja-JP" altLang="en-US" sz="2800" b="1" dirty="0"/>
-              <a:t>・</a:t>
-            </a:r>
+              <a:rPr kumimoji="1" lang="ja-JP" altLang="en-US" sz="3600" b="1" dirty="0"/>
+              <a:t>・通知機能を実装できなかったのは残念だった</a:t>
+            </a:r>
+            <a:endParaRPr kumimoji="1" lang="en-US" altLang="ja-JP" sz="3600" b="1" dirty="0"/>
           </a:p>
         </p:txBody>
       </p:sp>
@@ -5423,7 +5568,7 @@
 </p:sld>
 </file>
 
-<file path=ppt/slides/slide8.xml><?xml version="1.0" encoding="utf-8"?>
+<file path=ppt/slides/slide9.xml><?xml version="1.0" encoding="utf-8"?>
 <p:sld xmlns:a="http://schemas.openxmlformats.org/drawingml/2006/main" xmlns:r="http://schemas.openxmlformats.org/officeDocument/2006/relationships" xmlns:p="http://schemas.openxmlformats.org/presentationml/2006/main">
   <p:cSld>
     <p:spTree>

--- a/モバイル授業_todoリスト.pptx
+++ b/モバイル授業_todoリスト.pptx
@@ -4435,6 +4435,200 @@
   <p:clrMapOvr>
     <a:masterClrMapping/>
   </p:clrMapOvr>
+  <p:timing>
+    <p:tnLst>
+      <p:par>
+        <p:cTn id="1" dur="indefinite" restart="never" nodeType="tmRoot">
+          <p:childTnLst>
+            <p:seq concurrent="1" nextAc="seek">
+              <p:cTn id="2" dur="indefinite" nodeType="mainSeq">
+                <p:childTnLst>
+                  <p:par>
+                    <p:cTn id="3" fill="hold">
+                      <p:stCondLst>
+                        <p:cond delay="indefinite"/>
+                      </p:stCondLst>
+                      <p:childTnLst>
+                        <p:par>
+                          <p:cTn id="4" fill="hold">
+                            <p:stCondLst>
+                              <p:cond delay="0"/>
+                            </p:stCondLst>
+                            <p:childTnLst>
+                              <p:par>
+                                <p:cTn id="5" presetID="10" presetClass="entr" presetSubtype="0" fill="hold" grpId="0" nodeType="clickEffect">
+                                  <p:stCondLst>
+                                    <p:cond delay="0"/>
+                                  </p:stCondLst>
+                                  <p:childTnLst>
+                                    <p:set>
+                                      <p:cBhvr>
+                                        <p:cTn id="6" dur="1" fill="hold">
+                                          <p:stCondLst>
+                                            <p:cond delay="0"/>
+                                          </p:stCondLst>
+                                        </p:cTn>
+                                        <p:tgtEl>
+                                          <p:spTgt spid="8"/>
+                                        </p:tgtEl>
+                                        <p:attrNameLst>
+                                          <p:attrName>style.visibility</p:attrName>
+                                        </p:attrNameLst>
+                                      </p:cBhvr>
+                                      <p:to>
+                                        <p:strVal val="visible"/>
+                                      </p:to>
+                                    </p:set>
+                                    <p:animEffect transition="in" filter="fade">
+                                      <p:cBhvr>
+                                        <p:cTn id="7" dur="500"/>
+                                        <p:tgtEl>
+                                          <p:spTgt spid="8"/>
+                                        </p:tgtEl>
+                                      </p:cBhvr>
+                                    </p:animEffect>
+                                  </p:childTnLst>
+                                </p:cTn>
+                              </p:par>
+                            </p:childTnLst>
+                          </p:cTn>
+                        </p:par>
+                      </p:childTnLst>
+                    </p:cTn>
+                  </p:par>
+                  <p:par>
+                    <p:cTn id="8" fill="hold">
+                      <p:stCondLst>
+                        <p:cond delay="indefinite"/>
+                      </p:stCondLst>
+                      <p:childTnLst>
+                        <p:par>
+                          <p:cTn id="9" fill="hold">
+                            <p:stCondLst>
+                              <p:cond delay="0"/>
+                            </p:stCondLst>
+                            <p:childTnLst>
+                              <p:par>
+                                <p:cTn id="10" presetID="10" presetClass="entr" presetSubtype="0" fill="hold" grpId="0" nodeType="clickEffect">
+                                  <p:stCondLst>
+                                    <p:cond delay="0"/>
+                                  </p:stCondLst>
+                                  <p:childTnLst>
+                                    <p:set>
+                                      <p:cBhvr>
+                                        <p:cTn id="11" dur="1" fill="hold">
+                                          <p:stCondLst>
+                                            <p:cond delay="0"/>
+                                          </p:stCondLst>
+                                        </p:cTn>
+                                        <p:tgtEl>
+                                          <p:spTgt spid="4"/>
+                                        </p:tgtEl>
+                                        <p:attrNameLst>
+                                          <p:attrName>style.visibility</p:attrName>
+                                        </p:attrNameLst>
+                                      </p:cBhvr>
+                                      <p:to>
+                                        <p:strVal val="visible"/>
+                                      </p:to>
+                                    </p:set>
+                                    <p:animEffect transition="in" filter="fade">
+                                      <p:cBhvr>
+                                        <p:cTn id="12" dur="500"/>
+                                        <p:tgtEl>
+                                          <p:spTgt spid="4"/>
+                                        </p:tgtEl>
+                                      </p:cBhvr>
+                                    </p:animEffect>
+                                  </p:childTnLst>
+                                </p:cTn>
+                              </p:par>
+                            </p:childTnLst>
+                          </p:cTn>
+                        </p:par>
+                      </p:childTnLst>
+                    </p:cTn>
+                  </p:par>
+                  <p:par>
+                    <p:cTn id="13" fill="hold">
+                      <p:stCondLst>
+                        <p:cond delay="indefinite"/>
+                      </p:stCondLst>
+                      <p:childTnLst>
+                        <p:par>
+                          <p:cTn id="14" fill="hold">
+                            <p:stCondLst>
+                              <p:cond delay="0"/>
+                            </p:stCondLst>
+                            <p:childTnLst>
+                              <p:par>
+                                <p:cTn id="15" presetID="10" presetClass="entr" presetSubtype="0" fill="hold" grpId="0" nodeType="clickEffect">
+                                  <p:stCondLst>
+                                    <p:cond delay="0"/>
+                                  </p:stCondLst>
+                                  <p:childTnLst>
+                                    <p:set>
+                                      <p:cBhvr>
+                                        <p:cTn id="16" dur="1" fill="hold">
+                                          <p:stCondLst>
+                                            <p:cond delay="0"/>
+                                          </p:stCondLst>
+                                        </p:cTn>
+                                        <p:tgtEl>
+                                          <p:spTgt spid="9"/>
+                                        </p:tgtEl>
+                                        <p:attrNameLst>
+                                          <p:attrName>style.visibility</p:attrName>
+                                        </p:attrNameLst>
+                                      </p:cBhvr>
+                                      <p:to>
+                                        <p:strVal val="visible"/>
+                                      </p:to>
+                                    </p:set>
+                                    <p:animEffect transition="in" filter="fade">
+                                      <p:cBhvr>
+                                        <p:cTn id="17" dur="500"/>
+                                        <p:tgtEl>
+                                          <p:spTgt spid="9"/>
+                                        </p:tgtEl>
+                                      </p:cBhvr>
+                                    </p:animEffect>
+                                  </p:childTnLst>
+                                </p:cTn>
+                              </p:par>
+                            </p:childTnLst>
+                          </p:cTn>
+                        </p:par>
+                      </p:childTnLst>
+                    </p:cTn>
+                  </p:par>
+                </p:childTnLst>
+              </p:cTn>
+              <p:prevCondLst>
+                <p:cond evt="onPrev" delay="0">
+                  <p:tgtEl>
+                    <p:sldTgt/>
+                  </p:tgtEl>
+                </p:cond>
+              </p:prevCondLst>
+              <p:nextCondLst>
+                <p:cond evt="onNext" delay="0">
+                  <p:tgtEl>
+                    <p:sldTgt/>
+                  </p:tgtEl>
+                </p:cond>
+              </p:nextCondLst>
+            </p:seq>
+          </p:childTnLst>
+        </p:cTn>
+      </p:par>
+    </p:tnLst>
+    <p:bldLst>
+      <p:bldP spid="8" grpId="0"/>
+      <p:bldP spid="9" grpId="0"/>
+      <p:bldP spid="4" grpId="0"/>
+    </p:bldLst>
+  </p:timing>
 </p:sld>
 </file>
 
@@ -4653,6 +4847,146 @@
   <p:clrMapOvr>
     <a:masterClrMapping/>
   </p:clrMapOvr>
+  <p:timing>
+    <p:tnLst>
+      <p:par>
+        <p:cTn id="1" dur="indefinite" restart="never" nodeType="tmRoot">
+          <p:childTnLst>
+            <p:seq concurrent="1" nextAc="seek">
+              <p:cTn id="2" dur="indefinite" nodeType="mainSeq">
+                <p:childTnLst>
+                  <p:par>
+                    <p:cTn id="3" fill="hold">
+                      <p:stCondLst>
+                        <p:cond delay="indefinite"/>
+                      </p:stCondLst>
+                      <p:childTnLst>
+                        <p:par>
+                          <p:cTn id="4" fill="hold">
+                            <p:stCondLst>
+                              <p:cond delay="0"/>
+                            </p:stCondLst>
+                            <p:childTnLst>
+                              <p:par>
+                                <p:cTn id="5" presetID="10" presetClass="entr" presetSubtype="0" fill="hold" grpId="0" nodeType="clickEffect">
+                                  <p:stCondLst>
+                                    <p:cond delay="0"/>
+                                  </p:stCondLst>
+                                  <p:childTnLst>
+                                    <p:set>
+                                      <p:cBhvr>
+                                        <p:cTn id="6" dur="1" fill="hold">
+                                          <p:stCondLst>
+                                            <p:cond delay="0"/>
+                                          </p:stCondLst>
+                                        </p:cTn>
+                                        <p:tgtEl>
+                                          <p:spTgt spid="3"/>
+                                        </p:tgtEl>
+                                        <p:attrNameLst>
+                                          <p:attrName>style.visibility</p:attrName>
+                                        </p:attrNameLst>
+                                      </p:cBhvr>
+                                      <p:to>
+                                        <p:strVal val="visible"/>
+                                      </p:to>
+                                    </p:set>
+                                    <p:animEffect transition="in" filter="fade">
+                                      <p:cBhvr>
+                                        <p:cTn id="7" dur="500"/>
+                                        <p:tgtEl>
+                                          <p:spTgt spid="3"/>
+                                        </p:tgtEl>
+                                      </p:cBhvr>
+                                    </p:animEffect>
+                                  </p:childTnLst>
+                                </p:cTn>
+                              </p:par>
+                            </p:childTnLst>
+                          </p:cTn>
+                        </p:par>
+                      </p:childTnLst>
+                    </p:cTn>
+                  </p:par>
+                  <p:par>
+                    <p:cTn id="8" fill="hold">
+                      <p:stCondLst>
+                        <p:cond delay="indefinite"/>
+                      </p:stCondLst>
+                      <p:childTnLst>
+                        <p:par>
+                          <p:cTn id="9" fill="hold">
+                            <p:stCondLst>
+                              <p:cond delay="0"/>
+                            </p:stCondLst>
+                            <p:childTnLst>
+                              <p:par>
+                                <p:cTn id="10" presetID="10" presetClass="entr" presetSubtype="0" fill="hold" grpId="0" nodeType="clickEffect">
+                                  <p:stCondLst>
+                                    <p:cond delay="0"/>
+                                  </p:stCondLst>
+                                  <p:childTnLst>
+                                    <p:set>
+                                      <p:cBhvr>
+                                        <p:cTn id="11" dur="1" fill="hold">
+                                          <p:stCondLst>
+                                            <p:cond delay="0"/>
+                                          </p:stCondLst>
+                                        </p:cTn>
+                                        <p:tgtEl>
+                                          <p:spTgt spid="4"/>
+                                        </p:tgtEl>
+                                        <p:attrNameLst>
+                                          <p:attrName>style.visibility</p:attrName>
+                                        </p:attrNameLst>
+                                      </p:cBhvr>
+                                      <p:to>
+                                        <p:strVal val="visible"/>
+                                      </p:to>
+                                    </p:set>
+                                    <p:animEffect transition="in" filter="fade">
+                                      <p:cBhvr>
+                                        <p:cTn id="12" dur="500"/>
+                                        <p:tgtEl>
+                                          <p:spTgt spid="4"/>
+                                        </p:tgtEl>
+                                      </p:cBhvr>
+                                    </p:animEffect>
+                                  </p:childTnLst>
+                                </p:cTn>
+                              </p:par>
+                            </p:childTnLst>
+                          </p:cTn>
+                        </p:par>
+                      </p:childTnLst>
+                    </p:cTn>
+                  </p:par>
+                </p:childTnLst>
+              </p:cTn>
+              <p:prevCondLst>
+                <p:cond evt="onPrev" delay="0">
+                  <p:tgtEl>
+                    <p:sldTgt/>
+                  </p:tgtEl>
+                </p:cond>
+              </p:prevCondLst>
+              <p:nextCondLst>
+                <p:cond evt="onNext" delay="0">
+                  <p:tgtEl>
+                    <p:sldTgt/>
+                  </p:tgtEl>
+                </p:cond>
+              </p:nextCondLst>
+            </p:seq>
+          </p:childTnLst>
+        </p:cTn>
+      </p:par>
+    </p:tnLst>
+    <p:bldLst>
+      <p:bldP spid="3" grpId="0" animBg="1"/>
+      <p:bldP spid="4" grpId="0" animBg="1"/>
+    </p:bldLst>
+  </p:timing>
 </p:sld>
 </file>
 
@@ -4963,6 +5297,254 @@
   <p:clrMapOvr>
     <a:masterClrMapping/>
   </p:clrMapOvr>
+  <p:timing>
+    <p:tnLst>
+      <p:par>
+        <p:cTn id="1" dur="indefinite" restart="never" nodeType="tmRoot">
+          <p:childTnLst>
+            <p:seq concurrent="1" nextAc="seek">
+              <p:cTn id="2" dur="indefinite" nodeType="mainSeq">
+                <p:childTnLst>
+                  <p:par>
+                    <p:cTn id="3" fill="hold">
+                      <p:stCondLst>
+                        <p:cond delay="indefinite"/>
+                      </p:stCondLst>
+                      <p:childTnLst>
+                        <p:par>
+                          <p:cTn id="4" fill="hold">
+                            <p:stCondLst>
+                              <p:cond delay="0"/>
+                            </p:stCondLst>
+                            <p:childTnLst>
+                              <p:par>
+                                <p:cTn id="5" presetID="10" presetClass="entr" presetSubtype="0" fill="hold" grpId="0" nodeType="clickEffect">
+                                  <p:stCondLst>
+                                    <p:cond delay="0"/>
+                                  </p:stCondLst>
+                                  <p:childTnLst>
+                                    <p:set>
+                                      <p:cBhvr>
+                                        <p:cTn id="6" dur="1" fill="hold">
+                                          <p:stCondLst>
+                                            <p:cond delay="0"/>
+                                          </p:stCondLst>
+                                        </p:cTn>
+                                        <p:tgtEl>
+                                          <p:spTgt spid="3"/>
+                                        </p:tgtEl>
+                                        <p:attrNameLst>
+                                          <p:attrName>style.visibility</p:attrName>
+                                        </p:attrNameLst>
+                                      </p:cBhvr>
+                                      <p:to>
+                                        <p:strVal val="visible"/>
+                                      </p:to>
+                                    </p:set>
+                                    <p:animEffect transition="in" filter="fade">
+                                      <p:cBhvr>
+                                        <p:cTn id="7" dur="500"/>
+                                        <p:tgtEl>
+                                          <p:spTgt spid="3"/>
+                                        </p:tgtEl>
+                                      </p:cBhvr>
+                                    </p:animEffect>
+                                  </p:childTnLst>
+                                </p:cTn>
+                              </p:par>
+                            </p:childTnLst>
+                          </p:cTn>
+                        </p:par>
+                      </p:childTnLst>
+                    </p:cTn>
+                  </p:par>
+                  <p:par>
+                    <p:cTn id="8" fill="hold">
+                      <p:stCondLst>
+                        <p:cond delay="indefinite"/>
+                      </p:stCondLst>
+                      <p:childTnLst>
+                        <p:par>
+                          <p:cTn id="9" fill="hold">
+                            <p:stCondLst>
+                              <p:cond delay="0"/>
+                            </p:stCondLst>
+                            <p:childTnLst>
+                              <p:par>
+                                <p:cTn id="10" presetID="10" presetClass="entr" presetSubtype="0" fill="hold" grpId="0" nodeType="clickEffect">
+                                  <p:stCondLst>
+                                    <p:cond delay="0"/>
+                                  </p:stCondLst>
+                                  <p:childTnLst>
+                                    <p:set>
+                                      <p:cBhvr>
+                                        <p:cTn id="11" dur="1" fill="hold">
+                                          <p:stCondLst>
+                                            <p:cond delay="0"/>
+                                          </p:stCondLst>
+                                        </p:cTn>
+                                        <p:tgtEl>
+                                          <p:spTgt spid="6"/>
+                                        </p:tgtEl>
+                                        <p:attrNameLst>
+                                          <p:attrName>style.visibility</p:attrName>
+                                        </p:attrNameLst>
+                                      </p:cBhvr>
+                                      <p:to>
+                                        <p:strVal val="visible"/>
+                                      </p:to>
+                                    </p:set>
+                                    <p:animEffect transition="in" filter="fade">
+                                      <p:cBhvr>
+                                        <p:cTn id="12" dur="500"/>
+                                        <p:tgtEl>
+                                          <p:spTgt spid="6"/>
+                                        </p:tgtEl>
+                                      </p:cBhvr>
+                                    </p:animEffect>
+                                  </p:childTnLst>
+                                </p:cTn>
+                              </p:par>
+                            </p:childTnLst>
+                          </p:cTn>
+                        </p:par>
+                      </p:childTnLst>
+                    </p:cTn>
+                  </p:par>
+                  <p:par>
+                    <p:cTn id="13" fill="hold">
+                      <p:stCondLst>
+                        <p:cond delay="indefinite"/>
+                      </p:stCondLst>
+                      <p:childTnLst>
+                        <p:par>
+                          <p:cTn id="14" fill="hold">
+                            <p:stCondLst>
+                              <p:cond delay="0"/>
+                            </p:stCondLst>
+                            <p:childTnLst>
+                              <p:par>
+                                <p:cTn id="15" presetID="10" presetClass="entr" presetSubtype="0" fill="hold" grpId="0" nodeType="clickEffect">
+                                  <p:stCondLst>
+                                    <p:cond delay="0"/>
+                                  </p:stCondLst>
+                                  <p:childTnLst>
+                                    <p:set>
+                                      <p:cBhvr>
+                                        <p:cTn id="16" dur="1" fill="hold">
+                                          <p:stCondLst>
+                                            <p:cond delay="0"/>
+                                          </p:stCondLst>
+                                        </p:cTn>
+                                        <p:tgtEl>
+                                          <p:spTgt spid="7"/>
+                                        </p:tgtEl>
+                                        <p:attrNameLst>
+                                          <p:attrName>style.visibility</p:attrName>
+                                        </p:attrNameLst>
+                                      </p:cBhvr>
+                                      <p:to>
+                                        <p:strVal val="visible"/>
+                                      </p:to>
+                                    </p:set>
+                                    <p:animEffect transition="in" filter="fade">
+                                      <p:cBhvr>
+                                        <p:cTn id="17" dur="500"/>
+                                        <p:tgtEl>
+                                          <p:spTgt spid="7"/>
+                                        </p:tgtEl>
+                                      </p:cBhvr>
+                                    </p:animEffect>
+                                  </p:childTnLst>
+                                </p:cTn>
+                              </p:par>
+                            </p:childTnLst>
+                          </p:cTn>
+                        </p:par>
+                      </p:childTnLst>
+                    </p:cTn>
+                  </p:par>
+                  <p:par>
+                    <p:cTn id="18" fill="hold">
+                      <p:stCondLst>
+                        <p:cond delay="indefinite"/>
+                      </p:stCondLst>
+                      <p:childTnLst>
+                        <p:par>
+                          <p:cTn id="19" fill="hold">
+                            <p:stCondLst>
+                              <p:cond delay="0"/>
+                            </p:stCondLst>
+                            <p:childTnLst>
+                              <p:par>
+                                <p:cTn id="20" presetID="10" presetClass="entr" presetSubtype="0" fill="hold" grpId="0" nodeType="clickEffect">
+                                  <p:stCondLst>
+                                    <p:cond delay="0"/>
+                                  </p:stCondLst>
+                                  <p:childTnLst>
+                                    <p:set>
+                                      <p:cBhvr>
+                                        <p:cTn id="21" dur="1" fill="hold">
+                                          <p:stCondLst>
+                                            <p:cond delay="0"/>
+                                          </p:stCondLst>
+                                        </p:cTn>
+                                        <p:tgtEl>
+                                          <p:spTgt spid="4"/>
+                                        </p:tgtEl>
+                                        <p:attrNameLst>
+                                          <p:attrName>style.visibility</p:attrName>
+                                        </p:attrNameLst>
+                                      </p:cBhvr>
+                                      <p:to>
+                                        <p:strVal val="visible"/>
+                                      </p:to>
+                                    </p:set>
+                                    <p:animEffect transition="in" filter="fade">
+                                      <p:cBhvr>
+                                        <p:cTn id="22" dur="500"/>
+                                        <p:tgtEl>
+                                          <p:spTgt spid="4"/>
+                                        </p:tgtEl>
+                                      </p:cBhvr>
+                                    </p:animEffect>
+                                  </p:childTnLst>
+                                </p:cTn>
+                              </p:par>
+                            </p:childTnLst>
+                          </p:cTn>
+                        </p:par>
+                      </p:childTnLst>
+                    </p:cTn>
+                  </p:par>
+                </p:childTnLst>
+              </p:cTn>
+              <p:prevCondLst>
+                <p:cond evt="onPrev" delay="0">
+                  <p:tgtEl>
+                    <p:sldTgt/>
+                  </p:tgtEl>
+                </p:cond>
+              </p:prevCondLst>
+              <p:nextCondLst>
+                <p:cond evt="onNext" delay="0">
+                  <p:tgtEl>
+                    <p:sldTgt/>
+                  </p:tgtEl>
+                </p:cond>
+              </p:nextCondLst>
+            </p:seq>
+          </p:childTnLst>
+        </p:cTn>
+      </p:par>
+    </p:tnLst>
+    <p:bldLst>
+      <p:bldP spid="3" grpId="0" animBg="1"/>
+      <p:bldP spid="6" grpId="0" animBg="1"/>
+      <p:bldP spid="7" grpId="0" animBg="1"/>
+      <p:bldP spid="4" grpId="0" animBg="1"/>
+    </p:bldLst>
+  </p:timing>
 </p:sld>
 </file>
 
@@ -5104,6 +5686,92 @@
   <p:clrMapOvr>
     <a:masterClrMapping/>
   </p:clrMapOvr>
+  <p:timing>
+    <p:tnLst>
+      <p:par>
+        <p:cTn id="1" dur="indefinite" restart="never" nodeType="tmRoot">
+          <p:childTnLst>
+            <p:seq concurrent="1" nextAc="seek">
+              <p:cTn id="2" dur="indefinite" nodeType="mainSeq">
+                <p:childTnLst>
+                  <p:par>
+                    <p:cTn id="3" fill="hold">
+                      <p:stCondLst>
+                        <p:cond delay="indefinite"/>
+                      </p:stCondLst>
+                      <p:childTnLst>
+                        <p:par>
+                          <p:cTn id="4" fill="hold">
+                            <p:stCondLst>
+                              <p:cond delay="0"/>
+                            </p:stCondLst>
+                            <p:childTnLst>
+                              <p:par>
+                                <p:cTn id="5" presetID="10" presetClass="entr" presetSubtype="0" fill="hold" grpId="0" nodeType="clickEffect">
+                                  <p:stCondLst>
+                                    <p:cond delay="0"/>
+                                  </p:stCondLst>
+                                  <p:childTnLst>
+                                    <p:set>
+                                      <p:cBhvr>
+                                        <p:cTn id="6" dur="1" fill="hold">
+                                          <p:stCondLst>
+                                            <p:cond delay="0"/>
+                                          </p:stCondLst>
+                                        </p:cTn>
+                                        <p:tgtEl>
+                                          <p:spTgt spid="3"/>
+                                        </p:tgtEl>
+                                        <p:attrNameLst>
+                                          <p:attrName>style.visibility</p:attrName>
+                                        </p:attrNameLst>
+                                      </p:cBhvr>
+                                      <p:to>
+                                        <p:strVal val="visible"/>
+                                      </p:to>
+                                    </p:set>
+                                    <p:animEffect transition="in" filter="fade">
+                                      <p:cBhvr>
+                                        <p:cTn id="7" dur="500"/>
+                                        <p:tgtEl>
+                                          <p:spTgt spid="3"/>
+                                        </p:tgtEl>
+                                      </p:cBhvr>
+                                    </p:animEffect>
+                                  </p:childTnLst>
+                                </p:cTn>
+                              </p:par>
+                            </p:childTnLst>
+                          </p:cTn>
+                        </p:par>
+                      </p:childTnLst>
+                    </p:cTn>
+                  </p:par>
+                </p:childTnLst>
+              </p:cTn>
+              <p:prevCondLst>
+                <p:cond evt="onPrev" delay="0">
+                  <p:tgtEl>
+                    <p:sldTgt/>
+                  </p:tgtEl>
+                </p:cond>
+              </p:prevCondLst>
+              <p:nextCondLst>
+                <p:cond evt="onNext" delay="0">
+                  <p:tgtEl>
+                    <p:sldTgt/>
+                  </p:tgtEl>
+                </p:cond>
+              </p:nextCondLst>
+            </p:seq>
+          </p:childTnLst>
+        </p:cTn>
+      </p:par>
+    </p:tnLst>
+    <p:bldLst>
+      <p:bldP spid="3" grpId="0" animBg="1"/>
+    </p:bldLst>
+  </p:timing>
 </p:sld>
 </file>
 

--- a/モバイル授業_todoリスト.pptx
+++ b/モバイル授業_todoリスト.pptx
@@ -289,7 +289,7 @@
           <a:p>
             <a:fld id="{898ACB73-228B-4573-B2A8-EEAE64393BA5}" type="datetimeFigureOut">
               <a:rPr kumimoji="1" lang="ja-JP" altLang="en-US" smtClean="0"/>
-              <a:t>2026/6/24</a:t>
+              <a:t>2026/7/1</a:t>
             </a:fld>
             <a:endParaRPr kumimoji="1" lang="ja-JP" altLang="en-US"/>
           </a:p>
@@ -665,7 +665,7 @@
           <a:p>
             <a:fld id="{898ACB73-228B-4573-B2A8-EEAE64393BA5}" type="datetimeFigureOut">
               <a:rPr kumimoji="1" lang="ja-JP" altLang="en-US" smtClean="0"/>
-              <a:t>2026/6/24</a:t>
+              <a:t>2026/7/1</a:t>
             </a:fld>
             <a:endParaRPr kumimoji="1" lang="ja-JP" altLang="en-US"/>
           </a:p>
@@ -877,7 +877,7 @@
           <a:p>
             <a:fld id="{898ACB73-228B-4573-B2A8-EEAE64393BA5}" type="datetimeFigureOut">
               <a:rPr kumimoji="1" lang="ja-JP" altLang="en-US" smtClean="0"/>
-              <a:t>2026/6/24</a:t>
+              <a:t>2026/7/1</a:t>
             </a:fld>
             <a:endParaRPr kumimoji="1" lang="ja-JP" altLang="en-US"/>
           </a:p>
@@ -1079,7 +1079,7 @@
           <a:p>
             <a:fld id="{898ACB73-228B-4573-B2A8-EEAE64393BA5}" type="datetimeFigureOut">
               <a:rPr kumimoji="1" lang="ja-JP" altLang="en-US" smtClean="0"/>
-              <a:t>2026/6/24</a:t>
+              <a:t>2026/7/1</a:t>
             </a:fld>
             <a:endParaRPr kumimoji="1" lang="ja-JP" altLang="en-US"/>
           </a:p>
@@ -1356,7 +1356,7 @@
           <a:p>
             <a:fld id="{898ACB73-228B-4573-B2A8-EEAE64393BA5}" type="datetimeFigureOut">
               <a:rPr kumimoji="1" lang="ja-JP" altLang="en-US" smtClean="0"/>
-              <a:t>2026/6/24</a:t>
+              <a:t>2026/7/1</a:t>
             </a:fld>
             <a:endParaRPr kumimoji="1" lang="ja-JP" altLang="en-US"/>
           </a:p>
@@ -1814,7 +1814,7 @@
           <a:p>
             <a:fld id="{898ACB73-228B-4573-B2A8-EEAE64393BA5}" type="datetimeFigureOut">
               <a:rPr kumimoji="1" lang="ja-JP" altLang="en-US" smtClean="0"/>
-              <a:t>2026/6/24</a:t>
+              <a:t>2026/7/1</a:t>
             </a:fld>
             <a:endParaRPr kumimoji="1" lang="ja-JP" altLang="en-US"/>
           </a:p>
@@ -2355,7 +2355,7 @@
           <a:p>
             <a:fld id="{898ACB73-228B-4573-B2A8-EEAE64393BA5}" type="datetimeFigureOut">
               <a:rPr kumimoji="1" lang="ja-JP" altLang="en-US" smtClean="0"/>
-              <a:t>2026/6/24</a:t>
+              <a:t>2026/7/1</a:t>
             </a:fld>
             <a:endParaRPr kumimoji="1" lang="ja-JP" altLang="en-US"/>
           </a:p>
@@ -2473,7 +2473,7 @@
           <a:p>
             <a:fld id="{898ACB73-228B-4573-B2A8-EEAE64393BA5}" type="datetimeFigureOut">
               <a:rPr kumimoji="1" lang="ja-JP" altLang="en-US" smtClean="0"/>
-              <a:t>2026/6/24</a:t>
+              <a:t>2026/7/1</a:t>
             </a:fld>
             <a:endParaRPr kumimoji="1" lang="ja-JP" altLang="en-US"/>
           </a:p>
@@ -2568,7 +2568,7 @@
           <a:p>
             <a:fld id="{898ACB73-228B-4573-B2A8-EEAE64393BA5}" type="datetimeFigureOut">
               <a:rPr kumimoji="1" lang="ja-JP" altLang="en-US" smtClean="0"/>
-              <a:t>2026/6/24</a:t>
+              <a:t>2026/7/1</a:t>
             </a:fld>
             <a:endParaRPr kumimoji="1" lang="ja-JP" altLang="en-US"/>
           </a:p>
@@ -2946,7 +2946,7 @@
           <a:p>
             <a:fld id="{898ACB73-228B-4573-B2A8-EEAE64393BA5}" type="datetimeFigureOut">
               <a:rPr kumimoji="1" lang="ja-JP" altLang="en-US" smtClean="0"/>
-              <a:t>2026/6/24</a:t>
+              <a:t>2026/7/1</a:t>
             </a:fld>
             <a:endParaRPr kumimoji="1" lang="ja-JP" altLang="en-US"/>
           </a:p>
@@ -3334,7 +3334,7 @@
           <a:p>
             <a:fld id="{898ACB73-228B-4573-B2A8-EEAE64393BA5}" type="datetimeFigureOut">
               <a:rPr kumimoji="1" lang="ja-JP" altLang="en-US" smtClean="0"/>
-              <a:t>2026/6/24</a:t>
+              <a:t>2026/7/1</a:t>
             </a:fld>
             <a:endParaRPr kumimoji="1" lang="ja-JP" altLang="en-US"/>
           </a:p>
@@ -3644,7 +3644,7 @@
           <a:p>
             <a:fld id="{898ACB73-228B-4573-B2A8-EEAE64393BA5}" type="datetimeFigureOut">
               <a:rPr kumimoji="1" lang="ja-JP" altLang="en-US" smtClean="0"/>
-              <a:t>2026/6/24</a:t>
+              <a:t>2026/7/1</a:t>
             </a:fld>
             <a:endParaRPr kumimoji="1" lang="ja-JP" altLang="en-US"/>
           </a:p>
@@ -4325,7 +4325,7 @@
         <p:spPr>
           <a:xfrm>
             <a:off x="1238611" y="1011991"/>
-            <a:ext cx="10289996" cy="769441"/>
+            <a:ext cx="7468711" cy="769441"/>
           </a:xfrm>
           <a:prstGeom prst="rect">
             <a:avLst/>
@@ -4344,7 +4344,7 @@
             </a:r>
             <a:r>
               <a:rPr kumimoji="1" lang="ja-JP" altLang="en-US" sz="4400" b="1" dirty="0"/>
-              <a:t>学校でも私生活でも予定の管理が苦手</a:t>
+              <a:t>私自身が予定の管理が苦手</a:t>
             </a:r>
             <a:endParaRPr kumimoji="1" lang="ja-JP" altLang="en-US" sz="4000" b="1" dirty="0"/>
           </a:p>
@@ -4365,7 +4365,7 @@
         <p:spPr>
           <a:xfrm>
             <a:off x="1238611" y="5076567"/>
-            <a:ext cx="8648521" cy="769441"/>
+            <a:ext cx="7520007" cy="769441"/>
           </a:xfrm>
           <a:prstGeom prst="rect">
             <a:avLst/>
@@ -4380,7 +4380,7 @@
           <a:p>
             <a:r>
               <a:rPr kumimoji="1" lang="ja-JP" altLang="en-US" sz="4400" b="1" dirty="0"/>
-              <a:t>・「シンプルさ」を意識しました</a:t>
+              <a:t>・「シンプルさ」を意識した</a:t>
             </a:r>
           </a:p>
         </p:txBody>
@@ -5942,7 +5942,7 @@
         <p:spPr>
           <a:xfrm>
             <a:off x="932425" y="3767158"/>
-            <a:ext cx="9879628" cy="523220"/>
+            <a:ext cx="9161482" cy="523220"/>
           </a:xfrm>
           <a:prstGeom prst="rect">
             <a:avLst/>
@@ -5957,7 +5957,7 @@
           <a:p>
             <a:r>
               <a:rPr kumimoji="1" lang="ja-JP" altLang="en-US" sz="2800" b="1" dirty="0"/>
-              <a:t>・リストは新しい順、古い順、日時順、名前順にソート可能</a:t>
+              <a:t>・リストは新しい順、古い順、日時順、名前順にソート</a:t>
             </a:r>
           </a:p>
         </p:txBody>
@@ -6217,7 +6217,7 @@
           <a:p>
             <a:r>
               <a:rPr kumimoji="1" lang="ja-JP" altLang="en-US" sz="3600" b="1" dirty="0"/>
-              <a:t>・通知機能を実装できなかったのは残念だった</a:t>
+              <a:t>・通知機能を実装できなかったのは残念</a:t>
             </a:r>
             <a:endParaRPr kumimoji="1" lang="en-US" altLang="ja-JP" sz="3600" b="1" dirty="0"/>
           </a:p>

--- a/モバイル授業_todoリスト.pptx
+++ b/モバイル授業_todoリスト.pptx
@@ -9,11 +9,11 @@
     <p:sldId id="263" r:id="rId3"/>
     <p:sldId id="260" r:id="rId4"/>
     <p:sldId id="261" r:id="rId5"/>
-    <p:sldId id="268" r:id="rId6"/>
-    <p:sldId id="264" r:id="rId7"/>
-    <p:sldId id="266" r:id="rId8"/>
-    <p:sldId id="267" r:id="rId9"/>
-    <p:sldId id="265" r:id="rId10"/>
+    <p:sldId id="264" r:id="rId6"/>
+    <p:sldId id="266" r:id="rId7"/>
+    <p:sldId id="267" r:id="rId8"/>
+    <p:sldId id="265" r:id="rId9"/>
+    <p:sldId id="268" r:id="rId10"/>
   </p:sldIdLst>
   <p:sldSz cx="12192000" cy="6858000"/>
   <p:notesSz cx="6858000" cy="9144000"/>
@@ -289,7 +289,7 @@
           <a:p>
             <a:fld id="{898ACB73-228B-4573-B2A8-EEAE64393BA5}" type="datetimeFigureOut">
               <a:rPr kumimoji="1" lang="ja-JP" altLang="en-US" smtClean="0"/>
-              <a:t>2026/7/1</a:t>
+              <a:t>2026/7/8</a:t>
             </a:fld>
             <a:endParaRPr kumimoji="1" lang="ja-JP" altLang="en-US"/>
           </a:p>
@@ -665,7 +665,7 @@
           <a:p>
             <a:fld id="{898ACB73-228B-4573-B2A8-EEAE64393BA5}" type="datetimeFigureOut">
               <a:rPr kumimoji="1" lang="ja-JP" altLang="en-US" smtClean="0"/>
-              <a:t>2026/7/1</a:t>
+              <a:t>2026/7/8</a:t>
             </a:fld>
             <a:endParaRPr kumimoji="1" lang="ja-JP" altLang="en-US"/>
           </a:p>
@@ -877,7 +877,7 @@
           <a:p>
             <a:fld id="{898ACB73-228B-4573-B2A8-EEAE64393BA5}" type="datetimeFigureOut">
               <a:rPr kumimoji="1" lang="ja-JP" altLang="en-US" smtClean="0"/>
-              <a:t>2026/7/1</a:t>
+              <a:t>2026/7/8</a:t>
             </a:fld>
             <a:endParaRPr kumimoji="1" lang="ja-JP" altLang="en-US"/>
           </a:p>
@@ -1079,7 +1079,7 @@
           <a:p>
             <a:fld id="{898ACB73-228B-4573-B2A8-EEAE64393BA5}" type="datetimeFigureOut">
               <a:rPr kumimoji="1" lang="ja-JP" altLang="en-US" smtClean="0"/>
-              <a:t>2026/7/1</a:t>
+              <a:t>2026/7/8</a:t>
             </a:fld>
             <a:endParaRPr kumimoji="1" lang="ja-JP" altLang="en-US"/>
           </a:p>
@@ -1356,7 +1356,7 @@
           <a:p>
             <a:fld id="{898ACB73-228B-4573-B2A8-EEAE64393BA5}" type="datetimeFigureOut">
               <a:rPr kumimoji="1" lang="ja-JP" altLang="en-US" smtClean="0"/>
-              <a:t>2026/7/1</a:t>
+              <a:t>2026/7/8</a:t>
             </a:fld>
             <a:endParaRPr kumimoji="1" lang="ja-JP" altLang="en-US"/>
           </a:p>
@@ -1814,7 +1814,7 @@
           <a:p>
             <a:fld id="{898ACB73-228B-4573-B2A8-EEAE64393BA5}" type="datetimeFigureOut">
               <a:rPr kumimoji="1" lang="ja-JP" altLang="en-US" smtClean="0"/>
-              <a:t>2026/7/1</a:t>
+              <a:t>2026/7/8</a:t>
             </a:fld>
             <a:endParaRPr kumimoji="1" lang="ja-JP" altLang="en-US"/>
           </a:p>
@@ -2355,7 +2355,7 @@
           <a:p>
             <a:fld id="{898ACB73-228B-4573-B2A8-EEAE64393BA5}" type="datetimeFigureOut">
               <a:rPr kumimoji="1" lang="ja-JP" altLang="en-US" smtClean="0"/>
-              <a:t>2026/7/1</a:t>
+              <a:t>2026/7/8</a:t>
             </a:fld>
             <a:endParaRPr kumimoji="1" lang="ja-JP" altLang="en-US"/>
           </a:p>
@@ -2473,7 +2473,7 @@
           <a:p>
             <a:fld id="{898ACB73-228B-4573-B2A8-EEAE64393BA5}" type="datetimeFigureOut">
               <a:rPr kumimoji="1" lang="ja-JP" altLang="en-US" smtClean="0"/>
-              <a:t>2026/7/1</a:t>
+              <a:t>2026/7/8</a:t>
             </a:fld>
             <a:endParaRPr kumimoji="1" lang="ja-JP" altLang="en-US"/>
           </a:p>
@@ -2568,7 +2568,7 @@
           <a:p>
             <a:fld id="{898ACB73-228B-4573-B2A8-EEAE64393BA5}" type="datetimeFigureOut">
               <a:rPr kumimoji="1" lang="ja-JP" altLang="en-US" smtClean="0"/>
-              <a:t>2026/7/1</a:t>
+              <a:t>2026/7/8</a:t>
             </a:fld>
             <a:endParaRPr kumimoji="1" lang="ja-JP" altLang="en-US"/>
           </a:p>
@@ -2946,7 +2946,7 @@
           <a:p>
             <a:fld id="{898ACB73-228B-4573-B2A8-EEAE64393BA5}" type="datetimeFigureOut">
               <a:rPr kumimoji="1" lang="ja-JP" altLang="en-US" smtClean="0"/>
-              <a:t>2026/7/1</a:t>
+              <a:t>2026/7/8</a:t>
             </a:fld>
             <a:endParaRPr kumimoji="1" lang="ja-JP" altLang="en-US"/>
           </a:p>
@@ -3334,7 +3334,7 @@
           <a:p>
             <a:fld id="{898ACB73-228B-4573-B2A8-EEAE64393BA5}" type="datetimeFigureOut">
               <a:rPr kumimoji="1" lang="ja-JP" altLang="en-US" smtClean="0"/>
-              <a:t>2026/7/1</a:t>
+              <a:t>2026/7/8</a:t>
             </a:fld>
             <a:endParaRPr kumimoji="1" lang="ja-JP" altLang="en-US"/>
           </a:p>
@@ -3644,7 +3644,7 @@
           <a:p>
             <a:fld id="{898ACB73-228B-4573-B2A8-EEAE64393BA5}" type="datetimeFigureOut">
               <a:rPr kumimoji="1" lang="ja-JP" altLang="en-US" smtClean="0"/>
-              <a:t>2026/7/1</a:t>
+              <a:t>2026/7/8</a:t>
             </a:fld>
             <a:endParaRPr kumimoji="1" lang="ja-JP" altLang="en-US"/>
           </a:p>
@@ -4185,13 +4185,14 @@
           <a:lstStyle/>
           <a:p>
             <a:r>
-              <a:rPr kumimoji="1" lang="en-US" altLang="ja-JP" sz="8000" b="1" dirty="0" err="1"/>
-              <a:t>todo</a:t>
-            </a:r>
-            <a:r>
-              <a:rPr kumimoji="1" lang="ja-JP" altLang="en-US" b="1" dirty="0"/>
-              <a:t>リスト</a:t>
-            </a:r>
+              <a:rPr kumimoji="1" lang="en-US" altLang="ja-JP" sz="8000" b="1" dirty="0"/>
+              <a:t>Todo</a:t>
+            </a:r>
+            <a:r>
+              <a:rPr lang="ja-JP" altLang="en-US" sz="8000" b="1" dirty="0"/>
+              <a:t>管理アプリ</a:t>
+            </a:r>
+            <a:endParaRPr kumimoji="1" lang="ja-JP" altLang="en-US" b="1" dirty="0"/>
           </a:p>
         </p:txBody>
       </p:sp>
@@ -5216,10 +5217,10 @@
               </a:lnSpc>
             </a:pPr>
             <a:r>
-              <a:rPr kumimoji="1" lang="ja-JP" altLang="en-US" sz="2800" b="1" dirty="0"/>
+              <a:rPr kumimoji="1" lang="ja-JP" altLang="en-US" sz="2400" b="1" dirty="0"/>
               <a:t>カテゴリの</a:t>
             </a:r>
-            <a:endParaRPr kumimoji="1" lang="en-US" altLang="ja-JP" sz="2800" b="1" dirty="0"/>
+            <a:endParaRPr kumimoji="1" lang="en-US" altLang="ja-JP" sz="2400" b="1" dirty="0"/>
           </a:p>
           <a:p>
             <a:pPr algn="ctr">
@@ -5228,10 +5229,10 @@
               </a:lnSpc>
             </a:pPr>
             <a:r>
-              <a:rPr kumimoji="1" lang="ja-JP" altLang="en-US" sz="2800" b="1" dirty="0"/>
-              <a:t>設定・区分</a:t>
-            </a:r>
-            <a:endParaRPr kumimoji="1" lang="en-US" altLang="ja-JP" sz="2800" b="1" dirty="0"/>
+              <a:rPr kumimoji="1" lang="ja-JP" altLang="en-US" sz="2000" b="1" dirty="0"/>
+              <a:t>設定・フィルタ</a:t>
+            </a:r>
+            <a:endParaRPr kumimoji="1" lang="en-US" altLang="ja-JP" sz="2000" b="1" dirty="0"/>
           </a:p>
         </p:txBody>
       </p:sp>
@@ -5556,6 +5557,539 @@
         <p:cNvPr id="1" name="">
           <a:extLst>
             <a:ext uri="{FF2B5EF4-FFF2-40B4-BE49-F238E27FC236}">
+              <a16:creationId xmlns:a16="http://schemas.microsoft.com/office/drawing/2014/main" id="{2087F40B-0DCA-8276-6D62-2C3AADFC2A1D}"/>
+            </a:ext>
+          </a:extLst>
+        </p:cNvPr>
+        <p:cNvGrpSpPr/>
+        <p:nvPr/>
+      </p:nvGrpSpPr>
+      <p:grpSpPr>
+        <a:xfrm>
+          <a:off x="0" y="0"/>
+          <a:ext cx="0" cy="0"/>
+          <a:chOff x="0" y="0"/>
+          <a:chExt cx="0" cy="0"/>
+        </a:xfrm>
+      </p:grpSpPr>
+      <p:sp>
+        <p:nvSpPr>
+          <p:cNvPr id="2" name="タイトル 1">
+            <a:extLst>
+              <a:ext uri="{FF2B5EF4-FFF2-40B4-BE49-F238E27FC236}">
+                <a16:creationId xmlns:a16="http://schemas.microsoft.com/office/drawing/2014/main" id="{0E86ADDE-E18E-17C3-DB9A-72D2337013A4}"/>
+              </a:ext>
+            </a:extLst>
+          </p:cNvPr>
+          <p:cNvSpPr txBox="1">
+            <a:spLocks/>
+          </p:cNvSpPr>
+          <p:nvPr/>
+        </p:nvSpPr>
+        <p:spPr>
+          <a:xfrm>
+            <a:off x="4437485" y="521464"/>
+            <a:ext cx="4131393" cy="759542"/>
+          </a:xfrm>
+          <a:prstGeom prst="rect">
+            <a:avLst/>
+          </a:prstGeom>
+        </p:spPr>
+        <p:txBody>
+          <a:bodyPr>
+            <a:normAutofit/>
+          </a:bodyPr>
+          <a:lstStyle>
+            <a:lvl1pPr algn="l" defTabSz="914400" rtl="0" eaLnBrk="1" latinLnBrk="0" hangingPunct="1">
+              <a:lnSpc>
+                <a:spcPct val="89000"/>
+              </a:lnSpc>
+              <a:spcBef>
+                <a:spcPct val="0"/>
+              </a:spcBef>
+              <a:buNone/>
+              <a:defRPr kumimoji="1" sz="4400" kern="1200" baseline="0">
+                <a:solidFill>
+                  <a:schemeClr val="tx2"/>
+                </a:solidFill>
+                <a:latin typeface="+mj-lt"/>
+                <a:ea typeface="+mj-ea"/>
+                <a:cs typeface="+mj-cs"/>
+              </a:defRPr>
+            </a:lvl1pPr>
+          </a:lstStyle>
+          <a:p>
+            <a:r>
+              <a:rPr lang="ja-JP" altLang="en-US" b="1" dirty="0"/>
+              <a:t>アプリの使い方</a:t>
+            </a:r>
+          </a:p>
+        </p:txBody>
+      </p:sp>
+      <p:sp>
+        <p:nvSpPr>
+          <p:cNvPr id="5" name="テキスト ボックス 4">
+            <a:extLst>
+              <a:ext uri="{FF2B5EF4-FFF2-40B4-BE49-F238E27FC236}">
+                <a16:creationId xmlns:a16="http://schemas.microsoft.com/office/drawing/2014/main" id="{96281983-FAB1-AE10-A205-12A7FE163574}"/>
+              </a:ext>
+            </a:extLst>
+          </p:cNvPr>
+          <p:cNvSpPr txBox="1"/>
+          <p:nvPr/>
+        </p:nvSpPr>
+        <p:spPr>
+          <a:xfrm>
+            <a:off x="927520" y="2079523"/>
+            <a:ext cx="11151322" cy="523220"/>
+          </a:xfrm>
+          <a:prstGeom prst="rect">
+            <a:avLst/>
+          </a:prstGeom>
+          <a:noFill/>
+        </p:spPr>
+        <p:txBody>
+          <a:bodyPr wrap="none" rtlCol="0">
+            <a:spAutoFit/>
+          </a:bodyPr>
+          <a:lstStyle/>
+          <a:p>
+            <a:r>
+              <a:rPr kumimoji="1" lang="ja-JP" altLang="en-US" sz="2800" b="1" dirty="0"/>
+              <a:t>・内容、日時</a:t>
+            </a:r>
+            <a:r>
+              <a:rPr kumimoji="1" lang="en-US" altLang="ja-JP" sz="2800" b="1" dirty="0"/>
+              <a:t>(</a:t>
+            </a:r>
+            <a:r>
+              <a:rPr kumimoji="1" lang="ja-JP" altLang="en-US" sz="2800" b="1" dirty="0"/>
+              <a:t>任意</a:t>
+            </a:r>
+            <a:r>
+              <a:rPr kumimoji="1" lang="en-US" altLang="ja-JP" sz="2800" b="1" dirty="0"/>
+              <a:t>)</a:t>
+            </a:r>
+            <a:r>
+              <a:rPr kumimoji="1" lang="ja-JP" altLang="en-US" sz="2800" b="1" dirty="0"/>
+              <a:t>、カテゴリ</a:t>
+            </a:r>
+            <a:r>
+              <a:rPr kumimoji="1" lang="en-US" altLang="ja-JP" sz="2800" b="1" dirty="0"/>
+              <a:t>(</a:t>
+            </a:r>
+            <a:r>
+              <a:rPr kumimoji="1" lang="ja-JP" altLang="en-US" sz="2800" b="1" dirty="0"/>
+              <a:t>任意</a:t>
+            </a:r>
+            <a:r>
+              <a:rPr kumimoji="1" lang="en-US" altLang="ja-JP" sz="2800" b="1" dirty="0"/>
+              <a:t>)</a:t>
+            </a:r>
+            <a:r>
+              <a:rPr kumimoji="1" lang="ja-JP" altLang="en-US" sz="2800" b="1" dirty="0"/>
+              <a:t>を設定して、</a:t>
+            </a:r>
+            <a:r>
+              <a:rPr kumimoji="1" lang="en-US" altLang="ja-JP" sz="2800" b="1" dirty="0"/>
+              <a:t>TODO</a:t>
+            </a:r>
+            <a:r>
+              <a:rPr kumimoji="1" lang="ja-JP" altLang="en-US" sz="2800" b="1" dirty="0"/>
+              <a:t>リストに追加</a:t>
+            </a:r>
+          </a:p>
+        </p:txBody>
+      </p:sp>
+      <p:sp>
+        <p:nvSpPr>
+          <p:cNvPr id="6" name="テキスト ボックス 5">
+            <a:extLst>
+              <a:ext uri="{FF2B5EF4-FFF2-40B4-BE49-F238E27FC236}">
+                <a16:creationId xmlns:a16="http://schemas.microsoft.com/office/drawing/2014/main" id="{AB3F3D26-2DC1-AA83-2D71-BC3A451BAC8F}"/>
+              </a:ext>
+            </a:extLst>
+          </p:cNvPr>
+          <p:cNvSpPr txBox="1"/>
+          <p:nvPr/>
+        </p:nvSpPr>
+        <p:spPr>
+          <a:xfrm>
+            <a:off x="932425" y="3767158"/>
+            <a:ext cx="10238700" cy="523220"/>
+          </a:xfrm>
+          <a:prstGeom prst="rect">
+            <a:avLst/>
+          </a:prstGeom>
+          <a:noFill/>
+        </p:spPr>
+        <p:txBody>
+          <a:bodyPr wrap="none" rtlCol="0">
+            <a:spAutoFit/>
+          </a:bodyPr>
+          <a:lstStyle/>
+          <a:p>
+            <a:r>
+              <a:rPr kumimoji="1" lang="ja-JP" altLang="en-US" sz="2800" b="1" dirty="0"/>
+              <a:t>・リストは新しい順、古い順、日時順、名前順にソート可能</a:t>
+            </a:r>
+          </a:p>
+        </p:txBody>
+      </p:sp>
+      <p:sp>
+        <p:nvSpPr>
+          <p:cNvPr id="7" name="テキスト ボックス 6">
+            <a:extLst>
+              <a:ext uri="{FF2B5EF4-FFF2-40B4-BE49-F238E27FC236}">
+                <a16:creationId xmlns:a16="http://schemas.microsoft.com/office/drawing/2014/main" id="{C0F64986-CC73-3548-A1EF-352749189D7B}"/>
+              </a:ext>
+            </a:extLst>
+          </p:cNvPr>
+          <p:cNvSpPr txBox="1"/>
+          <p:nvPr/>
+        </p:nvSpPr>
+        <p:spPr>
+          <a:xfrm>
+            <a:off x="932425" y="5454793"/>
+            <a:ext cx="4852610" cy="523220"/>
+          </a:xfrm>
+          <a:prstGeom prst="rect">
+            <a:avLst/>
+          </a:prstGeom>
+          <a:noFill/>
+        </p:spPr>
+        <p:txBody>
+          <a:bodyPr wrap="none" rtlCol="0">
+            <a:spAutoFit/>
+          </a:bodyPr>
+          <a:lstStyle/>
+          <a:p>
+            <a:r>
+              <a:rPr kumimoji="1" lang="ja-JP" altLang="en-US" sz="2800" b="1" dirty="0"/>
+              <a:t>・カテゴリ毎に絞り込み可能</a:t>
+            </a:r>
+          </a:p>
+        </p:txBody>
+      </p:sp>
+    </p:spTree>
+    <p:extLst>
+      <p:ext uri="{BB962C8B-B14F-4D97-AF65-F5344CB8AC3E}">
+        <p14:creationId xmlns:p14="http://schemas.microsoft.com/office/powerpoint/2010/main" val="3382973414"/>
+      </p:ext>
+    </p:extLst>
+  </p:cSld>
+  <p:clrMapOvr>
+    <a:masterClrMapping/>
+  </p:clrMapOvr>
+</p:sld>
+</file>
+
+<file path=ppt/slides/slide6.xml><?xml version="1.0" encoding="utf-8"?>
+<p:sld xmlns:a="http://schemas.openxmlformats.org/drawingml/2006/main" xmlns:r="http://schemas.openxmlformats.org/officeDocument/2006/relationships" xmlns:p="http://schemas.openxmlformats.org/presentationml/2006/main">
+  <p:cSld>
+    <p:spTree>
+      <p:nvGrpSpPr>
+        <p:cNvPr id="1" name=""/>
+        <p:cNvGrpSpPr/>
+        <p:nvPr/>
+      </p:nvGrpSpPr>
+      <p:grpSpPr>
+        <a:xfrm>
+          <a:off x="0" y="0"/>
+          <a:ext cx="0" cy="0"/>
+          <a:chOff x="0" y="0"/>
+          <a:chExt cx="0" cy="0"/>
+        </a:xfrm>
+      </p:grpSpPr>
+      <p:sp>
+        <p:nvSpPr>
+          <p:cNvPr id="2" name="テキスト ボックス 1">
+            <a:extLst>
+              <a:ext uri="{FF2B5EF4-FFF2-40B4-BE49-F238E27FC236}">
+                <a16:creationId xmlns:a16="http://schemas.microsoft.com/office/drawing/2014/main" id="{63FAD635-FD64-A676-843B-FB092A60FF3D}"/>
+              </a:ext>
+            </a:extLst>
+          </p:cNvPr>
+          <p:cNvSpPr txBox="1"/>
+          <p:nvPr/>
+        </p:nvSpPr>
+        <p:spPr>
+          <a:xfrm>
+            <a:off x="3951823" y="2767280"/>
+            <a:ext cx="4288353" cy="1323439"/>
+          </a:xfrm>
+          <a:prstGeom prst="rect">
+            <a:avLst/>
+          </a:prstGeom>
+          <a:noFill/>
+        </p:spPr>
+        <p:txBody>
+          <a:bodyPr wrap="none" rtlCol="0">
+            <a:spAutoFit/>
+          </a:bodyPr>
+          <a:lstStyle/>
+          <a:p>
+            <a:r>
+              <a:rPr kumimoji="1" lang="ja-JP" altLang="en-US" sz="8000" b="1" dirty="0"/>
+              <a:t>実機説明</a:t>
+            </a:r>
+          </a:p>
+        </p:txBody>
+      </p:sp>
+    </p:spTree>
+    <p:extLst>
+      <p:ext uri="{BB962C8B-B14F-4D97-AF65-F5344CB8AC3E}">
+        <p14:creationId xmlns:p14="http://schemas.microsoft.com/office/powerpoint/2010/main" val="1609274902"/>
+      </p:ext>
+    </p:extLst>
+  </p:cSld>
+  <p:clrMapOvr>
+    <a:masterClrMapping/>
+  </p:clrMapOvr>
+</p:sld>
+</file>
+
+<file path=ppt/slides/slide7.xml><?xml version="1.0" encoding="utf-8"?>
+<p:sld xmlns:a="http://schemas.openxmlformats.org/drawingml/2006/main" xmlns:r="http://schemas.openxmlformats.org/officeDocument/2006/relationships" xmlns:p="http://schemas.openxmlformats.org/presentationml/2006/main">
+  <p:cSld>
+    <p:spTree>
+      <p:nvGrpSpPr>
+        <p:cNvPr id="1" name="">
+          <a:extLst>
+            <a:ext uri="{FF2B5EF4-FFF2-40B4-BE49-F238E27FC236}">
+              <a16:creationId xmlns:a16="http://schemas.microsoft.com/office/drawing/2014/main" id="{47F491B6-7374-3301-CACE-0ED8431A4B2C}"/>
+            </a:ext>
+          </a:extLst>
+        </p:cNvPr>
+        <p:cNvGrpSpPr/>
+        <p:nvPr/>
+      </p:nvGrpSpPr>
+      <p:grpSpPr>
+        <a:xfrm>
+          <a:off x="0" y="0"/>
+          <a:ext cx="0" cy="0"/>
+          <a:chOff x="0" y="0"/>
+          <a:chExt cx="0" cy="0"/>
+        </a:xfrm>
+      </p:grpSpPr>
+      <p:sp>
+        <p:nvSpPr>
+          <p:cNvPr id="2" name="タイトル 1">
+            <a:extLst>
+              <a:ext uri="{FF2B5EF4-FFF2-40B4-BE49-F238E27FC236}">
+                <a16:creationId xmlns:a16="http://schemas.microsoft.com/office/drawing/2014/main" id="{F3D9376E-2F96-D894-865E-EA38984CD13F}"/>
+              </a:ext>
+            </a:extLst>
+          </p:cNvPr>
+          <p:cNvSpPr txBox="1">
+            <a:spLocks/>
+          </p:cNvSpPr>
+          <p:nvPr/>
+        </p:nvSpPr>
+        <p:spPr>
+          <a:xfrm>
+            <a:off x="5146265" y="446847"/>
+            <a:ext cx="1899470" cy="759542"/>
+          </a:xfrm>
+          <a:prstGeom prst="rect">
+            <a:avLst/>
+          </a:prstGeom>
+        </p:spPr>
+        <p:txBody>
+          <a:bodyPr>
+            <a:normAutofit/>
+          </a:bodyPr>
+          <a:lstStyle>
+            <a:lvl1pPr algn="l" defTabSz="914400" rtl="0" eaLnBrk="1" latinLnBrk="0" hangingPunct="1">
+              <a:lnSpc>
+                <a:spcPct val="89000"/>
+              </a:lnSpc>
+              <a:spcBef>
+                <a:spcPct val="0"/>
+              </a:spcBef>
+              <a:buNone/>
+              <a:defRPr kumimoji="1" sz="4400" kern="1200" baseline="0">
+                <a:solidFill>
+                  <a:schemeClr val="tx2"/>
+                </a:solidFill>
+                <a:latin typeface="+mj-lt"/>
+                <a:ea typeface="+mj-ea"/>
+                <a:cs typeface="+mj-cs"/>
+              </a:defRPr>
+            </a:lvl1pPr>
+          </a:lstStyle>
+          <a:p>
+            <a:r>
+              <a:rPr lang="ja-JP" altLang="en-US" b="1" dirty="0"/>
+              <a:t>まとめ</a:t>
+            </a:r>
+          </a:p>
+        </p:txBody>
+      </p:sp>
+      <p:sp>
+        <p:nvSpPr>
+          <p:cNvPr id="5" name="テキスト ボックス 4">
+            <a:extLst>
+              <a:ext uri="{FF2B5EF4-FFF2-40B4-BE49-F238E27FC236}">
+                <a16:creationId xmlns:a16="http://schemas.microsoft.com/office/drawing/2014/main" id="{63A9E1F0-6E06-67C9-35F5-9FFC90BFADE5}"/>
+              </a:ext>
+            </a:extLst>
+          </p:cNvPr>
+          <p:cNvSpPr txBox="1"/>
+          <p:nvPr/>
+        </p:nvSpPr>
+        <p:spPr>
+          <a:xfrm>
+            <a:off x="932426" y="2204218"/>
+            <a:ext cx="9558593" cy="646331"/>
+          </a:xfrm>
+          <a:prstGeom prst="rect">
+            <a:avLst/>
+          </a:prstGeom>
+          <a:noFill/>
+        </p:spPr>
+        <p:txBody>
+          <a:bodyPr wrap="square" rtlCol="0">
+            <a:spAutoFit/>
+          </a:bodyPr>
+          <a:lstStyle/>
+          <a:p>
+            <a:r>
+              <a:rPr kumimoji="1" lang="ja-JP" altLang="en-US" sz="3600" b="1" dirty="0"/>
+              <a:t>・自分が求めるアプリに仕上がったので満足</a:t>
+            </a:r>
+          </a:p>
+        </p:txBody>
+      </p:sp>
+      <p:sp>
+        <p:nvSpPr>
+          <p:cNvPr id="6" name="テキスト ボックス 5">
+            <a:extLst>
+              <a:ext uri="{FF2B5EF4-FFF2-40B4-BE49-F238E27FC236}">
+                <a16:creationId xmlns:a16="http://schemas.microsoft.com/office/drawing/2014/main" id="{B05085C8-E2B1-5A7E-4E55-B16F6F152925}"/>
+              </a:ext>
+            </a:extLst>
+          </p:cNvPr>
+          <p:cNvSpPr txBox="1"/>
+          <p:nvPr/>
+        </p:nvSpPr>
+        <p:spPr>
+          <a:xfrm>
+            <a:off x="923413" y="4317764"/>
+            <a:ext cx="10345174" cy="1200329"/>
+          </a:xfrm>
+          <a:prstGeom prst="rect">
+            <a:avLst/>
+          </a:prstGeom>
+          <a:noFill/>
+        </p:spPr>
+        <p:txBody>
+          <a:bodyPr wrap="square" rtlCol="0">
+            <a:spAutoFit/>
+          </a:bodyPr>
+          <a:lstStyle/>
+          <a:p>
+            <a:r>
+              <a:rPr kumimoji="1" lang="ja-JP" altLang="en-US" sz="3600" b="1" dirty="0"/>
+              <a:t>・今後似たようなものを作る際は他の機能にも</a:t>
+            </a:r>
+            <a:endParaRPr kumimoji="1" lang="en-US" altLang="ja-JP" sz="3600" b="1" dirty="0"/>
+          </a:p>
+          <a:p>
+            <a:r>
+              <a:rPr kumimoji="1" lang="ja-JP" altLang="en-US" sz="3600" b="1" dirty="0"/>
+              <a:t>　挑戦してみたい</a:t>
+            </a:r>
+            <a:endParaRPr kumimoji="1" lang="en-US" altLang="ja-JP" sz="3600" b="1" dirty="0"/>
+          </a:p>
+        </p:txBody>
+      </p:sp>
+    </p:spTree>
+    <p:extLst>
+      <p:ext uri="{BB962C8B-B14F-4D97-AF65-F5344CB8AC3E}">
+        <p14:creationId xmlns:p14="http://schemas.microsoft.com/office/powerpoint/2010/main" val="710571263"/>
+      </p:ext>
+    </p:extLst>
+  </p:cSld>
+  <p:clrMapOvr>
+    <a:masterClrMapping/>
+  </p:clrMapOvr>
+</p:sld>
+</file>
+
+<file path=ppt/slides/slide8.xml><?xml version="1.0" encoding="utf-8"?>
+<p:sld xmlns:a="http://schemas.openxmlformats.org/drawingml/2006/main" xmlns:r="http://schemas.openxmlformats.org/officeDocument/2006/relationships" xmlns:p="http://schemas.openxmlformats.org/presentationml/2006/main">
+  <p:cSld>
+    <p:spTree>
+      <p:nvGrpSpPr>
+        <p:cNvPr id="1" name=""/>
+        <p:cNvGrpSpPr/>
+        <p:nvPr/>
+      </p:nvGrpSpPr>
+      <p:grpSpPr>
+        <a:xfrm>
+          <a:off x="0" y="0"/>
+          <a:ext cx="0" cy="0"/>
+          <a:chOff x="0" y="0"/>
+          <a:chExt cx="0" cy="0"/>
+        </a:xfrm>
+      </p:grpSpPr>
+      <p:sp>
+        <p:nvSpPr>
+          <p:cNvPr id="2" name="テキスト ボックス 1">
+            <a:extLst>
+              <a:ext uri="{FF2B5EF4-FFF2-40B4-BE49-F238E27FC236}">
+                <a16:creationId xmlns:a16="http://schemas.microsoft.com/office/drawing/2014/main" id="{155C96AD-CEFA-9B09-521A-E6DC813362A9}"/>
+              </a:ext>
+            </a:extLst>
+          </p:cNvPr>
+          <p:cNvSpPr txBox="1"/>
+          <p:nvPr/>
+        </p:nvSpPr>
+        <p:spPr>
+          <a:xfrm>
+            <a:off x="947830" y="2921168"/>
+            <a:ext cx="10956846" cy="1015663"/>
+          </a:xfrm>
+          <a:prstGeom prst="rect">
+            <a:avLst/>
+          </a:prstGeom>
+          <a:noFill/>
+        </p:spPr>
+        <p:txBody>
+          <a:bodyPr wrap="none" rtlCol="0">
+            <a:spAutoFit/>
+          </a:bodyPr>
+          <a:lstStyle/>
+          <a:p>
+            <a:r>
+              <a:rPr kumimoji="1" lang="ja-JP" altLang="en-US" sz="6000" b="1" dirty="0"/>
+              <a:t>ご清聴ありがとうございました</a:t>
+            </a:r>
+          </a:p>
+        </p:txBody>
+      </p:sp>
+    </p:spTree>
+    <p:extLst>
+      <p:ext uri="{BB962C8B-B14F-4D97-AF65-F5344CB8AC3E}">
+        <p14:creationId xmlns:p14="http://schemas.microsoft.com/office/powerpoint/2010/main" val="478292780"/>
+      </p:ext>
+    </p:extLst>
+  </p:cSld>
+  <p:clrMapOvr>
+    <a:masterClrMapping/>
+  </p:clrMapOvr>
+</p:sld>
+</file>
+
+<file path=ppt/slides/slide9.xml><?xml version="1.0" encoding="utf-8"?>
+<p:sld xmlns:a="http://schemas.openxmlformats.org/drawingml/2006/main" xmlns:r="http://schemas.openxmlformats.org/officeDocument/2006/relationships" xmlns:p="http://schemas.openxmlformats.org/presentationml/2006/main" show="0">
+  <p:cSld>
+    <p:spTree>
+      <p:nvGrpSpPr>
+        <p:cNvPr id="1" name="">
+          <a:extLst>
+            <a:ext uri="{FF2B5EF4-FFF2-40B4-BE49-F238E27FC236}">
               <a16:creationId xmlns:a16="http://schemas.microsoft.com/office/drawing/2014/main" id="{44F219D8-B9CD-06AE-8F82-464D8E8D5887}"/>
             </a:ext>
           </a:extLst>
@@ -5772,532 +6306,6 @@
       <p:bldP spid="3" grpId="0" animBg="1"/>
     </p:bldLst>
   </p:timing>
-</p:sld>
-</file>
-
-<file path=ppt/slides/slide6.xml><?xml version="1.0" encoding="utf-8"?>
-<p:sld xmlns:a="http://schemas.openxmlformats.org/drawingml/2006/main" xmlns:r="http://schemas.openxmlformats.org/officeDocument/2006/relationships" xmlns:p="http://schemas.openxmlformats.org/presentationml/2006/main">
-  <p:cSld>
-    <p:spTree>
-      <p:nvGrpSpPr>
-        <p:cNvPr id="1" name="">
-          <a:extLst>
-            <a:ext uri="{FF2B5EF4-FFF2-40B4-BE49-F238E27FC236}">
-              <a16:creationId xmlns:a16="http://schemas.microsoft.com/office/drawing/2014/main" id="{2087F40B-0DCA-8276-6D62-2C3AADFC2A1D}"/>
-            </a:ext>
-          </a:extLst>
-        </p:cNvPr>
-        <p:cNvGrpSpPr/>
-        <p:nvPr/>
-      </p:nvGrpSpPr>
-      <p:grpSpPr>
-        <a:xfrm>
-          <a:off x="0" y="0"/>
-          <a:ext cx="0" cy="0"/>
-          <a:chOff x="0" y="0"/>
-          <a:chExt cx="0" cy="0"/>
-        </a:xfrm>
-      </p:grpSpPr>
-      <p:sp>
-        <p:nvSpPr>
-          <p:cNvPr id="2" name="タイトル 1">
-            <a:extLst>
-              <a:ext uri="{FF2B5EF4-FFF2-40B4-BE49-F238E27FC236}">
-                <a16:creationId xmlns:a16="http://schemas.microsoft.com/office/drawing/2014/main" id="{0E86ADDE-E18E-17C3-DB9A-72D2337013A4}"/>
-              </a:ext>
-            </a:extLst>
-          </p:cNvPr>
-          <p:cNvSpPr txBox="1">
-            <a:spLocks/>
-          </p:cNvSpPr>
-          <p:nvPr/>
-        </p:nvSpPr>
-        <p:spPr>
-          <a:xfrm>
-            <a:off x="4437485" y="521464"/>
-            <a:ext cx="4131393" cy="759542"/>
-          </a:xfrm>
-          <a:prstGeom prst="rect">
-            <a:avLst/>
-          </a:prstGeom>
-        </p:spPr>
-        <p:txBody>
-          <a:bodyPr>
-            <a:normAutofit/>
-          </a:bodyPr>
-          <a:lstStyle>
-            <a:lvl1pPr algn="l" defTabSz="914400" rtl="0" eaLnBrk="1" latinLnBrk="0" hangingPunct="1">
-              <a:lnSpc>
-                <a:spcPct val="89000"/>
-              </a:lnSpc>
-              <a:spcBef>
-                <a:spcPct val="0"/>
-              </a:spcBef>
-              <a:buNone/>
-              <a:defRPr kumimoji="1" sz="4400" kern="1200" baseline="0">
-                <a:solidFill>
-                  <a:schemeClr val="tx2"/>
-                </a:solidFill>
-                <a:latin typeface="+mj-lt"/>
-                <a:ea typeface="+mj-ea"/>
-                <a:cs typeface="+mj-cs"/>
-              </a:defRPr>
-            </a:lvl1pPr>
-          </a:lstStyle>
-          <a:p>
-            <a:r>
-              <a:rPr lang="ja-JP" altLang="en-US" b="1" dirty="0"/>
-              <a:t>アプリの使い方</a:t>
-            </a:r>
-          </a:p>
-        </p:txBody>
-      </p:sp>
-      <p:sp>
-        <p:nvSpPr>
-          <p:cNvPr id="5" name="テキスト ボックス 4">
-            <a:extLst>
-              <a:ext uri="{FF2B5EF4-FFF2-40B4-BE49-F238E27FC236}">
-                <a16:creationId xmlns:a16="http://schemas.microsoft.com/office/drawing/2014/main" id="{96281983-FAB1-AE10-A205-12A7FE163574}"/>
-              </a:ext>
-            </a:extLst>
-          </p:cNvPr>
-          <p:cNvSpPr txBox="1"/>
-          <p:nvPr/>
-        </p:nvSpPr>
-        <p:spPr>
-          <a:xfrm>
-            <a:off x="927520" y="2079523"/>
-            <a:ext cx="11151322" cy="523220"/>
-          </a:xfrm>
-          <a:prstGeom prst="rect">
-            <a:avLst/>
-          </a:prstGeom>
-          <a:noFill/>
-        </p:spPr>
-        <p:txBody>
-          <a:bodyPr wrap="none" rtlCol="0">
-            <a:spAutoFit/>
-          </a:bodyPr>
-          <a:lstStyle/>
-          <a:p>
-            <a:r>
-              <a:rPr kumimoji="1" lang="ja-JP" altLang="en-US" sz="2800" b="1" dirty="0"/>
-              <a:t>・内容、日時</a:t>
-            </a:r>
-            <a:r>
-              <a:rPr kumimoji="1" lang="en-US" altLang="ja-JP" sz="2800" b="1" dirty="0"/>
-              <a:t>(</a:t>
-            </a:r>
-            <a:r>
-              <a:rPr kumimoji="1" lang="ja-JP" altLang="en-US" sz="2800" b="1" dirty="0"/>
-              <a:t>任意</a:t>
-            </a:r>
-            <a:r>
-              <a:rPr kumimoji="1" lang="en-US" altLang="ja-JP" sz="2800" b="1" dirty="0"/>
-              <a:t>)</a:t>
-            </a:r>
-            <a:r>
-              <a:rPr kumimoji="1" lang="ja-JP" altLang="en-US" sz="2800" b="1" dirty="0"/>
-              <a:t>、カテゴリ</a:t>
-            </a:r>
-            <a:r>
-              <a:rPr kumimoji="1" lang="en-US" altLang="ja-JP" sz="2800" b="1" dirty="0"/>
-              <a:t>(</a:t>
-            </a:r>
-            <a:r>
-              <a:rPr kumimoji="1" lang="ja-JP" altLang="en-US" sz="2800" b="1" dirty="0"/>
-              <a:t>任意</a:t>
-            </a:r>
-            <a:r>
-              <a:rPr kumimoji="1" lang="en-US" altLang="ja-JP" sz="2800" b="1" dirty="0"/>
-              <a:t>)</a:t>
-            </a:r>
-            <a:r>
-              <a:rPr kumimoji="1" lang="ja-JP" altLang="en-US" sz="2800" b="1" dirty="0"/>
-              <a:t>を設定して、</a:t>
-            </a:r>
-            <a:r>
-              <a:rPr kumimoji="1" lang="en-US" altLang="ja-JP" sz="2800" b="1" dirty="0"/>
-              <a:t>TODO</a:t>
-            </a:r>
-            <a:r>
-              <a:rPr kumimoji="1" lang="ja-JP" altLang="en-US" sz="2800" b="1" dirty="0"/>
-              <a:t>リストに追加</a:t>
-            </a:r>
-          </a:p>
-        </p:txBody>
-      </p:sp>
-      <p:sp>
-        <p:nvSpPr>
-          <p:cNvPr id="6" name="テキスト ボックス 5">
-            <a:extLst>
-              <a:ext uri="{FF2B5EF4-FFF2-40B4-BE49-F238E27FC236}">
-                <a16:creationId xmlns:a16="http://schemas.microsoft.com/office/drawing/2014/main" id="{AB3F3D26-2DC1-AA83-2D71-BC3A451BAC8F}"/>
-              </a:ext>
-            </a:extLst>
-          </p:cNvPr>
-          <p:cNvSpPr txBox="1"/>
-          <p:nvPr/>
-        </p:nvSpPr>
-        <p:spPr>
-          <a:xfrm>
-            <a:off x="932425" y="3767158"/>
-            <a:ext cx="9161482" cy="523220"/>
-          </a:xfrm>
-          <a:prstGeom prst="rect">
-            <a:avLst/>
-          </a:prstGeom>
-          <a:noFill/>
-        </p:spPr>
-        <p:txBody>
-          <a:bodyPr wrap="none" rtlCol="0">
-            <a:spAutoFit/>
-          </a:bodyPr>
-          <a:lstStyle/>
-          <a:p>
-            <a:r>
-              <a:rPr kumimoji="1" lang="ja-JP" altLang="en-US" sz="2800" b="1" dirty="0"/>
-              <a:t>・リストは新しい順、古い順、日時順、名前順にソート</a:t>
-            </a:r>
-          </a:p>
-        </p:txBody>
-      </p:sp>
-      <p:sp>
-        <p:nvSpPr>
-          <p:cNvPr id="7" name="テキスト ボックス 6">
-            <a:extLst>
-              <a:ext uri="{FF2B5EF4-FFF2-40B4-BE49-F238E27FC236}">
-                <a16:creationId xmlns:a16="http://schemas.microsoft.com/office/drawing/2014/main" id="{C0F64986-CC73-3548-A1EF-352749189D7B}"/>
-              </a:ext>
-            </a:extLst>
-          </p:cNvPr>
-          <p:cNvSpPr txBox="1"/>
-          <p:nvPr/>
-        </p:nvSpPr>
-        <p:spPr>
-          <a:xfrm>
-            <a:off x="932425" y="5454793"/>
-            <a:ext cx="5570756" cy="523220"/>
-          </a:xfrm>
-          <a:prstGeom prst="rect">
-            <a:avLst/>
-          </a:prstGeom>
-          <a:noFill/>
-        </p:spPr>
-        <p:txBody>
-          <a:bodyPr wrap="none" rtlCol="0">
-            <a:spAutoFit/>
-          </a:bodyPr>
-          <a:lstStyle/>
-          <a:p>
-            <a:r>
-              <a:rPr kumimoji="1" lang="ja-JP" altLang="en-US" sz="2800" b="1" dirty="0"/>
-              <a:t>・カテゴリ毎に絞り込みもできる</a:t>
-            </a:r>
-          </a:p>
-        </p:txBody>
-      </p:sp>
-    </p:spTree>
-    <p:extLst>
-      <p:ext uri="{BB962C8B-B14F-4D97-AF65-F5344CB8AC3E}">
-        <p14:creationId xmlns:p14="http://schemas.microsoft.com/office/powerpoint/2010/main" val="3382973414"/>
-      </p:ext>
-    </p:extLst>
-  </p:cSld>
-  <p:clrMapOvr>
-    <a:masterClrMapping/>
-  </p:clrMapOvr>
-</p:sld>
-</file>
-
-<file path=ppt/slides/slide7.xml><?xml version="1.0" encoding="utf-8"?>
-<p:sld xmlns:a="http://schemas.openxmlformats.org/drawingml/2006/main" xmlns:r="http://schemas.openxmlformats.org/officeDocument/2006/relationships" xmlns:p="http://schemas.openxmlformats.org/presentationml/2006/main">
-  <p:cSld>
-    <p:spTree>
-      <p:nvGrpSpPr>
-        <p:cNvPr id="1" name=""/>
-        <p:cNvGrpSpPr/>
-        <p:nvPr/>
-      </p:nvGrpSpPr>
-      <p:grpSpPr>
-        <a:xfrm>
-          <a:off x="0" y="0"/>
-          <a:ext cx="0" cy="0"/>
-          <a:chOff x="0" y="0"/>
-          <a:chExt cx="0" cy="0"/>
-        </a:xfrm>
-      </p:grpSpPr>
-      <p:sp>
-        <p:nvSpPr>
-          <p:cNvPr id="2" name="テキスト ボックス 1">
-            <a:extLst>
-              <a:ext uri="{FF2B5EF4-FFF2-40B4-BE49-F238E27FC236}">
-                <a16:creationId xmlns:a16="http://schemas.microsoft.com/office/drawing/2014/main" id="{63FAD635-FD64-A676-843B-FB092A60FF3D}"/>
-              </a:ext>
-            </a:extLst>
-          </p:cNvPr>
-          <p:cNvSpPr txBox="1"/>
-          <p:nvPr/>
-        </p:nvSpPr>
-        <p:spPr>
-          <a:xfrm>
-            <a:off x="3951823" y="2767280"/>
-            <a:ext cx="4288353" cy="1323439"/>
-          </a:xfrm>
-          <a:prstGeom prst="rect">
-            <a:avLst/>
-          </a:prstGeom>
-          <a:noFill/>
-        </p:spPr>
-        <p:txBody>
-          <a:bodyPr wrap="none" rtlCol="0">
-            <a:spAutoFit/>
-          </a:bodyPr>
-          <a:lstStyle/>
-          <a:p>
-            <a:r>
-              <a:rPr kumimoji="1" lang="ja-JP" altLang="en-US" sz="8000" b="1" dirty="0"/>
-              <a:t>実機説明</a:t>
-            </a:r>
-          </a:p>
-        </p:txBody>
-      </p:sp>
-    </p:spTree>
-    <p:extLst>
-      <p:ext uri="{BB962C8B-B14F-4D97-AF65-F5344CB8AC3E}">
-        <p14:creationId xmlns:p14="http://schemas.microsoft.com/office/powerpoint/2010/main" val="1609274902"/>
-      </p:ext>
-    </p:extLst>
-  </p:cSld>
-  <p:clrMapOvr>
-    <a:masterClrMapping/>
-  </p:clrMapOvr>
-</p:sld>
-</file>
-
-<file path=ppt/slides/slide8.xml><?xml version="1.0" encoding="utf-8"?>
-<p:sld xmlns:a="http://schemas.openxmlformats.org/drawingml/2006/main" xmlns:r="http://schemas.openxmlformats.org/officeDocument/2006/relationships" xmlns:p="http://schemas.openxmlformats.org/presentationml/2006/main">
-  <p:cSld>
-    <p:spTree>
-      <p:nvGrpSpPr>
-        <p:cNvPr id="1" name="">
-          <a:extLst>
-            <a:ext uri="{FF2B5EF4-FFF2-40B4-BE49-F238E27FC236}">
-              <a16:creationId xmlns:a16="http://schemas.microsoft.com/office/drawing/2014/main" id="{47F491B6-7374-3301-CACE-0ED8431A4B2C}"/>
-            </a:ext>
-          </a:extLst>
-        </p:cNvPr>
-        <p:cNvGrpSpPr/>
-        <p:nvPr/>
-      </p:nvGrpSpPr>
-      <p:grpSpPr>
-        <a:xfrm>
-          <a:off x="0" y="0"/>
-          <a:ext cx="0" cy="0"/>
-          <a:chOff x="0" y="0"/>
-          <a:chExt cx="0" cy="0"/>
-        </a:xfrm>
-      </p:grpSpPr>
-      <p:sp>
-        <p:nvSpPr>
-          <p:cNvPr id="2" name="タイトル 1">
-            <a:extLst>
-              <a:ext uri="{FF2B5EF4-FFF2-40B4-BE49-F238E27FC236}">
-                <a16:creationId xmlns:a16="http://schemas.microsoft.com/office/drawing/2014/main" id="{F3D9376E-2F96-D894-865E-EA38984CD13F}"/>
-              </a:ext>
-            </a:extLst>
-          </p:cNvPr>
-          <p:cNvSpPr txBox="1">
-            <a:spLocks/>
-          </p:cNvSpPr>
-          <p:nvPr/>
-        </p:nvSpPr>
-        <p:spPr>
-          <a:xfrm>
-            <a:off x="5146265" y="446847"/>
-            <a:ext cx="1899470" cy="759542"/>
-          </a:xfrm>
-          <a:prstGeom prst="rect">
-            <a:avLst/>
-          </a:prstGeom>
-        </p:spPr>
-        <p:txBody>
-          <a:bodyPr>
-            <a:normAutofit/>
-          </a:bodyPr>
-          <a:lstStyle>
-            <a:lvl1pPr algn="l" defTabSz="914400" rtl="0" eaLnBrk="1" latinLnBrk="0" hangingPunct="1">
-              <a:lnSpc>
-                <a:spcPct val="89000"/>
-              </a:lnSpc>
-              <a:spcBef>
-                <a:spcPct val="0"/>
-              </a:spcBef>
-              <a:buNone/>
-              <a:defRPr kumimoji="1" sz="4400" kern="1200" baseline="0">
-                <a:solidFill>
-                  <a:schemeClr val="tx2"/>
-                </a:solidFill>
-                <a:latin typeface="+mj-lt"/>
-                <a:ea typeface="+mj-ea"/>
-                <a:cs typeface="+mj-cs"/>
-              </a:defRPr>
-            </a:lvl1pPr>
-          </a:lstStyle>
-          <a:p>
-            <a:r>
-              <a:rPr lang="ja-JP" altLang="en-US" b="1" dirty="0"/>
-              <a:t>まとめ</a:t>
-            </a:r>
-          </a:p>
-        </p:txBody>
-      </p:sp>
-      <p:sp>
-        <p:nvSpPr>
-          <p:cNvPr id="5" name="テキスト ボックス 4">
-            <a:extLst>
-              <a:ext uri="{FF2B5EF4-FFF2-40B4-BE49-F238E27FC236}">
-                <a16:creationId xmlns:a16="http://schemas.microsoft.com/office/drawing/2014/main" id="{63A9E1F0-6E06-67C9-35F5-9FFC90BFADE5}"/>
-              </a:ext>
-            </a:extLst>
-          </p:cNvPr>
-          <p:cNvSpPr txBox="1"/>
-          <p:nvPr/>
-        </p:nvSpPr>
-        <p:spPr>
-          <a:xfrm>
-            <a:off x="932426" y="2204218"/>
-            <a:ext cx="9558593" cy="584775"/>
-          </a:xfrm>
-          <a:prstGeom prst="rect">
-            <a:avLst/>
-          </a:prstGeom>
-          <a:noFill/>
-        </p:spPr>
-        <p:txBody>
-          <a:bodyPr wrap="square" rtlCol="0">
-            <a:spAutoFit/>
-          </a:bodyPr>
-          <a:lstStyle/>
-          <a:p>
-            <a:r>
-              <a:rPr kumimoji="1" lang="ja-JP" altLang="en-US" sz="3200" b="1" dirty="0"/>
-              <a:t>・自分が求めるアプリに仕上がったので満足</a:t>
-            </a:r>
-          </a:p>
-        </p:txBody>
-      </p:sp>
-      <p:sp>
-        <p:nvSpPr>
-          <p:cNvPr id="6" name="テキスト ボックス 5">
-            <a:extLst>
-              <a:ext uri="{FF2B5EF4-FFF2-40B4-BE49-F238E27FC236}">
-                <a16:creationId xmlns:a16="http://schemas.microsoft.com/office/drawing/2014/main" id="{B05085C8-E2B1-5A7E-4E55-B16F6F152925}"/>
-              </a:ext>
-            </a:extLst>
-          </p:cNvPr>
-          <p:cNvSpPr txBox="1"/>
-          <p:nvPr/>
-        </p:nvSpPr>
-        <p:spPr>
-          <a:xfrm>
-            <a:off x="923413" y="4317764"/>
-            <a:ext cx="10345174" cy="646331"/>
-          </a:xfrm>
-          <a:prstGeom prst="rect">
-            <a:avLst/>
-          </a:prstGeom>
-          <a:noFill/>
-        </p:spPr>
-        <p:txBody>
-          <a:bodyPr wrap="square" rtlCol="0">
-            <a:spAutoFit/>
-          </a:bodyPr>
-          <a:lstStyle/>
-          <a:p>
-            <a:r>
-              <a:rPr kumimoji="1" lang="ja-JP" altLang="en-US" sz="3600" b="1" dirty="0"/>
-              <a:t>・通知機能を実装できなかったのは残念</a:t>
-            </a:r>
-            <a:endParaRPr kumimoji="1" lang="en-US" altLang="ja-JP" sz="3600" b="1" dirty="0"/>
-          </a:p>
-        </p:txBody>
-      </p:sp>
-    </p:spTree>
-    <p:extLst>
-      <p:ext uri="{BB962C8B-B14F-4D97-AF65-F5344CB8AC3E}">
-        <p14:creationId xmlns:p14="http://schemas.microsoft.com/office/powerpoint/2010/main" val="710571263"/>
-      </p:ext>
-    </p:extLst>
-  </p:cSld>
-  <p:clrMapOvr>
-    <a:masterClrMapping/>
-  </p:clrMapOvr>
-</p:sld>
-</file>
-
-<file path=ppt/slides/slide9.xml><?xml version="1.0" encoding="utf-8"?>
-<p:sld xmlns:a="http://schemas.openxmlformats.org/drawingml/2006/main" xmlns:r="http://schemas.openxmlformats.org/officeDocument/2006/relationships" xmlns:p="http://schemas.openxmlformats.org/presentationml/2006/main">
-  <p:cSld>
-    <p:spTree>
-      <p:nvGrpSpPr>
-        <p:cNvPr id="1" name=""/>
-        <p:cNvGrpSpPr/>
-        <p:nvPr/>
-      </p:nvGrpSpPr>
-      <p:grpSpPr>
-        <a:xfrm>
-          <a:off x="0" y="0"/>
-          <a:ext cx="0" cy="0"/>
-          <a:chOff x="0" y="0"/>
-          <a:chExt cx="0" cy="0"/>
-        </a:xfrm>
-      </p:grpSpPr>
-      <p:sp>
-        <p:nvSpPr>
-          <p:cNvPr id="2" name="テキスト ボックス 1">
-            <a:extLst>
-              <a:ext uri="{FF2B5EF4-FFF2-40B4-BE49-F238E27FC236}">
-                <a16:creationId xmlns:a16="http://schemas.microsoft.com/office/drawing/2014/main" id="{155C96AD-CEFA-9B09-521A-E6DC813362A9}"/>
-              </a:ext>
-            </a:extLst>
-          </p:cNvPr>
-          <p:cNvSpPr txBox="1"/>
-          <p:nvPr/>
-        </p:nvSpPr>
-        <p:spPr>
-          <a:xfrm>
-            <a:off x="947830" y="2921168"/>
-            <a:ext cx="10956846" cy="1015663"/>
-          </a:xfrm>
-          <a:prstGeom prst="rect">
-            <a:avLst/>
-          </a:prstGeom>
-          <a:noFill/>
-        </p:spPr>
-        <p:txBody>
-          <a:bodyPr wrap="none" rtlCol="0">
-            <a:spAutoFit/>
-          </a:bodyPr>
-          <a:lstStyle/>
-          <a:p>
-            <a:r>
-              <a:rPr kumimoji="1" lang="ja-JP" altLang="en-US" sz="6000" b="1" dirty="0"/>
-              <a:t>ご清聴ありがとうございました</a:t>
-            </a:r>
-          </a:p>
-        </p:txBody>
-      </p:sp>
-    </p:spTree>
-    <p:extLst>
-      <p:ext uri="{BB962C8B-B14F-4D97-AF65-F5344CB8AC3E}">
-        <p14:creationId xmlns:p14="http://schemas.microsoft.com/office/powerpoint/2010/main" val="478292780"/>
-      </p:ext>
-    </p:extLst>
-  </p:cSld>
-  <p:clrMapOvr>
-    <a:masterClrMapping/>
-  </p:clrMapOvr>
 </p:sld>
 </file>
 

--- a/モバイル授業_todoリスト.pptx
+++ b/モバイル授業_todoリスト.pptx
@@ -11,9 +11,10 @@
     <p:sldId id="261" r:id="rId5"/>
     <p:sldId id="264" r:id="rId6"/>
     <p:sldId id="266" r:id="rId7"/>
-    <p:sldId id="267" r:id="rId8"/>
-    <p:sldId id="265" r:id="rId9"/>
-    <p:sldId id="268" r:id="rId10"/>
+    <p:sldId id="269" r:id="rId8"/>
+    <p:sldId id="267" r:id="rId9"/>
+    <p:sldId id="265" r:id="rId10"/>
+    <p:sldId id="268" r:id="rId11"/>
   </p:sldIdLst>
   <p:sldSz cx="12192000" cy="6858000"/>
   <p:notesSz cx="6858000" cy="9144000"/>
@@ -4237,6 +4238,233 @@
 </p:sld>
 </file>
 
+<file path=ppt/slides/slide10.xml><?xml version="1.0" encoding="utf-8"?>
+<p:sld xmlns:a="http://schemas.openxmlformats.org/drawingml/2006/main" xmlns:r="http://schemas.openxmlformats.org/officeDocument/2006/relationships" xmlns:p="http://schemas.openxmlformats.org/presentationml/2006/main" show="0">
+  <p:cSld>
+    <p:spTree>
+      <p:nvGrpSpPr>
+        <p:cNvPr id="1" name="">
+          <a:extLst>
+            <a:ext uri="{FF2B5EF4-FFF2-40B4-BE49-F238E27FC236}">
+              <a16:creationId xmlns:a16="http://schemas.microsoft.com/office/drawing/2014/main" id="{44F219D8-B9CD-06AE-8F82-464D8E8D5887}"/>
+            </a:ext>
+          </a:extLst>
+        </p:cNvPr>
+        <p:cNvGrpSpPr/>
+        <p:nvPr/>
+      </p:nvGrpSpPr>
+      <p:grpSpPr>
+        <a:xfrm>
+          <a:off x="0" y="0"/>
+          <a:ext cx="0" cy="0"/>
+          <a:chOff x="0" y="0"/>
+          <a:chExt cx="0" cy="0"/>
+        </a:xfrm>
+      </p:grpSpPr>
+      <p:sp>
+        <p:nvSpPr>
+          <p:cNvPr id="2" name="タイトル 1">
+            <a:extLst>
+              <a:ext uri="{FF2B5EF4-FFF2-40B4-BE49-F238E27FC236}">
+                <a16:creationId xmlns:a16="http://schemas.microsoft.com/office/drawing/2014/main" id="{A8859D81-6A05-7CAA-305B-3706D2BC0EFE}"/>
+              </a:ext>
+            </a:extLst>
+          </p:cNvPr>
+          <p:cNvSpPr txBox="1">
+            <a:spLocks/>
+          </p:cNvSpPr>
+          <p:nvPr/>
+        </p:nvSpPr>
+        <p:spPr>
+          <a:xfrm>
+            <a:off x="3183808" y="508819"/>
+            <a:ext cx="5824384" cy="759542"/>
+          </a:xfrm>
+          <a:prstGeom prst="rect">
+            <a:avLst/>
+          </a:prstGeom>
+        </p:spPr>
+        <p:txBody>
+          <a:bodyPr>
+            <a:normAutofit/>
+          </a:bodyPr>
+          <a:lstStyle>
+            <a:lvl1pPr algn="l" defTabSz="914400" rtl="0" eaLnBrk="1" latinLnBrk="0" hangingPunct="1">
+              <a:lnSpc>
+                <a:spcPct val="89000"/>
+              </a:lnSpc>
+              <a:spcBef>
+                <a:spcPct val="0"/>
+              </a:spcBef>
+              <a:buNone/>
+              <a:defRPr kumimoji="1" sz="4400" kern="1200" baseline="0">
+                <a:solidFill>
+                  <a:schemeClr val="tx2"/>
+                </a:solidFill>
+                <a:latin typeface="+mj-lt"/>
+                <a:ea typeface="+mj-ea"/>
+                <a:cs typeface="+mj-cs"/>
+              </a:defRPr>
+            </a:lvl1pPr>
+          </a:lstStyle>
+          <a:p>
+            <a:r>
+              <a:rPr lang="ja-JP" altLang="en-US" b="1" dirty="0"/>
+              <a:t>実装できなかった機能</a:t>
+            </a:r>
+          </a:p>
+        </p:txBody>
+      </p:sp>
+      <p:sp>
+        <p:nvSpPr>
+          <p:cNvPr id="3" name="楕円 2">
+            <a:extLst>
+              <a:ext uri="{FF2B5EF4-FFF2-40B4-BE49-F238E27FC236}">
+                <a16:creationId xmlns:a16="http://schemas.microsoft.com/office/drawing/2014/main" id="{46941E49-BE74-E401-B17A-683F87754CDC}"/>
+              </a:ext>
+            </a:extLst>
+          </p:cNvPr>
+          <p:cNvSpPr/>
+          <p:nvPr/>
+        </p:nvSpPr>
+        <p:spPr>
+          <a:xfrm>
+            <a:off x="4296000" y="1835477"/>
+            <a:ext cx="3600000" cy="3600000"/>
+          </a:xfrm>
+          <a:prstGeom prst="ellipse">
+            <a:avLst/>
+          </a:prstGeom>
+        </p:spPr>
+        <p:style>
+          <a:lnRef idx="1">
+            <a:schemeClr val="accent2"/>
+          </a:lnRef>
+          <a:fillRef idx="2">
+            <a:schemeClr val="accent2"/>
+          </a:fillRef>
+          <a:effectRef idx="1">
+            <a:schemeClr val="accent2"/>
+          </a:effectRef>
+          <a:fontRef idx="minor">
+            <a:schemeClr val="dk1"/>
+          </a:fontRef>
+        </p:style>
+        <p:txBody>
+          <a:bodyPr rtlCol="0" anchor="ctr"/>
+          <a:lstStyle/>
+          <a:p>
+            <a:pPr algn="ctr">
+              <a:lnSpc>
+                <a:spcPct val="150000"/>
+              </a:lnSpc>
+            </a:pPr>
+            <a:r>
+              <a:rPr kumimoji="1" lang="ja-JP" altLang="en-US" sz="2800" b="1" dirty="0"/>
+              <a:t>通知設定</a:t>
+            </a:r>
+          </a:p>
+        </p:txBody>
+      </p:sp>
+    </p:spTree>
+    <p:extLst>
+      <p:ext uri="{BB962C8B-B14F-4D97-AF65-F5344CB8AC3E}">
+        <p14:creationId xmlns:p14="http://schemas.microsoft.com/office/powerpoint/2010/main" val="3535540919"/>
+      </p:ext>
+    </p:extLst>
+  </p:cSld>
+  <p:clrMapOvr>
+    <a:masterClrMapping/>
+  </p:clrMapOvr>
+  <p:timing>
+    <p:tnLst>
+      <p:par>
+        <p:cTn id="1" dur="indefinite" restart="never" nodeType="tmRoot">
+          <p:childTnLst>
+            <p:seq concurrent="1" nextAc="seek">
+              <p:cTn id="2" dur="indefinite" nodeType="mainSeq">
+                <p:childTnLst>
+                  <p:par>
+                    <p:cTn id="3" fill="hold">
+                      <p:stCondLst>
+                        <p:cond delay="indefinite"/>
+                      </p:stCondLst>
+                      <p:childTnLst>
+                        <p:par>
+                          <p:cTn id="4" fill="hold">
+                            <p:stCondLst>
+                              <p:cond delay="0"/>
+                            </p:stCondLst>
+                            <p:childTnLst>
+                              <p:par>
+                                <p:cTn id="5" presetID="10" presetClass="entr" presetSubtype="0" fill="hold" grpId="0" nodeType="clickEffect">
+                                  <p:stCondLst>
+                                    <p:cond delay="0"/>
+                                  </p:stCondLst>
+                                  <p:childTnLst>
+                                    <p:set>
+                                      <p:cBhvr>
+                                        <p:cTn id="6" dur="1" fill="hold">
+                                          <p:stCondLst>
+                                            <p:cond delay="0"/>
+                                          </p:stCondLst>
+                                        </p:cTn>
+                                        <p:tgtEl>
+                                          <p:spTgt spid="3"/>
+                                        </p:tgtEl>
+                                        <p:attrNameLst>
+                                          <p:attrName>style.visibility</p:attrName>
+                                        </p:attrNameLst>
+                                      </p:cBhvr>
+                                      <p:to>
+                                        <p:strVal val="visible"/>
+                                      </p:to>
+                                    </p:set>
+                                    <p:animEffect transition="in" filter="fade">
+                                      <p:cBhvr>
+                                        <p:cTn id="7" dur="500"/>
+                                        <p:tgtEl>
+                                          <p:spTgt spid="3"/>
+                                        </p:tgtEl>
+                                      </p:cBhvr>
+                                    </p:animEffect>
+                                  </p:childTnLst>
+                                </p:cTn>
+                              </p:par>
+                            </p:childTnLst>
+                          </p:cTn>
+                        </p:par>
+                      </p:childTnLst>
+                    </p:cTn>
+                  </p:par>
+                </p:childTnLst>
+              </p:cTn>
+              <p:prevCondLst>
+                <p:cond evt="onPrev" delay="0">
+                  <p:tgtEl>
+                    <p:sldTgt/>
+                  </p:tgtEl>
+                </p:cond>
+              </p:prevCondLst>
+              <p:nextCondLst>
+                <p:cond evt="onNext" delay="0">
+                  <p:tgtEl>
+                    <p:sldTgt/>
+                  </p:tgtEl>
+                </p:cond>
+              </p:nextCondLst>
+            </p:seq>
+          </p:childTnLst>
+        </p:cTn>
+      </p:par>
+    </p:tnLst>
+    <p:bldLst>
+      <p:bldP spid="3" grpId="0" animBg="1"/>
+    </p:bldLst>
+  </p:timing>
+</p:sld>
+</file>
+
 <file path=ppt/slides/slide2.xml><?xml version="1.0" encoding="utf-8"?>
 <p:sld xmlns:a="http://schemas.openxmlformats.org/drawingml/2006/main" xmlns:r="http://schemas.openxmlformats.org/officeDocument/2006/relationships" xmlns:p="http://schemas.openxmlformats.org/presentationml/2006/main">
   <p:cSld>
@@ -5857,6 +6085,171 @@
         <p:cNvPr id="1" name="">
           <a:extLst>
             <a:ext uri="{FF2B5EF4-FFF2-40B4-BE49-F238E27FC236}">
+              <a16:creationId xmlns:a16="http://schemas.microsoft.com/office/drawing/2014/main" id="{2CDE81AB-A396-FCF9-D83B-E8453EE5E2C2}"/>
+            </a:ext>
+          </a:extLst>
+        </p:cNvPr>
+        <p:cNvGrpSpPr/>
+        <p:nvPr/>
+      </p:nvGrpSpPr>
+      <p:grpSpPr>
+        <a:xfrm>
+          <a:off x="0" y="0"/>
+          <a:ext cx="0" cy="0"/>
+          <a:chOff x="0" y="0"/>
+          <a:chExt cx="0" cy="0"/>
+        </a:xfrm>
+      </p:grpSpPr>
+      <p:sp>
+        <p:nvSpPr>
+          <p:cNvPr id="2" name="タイトル 1">
+            <a:extLst>
+              <a:ext uri="{FF2B5EF4-FFF2-40B4-BE49-F238E27FC236}">
+                <a16:creationId xmlns:a16="http://schemas.microsoft.com/office/drawing/2014/main" id="{54AFE1F8-7C42-AE49-D46C-4098F04C2558}"/>
+              </a:ext>
+            </a:extLst>
+          </p:cNvPr>
+          <p:cNvSpPr txBox="1">
+            <a:spLocks/>
+          </p:cNvSpPr>
+          <p:nvPr/>
+        </p:nvSpPr>
+        <p:spPr>
+          <a:xfrm>
+            <a:off x="4092215" y="515672"/>
+            <a:ext cx="4117719" cy="759542"/>
+          </a:xfrm>
+          <a:prstGeom prst="rect">
+            <a:avLst/>
+          </a:prstGeom>
+        </p:spPr>
+        <p:txBody>
+          <a:bodyPr>
+            <a:normAutofit lnSpcReduction="10000"/>
+          </a:bodyPr>
+          <a:lstStyle>
+            <a:lvl1pPr algn="l" defTabSz="914400" rtl="0" eaLnBrk="1" latinLnBrk="0" hangingPunct="1">
+              <a:lnSpc>
+                <a:spcPct val="89000"/>
+              </a:lnSpc>
+              <a:spcBef>
+                <a:spcPct val="0"/>
+              </a:spcBef>
+              <a:buNone/>
+              <a:defRPr kumimoji="1" sz="4400" kern="1200" baseline="0">
+                <a:solidFill>
+                  <a:schemeClr val="tx2"/>
+                </a:solidFill>
+                <a:latin typeface="+mj-lt"/>
+                <a:ea typeface="+mj-ea"/>
+                <a:cs typeface="+mj-cs"/>
+              </a:defRPr>
+            </a:lvl1pPr>
+          </a:lstStyle>
+          <a:p>
+            <a:r>
+              <a:rPr lang="en-US" altLang="ja-JP" sz="4800" b="1" dirty="0"/>
+              <a:t>AI</a:t>
+            </a:r>
+            <a:r>
+              <a:rPr lang="ja-JP" altLang="en-US" b="1" dirty="0"/>
+              <a:t>を使った部分</a:t>
+            </a:r>
+          </a:p>
+        </p:txBody>
+      </p:sp>
+      <p:sp>
+        <p:nvSpPr>
+          <p:cNvPr id="5" name="テキスト ボックス 4">
+            <a:extLst>
+              <a:ext uri="{FF2B5EF4-FFF2-40B4-BE49-F238E27FC236}">
+                <a16:creationId xmlns:a16="http://schemas.microsoft.com/office/drawing/2014/main" id="{392C2245-4006-CFD5-ED63-7199E1DCA50A}"/>
+              </a:ext>
+            </a:extLst>
+          </p:cNvPr>
+          <p:cNvSpPr txBox="1"/>
+          <p:nvPr/>
+        </p:nvSpPr>
+        <p:spPr>
+          <a:xfrm>
+            <a:off x="932427" y="2204218"/>
+            <a:ext cx="5822334" cy="646331"/>
+          </a:xfrm>
+          <a:prstGeom prst="rect">
+            <a:avLst/>
+          </a:prstGeom>
+          <a:noFill/>
+        </p:spPr>
+        <p:txBody>
+          <a:bodyPr wrap="square" rtlCol="0">
+            <a:spAutoFit/>
+          </a:bodyPr>
+          <a:lstStyle/>
+          <a:p>
+            <a:r>
+              <a:rPr kumimoji="1" lang="ja-JP" altLang="en-US" sz="3600" b="1" dirty="0"/>
+              <a:t>・アカウント機能周り全般</a:t>
+            </a:r>
+          </a:p>
+        </p:txBody>
+      </p:sp>
+      <p:sp>
+        <p:nvSpPr>
+          <p:cNvPr id="6" name="テキスト ボックス 5">
+            <a:extLst>
+              <a:ext uri="{FF2B5EF4-FFF2-40B4-BE49-F238E27FC236}">
+                <a16:creationId xmlns:a16="http://schemas.microsoft.com/office/drawing/2014/main" id="{B531D624-6275-B2F3-4A24-1F13EC1F295D}"/>
+              </a:ext>
+            </a:extLst>
+          </p:cNvPr>
+          <p:cNvSpPr txBox="1"/>
+          <p:nvPr/>
+        </p:nvSpPr>
+        <p:spPr>
+          <a:xfrm>
+            <a:off x="923413" y="4317764"/>
+            <a:ext cx="5831348" cy="646331"/>
+          </a:xfrm>
+          <a:prstGeom prst="rect">
+            <a:avLst/>
+          </a:prstGeom>
+          <a:noFill/>
+        </p:spPr>
+        <p:txBody>
+          <a:bodyPr wrap="square" rtlCol="0">
+            <a:spAutoFit/>
+          </a:bodyPr>
+          <a:lstStyle/>
+          <a:p>
+            <a:r>
+              <a:rPr kumimoji="1" lang="ja-JP" altLang="en-US" sz="3600" b="1" dirty="0"/>
+              <a:t>・細かい質問やアドバイス</a:t>
+            </a:r>
+            <a:endParaRPr kumimoji="1" lang="en-US" altLang="ja-JP" sz="3600" b="1" dirty="0"/>
+          </a:p>
+        </p:txBody>
+      </p:sp>
+    </p:spTree>
+    <p:extLst>
+      <p:ext uri="{BB962C8B-B14F-4D97-AF65-F5344CB8AC3E}">
+        <p14:creationId xmlns:p14="http://schemas.microsoft.com/office/powerpoint/2010/main" val="2951101083"/>
+      </p:ext>
+    </p:extLst>
+  </p:cSld>
+  <p:clrMapOvr>
+    <a:masterClrMapping/>
+  </p:clrMapOvr>
+</p:sld>
+</file>
+
+<file path=ppt/slides/slide8.xml><?xml version="1.0" encoding="utf-8"?>
+<p:sld xmlns:a="http://schemas.openxmlformats.org/drawingml/2006/main" xmlns:r="http://schemas.openxmlformats.org/officeDocument/2006/relationships" xmlns:p="http://schemas.openxmlformats.org/presentationml/2006/main">
+  <p:cSld>
+    <p:spTree>
+      <p:nvGrpSpPr>
+        <p:cNvPr id="1" name="">
+          <a:extLst>
+            <a:ext uri="{FF2B5EF4-FFF2-40B4-BE49-F238E27FC236}">
               <a16:creationId xmlns:a16="http://schemas.microsoft.com/office/drawing/2014/main" id="{47F491B6-7374-3301-CACE-0ED8431A4B2C}"/>
             </a:ext>
           </a:extLst>
@@ -6017,7 +6410,7 @@
 </p:sld>
 </file>
 
-<file path=ppt/slides/slide8.xml><?xml version="1.0" encoding="utf-8"?>
+<file path=ppt/slides/slide9.xml><?xml version="1.0" encoding="utf-8"?>
 <p:sld xmlns:a="http://schemas.openxmlformats.org/drawingml/2006/main" xmlns:r="http://schemas.openxmlformats.org/officeDocument/2006/relationships" xmlns:p="http://schemas.openxmlformats.org/presentationml/2006/main">
   <p:cSld>
     <p:spTree>
@@ -6079,233 +6472,6 @@
   <p:clrMapOvr>
     <a:masterClrMapping/>
   </p:clrMapOvr>
-</p:sld>
-</file>
-
-<file path=ppt/slides/slide9.xml><?xml version="1.0" encoding="utf-8"?>
-<p:sld xmlns:a="http://schemas.openxmlformats.org/drawingml/2006/main" xmlns:r="http://schemas.openxmlformats.org/officeDocument/2006/relationships" xmlns:p="http://schemas.openxmlformats.org/presentationml/2006/main" show="0">
-  <p:cSld>
-    <p:spTree>
-      <p:nvGrpSpPr>
-        <p:cNvPr id="1" name="">
-          <a:extLst>
-            <a:ext uri="{FF2B5EF4-FFF2-40B4-BE49-F238E27FC236}">
-              <a16:creationId xmlns:a16="http://schemas.microsoft.com/office/drawing/2014/main" id="{44F219D8-B9CD-06AE-8F82-464D8E8D5887}"/>
-            </a:ext>
-          </a:extLst>
-        </p:cNvPr>
-        <p:cNvGrpSpPr/>
-        <p:nvPr/>
-      </p:nvGrpSpPr>
-      <p:grpSpPr>
-        <a:xfrm>
-          <a:off x="0" y="0"/>
-          <a:ext cx="0" cy="0"/>
-          <a:chOff x="0" y="0"/>
-          <a:chExt cx="0" cy="0"/>
-        </a:xfrm>
-      </p:grpSpPr>
-      <p:sp>
-        <p:nvSpPr>
-          <p:cNvPr id="2" name="タイトル 1">
-            <a:extLst>
-              <a:ext uri="{FF2B5EF4-FFF2-40B4-BE49-F238E27FC236}">
-                <a16:creationId xmlns:a16="http://schemas.microsoft.com/office/drawing/2014/main" id="{A8859D81-6A05-7CAA-305B-3706D2BC0EFE}"/>
-              </a:ext>
-            </a:extLst>
-          </p:cNvPr>
-          <p:cNvSpPr txBox="1">
-            <a:spLocks/>
-          </p:cNvSpPr>
-          <p:nvPr/>
-        </p:nvSpPr>
-        <p:spPr>
-          <a:xfrm>
-            <a:off x="3183808" y="508819"/>
-            <a:ext cx="5824384" cy="759542"/>
-          </a:xfrm>
-          <a:prstGeom prst="rect">
-            <a:avLst/>
-          </a:prstGeom>
-        </p:spPr>
-        <p:txBody>
-          <a:bodyPr>
-            <a:normAutofit/>
-          </a:bodyPr>
-          <a:lstStyle>
-            <a:lvl1pPr algn="l" defTabSz="914400" rtl="0" eaLnBrk="1" latinLnBrk="0" hangingPunct="1">
-              <a:lnSpc>
-                <a:spcPct val="89000"/>
-              </a:lnSpc>
-              <a:spcBef>
-                <a:spcPct val="0"/>
-              </a:spcBef>
-              <a:buNone/>
-              <a:defRPr kumimoji="1" sz="4400" kern="1200" baseline="0">
-                <a:solidFill>
-                  <a:schemeClr val="tx2"/>
-                </a:solidFill>
-                <a:latin typeface="+mj-lt"/>
-                <a:ea typeface="+mj-ea"/>
-                <a:cs typeface="+mj-cs"/>
-              </a:defRPr>
-            </a:lvl1pPr>
-          </a:lstStyle>
-          <a:p>
-            <a:r>
-              <a:rPr lang="ja-JP" altLang="en-US" b="1" dirty="0"/>
-              <a:t>実装できなかった機能</a:t>
-            </a:r>
-          </a:p>
-        </p:txBody>
-      </p:sp>
-      <p:sp>
-        <p:nvSpPr>
-          <p:cNvPr id="3" name="楕円 2">
-            <a:extLst>
-              <a:ext uri="{FF2B5EF4-FFF2-40B4-BE49-F238E27FC236}">
-                <a16:creationId xmlns:a16="http://schemas.microsoft.com/office/drawing/2014/main" id="{46941E49-BE74-E401-B17A-683F87754CDC}"/>
-              </a:ext>
-            </a:extLst>
-          </p:cNvPr>
-          <p:cNvSpPr/>
-          <p:nvPr/>
-        </p:nvSpPr>
-        <p:spPr>
-          <a:xfrm>
-            <a:off x="4296000" y="1835477"/>
-            <a:ext cx="3600000" cy="3600000"/>
-          </a:xfrm>
-          <a:prstGeom prst="ellipse">
-            <a:avLst/>
-          </a:prstGeom>
-        </p:spPr>
-        <p:style>
-          <a:lnRef idx="1">
-            <a:schemeClr val="accent2"/>
-          </a:lnRef>
-          <a:fillRef idx="2">
-            <a:schemeClr val="accent2"/>
-          </a:fillRef>
-          <a:effectRef idx="1">
-            <a:schemeClr val="accent2"/>
-          </a:effectRef>
-          <a:fontRef idx="minor">
-            <a:schemeClr val="dk1"/>
-          </a:fontRef>
-        </p:style>
-        <p:txBody>
-          <a:bodyPr rtlCol="0" anchor="ctr"/>
-          <a:lstStyle/>
-          <a:p>
-            <a:pPr algn="ctr">
-              <a:lnSpc>
-                <a:spcPct val="150000"/>
-              </a:lnSpc>
-            </a:pPr>
-            <a:r>
-              <a:rPr kumimoji="1" lang="ja-JP" altLang="en-US" sz="2800" b="1" dirty="0"/>
-              <a:t>通知設定</a:t>
-            </a:r>
-          </a:p>
-        </p:txBody>
-      </p:sp>
-    </p:spTree>
-    <p:extLst>
-      <p:ext uri="{BB962C8B-B14F-4D97-AF65-F5344CB8AC3E}">
-        <p14:creationId xmlns:p14="http://schemas.microsoft.com/office/powerpoint/2010/main" val="3535540919"/>
-      </p:ext>
-    </p:extLst>
-  </p:cSld>
-  <p:clrMapOvr>
-    <a:masterClrMapping/>
-  </p:clrMapOvr>
-  <p:timing>
-    <p:tnLst>
-      <p:par>
-        <p:cTn id="1" dur="indefinite" restart="never" nodeType="tmRoot">
-          <p:childTnLst>
-            <p:seq concurrent="1" nextAc="seek">
-              <p:cTn id="2" dur="indefinite" nodeType="mainSeq">
-                <p:childTnLst>
-                  <p:par>
-                    <p:cTn id="3" fill="hold">
-                      <p:stCondLst>
-                        <p:cond delay="indefinite"/>
-                      </p:stCondLst>
-                      <p:childTnLst>
-                        <p:par>
-                          <p:cTn id="4" fill="hold">
-                            <p:stCondLst>
-                              <p:cond delay="0"/>
-                            </p:stCondLst>
-                            <p:childTnLst>
-                              <p:par>
-                                <p:cTn id="5" presetID="10" presetClass="entr" presetSubtype="0" fill="hold" grpId="0" nodeType="clickEffect">
-                                  <p:stCondLst>
-                                    <p:cond delay="0"/>
-                                  </p:stCondLst>
-                                  <p:childTnLst>
-                                    <p:set>
-                                      <p:cBhvr>
-                                        <p:cTn id="6" dur="1" fill="hold">
-                                          <p:stCondLst>
-                                            <p:cond delay="0"/>
-                                          </p:stCondLst>
-                                        </p:cTn>
-                                        <p:tgtEl>
-                                          <p:spTgt spid="3"/>
-                                        </p:tgtEl>
-                                        <p:attrNameLst>
-                                          <p:attrName>style.visibility</p:attrName>
-                                        </p:attrNameLst>
-                                      </p:cBhvr>
-                                      <p:to>
-                                        <p:strVal val="visible"/>
-                                      </p:to>
-                                    </p:set>
-                                    <p:animEffect transition="in" filter="fade">
-                                      <p:cBhvr>
-                                        <p:cTn id="7" dur="500"/>
-                                        <p:tgtEl>
-                                          <p:spTgt spid="3"/>
-                                        </p:tgtEl>
-                                      </p:cBhvr>
-                                    </p:animEffect>
-                                  </p:childTnLst>
-                                </p:cTn>
-                              </p:par>
-                            </p:childTnLst>
-                          </p:cTn>
-                        </p:par>
-                      </p:childTnLst>
-                    </p:cTn>
-                  </p:par>
-                </p:childTnLst>
-              </p:cTn>
-              <p:prevCondLst>
-                <p:cond evt="onPrev" delay="0">
-                  <p:tgtEl>
-                    <p:sldTgt/>
-                  </p:tgtEl>
-                </p:cond>
-              </p:prevCondLst>
-              <p:nextCondLst>
-                <p:cond evt="onNext" delay="0">
-                  <p:tgtEl>
-                    <p:sldTgt/>
-                  </p:tgtEl>
-                </p:cond>
-              </p:nextCondLst>
-            </p:seq>
-          </p:childTnLst>
-        </p:cTn>
-      </p:par>
-    </p:tnLst>
-    <p:bldLst>
-      <p:bldP spid="3" grpId="0" animBg="1"/>
-    </p:bldLst>
-  </p:timing>
 </p:sld>
 </file>
 

--- a/モバイル授業_todoリスト.pptx
+++ b/モバイル授業_todoリスト.pptx
@@ -14,7 +14,6 @@
     <p:sldId id="269" r:id="rId8"/>
     <p:sldId id="267" r:id="rId9"/>
     <p:sldId id="265" r:id="rId10"/>
-    <p:sldId id="268" r:id="rId11"/>
   </p:sldIdLst>
   <p:sldSz cx="12192000" cy="6858000"/>
   <p:notesSz cx="6858000" cy="9144000"/>
@@ -290,7 +289,7 @@
           <a:p>
             <a:fld id="{898ACB73-228B-4573-B2A8-EEAE64393BA5}" type="datetimeFigureOut">
               <a:rPr kumimoji="1" lang="ja-JP" altLang="en-US" smtClean="0"/>
-              <a:t>2026/7/8</a:t>
+              <a:t>2026/7/14</a:t>
             </a:fld>
             <a:endParaRPr kumimoji="1" lang="ja-JP" altLang="en-US"/>
           </a:p>
@@ -666,7 +665,7 @@
           <a:p>
             <a:fld id="{898ACB73-228B-4573-B2A8-EEAE64393BA5}" type="datetimeFigureOut">
               <a:rPr kumimoji="1" lang="ja-JP" altLang="en-US" smtClean="0"/>
-              <a:t>2026/7/8</a:t>
+              <a:t>2026/7/14</a:t>
             </a:fld>
             <a:endParaRPr kumimoji="1" lang="ja-JP" altLang="en-US"/>
           </a:p>
@@ -878,7 +877,7 @@
           <a:p>
             <a:fld id="{898ACB73-228B-4573-B2A8-EEAE64393BA5}" type="datetimeFigureOut">
               <a:rPr kumimoji="1" lang="ja-JP" altLang="en-US" smtClean="0"/>
-              <a:t>2026/7/8</a:t>
+              <a:t>2026/7/14</a:t>
             </a:fld>
             <a:endParaRPr kumimoji="1" lang="ja-JP" altLang="en-US"/>
           </a:p>
@@ -1080,7 +1079,7 @@
           <a:p>
             <a:fld id="{898ACB73-228B-4573-B2A8-EEAE64393BA5}" type="datetimeFigureOut">
               <a:rPr kumimoji="1" lang="ja-JP" altLang="en-US" smtClean="0"/>
-              <a:t>2026/7/8</a:t>
+              <a:t>2026/7/14</a:t>
             </a:fld>
             <a:endParaRPr kumimoji="1" lang="ja-JP" altLang="en-US"/>
           </a:p>
@@ -1357,7 +1356,7 @@
           <a:p>
             <a:fld id="{898ACB73-228B-4573-B2A8-EEAE64393BA5}" type="datetimeFigureOut">
               <a:rPr kumimoji="1" lang="ja-JP" altLang="en-US" smtClean="0"/>
-              <a:t>2026/7/8</a:t>
+              <a:t>2026/7/14</a:t>
             </a:fld>
             <a:endParaRPr kumimoji="1" lang="ja-JP" altLang="en-US"/>
           </a:p>
@@ -1815,7 +1814,7 @@
           <a:p>
             <a:fld id="{898ACB73-228B-4573-B2A8-EEAE64393BA5}" type="datetimeFigureOut">
               <a:rPr kumimoji="1" lang="ja-JP" altLang="en-US" smtClean="0"/>
-              <a:t>2026/7/8</a:t>
+              <a:t>2026/7/14</a:t>
             </a:fld>
             <a:endParaRPr kumimoji="1" lang="ja-JP" altLang="en-US"/>
           </a:p>
@@ -2356,7 +2355,7 @@
           <a:p>
             <a:fld id="{898ACB73-228B-4573-B2A8-EEAE64393BA5}" type="datetimeFigureOut">
               <a:rPr kumimoji="1" lang="ja-JP" altLang="en-US" smtClean="0"/>
-              <a:t>2026/7/8</a:t>
+              <a:t>2026/7/14</a:t>
             </a:fld>
             <a:endParaRPr kumimoji="1" lang="ja-JP" altLang="en-US"/>
           </a:p>
@@ -2474,7 +2473,7 @@
           <a:p>
             <a:fld id="{898ACB73-228B-4573-B2A8-EEAE64393BA5}" type="datetimeFigureOut">
               <a:rPr kumimoji="1" lang="ja-JP" altLang="en-US" smtClean="0"/>
-              <a:t>2026/7/8</a:t>
+              <a:t>2026/7/14</a:t>
             </a:fld>
             <a:endParaRPr kumimoji="1" lang="ja-JP" altLang="en-US"/>
           </a:p>
@@ -2569,7 +2568,7 @@
           <a:p>
             <a:fld id="{898ACB73-228B-4573-B2A8-EEAE64393BA5}" type="datetimeFigureOut">
               <a:rPr kumimoji="1" lang="ja-JP" altLang="en-US" smtClean="0"/>
-              <a:t>2026/7/8</a:t>
+              <a:t>2026/7/14</a:t>
             </a:fld>
             <a:endParaRPr kumimoji="1" lang="ja-JP" altLang="en-US"/>
           </a:p>
@@ -2947,7 +2946,7 @@
           <a:p>
             <a:fld id="{898ACB73-228B-4573-B2A8-EEAE64393BA5}" type="datetimeFigureOut">
               <a:rPr kumimoji="1" lang="ja-JP" altLang="en-US" smtClean="0"/>
-              <a:t>2026/7/8</a:t>
+              <a:t>2026/7/14</a:t>
             </a:fld>
             <a:endParaRPr kumimoji="1" lang="ja-JP" altLang="en-US"/>
           </a:p>
@@ -3335,7 +3334,7 @@
           <a:p>
             <a:fld id="{898ACB73-228B-4573-B2A8-EEAE64393BA5}" type="datetimeFigureOut">
               <a:rPr kumimoji="1" lang="ja-JP" altLang="en-US" smtClean="0"/>
-              <a:t>2026/7/8</a:t>
+              <a:t>2026/7/14</a:t>
             </a:fld>
             <a:endParaRPr kumimoji="1" lang="ja-JP" altLang="en-US"/>
           </a:p>
@@ -3645,7 +3644,7 @@
           <a:p>
             <a:fld id="{898ACB73-228B-4573-B2A8-EEAE64393BA5}" type="datetimeFigureOut">
               <a:rPr kumimoji="1" lang="ja-JP" altLang="en-US" smtClean="0"/>
-              <a:t>2026/7/8</a:t>
+              <a:t>2026/7/14</a:t>
             </a:fld>
             <a:endParaRPr kumimoji="1" lang="ja-JP" altLang="en-US"/>
           </a:p>
@@ -4238,233 +4237,6 @@
 </p:sld>
 </file>
 
-<file path=ppt/slides/slide10.xml><?xml version="1.0" encoding="utf-8"?>
-<p:sld xmlns:a="http://schemas.openxmlformats.org/drawingml/2006/main" xmlns:r="http://schemas.openxmlformats.org/officeDocument/2006/relationships" xmlns:p="http://schemas.openxmlformats.org/presentationml/2006/main" show="0">
-  <p:cSld>
-    <p:spTree>
-      <p:nvGrpSpPr>
-        <p:cNvPr id="1" name="">
-          <a:extLst>
-            <a:ext uri="{FF2B5EF4-FFF2-40B4-BE49-F238E27FC236}">
-              <a16:creationId xmlns:a16="http://schemas.microsoft.com/office/drawing/2014/main" id="{44F219D8-B9CD-06AE-8F82-464D8E8D5887}"/>
-            </a:ext>
-          </a:extLst>
-        </p:cNvPr>
-        <p:cNvGrpSpPr/>
-        <p:nvPr/>
-      </p:nvGrpSpPr>
-      <p:grpSpPr>
-        <a:xfrm>
-          <a:off x="0" y="0"/>
-          <a:ext cx="0" cy="0"/>
-          <a:chOff x="0" y="0"/>
-          <a:chExt cx="0" cy="0"/>
-        </a:xfrm>
-      </p:grpSpPr>
-      <p:sp>
-        <p:nvSpPr>
-          <p:cNvPr id="2" name="タイトル 1">
-            <a:extLst>
-              <a:ext uri="{FF2B5EF4-FFF2-40B4-BE49-F238E27FC236}">
-                <a16:creationId xmlns:a16="http://schemas.microsoft.com/office/drawing/2014/main" id="{A8859D81-6A05-7CAA-305B-3706D2BC0EFE}"/>
-              </a:ext>
-            </a:extLst>
-          </p:cNvPr>
-          <p:cNvSpPr txBox="1">
-            <a:spLocks/>
-          </p:cNvSpPr>
-          <p:nvPr/>
-        </p:nvSpPr>
-        <p:spPr>
-          <a:xfrm>
-            <a:off x="3183808" y="508819"/>
-            <a:ext cx="5824384" cy="759542"/>
-          </a:xfrm>
-          <a:prstGeom prst="rect">
-            <a:avLst/>
-          </a:prstGeom>
-        </p:spPr>
-        <p:txBody>
-          <a:bodyPr>
-            <a:normAutofit/>
-          </a:bodyPr>
-          <a:lstStyle>
-            <a:lvl1pPr algn="l" defTabSz="914400" rtl="0" eaLnBrk="1" latinLnBrk="0" hangingPunct="1">
-              <a:lnSpc>
-                <a:spcPct val="89000"/>
-              </a:lnSpc>
-              <a:spcBef>
-                <a:spcPct val="0"/>
-              </a:spcBef>
-              <a:buNone/>
-              <a:defRPr kumimoji="1" sz="4400" kern="1200" baseline="0">
-                <a:solidFill>
-                  <a:schemeClr val="tx2"/>
-                </a:solidFill>
-                <a:latin typeface="+mj-lt"/>
-                <a:ea typeface="+mj-ea"/>
-                <a:cs typeface="+mj-cs"/>
-              </a:defRPr>
-            </a:lvl1pPr>
-          </a:lstStyle>
-          <a:p>
-            <a:r>
-              <a:rPr lang="ja-JP" altLang="en-US" b="1" dirty="0"/>
-              <a:t>実装できなかった機能</a:t>
-            </a:r>
-          </a:p>
-        </p:txBody>
-      </p:sp>
-      <p:sp>
-        <p:nvSpPr>
-          <p:cNvPr id="3" name="楕円 2">
-            <a:extLst>
-              <a:ext uri="{FF2B5EF4-FFF2-40B4-BE49-F238E27FC236}">
-                <a16:creationId xmlns:a16="http://schemas.microsoft.com/office/drawing/2014/main" id="{46941E49-BE74-E401-B17A-683F87754CDC}"/>
-              </a:ext>
-            </a:extLst>
-          </p:cNvPr>
-          <p:cNvSpPr/>
-          <p:nvPr/>
-        </p:nvSpPr>
-        <p:spPr>
-          <a:xfrm>
-            <a:off x="4296000" y="1835477"/>
-            <a:ext cx="3600000" cy="3600000"/>
-          </a:xfrm>
-          <a:prstGeom prst="ellipse">
-            <a:avLst/>
-          </a:prstGeom>
-        </p:spPr>
-        <p:style>
-          <a:lnRef idx="1">
-            <a:schemeClr val="accent2"/>
-          </a:lnRef>
-          <a:fillRef idx="2">
-            <a:schemeClr val="accent2"/>
-          </a:fillRef>
-          <a:effectRef idx="1">
-            <a:schemeClr val="accent2"/>
-          </a:effectRef>
-          <a:fontRef idx="minor">
-            <a:schemeClr val="dk1"/>
-          </a:fontRef>
-        </p:style>
-        <p:txBody>
-          <a:bodyPr rtlCol="0" anchor="ctr"/>
-          <a:lstStyle/>
-          <a:p>
-            <a:pPr algn="ctr">
-              <a:lnSpc>
-                <a:spcPct val="150000"/>
-              </a:lnSpc>
-            </a:pPr>
-            <a:r>
-              <a:rPr kumimoji="1" lang="ja-JP" altLang="en-US" sz="2800" b="1" dirty="0"/>
-              <a:t>通知設定</a:t>
-            </a:r>
-          </a:p>
-        </p:txBody>
-      </p:sp>
-    </p:spTree>
-    <p:extLst>
-      <p:ext uri="{BB962C8B-B14F-4D97-AF65-F5344CB8AC3E}">
-        <p14:creationId xmlns:p14="http://schemas.microsoft.com/office/powerpoint/2010/main" val="3535540919"/>
-      </p:ext>
-    </p:extLst>
-  </p:cSld>
-  <p:clrMapOvr>
-    <a:masterClrMapping/>
-  </p:clrMapOvr>
-  <p:timing>
-    <p:tnLst>
-      <p:par>
-        <p:cTn id="1" dur="indefinite" restart="never" nodeType="tmRoot">
-          <p:childTnLst>
-            <p:seq concurrent="1" nextAc="seek">
-              <p:cTn id="2" dur="indefinite" nodeType="mainSeq">
-                <p:childTnLst>
-                  <p:par>
-                    <p:cTn id="3" fill="hold">
-                      <p:stCondLst>
-                        <p:cond delay="indefinite"/>
-                      </p:stCondLst>
-                      <p:childTnLst>
-                        <p:par>
-                          <p:cTn id="4" fill="hold">
-                            <p:stCondLst>
-                              <p:cond delay="0"/>
-                            </p:stCondLst>
-                            <p:childTnLst>
-                              <p:par>
-                                <p:cTn id="5" presetID="10" presetClass="entr" presetSubtype="0" fill="hold" grpId="0" nodeType="clickEffect">
-                                  <p:stCondLst>
-                                    <p:cond delay="0"/>
-                                  </p:stCondLst>
-                                  <p:childTnLst>
-                                    <p:set>
-                                      <p:cBhvr>
-                                        <p:cTn id="6" dur="1" fill="hold">
-                                          <p:stCondLst>
-                                            <p:cond delay="0"/>
-                                          </p:stCondLst>
-                                        </p:cTn>
-                                        <p:tgtEl>
-                                          <p:spTgt spid="3"/>
-                                        </p:tgtEl>
-                                        <p:attrNameLst>
-                                          <p:attrName>style.visibility</p:attrName>
-                                        </p:attrNameLst>
-                                      </p:cBhvr>
-                                      <p:to>
-                                        <p:strVal val="visible"/>
-                                      </p:to>
-                                    </p:set>
-                                    <p:animEffect transition="in" filter="fade">
-                                      <p:cBhvr>
-                                        <p:cTn id="7" dur="500"/>
-                                        <p:tgtEl>
-                                          <p:spTgt spid="3"/>
-                                        </p:tgtEl>
-                                      </p:cBhvr>
-                                    </p:animEffect>
-                                  </p:childTnLst>
-                                </p:cTn>
-                              </p:par>
-                            </p:childTnLst>
-                          </p:cTn>
-                        </p:par>
-                      </p:childTnLst>
-                    </p:cTn>
-                  </p:par>
-                </p:childTnLst>
-              </p:cTn>
-              <p:prevCondLst>
-                <p:cond evt="onPrev" delay="0">
-                  <p:tgtEl>
-                    <p:sldTgt/>
-                  </p:tgtEl>
-                </p:cond>
-              </p:prevCondLst>
-              <p:nextCondLst>
-                <p:cond evt="onNext" delay="0">
-                  <p:tgtEl>
-                    <p:sldTgt/>
-                  </p:tgtEl>
-                </p:cond>
-              </p:nextCondLst>
-            </p:seq>
-          </p:childTnLst>
-        </p:cTn>
-      </p:par>
-    </p:tnLst>
-    <p:bldLst>
-      <p:bldP spid="3" grpId="0" animBg="1"/>
-    </p:bldLst>
-  </p:timing>
-</p:sld>
-</file>
-
 <file path=ppt/slides/slide2.xml><?xml version="1.0" encoding="utf-8"?>
 <p:sld xmlns:a="http://schemas.openxmlformats.org/drawingml/2006/main" xmlns:r="http://schemas.openxmlformats.org/officeDocument/2006/relationships" xmlns:p="http://schemas.openxmlformats.org/presentationml/2006/main">
   <p:cSld>
@@ -5393,10 +5165,10 @@
               </a:lnSpc>
             </a:pPr>
             <a:r>
-              <a:rPr kumimoji="1" lang="ja-JP" altLang="en-US" sz="2000" b="1" dirty="0"/>
-              <a:t>アカウント機能</a:t>
-            </a:r>
-            <a:endParaRPr kumimoji="1" lang="en-US" altLang="ja-JP" sz="2000" b="1" dirty="0"/>
+              <a:rPr kumimoji="1" lang="ja-JP" altLang="en-US" sz="2800" b="1" dirty="0"/>
+              <a:t>ソート機能</a:t>
+            </a:r>
+            <a:endParaRPr kumimoji="1" lang="en-US" altLang="ja-JP" sz="2800" b="1" dirty="0"/>
           </a:p>
         </p:txBody>
       </p:sp>
@@ -5509,10 +5281,10 @@
               </a:lnSpc>
             </a:pPr>
             <a:r>
-              <a:rPr kumimoji="1" lang="ja-JP" altLang="en-US" sz="2800" b="1" dirty="0"/>
-              <a:t>ソート機能</a:t>
-            </a:r>
-            <a:endParaRPr kumimoji="1" lang="en-US" altLang="ja-JP" sz="2800" b="1" dirty="0"/>
+              <a:rPr kumimoji="1" lang="ja-JP" altLang="en-US" sz="2000" b="1" dirty="0"/>
+              <a:t>アカウント機能</a:t>
+            </a:r>
+            <a:endParaRPr kumimoji="1" lang="en-US" altLang="ja-JP" sz="2000" b="1" dirty="0"/>
           </a:p>
         </p:txBody>
       </p:sp>
@@ -6188,7 +5960,7 @@
           <a:p>
             <a:r>
               <a:rPr kumimoji="1" lang="ja-JP" altLang="en-US" sz="3600" b="1" dirty="0"/>
-              <a:t>・アカウント機能周り全般</a:t>
+              <a:t>・データベース周り全般</a:t>
             </a:r>
           </a:p>
         </p:txBody>
